--- a/presentation/SRAM_AI_Adoption_Playbook.pptx
+++ b/presentation/SRAM_AI_Adoption_Playbook.pptx
@@ -3316,8 +3316,8 @@
         </p:nvSpPr>
         <p:spPr>
           <a:xfrm>
-            <a:off x="731520" y="365760"/>
-            <a:ext cx="5486400" cy="457200"/>
+            <a:off x="731520" y="274320"/>
+            <a:ext cx="5486400" cy="274320"/>
           </a:xfrm>
           <a:prstGeom prst="rect">
             <a:avLst/>
@@ -3352,8 +3352,8 @@
         </p:nvSpPr>
         <p:spPr>
           <a:xfrm>
-            <a:off x="731520" y="640080"/>
-            <a:ext cx="9144000" cy="640080"/>
+            <a:off x="731520" y="594360"/>
+            <a:ext cx="9144000" cy="457200"/>
           </a:xfrm>
           <a:prstGeom prst="rect">
             <a:avLst/>
@@ -3388,7 +3388,7 @@
         </p:nvSpPr>
         <p:spPr>
           <a:xfrm>
-            <a:off x="731520" y="1188720"/>
+            <a:off x="731520" y="1097280"/>
             <a:ext cx="1097280" cy="38100"/>
           </a:xfrm>
           <a:prstGeom prst="rect">
@@ -3431,8 +3431,8 @@
         </p:nvSpPr>
         <p:spPr>
           <a:xfrm>
-            <a:off x="731520" y="1463040"/>
-            <a:ext cx="5029200" cy="914400"/>
+            <a:off x="731520" y="1325880"/>
+            <a:ext cx="6858000" cy="731520"/>
           </a:xfrm>
           <a:prstGeom prst="rect">
             <a:avLst/>
@@ -3467,7 +3467,7 @@
         </p:nvSpPr>
         <p:spPr>
           <a:xfrm>
-            <a:off x="731520" y="2560320"/>
+            <a:off x="731520" y="2286000"/>
             <a:ext cx="2286000" cy="1371600"/>
           </a:xfrm>
           <a:prstGeom prst="roundRect">
@@ -3514,8 +3514,8 @@
         </p:nvSpPr>
         <p:spPr>
           <a:xfrm>
-            <a:off x="1005840" y="2788920"/>
-            <a:ext cx="1737360" cy="365760"/>
+            <a:off x="1005840" y="2423160"/>
+            <a:ext cx="1737360" cy="274320"/>
           </a:xfrm>
           <a:prstGeom prst="rect">
             <a:avLst/>
@@ -3550,8 +3550,8 @@
         </p:nvSpPr>
         <p:spPr>
           <a:xfrm>
-            <a:off x="1005840" y="3063240"/>
-            <a:ext cx="1737360" cy="548640"/>
+            <a:off x="1005840" y="2697480"/>
+            <a:ext cx="1737360" cy="457200"/>
           </a:xfrm>
           <a:prstGeom prst="rect">
             <a:avLst/>
@@ -3586,7 +3586,7 @@
         </p:nvSpPr>
         <p:spPr>
           <a:xfrm>
-            <a:off x="1005840" y="3611880"/>
+            <a:off x="1005840" y="3200400"/>
             <a:ext cx="1737360" cy="274320"/>
           </a:xfrm>
           <a:prstGeom prst="rect">
@@ -3622,7 +3622,7 @@
         </p:nvSpPr>
         <p:spPr>
           <a:xfrm>
-            <a:off x="3200400" y="2560320"/>
+            <a:off x="3200400" y="2286000"/>
             <a:ext cx="2286000" cy="1371600"/>
           </a:xfrm>
           <a:prstGeom prst="roundRect">
@@ -3669,8 +3669,8 @@
         </p:nvSpPr>
         <p:spPr>
           <a:xfrm>
-            <a:off x="3474720" y="2788920"/>
-            <a:ext cx="1737360" cy="365760"/>
+            <a:off x="3474720" y="2423160"/>
+            <a:ext cx="1737360" cy="274320"/>
           </a:xfrm>
           <a:prstGeom prst="rect">
             <a:avLst/>
@@ -3705,8 +3705,8 @@
         </p:nvSpPr>
         <p:spPr>
           <a:xfrm>
-            <a:off x="3474720" y="3063240"/>
-            <a:ext cx="1737360" cy="548640"/>
+            <a:off x="3474720" y="2697480"/>
+            <a:ext cx="1737360" cy="457200"/>
           </a:xfrm>
           <a:prstGeom prst="rect">
             <a:avLst/>
@@ -3741,7 +3741,7 @@
         </p:nvSpPr>
         <p:spPr>
           <a:xfrm>
-            <a:off x="3474720" y="3611880"/>
+            <a:off x="3474720" y="3200400"/>
             <a:ext cx="1737360" cy="274320"/>
           </a:xfrm>
           <a:prstGeom prst="rect">
@@ -3777,7 +3777,7 @@
         </p:nvSpPr>
         <p:spPr>
           <a:xfrm>
-            <a:off x="5669280" y="2560320"/>
+            <a:off x="5669280" y="2286000"/>
             <a:ext cx="2286000" cy="1371600"/>
           </a:xfrm>
           <a:prstGeom prst="roundRect">
@@ -3824,8 +3824,8 @@
         </p:nvSpPr>
         <p:spPr>
           <a:xfrm>
-            <a:off x="5943600" y="2788920"/>
-            <a:ext cx="1737360" cy="365760"/>
+            <a:off x="5943600" y="2423160"/>
+            <a:ext cx="1737360" cy="274320"/>
           </a:xfrm>
           <a:prstGeom prst="rect">
             <a:avLst/>
@@ -3860,8 +3860,8 @@
         </p:nvSpPr>
         <p:spPr>
           <a:xfrm>
-            <a:off x="5943600" y="3063240"/>
-            <a:ext cx="1737360" cy="548640"/>
+            <a:off x="5943600" y="2697480"/>
+            <a:ext cx="1737360" cy="457200"/>
           </a:xfrm>
           <a:prstGeom prst="rect">
             <a:avLst/>
@@ -3896,7 +3896,7 @@
         </p:nvSpPr>
         <p:spPr>
           <a:xfrm>
-            <a:off x="5943600" y="3611880"/>
+            <a:off x="5943600" y="3200400"/>
             <a:ext cx="1737360" cy="274320"/>
           </a:xfrm>
           <a:prstGeom prst="rect">
@@ -3932,7 +3932,7 @@
         </p:nvSpPr>
         <p:spPr>
           <a:xfrm>
-            <a:off x="8138160" y="2560320"/>
+            <a:off x="8138160" y="2286000"/>
             <a:ext cx="2286000" cy="1371600"/>
           </a:xfrm>
           <a:prstGeom prst="roundRect">
@@ -3979,8 +3979,8 @@
         </p:nvSpPr>
         <p:spPr>
           <a:xfrm>
-            <a:off x="8412480" y="2788920"/>
-            <a:ext cx="1737360" cy="365760"/>
+            <a:off x="8412480" y="2423160"/>
+            <a:ext cx="1737360" cy="274320"/>
           </a:xfrm>
           <a:prstGeom prst="rect">
             <a:avLst/>
@@ -4015,8 +4015,8 @@
         </p:nvSpPr>
         <p:spPr>
           <a:xfrm>
-            <a:off x="8412480" y="3063240"/>
-            <a:ext cx="1737360" cy="548640"/>
+            <a:off x="8412480" y="2697480"/>
+            <a:ext cx="1737360" cy="457200"/>
           </a:xfrm>
           <a:prstGeom prst="rect">
             <a:avLst/>
@@ -4051,7 +4051,7 @@
         </p:nvSpPr>
         <p:spPr>
           <a:xfrm>
-            <a:off x="8412480" y="3611880"/>
+            <a:off x="8412480" y="3200400"/>
             <a:ext cx="1737360" cy="274320"/>
           </a:xfrm>
           <a:prstGeom prst="rect">
@@ -4087,7 +4087,7 @@
         </p:nvSpPr>
         <p:spPr>
           <a:xfrm>
-            <a:off x="731520" y="4206240"/>
+            <a:off x="731520" y="3931920"/>
             <a:ext cx="5486400" cy="365760"/>
           </a:xfrm>
           <a:prstGeom prst="rect">
@@ -4123,8 +4123,8 @@
         </p:nvSpPr>
         <p:spPr>
           <a:xfrm>
-            <a:off x="731520" y="4663440"/>
-            <a:ext cx="2743200" cy="320040"/>
+            <a:off x="731520" y="4389120"/>
+            <a:ext cx="2926080" cy="320040"/>
           </a:xfrm>
           <a:prstGeom prst="rect">
             <a:avLst/>
@@ -4159,7 +4159,7 @@
         </p:nvSpPr>
         <p:spPr>
           <a:xfrm>
-            <a:off x="3657600" y="4663440"/>
+            <a:off x="3840480" y="4389120"/>
             <a:ext cx="3657600" cy="320040"/>
           </a:xfrm>
           <a:prstGeom prst="rect">
@@ -4195,8 +4195,44 @@
         </p:nvSpPr>
         <p:spPr>
           <a:xfrm>
-            <a:off x="7498079" y="4663440"/>
-            <a:ext cx="1828800" cy="320040"/>
+            <a:off x="731520" y="4736592"/>
+            <a:ext cx="2926080" cy="320040"/>
+          </a:xfrm>
+          <a:prstGeom prst="rect">
+            <a:avLst/>
+          </a:prstGeom>
+          <a:noFill/>
+        </p:spPr>
+        <p:txBody>
+          <a:bodyPr wrap="square">
+            <a:spAutoFit/>
+          </a:bodyPr>
+          <a:lstStyle/>
+          <a:p>
+            <a:pPr algn="l">
+              <a:defRPr sz="1200" b="1">
+                <a:solidFill>
+                  <a:srgbClr val="389FF5"/>
+                </a:solidFill>
+                <a:latin typeface="Calibri"/>
+              </a:defRPr>
+            </a:pPr>
+            <a:r>
+              <a:t>Suspension</a:t>
+            </a:r>
+          </a:p>
+        </p:txBody>
+      </p:sp>
+      <p:sp>
+        <p:nvSpPr>
+          <p:cNvPr id="26" name="TextBox 25"/>
+          <p:cNvSpPr txBox="1"/>
+          <p:nvPr/>
+        </p:nvSpPr>
+        <p:spPr>
+          <a:xfrm>
+            <a:off x="3840480" y="4736592"/>
+            <a:ext cx="3657600" cy="320040"/>
           </a:xfrm>
           <a:prstGeom prst="rect">
             <a:avLst/>
@@ -4212,62 +4248,278 @@
             <a:pPr algn="l">
               <a:defRPr sz="1100" b="0">
                 <a:solidFill>
+                  <a:srgbClr val="94A3B8"/>
+                </a:solidFill>
+                <a:latin typeface="Calibri"/>
+              </a:defRPr>
+            </a:pPr>
+            <a:r>
+              <a:t>RockShox forks and shocks</a:t>
+            </a:r>
+          </a:p>
+        </p:txBody>
+      </p:sp>
+      <p:sp>
+        <p:nvSpPr>
+          <p:cNvPr id="27" name="TextBox 26"/>
+          <p:cNvSpPr txBox="1"/>
+          <p:nvPr/>
+        </p:nvSpPr>
+        <p:spPr>
+          <a:xfrm>
+            <a:off x="731520" y="5084064"/>
+            <a:ext cx="2926080" cy="320040"/>
+          </a:xfrm>
+          <a:prstGeom prst="rect">
+            <a:avLst/>
+          </a:prstGeom>
+          <a:noFill/>
+        </p:spPr>
+        <p:txBody>
+          <a:bodyPr wrap="square">
+            <a:spAutoFit/>
+          </a:bodyPr>
+          <a:lstStyle/>
+          <a:p>
+            <a:pPr algn="l">
+              <a:defRPr sz="1200" b="1">
+                <a:solidFill>
+                  <a:srgbClr val="389FF5"/>
+                </a:solidFill>
+                <a:latin typeface="Calibri"/>
+              </a:defRPr>
+            </a:pPr>
+            <a:r>
+              <a:t>Wheels + Cockpit</a:t>
+            </a:r>
+          </a:p>
+        </p:txBody>
+      </p:sp>
+      <p:sp>
+        <p:nvSpPr>
+          <p:cNvPr id="28" name="TextBox 27"/>
+          <p:cNvSpPr txBox="1"/>
+          <p:nvPr/>
+        </p:nvSpPr>
+        <p:spPr>
+          <a:xfrm>
+            <a:off x="3840480" y="5084064"/>
+            <a:ext cx="3657600" cy="320040"/>
+          </a:xfrm>
+          <a:prstGeom prst="rect">
+            <a:avLst/>
+          </a:prstGeom>
+          <a:noFill/>
+        </p:spPr>
+        <p:txBody>
+          <a:bodyPr wrap="square">
+            <a:spAutoFit/>
+          </a:bodyPr>
+          <a:lstStyle/>
+          <a:p>
+            <a:pPr algn="l">
+              <a:defRPr sz="1100" b="0">
+                <a:solidFill>
+                  <a:srgbClr val="94A3B8"/>
+                </a:solidFill>
+                <a:latin typeface="Calibri"/>
+              </a:defRPr>
+            </a:pPr>
+            <a:r>
+              <a:t>Zipp performance components</a:t>
+            </a:r>
+          </a:p>
+        </p:txBody>
+      </p:sp>
+      <p:sp>
+        <p:nvSpPr>
+          <p:cNvPr id="29" name="TextBox 28"/>
+          <p:cNvSpPr txBox="1"/>
+          <p:nvPr/>
+        </p:nvSpPr>
+        <p:spPr>
+          <a:xfrm>
+            <a:off x="731520" y="5431536"/>
+            <a:ext cx="2926080" cy="320040"/>
+          </a:xfrm>
+          <a:prstGeom prst="rect">
+            <a:avLst/>
+          </a:prstGeom>
+          <a:noFill/>
+        </p:spPr>
+        <p:txBody>
+          <a:bodyPr wrap="square">
+            <a:spAutoFit/>
+          </a:bodyPr>
+          <a:lstStyle/>
+          <a:p>
+            <a:pPr algn="l">
+              <a:defRPr sz="1200" b="1">
+                <a:solidFill>
+                  <a:srgbClr val="34D399"/>
+                </a:solidFill>
+                <a:latin typeface="Calibri"/>
+              </a:defRPr>
+            </a:pPr>
+            <a:r>
+              <a:t>Connected Products</a:t>
+            </a:r>
+          </a:p>
+        </p:txBody>
+      </p:sp>
+      <p:sp>
+        <p:nvSpPr>
+          <p:cNvPr id="30" name="TextBox 29"/>
+          <p:cNvSpPr txBox="1"/>
+          <p:nvPr/>
+        </p:nvSpPr>
+        <p:spPr>
+          <a:xfrm>
+            <a:off x="3840480" y="5431536"/>
+            <a:ext cx="3657600" cy="320040"/>
+          </a:xfrm>
+          <a:prstGeom prst="rect">
+            <a:avLst/>
+          </a:prstGeom>
+          <a:noFill/>
+        </p:spPr>
+        <p:txBody>
+          <a:bodyPr wrap="square">
+            <a:spAutoFit/>
+          </a:bodyPr>
+          <a:lstStyle/>
+          <a:p>
+            <a:pPr algn="l">
+              <a:defRPr sz="1100" b="0">
+                <a:solidFill>
+                  <a:srgbClr val="94A3B8"/>
+                </a:solidFill>
+                <a:latin typeface="Calibri"/>
+              </a:defRPr>
+            </a:pPr>
+            <a:r>
+              <a:t>Hammerhead Karoo, Quarq power</a:t>
+            </a:r>
+          </a:p>
+        </p:txBody>
+      </p:sp>
+      <p:sp>
+        <p:nvSpPr>
+          <p:cNvPr id="31" name="TextBox 30"/>
+          <p:cNvSpPr txBox="1"/>
+          <p:nvPr/>
+        </p:nvSpPr>
+        <p:spPr>
+          <a:xfrm>
+            <a:off x="731520" y="5779008"/>
+            <a:ext cx="2926080" cy="320040"/>
+          </a:xfrm>
+          <a:prstGeom prst="rect">
+            <a:avLst/>
+          </a:prstGeom>
+          <a:noFill/>
+        </p:spPr>
+        <p:txBody>
+          <a:bodyPr wrap="square">
+            <a:spAutoFit/>
+          </a:bodyPr>
+          <a:lstStyle/>
+          <a:p>
+            <a:pPr algn="l">
+              <a:defRPr sz="1200" b="1">
+                <a:solidFill>
+                  <a:srgbClr val="34D399"/>
+                </a:solidFill>
+                <a:latin typeface="Calibri"/>
+              </a:defRPr>
+            </a:pPr>
+            <a:r>
+              <a:t>Wear Parts + Service</a:t>
+            </a:r>
+          </a:p>
+        </p:txBody>
+      </p:sp>
+      <p:sp>
+        <p:nvSpPr>
+          <p:cNvPr id="32" name="TextBox 31"/>
+          <p:cNvSpPr txBox="1"/>
+          <p:nvPr/>
+        </p:nvSpPr>
+        <p:spPr>
+          <a:xfrm>
+            <a:off x="3840480" y="5779008"/>
+            <a:ext cx="3657600" cy="320040"/>
+          </a:xfrm>
+          <a:prstGeom prst="rect">
+            <a:avLst/>
+          </a:prstGeom>
+          <a:noFill/>
+        </p:spPr>
+        <p:txBody>
+          <a:bodyPr wrap="square">
+            <a:spAutoFit/>
+          </a:bodyPr>
+          <a:lstStyle/>
+          <a:p>
+            <a:pPr algn="l">
+              <a:defRPr sz="1100" b="0">
+                <a:solidFill>
+                  <a:srgbClr val="94A3B8"/>
+                </a:solidFill>
+                <a:latin typeface="Calibri"/>
+              </a:defRPr>
+            </a:pPr>
+            <a:r>
+              <a:t>Chains, cassettes, pads, rotors</a:t>
+            </a:r>
+          </a:p>
+        </p:txBody>
+      </p:sp>
+      <p:sp>
+        <p:nvSpPr>
+          <p:cNvPr id="33" name="TextBox 32"/>
+          <p:cNvSpPr txBox="1"/>
+          <p:nvPr/>
+        </p:nvSpPr>
+        <p:spPr>
+          <a:xfrm>
+            <a:off x="731520" y="6126480"/>
+            <a:ext cx="2926080" cy="320040"/>
+          </a:xfrm>
+          <a:prstGeom prst="rect">
+            <a:avLst/>
+          </a:prstGeom>
+          <a:noFill/>
+        </p:spPr>
+        <p:txBody>
+          <a:bodyPr wrap="square">
+            <a:spAutoFit/>
+          </a:bodyPr>
+          <a:lstStyle/>
+          <a:p>
+            <a:pPr algn="l">
+              <a:defRPr sz="1200" b="1">
+                <a:solidFill>
                   <a:srgbClr val="64748B"/>
                 </a:solidFill>
                 <a:latin typeface="Calibri"/>
               </a:defRPr>
             </a:pPr>
             <a:r>
-              <a:t>Core engine</a:t>
-            </a:r>
-          </a:p>
-        </p:txBody>
-      </p:sp>
-      <p:sp>
-        <p:nvSpPr>
-          <p:cNvPr id="26" name="TextBox 25"/>
-          <p:cNvSpPr txBox="1"/>
-          <p:nvPr/>
-        </p:nvSpPr>
-        <p:spPr>
-          <a:xfrm>
-            <a:off x="731520" y="4983480"/>
-            <a:ext cx="2743200" cy="320040"/>
-          </a:xfrm>
-          <a:prstGeom prst="rect">
-            <a:avLst/>
-          </a:prstGeom>
-          <a:noFill/>
-        </p:spPr>
-        <p:txBody>
-          <a:bodyPr wrap="square">
-            <a:spAutoFit/>
-          </a:bodyPr>
-          <a:lstStyle/>
-          <a:p>
-            <a:pPr algn="l">
-              <a:defRPr sz="1200" b="1">
-                <a:solidFill>
-                  <a:srgbClr val="389FF5"/>
-                </a:solidFill>
-                <a:latin typeface="Calibri"/>
-              </a:defRPr>
-            </a:pPr>
-            <a:r>
-              <a:t>Suspension</a:t>
-            </a:r>
-          </a:p>
-        </p:txBody>
-      </p:sp>
-      <p:sp>
-        <p:nvSpPr>
-          <p:cNvPr id="27" name="TextBox 26"/>
-          <p:cNvSpPr txBox="1"/>
-          <p:nvPr/>
-        </p:nvSpPr>
-        <p:spPr>
-          <a:xfrm>
-            <a:off x="3657600" y="4983480"/>
+              <a:t>Pedals + Adjacent</a:t>
+            </a:r>
+          </a:p>
+        </p:txBody>
+      </p:sp>
+      <p:sp>
+        <p:nvSpPr>
+          <p:cNvPr id="34" name="TextBox 33"/>
+          <p:cNvSpPr txBox="1"/>
+          <p:nvPr/>
+        </p:nvSpPr>
+        <p:spPr>
+          <a:xfrm>
+            <a:off x="3840480" y="6126480"/>
             <a:ext cx="3657600" cy="320040"/>
           </a:xfrm>
           <a:prstGeom prst="rect">
@@ -4290,438 +4542,6 @@
               </a:defRPr>
             </a:pPr>
             <a:r>
-              <a:t>RockShox forks and shocks</a:t>
-            </a:r>
-          </a:p>
-        </p:txBody>
-      </p:sp>
-      <p:sp>
-        <p:nvSpPr>
-          <p:cNvPr id="28" name="TextBox 27"/>
-          <p:cNvSpPr txBox="1"/>
-          <p:nvPr/>
-        </p:nvSpPr>
-        <p:spPr>
-          <a:xfrm>
-            <a:off x="7498079" y="4983480"/>
-            <a:ext cx="1828800" cy="320040"/>
-          </a:xfrm>
-          <a:prstGeom prst="rect">
-            <a:avLst/>
-          </a:prstGeom>
-          <a:noFill/>
-        </p:spPr>
-        <p:txBody>
-          <a:bodyPr wrap="square">
-            <a:spAutoFit/>
-          </a:bodyPr>
-          <a:lstStyle/>
-          <a:p>
-            <a:pPr algn="l">
-              <a:defRPr sz="1100" b="0">
-                <a:solidFill>
-                  <a:srgbClr val="64748B"/>
-                </a:solidFill>
-                <a:latin typeface="Calibri"/>
-              </a:defRPr>
-            </a:pPr>
-            <a:r>
-              <a:t>High</a:t>
-            </a:r>
-          </a:p>
-        </p:txBody>
-      </p:sp>
-      <p:sp>
-        <p:nvSpPr>
-          <p:cNvPr id="29" name="TextBox 28"/>
-          <p:cNvSpPr txBox="1"/>
-          <p:nvPr/>
-        </p:nvSpPr>
-        <p:spPr>
-          <a:xfrm>
-            <a:off x="731520" y="5303520"/>
-            <a:ext cx="2743200" cy="320040"/>
-          </a:xfrm>
-          <a:prstGeom prst="rect">
-            <a:avLst/>
-          </a:prstGeom>
-          <a:noFill/>
-        </p:spPr>
-        <p:txBody>
-          <a:bodyPr wrap="square">
-            <a:spAutoFit/>
-          </a:bodyPr>
-          <a:lstStyle/>
-          <a:p>
-            <a:pPr algn="l">
-              <a:defRPr sz="1200" b="1">
-                <a:solidFill>
-                  <a:srgbClr val="389FF5"/>
-                </a:solidFill>
-                <a:latin typeface="Calibri"/>
-              </a:defRPr>
-            </a:pPr>
-            <a:r>
-              <a:t>Wheels + Cockpit</a:t>
-            </a:r>
-          </a:p>
-        </p:txBody>
-      </p:sp>
-      <p:sp>
-        <p:nvSpPr>
-          <p:cNvPr id="30" name="TextBox 29"/>
-          <p:cNvSpPr txBox="1"/>
-          <p:nvPr/>
-        </p:nvSpPr>
-        <p:spPr>
-          <a:xfrm>
-            <a:off x="3657600" y="5303520"/>
-            <a:ext cx="3657600" cy="320040"/>
-          </a:xfrm>
-          <a:prstGeom prst="rect">
-            <a:avLst/>
-          </a:prstGeom>
-          <a:noFill/>
-        </p:spPr>
-        <p:txBody>
-          <a:bodyPr wrap="square">
-            <a:spAutoFit/>
-          </a:bodyPr>
-          <a:lstStyle/>
-          <a:p>
-            <a:pPr algn="l">
-              <a:defRPr sz="1100" b="0">
-                <a:solidFill>
-                  <a:srgbClr val="94A3B8"/>
-                </a:solidFill>
-                <a:latin typeface="Calibri"/>
-              </a:defRPr>
-            </a:pPr>
-            <a:r>
-              <a:t>Zipp performance components</a:t>
-            </a:r>
-          </a:p>
-        </p:txBody>
-      </p:sp>
-      <p:sp>
-        <p:nvSpPr>
-          <p:cNvPr id="31" name="TextBox 30"/>
-          <p:cNvSpPr txBox="1"/>
-          <p:nvPr/>
-        </p:nvSpPr>
-        <p:spPr>
-          <a:xfrm>
-            <a:off x="7498079" y="5303520"/>
-            <a:ext cx="1828800" cy="320040"/>
-          </a:xfrm>
-          <a:prstGeom prst="rect">
-            <a:avLst/>
-          </a:prstGeom>
-          <a:noFill/>
-        </p:spPr>
-        <p:txBody>
-          <a:bodyPr wrap="square">
-            <a:spAutoFit/>
-          </a:bodyPr>
-          <a:lstStyle/>
-          <a:p>
-            <a:pPr algn="l">
-              <a:defRPr sz="1100" b="0">
-                <a:solidFill>
-                  <a:srgbClr val="64748B"/>
-                </a:solidFill>
-                <a:latin typeface="Calibri"/>
-              </a:defRPr>
-            </a:pPr>
-            <a:r>
-              <a:t>Medium</a:t>
-            </a:r>
-          </a:p>
-        </p:txBody>
-      </p:sp>
-      <p:sp>
-        <p:nvSpPr>
-          <p:cNvPr id="32" name="TextBox 31"/>
-          <p:cNvSpPr txBox="1"/>
-          <p:nvPr/>
-        </p:nvSpPr>
-        <p:spPr>
-          <a:xfrm>
-            <a:off x="731520" y="5623559"/>
-            <a:ext cx="2743200" cy="320040"/>
-          </a:xfrm>
-          <a:prstGeom prst="rect">
-            <a:avLst/>
-          </a:prstGeom>
-          <a:noFill/>
-        </p:spPr>
-        <p:txBody>
-          <a:bodyPr wrap="square">
-            <a:spAutoFit/>
-          </a:bodyPr>
-          <a:lstStyle/>
-          <a:p>
-            <a:pPr algn="l">
-              <a:defRPr sz="1200" b="1">
-                <a:solidFill>
-                  <a:srgbClr val="34D399"/>
-                </a:solidFill>
-                <a:latin typeface="Calibri"/>
-              </a:defRPr>
-            </a:pPr>
-            <a:r>
-              <a:t>Connected Products</a:t>
-            </a:r>
-          </a:p>
-        </p:txBody>
-      </p:sp>
-      <p:sp>
-        <p:nvSpPr>
-          <p:cNvPr id="33" name="TextBox 32"/>
-          <p:cNvSpPr txBox="1"/>
-          <p:nvPr/>
-        </p:nvSpPr>
-        <p:spPr>
-          <a:xfrm>
-            <a:off x="3657600" y="5623559"/>
-            <a:ext cx="3657600" cy="320040"/>
-          </a:xfrm>
-          <a:prstGeom prst="rect">
-            <a:avLst/>
-          </a:prstGeom>
-          <a:noFill/>
-        </p:spPr>
-        <p:txBody>
-          <a:bodyPr wrap="square">
-            <a:spAutoFit/>
-          </a:bodyPr>
-          <a:lstStyle/>
-          <a:p>
-            <a:pPr algn="l">
-              <a:defRPr sz="1100" b="0">
-                <a:solidFill>
-                  <a:srgbClr val="94A3B8"/>
-                </a:solidFill>
-                <a:latin typeface="Calibri"/>
-              </a:defRPr>
-            </a:pPr>
-            <a:r>
-              <a:t>Hammerhead Karoo, Quarq power</a:t>
-            </a:r>
-          </a:p>
-        </p:txBody>
-      </p:sp>
-      <p:sp>
-        <p:nvSpPr>
-          <p:cNvPr id="34" name="TextBox 33"/>
-          <p:cNvSpPr txBox="1"/>
-          <p:nvPr/>
-        </p:nvSpPr>
-        <p:spPr>
-          <a:xfrm>
-            <a:off x="7498079" y="5623559"/>
-            <a:ext cx="1828800" cy="320040"/>
-          </a:xfrm>
-          <a:prstGeom prst="rect">
-            <a:avLst/>
-          </a:prstGeom>
-          <a:noFill/>
-        </p:spPr>
-        <p:txBody>
-          <a:bodyPr wrap="square">
-            <a:spAutoFit/>
-          </a:bodyPr>
-          <a:lstStyle/>
-          <a:p>
-            <a:pPr algn="l">
-              <a:defRPr sz="1100" b="0">
-                <a:solidFill>
-                  <a:srgbClr val="64748B"/>
-                </a:solidFill>
-                <a:latin typeface="Calibri"/>
-              </a:defRPr>
-            </a:pPr>
-            <a:r>
-              <a:t>Strategic</a:t>
-            </a:r>
-          </a:p>
-        </p:txBody>
-      </p:sp>
-      <p:sp>
-        <p:nvSpPr>
-          <p:cNvPr id="35" name="TextBox 34"/>
-          <p:cNvSpPr txBox="1"/>
-          <p:nvPr/>
-        </p:nvSpPr>
-        <p:spPr>
-          <a:xfrm>
-            <a:off x="731520" y="5943600"/>
-            <a:ext cx="2743200" cy="320040"/>
-          </a:xfrm>
-          <a:prstGeom prst="rect">
-            <a:avLst/>
-          </a:prstGeom>
-          <a:noFill/>
-        </p:spPr>
-        <p:txBody>
-          <a:bodyPr wrap="square">
-            <a:spAutoFit/>
-          </a:bodyPr>
-          <a:lstStyle/>
-          <a:p>
-            <a:pPr algn="l">
-              <a:defRPr sz="1200" b="1">
-                <a:solidFill>
-                  <a:srgbClr val="34D399"/>
-                </a:solidFill>
-                <a:latin typeface="Calibri"/>
-              </a:defRPr>
-            </a:pPr>
-            <a:r>
-              <a:t>Wear Parts + Service</a:t>
-            </a:r>
-          </a:p>
-        </p:txBody>
-      </p:sp>
-      <p:sp>
-        <p:nvSpPr>
-          <p:cNvPr id="36" name="TextBox 35"/>
-          <p:cNvSpPr txBox="1"/>
-          <p:nvPr/>
-        </p:nvSpPr>
-        <p:spPr>
-          <a:xfrm>
-            <a:off x="3657600" y="5943600"/>
-            <a:ext cx="3657600" cy="320040"/>
-          </a:xfrm>
-          <a:prstGeom prst="rect">
-            <a:avLst/>
-          </a:prstGeom>
-          <a:noFill/>
-        </p:spPr>
-        <p:txBody>
-          <a:bodyPr wrap="square">
-            <a:spAutoFit/>
-          </a:bodyPr>
-          <a:lstStyle/>
-          <a:p>
-            <a:pPr algn="l">
-              <a:defRPr sz="1100" b="0">
-                <a:solidFill>
-                  <a:srgbClr val="94A3B8"/>
-                </a:solidFill>
-                <a:latin typeface="Calibri"/>
-              </a:defRPr>
-            </a:pPr>
-            <a:r>
-              <a:t>Chains, cassettes, pads, rotors</a:t>
-            </a:r>
-          </a:p>
-        </p:txBody>
-      </p:sp>
-      <p:sp>
-        <p:nvSpPr>
-          <p:cNvPr id="37" name="TextBox 36"/>
-          <p:cNvSpPr txBox="1"/>
-          <p:nvPr/>
-        </p:nvSpPr>
-        <p:spPr>
-          <a:xfrm>
-            <a:off x="7498079" y="5943600"/>
-            <a:ext cx="1828800" cy="320040"/>
-          </a:xfrm>
-          <a:prstGeom prst="rect">
-            <a:avLst/>
-          </a:prstGeom>
-          <a:noFill/>
-        </p:spPr>
-        <p:txBody>
-          <a:bodyPr wrap="square">
-            <a:spAutoFit/>
-          </a:bodyPr>
-          <a:lstStyle/>
-          <a:p>
-            <a:pPr algn="l">
-              <a:defRPr sz="1100" b="0">
-                <a:solidFill>
-                  <a:srgbClr val="64748B"/>
-                </a:solidFill>
-                <a:latin typeface="Calibri"/>
-              </a:defRPr>
-            </a:pPr>
-            <a:r>
-              <a:t>Recurring</a:t>
-            </a:r>
-          </a:p>
-        </p:txBody>
-      </p:sp>
-      <p:sp>
-        <p:nvSpPr>
-          <p:cNvPr id="38" name="TextBox 37"/>
-          <p:cNvSpPr txBox="1"/>
-          <p:nvPr/>
-        </p:nvSpPr>
-        <p:spPr>
-          <a:xfrm>
-            <a:off x="731520" y="6263640"/>
-            <a:ext cx="2743200" cy="320040"/>
-          </a:xfrm>
-          <a:prstGeom prst="rect">
-            <a:avLst/>
-          </a:prstGeom>
-          <a:noFill/>
-        </p:spPr>
-        <p:txBody>
-          <a:bodyPr wrap="square">
-            <a:spAutoFit/>
-          </a:bodyPr>
-          <a:lstStyle/>
-          <a:p>
-            <a:pPr algn="l">
-              <a:defRPr sz="1200" b="1">
-                <a:solidFill>
-                  <a:srgbClr val="64748B"/>
-                </a:solidFill>
-                <a:latin typeface="Calibri"/>
-              </a:defRPr>
-            </a:pPr>
-            <a:r>
-              <a:t>Pedals + Adjacent</a:t>
-            </a:r>
-          </a:p>
-        </p:txBody>
-      </p:sp>
-      <p:sp>
-        <p:nvSpPr>
-          <p:cNvPr id="39" name="TextBox 38"/>
-          <p:cNvSpPr txBox="1"/>
-          <p:nvPr/>
-        </p:nvSpPr>
-        <p:spPr>
-          <a:xfrm>
-            <a:off x="3657600" y="6263640"/>
-            <a:ext cx="3657600" cy="320040"/>
-          </a:xfrm>
-          <a:prstGeom prst="rect">
-            <a:avLst/>
-          </a:prstGeom>
-          <a:noFill/>
-        </p:spPr>
-        <p:txBody>
-          <a:bodyPr wrap="square">
-            <a:spAutoFit/>
-          </a:bodyPr>
-          <a:lstStyle/>
-          <a:p>
-            <a:pPr algn="l">
-              <a:defRPr sz="1100" b="0">
-                <a:solidFill>
-                  <a:srgbClr val="94A3B8"/>
-                </a:solidFill>
-                <a:latin typeface="Calibri"/>
-              </a:defRPr>
-            </a:pPr>
-            <a:r>
               <a:t>TIME, Velocio, Ochain</a:t>
             </a:r>
           </a:p>
@@ -4729,50 +4549,14 @@
       </p:sp>
       <p:sp>
         <p:nvSpPr>
-          <p:cNvPr id="40" name="TextBox 39"/>
-          <p:cNvSpPr txBox="1"/>
-          <p:nvPr/>
-        </p:nvSpPr>
-        <p:spPr>
-          <a:xfrm>
-            <a:off x="7498079" y="6263640"/>
-            <a:ext cx="1828800" cy="320040"/>
-          </a:xfrm>
-          <a:prstGeom prst="rect">
-            <a:avLst/>
-          </a:prstGeom>
-          <a:noFill/>
-        </p:spPr>
-        <p:txBody>
-          <a:bodyPr wrap="square">
-            <a:spAutoFit/>
-          </a:bodyPr>
-          <a:lstStyle/>
-          <a:p>
-            <a:pPr algn="l">
-              <a:defRPr sz="1100" b="0">
-                <a:solidFill>
-                  <a:srgbClr val="64748B"/>
-                </a:solidFill>
-                <a:latin typeface="Calibri"/>
-              </a:defRPr>
-            </a:pPr>
-            <a:r>
-              <a:t>Growing</a:t>
-            </a:r>
-          </a:p>
-        </p:txBody>
-      </p:sp>
-      <p:sp>
-        <p:nvSpPr>
-          <p:cNvPr id="41" name="Rounded Rectangle 40"/>
+          <p:cNvPr id="35" name="Rounded Rectangle 34"/>
           <p:cNvSpPr/>
           <p:nvPr/>
         </p:nvSpPr>
         <p:spPr>
           <a:xfrm>
-            <a:off x="8686800" y="4206240"/>
-            <a:ext cx="3017520" cy="2286000"/>
+            <a:off x="8138160" y="3931920"/>
+            <a:ext cx="3474720" cy="2560320"/>
           </a:xfrm>
           <a:prstGeom prst="roundRect">
             <a:avLst>
@@ -4812,14 +4596,14 @@
       </p:sp>
       <p:sp>
         <p:nvSpPr>
-          <p:cNvPr id="42" name="TextBox 41"/>
-          <p:cNvSpPr txBox="1"/>
-          <p:nvPr/>
-        </p:nvSpPr>
-        <p:spPr>
-          <a:xfrm>
-            <a:off x="8961120" y="4389120"/>
-            <a:ext cx="2468880" cy="365760"/>
+          <p:cNvPr id="36" name="TextBox 35"/>
+          <p:cNvSpPr txBox="1"/>
+          <p:nvPr/>
+        </p:nvSpPr>
+        <p:spPr>
+          <a:xfrm>
+            <a:off x="8412480" y="4114800"/>
+            <a:ext cx="2926080" cy="365760"/>
           </a:xfrm>
           <a:prstGeom prst="rect">
             <a:avLst/>
@@ -4848,14 +4632,14 @@
       </p:sp>
       <p:sp>
         <p:nvSpPr>
-          <p:cNvPr id="43" name="TextBox 42"/>
-          <p:cNvSpPr txBox="1"/>
-          <p:nvPr/>
-        </p:nvSpPr>
-        <p:spPr>
-          <a:xfrm>
-            <a:off x="8961120" y="4800600"/>
-            <a:ext cx="2468880" cy="1508760"/>
+          <p:cNvPr id="37" name="TextBox 36"/>
+          <p:cNvSpPr txBox="1"/>
+          <p:nvPr/>
+        </p:nvSpPr>
+        <p:spPr>
+          <a:xfrm>
+            <a:off x="8412480" y="4526280"/>
+            <a:ext cx="2926080" cy="1783080"/>
           </a:xfrm>
           <a:prstGeom prst="rect">
             <a:avLst/>
@@ -4951,8 +4735,8 @@
         </p:nvSpPr>
         <p:spPr>
           <a:xfrm>
-            <a:off x="731520" y="365760"/>
-            <a:ext cx="5486400" cy="457200"/>
+            <a:off x="731520" y="274320"/>
+            <a:ext cx="5486400" cy="274320"/>
           </a:xfrm>
           <a:prstGeom prst="rect">
             <a:avLst/>
@@ -4987,8 +4771,8 @@
         </p:nvSpPr>
         <p:spPr>
           <a:xfrm>
-            <a:off x="731520" y="640080"/>
-            <a:ext cx="9144000" cy="640080"/>
+            <a:off x="731520" y="594360"/>
+            <a:ext cx="9144000" cy="457200"/>
           </a:xfrm>
           <a:prstGeom prst="rect">
             <a:avLst/>
@@ -5023,7 +4807,7 @@
         </p:nvSpPr>
         <p:spPr>
           <a:xfrm>
-            <a:off x="731520" y="1188720"/>
+            <a:off x="731520" y="1097280"/>
             <a:ext cx="1097280" cy="38100"/>
           </a:xfrm>
           <a:prstGeom prst="rect">
@@ -5066,8 +4850,8 @@
         </p:nvSpPr>
         <p:spPr>
           <a:xfrm>
-            <a:off x="731520" y="1463040"/>
-            <a:ext cx="10058400" cy="548640"/>
+            <a:off x="731520" y="1325880"/>
+            <a:ext cx="10058400" cy="457200"/>
           </a:xfrm>
           <a:prstGeom prst="rect">
             <a:avLst/>
@@ -6384,8 +6168,8 @@
         </p:nvSpPr>
         <p:spPr>
           <a:xfrm>
-            <a:off x="731520" y="365760"/>
-            <a:ext cx="5486400" cy="457200"/>
+            <a:off x="731520" y="274320"/>
+            <a:ext cx="5486400" cy="274320"/>
           </a:xfrm>
           <a:prstGeom prst="rect">
             <a:avLst/>
@@ -6420,8 +6204,8 @@
         </p:nvSpPr>
         <p:spPr>
           <a:xfrm>
-            <a:off x="731520" y="640080"/>
-            <a:ext cx="9144000" cy="640080"/>
+            <a:off x="731520" y="594360"/>
+            <a:ext cx="9144000" cy="457200"/>
           </a:xfrm>
           <a:prstGeom prst="rect">
             <a:avLst/>
@@ -6456,7 +6240,7 @@
         </p:nvSpPr>
         <p:spPr>
           <a:xfrm>
-            <a:off x="731520" y="1188720"/>
+            <a:off x="731520" y="1097280"/>
             <a:ext cx="1097280" cy="38100"/>
           </a:xfrm>
           <a:prstGeom prst="rect">
@@ -6499,8 +6283,8 @@
         </p:nvSpPr>
         <p:spPr>
           <a:xfrm>
-            <a:off x="731520" y="1463040"/>
-            <a:ext cx="10058400" cy="548640"/>
+            <a:off x="731520" y="1325880"/>
+            <a:ext cx="10058400" cy="457200"/>
           </a:xfrm>
           <a:prstGeom prst="rect">
             <a:avLst/>
@@ -6582,8 +6366,8 @@
         </p:nvSpPr>
         <p:spPr>
           <a:xfrm>
-            <a:off x="1005840" y="2514600"/>
-            <a:ext cx="2651760" cy="365760"/>
+            <a:off x="1005840" y="2423160"/>
+            <a:ext cx="2651760" cy="274320"/>
           </a:xfrm>
           <a:prstGeom prst="rect">
             <a:avLst/>
@@ -6618,8 +6402,8 @@
         </p:nvSpPr>
         <p:spPr>
           <a:xfrm>
-            <a:off x="1005840" y="2788920"/>
-            <a:ext cx="2651760" cy="548640"/>
+            <a:off x="1005840" y="2697480"/>
+            <a:ext cx="2651760" cy="457200"/>
           </a:xfrm>
           <a:prstGeom prst="rect">
             <a:avLst/>
@@ -6654,7 +6438,7 @@
         </p:nvSpPr>
         <p:spPr>
           <a:xfrm>
-            <a:off x="1005840" y="3337560"/>
+            <a:off x="1005840" y="3200400"/>
             <a:ext cx="2651760" cy="274320"/>
           </a:xfrm>
           <a:prstGeom prst="rect">
@@ -6737,8 +6521,8 @@
         </p:nvSpPr>
         <p:spPr>
           <a:xfrm>
-            <a:off x="4480560" y="2514600"/>
-            <a:ext cx="2651760" cy="365760"/>
+            <a:off x="4480560" y="2423160"/>
+            <a:ext cx="2651760" cy="274320"/>
           </a:xfrm>
           <a:prstGeom prst="rect">
             <a:avLst/>
@@ -6773,8 +6557,8 @@
         </p:nvSpPr>
         <p:spPr>
           <a:xfrm>
-            <a:off x="4480560" y="2788920"/>
-            <a:ext cx="2651760" cy="548640"/>
+            <a:off x="4480560" y="2697480"/>
+            <a:ext cx="2651760" cy="457200"/>
           </a:xfrm>
           <a:prstGeom prst="rect">
             <a:avLst/>
@@ -6809,7 +6593,7 @@
         </p:nvSpPr>
         <p:spPr>
           <a:xfrm>
-            <a:off x="4480560" y="3337560"/>
+            <a:off x="4480560" y="3200400"/>
             <a:ext cx="2651760" cy="274320"/>
           </a:xfrm>
           <a:prstGeom prst="rect">
@@ -6892,8 +6676,8 @@
         </p:nvSpPr>
         <p:spPr>
           <a:xfrm>
-            <a:off x="7955280" y="2514600"/>
-            <a:ext cx="3200399" cy="365760"/>
+            <a:off x="7955280" y="2423160"/>
+            <a:ext cx="3200399" cy="274320"/>
           </a:xfrm>
           <a:prstGeom prst="rect">
             <a:avLst/>
@@ -6928,8 +6712,8 @@
         </p:nvSpPr>
         <p:spPr>
           <a:xfrm>
-            <a:off x="7955280" y="2788920"/>
-            <a:ext cx="3200399" cy="548640"/>
+            <a:off x="7955280" y="2697480"/>
+            <a:ext cx="3200399" cy="457200"/>
           </a:xfrm>
           <a:prstGeom prst="rect">
             <a:avLst/>
@@ -6964,7 +6748,7 @@
         </p:nvSpPr>
         <p:spPr>
           <a:xfrm>
-            <a:off x="7955280" y="3337560"/>
+            <a:off x="7955280" y="3200400"/>
             <a:ext cx="3200399" cy="274320"/>
           </a:xfrm>
           <a:prstGeom prst="rect">
@@ -7536,8 +7320,8 @@
         </p:nvSpPr>
         <p:spPr>
           <a:xfrm>
-            <a:off x="731520" y="365760"/>
-            <a:ext cx="5486400" cy="457200"/>
+            <a:off x="731520" y="274320"/>
+            <a:ext cx="5486400" cy="274320"/>
           </a:xfrm>
           <a:prstGeom prst="rect">
             <a:avLst/>
@@ -7572,8 +7356,8 @@
         </p:nvSpPr>
         <p:spPr>
           <a:xfrm>
-            <a:off x="731520" y="640080"/>
-            <a:ext cx="9144000" cy="640080"/>
+            <a:off x="731520" y="594360"/>
+            <a:ext cx="9144000" cy="457200"/>
           </a:xfrm>
           <a:prstGeom prst="rect">
             <a:avLst/>
@@ -7608,7 +7392,7 @@
         </p:nvSpPr>
         <p:spPr>
           <a:xfrm>
-            <a:off x="731520" y="1188720"/>
+            <a:off x="731520" y="1097280"/>
             <a:ext cx="1097280" cy="38100"/>
           </a:xfrm>
           <a:prstGeom prst="rect">
@@ -9124,8 +8908,8 @@
         </p:nvSpPr>
         <p:spPr>
           <a:xfrm>
-            <a:off x="731520" y="365760"/>
-            <a:ext cx="5486400" cy="457200"/>
+            <a:off x="731520" y="274320"/>
+            <a:ext cx="5486400" cy="274320"/>
           </a:xfrm>
           <a:prstGeom prst="rect">
             <a:avLst/>
@@ -9160,8 +8944,8 @@
         </p:nvSpPr>
         <p:spPr>
           <a:xfrm>
-            <a:off x="731520" y="640080"/>
-            <a:ext cx="9144000" cy="640080"/>
+            <a:off x="731520" y="594360"/>
+            <a:ext cx="9144000" cy="457200"/>
           </a:xfrm>
           <a:prstGeom prst="rect">
             <a:avLst/>
@@ -9196,7 +8980,7 @@
         </p:nvSpPr>
         <p:spPr>
           <a:xfrm>
-            <a:off x="731520" y="1188720"/>
+            <a:off x="731520" y="1097280"/>
             <a:ext cx="1097280" cy="38100"/>
           </a:xfrm>
           <a:prstGeom prst="rect">
@@ -9718,8 +9502,8 @@
         </p:nvSpPr>
         <p:spPr>
           <a:xfrm>
-            <a:off x="7132320" y="2148840"/>
-            <a:ext cx="1737360" cy="365760"/>
+            <a:off x="7132320" y="2057400"/>
+            <a:ext cx="1737360" cy="274320"/>
           </a:xfrm>
           <a:prstGeom prst="rect">
             <a:avLst/>
@@ -9754,8 +9538,8 @@
         </p:nvSpPr>
         <p:spPr>
           <a:xfrm>
-            <a:off x="7132320" y="2423160"/>
-            <a:ext cx="1737360" cy="548640"/>
+            <a:off x="7132320" y="2331720"/>
+            <a:ext cx="1737360" cy="457200"/>
           </a:xfrm>
           <a:prstGeom prst="rect">
             <a:avLst/>
@@ -9790,7 +9574,7 @@
         </p:nvSpPr>
         <p:spPr>
           <a:xfrm>
-            <a:off x="7132320" y="2971800"/>
+            <a:off x="7132320" y="2834640"/>
             <a:ext cx="1737360" cy="274320"/>
           </a:xfrm>
           <a:prstGeom prst="rect">
@@ -9873,8 +9657,8 @@
         </p:nvSpPr>
         <p:spPr>
           <a:xfrm>
-            <a:off x="9601200" y="2148840"/>
-            <a:ext cx="1737360" cy="365760"/>
+            <a:off x="9601200" y="2057400"/>
+            <a:ext cx="1737360" cy="274320"/>
           </a:xfrm>
           <a:prstGeom prst="rect">
             <a:avLst/>
@@ -9909,8 +9693,8 @@
         </p:nvSpPr>
         <p:spPr>
           <a:xfrm>
-            <a:off x="9601200" y="2423160"/>
-            <a:ext cx="1737360" cy="548640"/>
+            <a:off x="9601200" y="2331720"/>
+            <a:ext cx="1737360" cy="457200"/>
           </a:xfrm>
           <a:prstGeom prst="rect">
             <a:avLst/>
@@ -9945,7 +9729,7 @@
         </p:nvSpPr>
         <p:spPr>
           <a:xfrm>
-            <a:off x="9601200" y="2971800"/>
+            <a:off x="9601200" y="2834640"/>
             <a:ext cx="1737360" cy="274320"/>
           </a:xfrm>
           <a:prstGeom prst="rect">
@@ -10232,8 +10016,8 @@
         </p:nvSpPr>
         <p:spPr>
           <a:xfrm>
-            <a:off x="731520" y="365760"/>
-            <a:ext cx="5486400" cy="457200"/>
+            <a:off x="731520" y="274320"/>
+            <a:ext cx="5486400" cy="274320"/>
           </a:xfrm>
           <a:prstGeom prst="rect">
             <a:avLst/>
@@ -10268,8 +10052,8 @@
         </p:nvSpPr>
         <p:spPr>
           <a:xfrm>
-            <a:off x="731520" y="640080"/>
-            <a:ext cx="9144000" cy="640080"/>
+            <a:off x="731520" y="594360"/>
+            <a:ext cx="9144000" cy="457200"/>
           </a:xfrm>
           <a:prstGeom prst="rect">
             <a:avLst/>
@@ -10304,7 +10088,7 @@
         </p:nvSpPr>
         <p:spPr>
           <a:xfrm>
-            <a:off x="731520" y="1188720"/>
+            <a:off x="731520" y="1097280"/>
             <a:ext cx="1097280" cy="38100"/>
           </a:xfrm>
           <a:prstGeom prst="rect">
@@ -10347,8 +10131,8 @@
         </p:nvSpPr>
         <p:spPr>
           <a:xfrm>
-            <a:off x="731520" y="1463040"/>
-            <a:ext cx="10058400" cy="548640"/>
+            <a:off x="731520" y="1325880"/>
+            <a:ext cx="10058400" cy="457200"/>
           </a:xfrm>
           <a:prstGeom prst="rect">
             <a:avLst/>
@@ -10968,8 +10752,8 @@
         </p:nvSpPr>
         <p:spPr>
           <a:xfrm>
-            <a:off x="731520" y="365760"/>
-            <a:ext cx="5486400" cy="457200"/>
+            <a:off x="731520" y="274320"/>
+            <a:ext cx="5486400" cy="274320"/>
           </a:xfrm>
           <a:prstGeom prst="rect">
             <a:avLst/>
@@ -11004,8 +10788,8 @@
         </p:nvSpPr>
         <p:spPr>
           <a:xfrm>
-            <a:off x="731520" y="640080"/>
-            <a:ext cx="9144000" cy="640080"/>
+            <a:off x="731520" y="594360"/>
+            <a:ext cx="9144000" cy="457200"/>
           </a:xfrm>
           <a:prstGeom prst="rect">
             <a:avLst/>
@@ -11040,7 +10824,7 @@
         </p:nvSpPr>
         <p:spPr>
           <a:xfrm>
-            <a:off x="731520" y="1188720"/>
+            <a:off x="731520" y="1097280"/>
             <a:ext cx="1097280" cy="38100"/>
           </a:xfrm>
           <a:prstGeom prst="rect">
@@ -11083,8 +10867,8 @@
         </p:nvSpPr>
         <p:spPr>
           <a:xfrm>
-            <a:off x="731520" y="1645920"/>
-            <a:ext cx="10515600" cy="1371600"/>
+            <a:off x="731520" y="1371600"/>
+            <a:ext cx="10515600" cy="1280160"/>
           </a:xfrm>
           <a:prstGeom prst="roundRect">
             <a:avLst>
@@ -11130,8 +10914,8 @@
         </p:nvSpPr>
         <p:spPr>
           <a:xfrm>
-            <a:off x="1097280" y="1965960"/>
-            <a:ext cx="548640" cy="548640"/>
+            <a:off x="1097280" y="1645920"/>
+            <a:ext cx="502920" cy="502920"/>
           </a:xfrm>
           <a:prstGeom prst="ellipse">
             <a:avLst/>
@@ -11162,7 +10946,7 @@
           <a:lstStyle/>
           <a:p>
             <a:pPr algn="ctr">
-              <a:defRPr sz="2200" b="1">
+              <a:defRPr sz="2000" b="1">
                 <a:solidFill>
                   <a:srgbClr val="0F172A"/>
                 </a:solidFill>
@@ -11182,22 +10966,22 @@
         </p:nvSpPr>
         <p:spPr>
           <a:xfrm>
-            <a:off x="2011680" y="1828800"/>
-            <a:ext cx="8686800" cy="457200"/>
-          </a:xfrm>
-          <a:prstGeom prst="rect">
-            <a:avLst/>
-          </a:prstGeom>
-          <a:noFill/>
-        </p:spPr>
-        <p:txBody>
-          <a:bodyPr wrap="square">
-            <a:spAutoFit/>
-          </a:bodyPr>
-          <a:lstStyle/>
-          <a:p>
-            <a:pPr algn="l">
-              <a:defRPr sz="2000" b="1">
+            <a:off x="1920240" y="1508760"/>
+            <a:ext cx="8686800" cy="411480"/>
+          </a:xfrm>
+          <a:prstGeom prst="rect">
+            <a:avLst/>
+          </a:prstGeom>
+          <a:noFill/>
+        </p:spPr>
+        <p:txBody>
+          <a:bodyPr wrap="square">
+            <a:spAutoFit/>
+          </a:bodyPr>
+          <a:lstStyle/>
+          <a:p>
+            <a:pPr algn="l">
+              <a:defRPr sz="1800" b="1">
                 <a:solidFill>
                   <a:srgbClr val="F8FAFC"/>
                 </a:solidFill>
@@ -11218,22 +11002,22 @@
         </p:nvSpPr>
         <p:spPr>
           <a:xfrm>
-            <a:off x="2011680" y="2286000"/>
-            <a:ext cx="8686800" cy="640080"/>
-          </a:xfrm>
-          <a:prstGeom prst="rect">
-            <a:avLst/>
-          </a:prstGeom>
-          <a:noFill/>
-        </p:spPr>
-        <p:txBody>
-          <a:bodyPr wrap="square">
-            <a:spAutoFit/>
-          </a:bodyPr>
-          <a:lstStyle/>
-          <a:p>
-            <a:pPr algn="l">
-              <a:defRPr sz="1300" b="0">
+            <a:off x="1920240" y="1920240"/>
+            <a:ext cx="8686800" cy="594360"/>
+          </a:xfrm>
+          <a:prstGeom prst="rect">
+            <a:avLst/>
+          </a:prstGeom>
+          <a:noFill/>
+        </p:spPr>
+        <p:txBody>
+          <a:bodyPr wrap="square">
+            <a:spAutoFit/>
+          </a:bodyPr>
+          <a:lstStyle/>
+          <a:p>
+            <a:pPr algn="l">
+              <a:defRPr sz="1200" b="0">
                 <a:solidFill>
                   <a:srgbClr val="94A3B8"/>
                 </a:solidFill>
@@ -11254,8 +11038,8 @@
         </p:nvSpPr>
         <p:spPr>
           <a:xfrm>
-            <a:off x="731520" y="3291840"/>
-            <a:ext cx="10515600" cy="1371600"/>
+            <a:off x="731520" y="2880360"/>
+            <a:ext cx="10515600" cy="1280160"/>
           </a:xfrm>
           <a:prstGeom prst="roundRect">
             <a:avLst>
@@ -11301,8 +11085,8 @@
         </p:nvSpPr>
         <p:spPr>
           <a:xfrm>
-            <a:off x="1097280" y="3611880"/>
-            <a:ext cx="548640" cy="548640"/>
+            <a:off x="1097280" y="3154680"/>
+            <a:ext cx="502920" cy="502920"/>
           </a:xfrm>
           <a:prstGeom prst="ellipse">
             <a:avLst/>
@@ -11333,7 +11117,7 @@
           <a:lstStyle/>
           <a:p>
             <a:pPr algn="ctr">
-              <a:defRPr sz="2200" b="1">
+              <a:defRPr sz="2000" b="1">
                 <a:solidFill>
                   <a:srgbClr val="0F172A"/>
                 </a:solidFill>
@@ -11353,22 +11137,22 @@
         </p:nvSpPr>
         <p:spPr>
           <a:xfrm>
-            <a:off x="2011680" y="3474720"/>
-            <a:ext cx="8686800" cy="457200"/>
-          </a:xfrm>
-          <a:prstGeom prst="rect">
-            <a:avLst/>
-          </a:prstGeom>
-          <a:noFill/>
-        </p:spPr>
-        <p:txBody>
-          <a:bodyPr wrap="square">
-            <a:spAutoFit/>
-          </a:bodyPr>
-          <a:lstStyle/>
-          <a:p>
-            <a:pPr algn="l">
-              <a:defRPr sz="2000" b="1">
+            <a:off x="1920240" y="3017520"/>
+            <a:ext cx="8686800" cy="411480"/>
+          </a:xfrm>
+          <a:prstGeom prst="rect">
+            <a:avLst/>
+          </a:prstGeom>
+          <a:noFill/>
+        </p:spPr>
+        <p:txBody>
+          <a:bodyPr wrap="square">
+            <a:spAutoFit/>
+          </a:bodyPr>
+          <a:lstStyle/>
+          <a:p>
+            <a:pPr algn="l">
+              <a:defRPr sz="1800" b="1">
                 <a:solidFill>
                   <a:srgbClr val="F8FAFC"/>
                 </a:solidFill>
@@ -11389,22 +11173,22 @@
         </p:nvSpPr>
         <p:spPr>
           <a:xfrm>
-            <a:off x="2011680" y="3931920"/>
-            <a:ext cx="8686800" cy="640080"/>
-          </a:xfrm>
-          <a:prstGeom prst="rect">
-            <a:avLst/>
-          </a:prstGeom>
-          <a:noFill/>
-        </p:spPr>
-        <p:txBody>
-          <a:bodyPr wrap="square">
-            <a:spAutoFit/>
-          </a:bodyPr>
-          <a:lstStyle/>
-          <a:p>
-            <a:pPr algn="l">
-              <a:defRPr sz="1300" b="0">
+            <a:off x="1920240" y="3429000"/>
+            <a:ext cx="8686800" cy="594360"/>
+          </a:xfrm>
+          <a:prstGeom prst="rect">
+            <a:avLst/>
+          </a:prstGeom>
+          <a:noFill/>
+        </p:spPr>
+        <p:txBody>
+          <a:bodyPr wrap="square">
+            <a:spAutoFit/>
+          </a:bodyPr>
+          <a:lstStyle/>
+          <a:p>
+            <a:pPr algn="l">
+              <a:defRPr sz="1200" b="0">
                 <a:solidFill>
                   <a:srgbClr val="94A3B8"/>
                 </a:solidFill>
@@ -11425,8 +11209,8 @@
         </p:nvSpPr>
         <p:spPr>
           <a:xfrm>
-            <a:off x="731520" y="4937760"/>
-            <a:ext cx="10515600" cy="1371600"/>
+            <a:off x="731520" y="4389120"/>
+            <a:ext cx="10515600" cy="1280160"/>
           </a:xfrm>
           <a:prstGeom prst="roundRect">
             <a:avLst>
@@ -11472,8 +11256,8 @@
         </p:nvSpPr>
         <p:spPr>
           <a:xfrm>
-            <a:off x="1097280" y="5257800"/>
-            <a:ext cx="548640" cy="548640"/>
+            <a:off x="1097280" y="4663440"/>
+            <a:ext cx="502920" cy="502920"/>
           </a:xfrm>
           <a:prstGeom prst="ellipse">
             <a:avLst/>
@@ -11504,7 +11288,7 @@
           <a:lstStyle/>
           <a:p>
             <a:pPr algn="ctr">
-              <a:defRPr sz="2200" b="1">
+              <a:defRPr sz="2000" b="1">
                 <a:solidFill>
                   <a:srgbClr val="0F172A"/>
                 </a:solidFill>
@@ -11524,22 +11308,22 @@
         </p:nvSpPr>
         <p:spPr>
           <a:xfrm>
-            <a:off x="2011680" y="5120640"/>
-            <a:ext cx="8686800" cy="457200"/>
-          </a:xfrm>
-          <a:prstGeom prst="rect">
-            <a:avLst/>
-          </a:prstGeom>
-          <a:noFill/>
-        </p:spPr>
-        <p:txBody>
-          <a:bodyPr wrap="square">
-            <a:spAutoFit/>
-          </a:bodyPr>
-          <a:lstStyle/>
-          <a:p>
-            <a:pPr algn="l">
-              <a:defRPr sz="2000" b="1">
+            <a:off x="1920240" y="4526280"/>
+            <a:ext cx="8686800" cy="411480"/>
+          </a:xfrm>
+          <a:prstGeom prst="rect">
+            <a:avLst/>
+          </a:prstGeom>
+          <a:noFill/>
+        </p:spPr>
+        <p:txBody>
+          <a:bodyPr wrap="square">
+            <a:spAutoFit/>
+          </a:bodyPr>
+          <a:lstStyle/>
+          <a:p>
+            <a:pPr algn="l">
+              <a:defRPr sz="1800" b="1">
                 <a:solidFill>
                   <a:srgbClr val="F8FAFC"/>
                 </a:solidFill>
@@ -11560,22 +11344,22 @@
         </p:nvSpPr>
         <p:spPr>
           <a:xfrm>
-            <a:off x="2011680" y="5577840"/>
-            <a:ext cx="8686800" cy="640080"/>
-          </a:xfrm>
-          <a:prstGeom prst="rect">
-            <a:avLst/>
-          </a:prstGeom>
-          <a:noFill/>
-        </p:spPr>
-        <p:txBody>
-          <a:bodyPr wrap="square">
-            <a:spAutoFit/>
-          </a:bodyPr>
-          <a:lstStyle/>
-          <a:p>
-            <a:pPr algn="l">
-              <a:defRPr sz="1300" b="0">
+            <a:off x="1920240" y="4937760"/>
+            <a:ext cx="8686800" cy="594360"/>
+          </a:xfrm>
+          <a:prstGeom prst="rect">
+            <a:avLst/>
+          </a:prstGeom>
+          <a:noFill/>
+        </p:spPr>
+        <p:txBody>
+          <a:bodyPr wrap="square">
+            <a:spAutoFit/>
+          </a:bodyPr>
+          <a:lstStyle/>
+          <a:p>
+            <a:pPr algn="l">
+              <a:defRPr sz="1200" b="0">
                 <a:solidFill>
                   <a:srgbClr val="94A3B8"/>
                 </a:solidFill>
@@ -11596,17 +11380,21 @@
         </p:nvSpPr>
         <p:spPr>
           <a:xfrm>
-            <a:off x="731520" y="6400800"/>
-            <a:ext cx="10515600" cy="9144"/>
+            <a:off x="731520" y="6172200"/>
+            <a:ext cx="10515600" cy="457200"/>
           </a:xfrm>
           <a:prstGeom prst="roundRect">
-            <a:avLst/>
+            <a:avLst>
+              <a:gd name="adj" fmla="val 10000"/>
+            </a:avLst>
           </a:prstGeom>
           <a:solidFill>
-            <a:srgbClr val="1E293B"/>
+            <a:srgbClr val="16213A"/>
           </a:solidFill>
-          <a:ln>
-            <a:noFill/>
+          <a:ln w="12700">
+            <a:solidFill>
+              <a:srgbClr val="34D399"/>
+            </a:solidFill>
           </a:ln>
         </p:spPr>
         <p:style>
@@ -11639,24 +11427,21 @@
         </p:nvSpPr>
         <p:spPr>
           <a:xfrm>
-            <a:off x="731520" y="5760720"/>
-            <a:ext cx="10515600" cy="640080"/>
-          </a:xfrm>
-          <a:prstGeom prst="rect">
-            <a:avLst/>
-          </a:prstGeom>
-          <a:noFill/>
-        </p:spPr>
-        <p:txBody>
-          <a:bodyPr wrap="square">
-            <a:spAutoFit/>
-          </a:bodyPr>
-          <a:lstStyle/>
-          <a:p>
-            <a:pPr>
-              <a:spcAft>
-                <a:spcPts val="780"/>
-              </a:spcAft>
+            <a:off x="1188720" y="6217920"/>
+            <a:ext cx="9601200" cy="365760"/>
+          </a:xfrm>
+          <a:prstGeom prst="rect">
+            <a:avLst/>
+          </a:prstGeom>
+          <a:noFill/>
+        </p:spPr>
+        <p:txBody>
+          <a:bodyPr wrap="square">
+            <a:spAutoFit/>
+          </a:bodyPr>
+          <a:lstStyle/>
+          <a:p>
+            <a:pPr algn="ctr">
               <a:defRPr sz="1300" b="1">
                 <a:solidFill>
                   <a:srgbClr val="34D399"/>
@@ -11665,7 +11450,7 @@
               </a:defRPr>
             </a:pPr>
             <a:r>
-              <a:t>Expected Year-1 return: 3.8x  |  Downside bounded by 90-day pilot scope  |  Upside scales with SRAM's unique data advantage</a:t>
+              <a:t>Expected Year-1 return: 3.8x  |  Downside bounded by 90-day pilot  |  Upside scales with SRAM's unique data advantage</a:t>
             </a:r>
           </a:p>
         </p:txBody>

--- a/presentation/SRAM_AI_Adoption_Playbook.pptx
+++ b/presentation/SRAM_AI_Adoption_Playbook.pptx
@@ -3091,7 +3091,7 @@
     <p:bg>
       <p:bgPr>
         <a:solidFill>
-          <a:srgbClr val="0F172A"/>
+          <a:srgbClr val="1C1C1E"/>
         </a:solidFill>
         <a:effectLst/>
       </p:bgPr>
@@ -3111,14 +3111,14 @@
         </p:nvSpPr>
         <p:spPr>
           <a:xfrm>
-            <a:off x="1371600" y="2286000"/>
-            <a:ext cx="1828800" cy="38100"/>
+            <a:off x="1371600" y="2377440"/>
+            <a:ext cx="1371600" cy="38100"/>
           </a:xfrm>
           <a:prstGeom prst="rect">
             <a:avLst/>
           </a:prstGeom>
           <a:solidFill>
-            <a:srgbClr val="389FF5"/>
+            <a:srgbClr val="E51937"/>
           </a:solidFill>
           <a:ln>
             <a:noFill/>
@@ -3154,8 +3154,8 @@
         </p:nvSpPr>
         <p:spPr>
           <a:xfrm>
-            <a:off x="1371600" y="2468880"/>
-            <a:ext cx="9144000" cy="2743200"/>
+            <a:off x="1371600" y="2560320"/>
+            <a:ext cx="9144000" cy="2286000"/>
           </a:xfrm>
           <a:prstGeom prst="rect">
             <a:avLst/>
@@ -3170,11 +3170,11 @@
           <a:p>
             <a:pPr>
               <a:spcAft>
-                <a:spcPts val="2520"/>
+                <a:spcPts val="2640"/>
               </a:spcAft>
-              <a:defRPr sz="4200" b="1">
-                <a:solidFill>
-                  <a:srgbClr val="F8FAFC"/>
+              <a:defRPr sz="4400" b="1">
+                <a:solidFill>
+                  <a:srgbClr val="FFFFFF"/>
                 </a:solidFill>
                 <a:latin typeface="Calibri"/>
               </a:defRPr>
@@ -3186,11 +3186,11 @@
           <a:p>
             <a:pPr>
               <a:spcAft>
-                <a:spcPts val="1680"/>
+                <a:spcPts val="1560"/>
               </a:spcAft>
-              <a:defRPr sz="2800" b="0">
-                <a:solidFill>
-                  <a:srgbClr val="389FF5"/>
+              <a:defRPr sz="2600" b="0">
+                <a:solidFill>
+                  <a:srgbClr val="E51937"/>
                 </a:solidFill>
                 <a:latin typeface="Calibri"/>
               </a:defRPr>
@@ -3198,6 +3198,19 @@
             <a:r>
               <a:t>AI Adoption Playbook</a:t>
             </a:r>
+          </a:p>
+          <a:p>
+            <a:pPr>
+              <a:spcAft>
+                <a:spcPts val="720"/>
+              </a:spcAft>
+              <a:defRPr sz="1200" b="0">
+                <a:solidFill>
+                  <a:srgbClr val="767676"/>
+                </a:solidFill>
+                <a:latin typeface="Calibri"/>
+              </a:defRPr>
+            </a:pPr>
           </a:p>
           <a:p>
             <a:pPr>
@@ -3206,36 +3219,23 @@
               </a:spcAft>
               <a:defRPr sz="1400" b="0">
                 <a:solidFill>
-                  <a:srgbClr val="64748B"/>
-                </a:solidFill>
-                <a:latin typeface="Calibri"/>
-              </a:defRPr>
-            </a:pPr>
+                  <a:srgbClr val="D9DBD8"/>
+                </a:solidFill>
+                <a:latin typeface="Calibri"/>
+              </a:defRPr>
+            </a:pPr>
+            <a:r>
+              <a:t>Prepared for Executive Leadership</a:t>
+            </a:r>
           </a:p>
           <a:p>
             <a:pPr>
               <a:spcAft>
-                <a:spcPts val="840"/>
+                <a:spcPts val="780"/>
               </a:spcAft>
-              <a:defRPr sz="1400" b="0">
-                <a:solidFill>
-                  <a:srgbClr val="94A3B8"/>
-                </a:solidFill>
-                <a:latin typeface="Calibri"/>
-              </a:defRPr>
-            </a:pPr>
-            <a:r>
-              <a:t>Prepared for Executive Leadership</a:t>
-            </a:r>
-          </a:p>
-          <a:p>
-            <a:pPr>
-              <a:spcAft>
-                <a:spcPts val="840"/>
-              </a:spcAft>
-              <a:defRPr sz="1400" b="0">
-                <a:solidFill>
-                  <a:srgbClr val="64748B"/>
+              <a:defRPr sz="1300" b="0">
+                <a:solidFill>
+                  <a:srgbClr val="767676"/>
                 </a:solidFill>
                 <a:latin typeface="Calibri"/>
               </a:defRPr>
@@ -3254,24 +3254,24 @@
         </p:nvSpPr>
         <p:spPr>
           <a:xfrm>
-            <a:off x="1371600" y="5669280"/>
-            <a:ext cx="9144000" cy="457200"/>
-          </a:xfrm>
-          <a:prstGeom prst="rect">
-            <a:avLst/>
-          </a:prstGeom>
-          <a:noFill/>
-        </p:spPr>
-        <p:txBody>
-          <a:bodyPr wrap="square">
-            <a:spAutoFit/>
-          </a:bodyPr>
-          <a:lstStyle/>
-          <a:p>
-            <a:pPr algn="l">
-              <a:defRPr sz="1100" b="0">
-                <a:solidFill>
-                  <a:srgbClr val="64748B"/>
+            <a:off x="1371600" y="5760720"/>
+            <a:ext cx="9144000" cy="365760"/>
+          </a:xfrm>
+          <a:prstGeom prst="rect">
+            <a:avLst/>
+          </a:prstGeom>
+          <a:noFill/>
+        </p:spPr>
+        <p:txBody>
+          <a:bodyPr wrap="square">
+            <a:spAutoFit/>
+          </a:bodyPr>
+          <a:lstStyle/>
+          <a:p>
+            <a:pPr algn="l">
+              <a:defRPr sz="1000" b="0">
+                <a:solidFill>
+                  <a:srgbClr val="767676"/>
                 </a:solidFill>
                 <a:latin typeface="Calibri"/>
               </a:defRPr>
@@ -3296,7 +3296,7 @@
     <p:bg>
       <p:bgPr>
         <a:solidFill>
-          <a:srgbClr val="0F172A"/>
+          <a:srgbClr val="1C1C1E"/>
         </a:solidFill>
         <a:effectLst/>
       </p:bgPr>
@@ -3317,23 +3317,23 @@
         <p:spPr>
           <a:xfrm>
             <a:off x="731520" y="274320"/>
-            <a:ext cx="5486400" cy="274320"/>
-          </a:xfrm>
-          <a:prstGeom prst="rect">
-            <a:avLst/>
-          </a:prstGeom>
-          <a:noFill/>
-        </p:spPr>
-        <p:txBody>
-          <a:bodyPr wrap="square">
-            <a:spAutoFit/>
-          </a:bodyPr>
-          <a:lstStyle/>
-          <a:p>
-            <a:pPr algn="l">
-              <a:defRPr sz="1200" b="1">
-                <a:solidFill>
-                  <a:srgbClr val="389FF5"/>
+            <a:ext cx="5486400" cy="228600"/>
+          </a:xfrm>
+          <a:prstGeom prst="rect">
+            <a:avLst/>
+          </a:prstGeom>
+          <a:noFill/>
+        </p:spPr>
+        <p:txBody>
+          <a:bodyPr wrap="square">
+            <a:spAutoFit/>
+          </a:bodyPr>
+          <a:lstStyle/>
+          <a:p>
+            <a:pPr algn="l">
+              <a:defRPr sz="1100" b="1">
+                <a:solidFill>
+                  <a:srgbClr val="E51937"/>
                 </a:solidFill>
                 <a:latin typeface="Calibri"/>
               </a:defRPr>
@@ -3352,8 +3352,8 @@
         </p:nvSpPr>
         <p:spPr>
           <a:xfrm>
-            <a:off x="731520" y="594360"/>
-            <a:ext cx="9144000" cy="457200"/>
+            <a:off x="731520" y="548640"/>
+            <a:ext cx="10058400" cy="457200"/>
           </a:xfrm>
           <a:prstGeom prst="rect">
             <a:avLst/>
@@ -3369,7 +3369,7 @@
             <a:pPr algn="l">
               <a:defRPr sz="3200" b="1">
                 <a:solidFill>
-                  <a:srgbClr val="F8FAFC"/>
+                  <a:srgbClr val="FFFFFF"/>
                 </a:solidFill>
                 <a:latin typeface="Calibri"/>
               </a:defRPr>
@@ -3388,14 +3388,14 @@
         </p:nvSpPr>
         <p:spPr>
           <a:xfrm>
-            <a:off x="731520" y="1097280"/>
-            <a:ext cx="1097280" cy="38100"/>
+            <a:off x="731520" y="1051560"/>
+            <a:ext cx="914400" cy="25400"/>
           </a:xfrm>
           <a:prstGeom prst="rect">
             <a:avLst/>
           </a:prstGeom>
           <a:solidFill>
-            <a:srgbClr val="389FF5"/>
+            <a:srgbClr val="E51937"/>
           </a:solidFill>
           <a:ln>
             <a:noFill/>
@@ -3431,8 +3431,8 @@
         </p:nvSpPr>
         <p:spPr>
           <a:xfrm>
-            <a:off x="731520" y="1325880"/>
-            <a:ext cx="6858000" cy="731520"/>
+            <a:off x="731520" y="1280160"/>
+            <a:ext cx="10058400" cy="640080"/>
           </a:xfrm>
           <a:prstGeom prst="rect">
             <a:avLst/>
@@ -3448,7 +3448,7 @@
             <a:pPr algn="l">
               <a:defRPr sz="1400" b="0">
                 <a:solidFill>
-                  <a:srgbClr val="94A3B8"/>
+                  <a:srgbClr val="D9DBD8"/>
                 </a:solidFill>
                 <a:latin typeface="Calibri"/>
               </a:defRPr>
@@ -3467,20 +3467,20 @@
         </p:nvSpPr>
         <p:spPr>
           <a:xfrm>
-            <a:off x="731520" y="2286000"/>
-            <a:ext cx="2286000" cy="1371600"/>
+            <a:off x="731520" y="2194560"/>
+            <a:ext cx="2377440" cy="1188720"/>
           </a:xfrm>
           <a:prstGeom prst="roundRect">
             <a:avLst>
-              <a:gd name="adj" fmla="val 5000"/>
+              <a:gd name="adj" fmla="val 4000"/>
             </a:avLst>
           </a:prstGeom>
           <a:solidFill>
-            <a:srgbClr val="16213A"/>
+            <a:srgbClr val="2A2A2C"/>
           </a:solidFill>
           <a:ln w="12700">
             <a:solidFill>
-              <a:srgbClr val="1E293B"/>
+              <a:srgbClr val="3A3A3C"/>
             </a:solidFill>
           </a:ln>
         </p:spPr>
@@ -3514,24 +3514,24 @@
         </p:nvSpPr>
         <p:spPr>
           <a:xfrm>
-            <a:off x="1005840" y="2423160"/>
-            <a:ext cx="1737360" cy="274320"/>
-          </a:xfrm>
-          <a:prstGeom prst="rect">
-            <a:avLst/>
-          </a:prstGeom>
-          <a:noFill/>
-        </p:spPr>
-        <p:txBody>
-          <a:bodyPr wrap="square">
-            <a:spAutoFit/>
-          </a:bodyPr>
-          <a:lstStyle/>
-          <a:p>
-            <a:pPr algn="l">
-              <a:defRPr sz="1100" b="0">
-                <a:solidFill>
-                  <a:srgbClr val="64748B"/>
+            <a:off x="960120" y="2331720"/>
+            <a:ext cx="1920240" cy="228600"/>
+          </a:xfrm>
+          <a:prstGeom prst="rect">
+            <a:avLst/>
+          </a:prstGeom>
+          <a:noFill/>
+        </p:spPr>
+        <p:txBody>
+          <a:bodyPr wrap="square">
+            <a:spAutoFit/>
+          </a:bodyPr>
+          <a:lstStyle/>
+          <a:p>
+            <a:pPr algn="l">
+              <a:defRPr sz="1000" b="0">
+                <a:solidFill>
+                  <a:srgbClr val="767676"/>
                 </a:solidFill>
                 <a:latin typeface="Calibri"/>
               </a:defRPr>
@@ -3550,24 +3550,24 @@
         </p:nvSpPr>
         <p:spPr>
           <a:xfrm>
-            <a:off x="1005840" y="2697480"/>
-            <a:ext cx="1737360" cy="457200"/>
-          </a:xfrm>
-          <a:prstGeom prst="rect">
-            <a:avLst/>
-          </a:prstGeom>
-          <a:noFill/>
-        </p:spPr>
-        <p:txBody>
-          <a:bodyPr wrap="square">
-            <a:spAutoFit/>
-          </a:bodyPr>
-          <a:lstStyle/>
-          <a:p>
-            <a:pPr algn="l">
-              <a:defRPr sz="2800" b="1">
-                <a:solidFill>
-                  <a:srgbClr val="389FF5"/>
+            <a:off x="960120" y="2560320"/>
+            <a:ext cx="1920240" cy="411480"/>
+          </a:xfrm>
+          <a:prstGeom prst="rect">
+            <a:avLst/>
+          </a:prstGeom>
+          <a:noFill/>
+        </p:spPr>
+        <p:txBody>
+          <a:bodyPr wrap="square">
+            <a:spAutoFit/>
+          </a:bodyPr>
+          <a:lstStyle/>
+          <a:p>
+            <a:pPr algn="l">
+              <a:defRPr sz="2600" b="1">
+                <a:solidFill>
+                  <a:srgbClr val="E51937"/>
                 </a:solidFill>
                 <a:latin typeface="Calibri"/>
               </a:defRPr>
@@ -3586,24 +3586,24 @@
         </p:nvSpPr>
         <p:spPr>
           <a:xfrm>
-            <a:off x="1005840" y="3200400"/>
-            <a:ext cx="1737360" cy="274320"/>
-          </a:xfrm>
-          <a:prstGeom prst="rect">
-            <a:avLst/>
-          </a:prstGeom>
-          <a:noFill/>
-        </p:spPr>
-        <p:txBody>
-          <a:bodyPr wrap="square">
-            <a:spAutoFit/>
-          </a:bodyPr>
-          <a:lstStyle/>
-          <a:p>
-            <a:pPr algn="l">
-              <a:defRPr sz="1000" b="0">
-                <a:solidFill>
-                  <a:srgbClr val="94A3B8"/>
+            <a:off x="960120" y="3017520"/>
+            <a:ext cx="1920240" cy="228600"/>
+          </a:xfrm>
+          <a:prstGeom prst="rect">
+            <a:avLst/>
+          </a:prstGeom>
+          <a:noFill/>
+        </p:spPr>
+        <p:txBody>
+          <a:bodyPr wrap="square">
+            <a:spAutoFit/>
+          </a:bodyPr>
+          <a:lstStyle/>
+          <a:p>
+            <a:pPr algn="l">
+              <a:defRPr sz="900" b="0">
+                <a:solidFill>
+                  <a:srgbClr val="767676"/>
                 </a:solidFill>
                 <a:latin typeface="Calibri"/>
               </a:defRPr>
@@ -3622,20 +3622,20 @@
         </p:nvSpPr>
         <p:spPr>
           <a:xfrm>
-            <a:off x="3200400" y="2286000"/>
-            <a:ext cx="2286000" cy="1371600"/>
+            <a:off x="3337560" y="2194560"/>
+            <a:ext cx="2377440" cy="1188720"/>
           </a:xfrm>
           <a:prstGeom prst="roundRect">
             <a:avLst>
-              <a:gd name="adj" fmla="val 5000"/>
+              <a:gd name="adj" fmla="val 4000"/>
             </a:avLst>
           </a:prstGeom>
           <a:solidFill>
-            <a:srgbClr val="16213A"/>
+            <a:srgbClr val="2A2A2C"/>
           </a:solidFill>
           <a:ln w="12700">
             <a:solidFill>
-              <a:srgbClr val="1E293B"/>
+              <a:srgbClr val="3A3A3C"/>
             </a:solidFill>
           </a:ln>
         </p:spPr>
@@ -3669,24 +3669,24 @@
         </p:nvSpPr>
         <p:spPr>
           <a:xfrm>
-            <a:off x="3474720" y="2423160"/>
-            <a:ext cx="1737360" cy="274320"/>
-          </a:xfrm>
-          <a:prstGeom prst="rect">
-            <a:avLst/>
-          </a:prstGeom>
-          <a:noFill/>
-        </p:spPr>
-        <p:txBody>
-          <a:bodyPr wrap="square">
-            <a:spAutoFit/>
-          </a:bodyPr>
-          <a:lstStyle/>
-          <a:p>
-            <a:pPr algn="l">
-              <a:defRPr sz="1100" b="0">
-                <a:solidFill>
-                  <a:srgbClr val="64748B"/>
+            <a:off x="3566160" y="2331720"/>
+            <a:ext cx="1920240" cy="228600"/>
+          </a:xfrm>
+          <a:prstGeom prst="rect">
+            <a:avLst/>
+          </a:prstGeom>
+          <a:noFill/>
+        </p:spPr>
+        <p:txBody>
+          <a:bodyPr wrap="square">
+            <a:spAutoFit/>
+          </a:bodyPr>
+          <a:lstStyle/>
+          <a:p>
+            <a:pPr algn="l">
+              <a:defRPr sz="1000" b="0">
+                <a:solidFill>
+                  <a:srgbClr val="767676"/>
                 </a:solidFill>
                 <a:latin typeface="Calibri"/>
               </a:defRPr>
@@ -3705,24 +3705,24 @@
         </p:nvSpPr>
         <p:spPr>
           <a:xfrm>
-            <a:off x="3474720" y="2697480"/>
-            <a:ext cx="1737360" cy="457200"/>
-          </a:xfrm>
-          <a:prstGeom prst="rect">
-            <a:avLst/>
-          </a:prstGeom>
-          <a:noFill/>
-        </p:spPr>
-        <p:txBody>
-          <a:bodyPr wrap="square">
-            <a:spAutoFit/>
-          </a:bodyPr>
-          <a:lstStyle/>
-          <a:p>
-            <a:pPr algn="l">
-              <a:defRPr sz="2800" b="1">
-                <a:solidFill>
-                  <a:srgbClr val="389FF5"/>
+            <a:off x="3566160" y="2560320"/>
+            <a:ext cx="1920240" cy="411480"/>
+          </a:xfrm>
+          <a:prstGeom prst="rect">
+            <a:avLst/>
+          </a:prstGeom>
+          <a:noFill/>
+        </p:spPr>
+        <p:txBody>
+          <a:bodyPr wrap="square">
+            <a:spAutoFit/>
+          </a:bodyPr>
+          <a:lstStyle/>
+          <a:p>
+            <a:pPr algn="l">
+              <a:defRPr sz="2600" b="1">
+                <a:solidFill>
+                  <a:srgbClr val="E51937"/>
                 </a:solidFill>
                 <a:latin typeface="Calibri"/>
               </a:defRPr>
@@ -3741,24 +3741,24 @@
         </p:nvSpPr>
         <p:spPr>
           <a:xfrm>
-            <a:off x="3474720" y="3200400"/>
-            <a:ext cx="1737360" cy="274320"/>
-          </a:xfrm>
-          <a:prstGeom prst="rect">
-            <a:avLst/>
-          </a:prstGeom>
-          <a:noFill/>
-        </p:spPr>
-        <p:txBody>
-          <a:bodyPr wrap="square">
-            <a:spAutoFit/>
-          </a:bodyPr>
-          <a:lstStyle/>
-          <a:p>
-            <a:pPr algn="l">
-              <a:defRPr sz="1000" b="0">
-                <a:solidFill>
-                  <a:srgbClr val="94A3B8"/>
+            <a:off x="3566160" y="3017520"/>
+            <a:ext cx="1920240" cy="228600"/>
+          </a:xfrm>
+          <a:prstGeom prst="rect">
+            <a:avLst/>
+          </a:prstGeom>
+          <a:noFill/>
+        </p:spPr>
+        <p:txBody>
+          <a:bodyPr wrap="square">
+            <a:spAutoFit/>
+          </a:bodyPr>
+          <a:lstStyle/>
+          <a:p>
+            <a:pPr algn="l">
+              <a:defRPr sz="900" b="0">
+                <a:solidFill>
+                  <a:srgbClr val="767676"/>
                 </a:solidFill>
                 <a:latin typeface="Calibri"/>
               </a:defRPr>
@@ -3777,20 +3777,20 @@
         </p:nvSpPr>
         <p:spPr>
           <a:xfrm>
-            <a:off x="5669280" y="2286000"/>
-            <a:ext cx="2286000" cy="1371600"/>
+            <a:off x="5943600" y="2194560"/>
+            <a:ext cx="2377440" cy="1188720"/>
           </a:xfrm>
           <a:prstGeom prst="roundRect">
             <a:avLst>
-              <a:gd name="adj" fmla="val 5000"/>
+              <a:gd name="adj" fmla="val 4000"/>
             </a:avLst>
           </a:prstGeom>
           <a:solidFill>
-            <a:srgbClr val="16213A"/>
+            <a:srgbClr val="2A2A2C"/>
           </a:solidFill>
           <a:ln w="12700">
             <a:solidFill>
-              <a:srgbClr val="1E293B"/>
+              <a:srgbClr val="3A3A3C"/>
             </a:solidFill>
           </a:ln>
         </p:spPr>
@@ -3824,24 +3824,24 @@
         </p:nvSpPr>
         <p:spPr>
           <a:xfrm>
-            <a:off x="5943600" y="2423160"/>
-            <a:ext cx="1737360" cy="274320"/>
-          </a:xfrm>
-          <a:prstGeom prst="rect">
-            <a:avLst/>
-          </a:prstGeom>
-          <a:noFill/>
-        </p:spPr>
-        <p:txBody>
-          <a:bodyPr wrap="square">
-            <a:spAutoFit/>
-          </a:bodyPr>
-          <a:lstStyle/>
-          <a:p>
-            <a:pPr algn="l">
-              <a:defRPr sz="1100" b="0">
-                <a:solidFill>
-                  <a:srgbClr val="64748B"/>
+            <a:off x="6172200" y="2331720"/>
+            <a:ext cx="1920240" cy="228600"/>
+          </a:xfrm>
+          <a:prstGeom prst="rect">
+            <a:avLst/>
+          </a:prstGeom>
+          <a:noFill/>
+        </p:spPr>
+        <p:txBody>
+          <a:bodyPr wrap="square">
+            <a:spAutoFit/>
+          </a:bodyPr>
+          <a:lstStyle/>
+          <a:p>
+            <a:pPr algn="l">
+              <a:defRPr sz="1000" b="0">
+                <a:solidFill>
+                  <a:srgbClr val="767676"/>
                 </a:solidFill>
                 <a:latin typeface="Calibri"/>
               </a:defRPr>
@@ -3860,24 +3860,24 @@
         </p:nvSpPr>
         <p:spPr>
           <a:xfrm>
-            <a:off x="5943600" y="2697480"/>
-            <a:ext cx="1737360" cy="457200"/>
-          </a:xfrm>
-          <a:prstGeom prst="rect">
-            <a:avLst/>
-          </a:prstGeom>
-          <a:noFill/>
-        </p:spPr>
-        <p:txBody>
-          <a:bodyPr wrap="square">
-            <a:spAutoFit/>
-          </a:bodyPr>
-          <a:lstStyle/>
-          <a:p>
-            <a:pPr algn="l">
-              <a:defRPr sz="2800" b="1">
-                <a:solidFill>
-                  <a:srgbClr val="389FF5"/>
+            <a:off x="6172200" y="2560320"/>
+            <a:ext cx="1920240" cy="411480"/>
+          </a:xfrm>
+          <a:prstGeom prst="rect">
+            <a:avLst/>
+          </a:prstGeom>
+          <a:noFill/>
+        </p:spPr>
+        <p:txBody>
+          <a:bodyPr wrap="square">
+            <a:spAutoFit/>
+          </a:bodyPr>
+          <a:lstStyle/>
+          <a:p>
+            <a:pPr algn="l">
+              <a:defRPr sz="2600" b="1">
+                <a:solidFill>
+                  <a:srgbClr val="E51937"/>
                 </a:solidFill>
                 <a:latin typeface="Calibri"/>
               </a:defRPr>
@@ -3896,24 +3896,24 @@
         </p:nvSpPr>
         <p:spPr>
           <a:xfrm>
-            <a:off x="5943600" y="3200400"/>
-            <a:ext cx="1737360" cy="274320"/>
-          </a:xfrm>
-          <a:prstGeom prst="rect">
-            <a:avLst/>
-          </a:prstGeom>
-          <a:noFill/>
-        </p:spPr>
-        <p:txBody>
-          <a:bodyPr wrap="square">
-            <a:spAutoFit/>
-          </a:bodyPr>
-          <a:lstStyle/>
-          <a:p>
-            <a:pPr algn="l">
-              <a:defRPr sz="1000" b="0">
-                <a:solidFill>
-                  <a:srgbClr val="94A3B8"/>
+            <a:off x="6172200" y="3017520"/>
+            <a:ext cx="1920240" cy="228600"/>
+          </a:xfrm>
+          <a:prstGeom prst="rect">
+            <a:avLst/>
+          </a:prstGeom>
+          <a:noFill/>
+        </p:spPr>
+        <p:txBody>
+          <a:bodyPr wrap="square">
+            <a:spAutoFit/>
+          </a:bodyPr>
+          <a:lstStyle/>
+          <a:p>
+            <a:pPr algn="l">
+              <a:defRPr sz="900" b="0">
+                <a:solidFill>
+                  <a:srgbClr val="767676"/>
                 </a:solidFill>
                 <a:latin typeface="Calibri"/>
               </a:defRPr>
@@ -3932,20 +3932,20 @@
         </p:nvSpPr>
         <p:spPr>
           <a:xfrm>
-            <a:off x="8138160" y="2286000"/>
-            <a:ext cx="2286000" cy="1371600"/>
+            <a:off x="8549640" y="2194560"/>
+            <a:ext cx="2377440" cy="1188720"/>
           </a:xfrm>
           <a:prstGeom prst="roundRect">
             <a:avLst>
-              <a:gd name="adj" fmla="val 5000"/>
+              <a:gd name="adj" fmla="val 4000"/>
             </a:avLst>
           </a:prstGeom>
           <a:solidFill>
-            <a:srgbClr val="16213A"/>
+            <a:srgbClr val="2A2A2C"/>
           </a:solidFill>
           <a:ln w="12700">
             <a:solidFill>
-              <a:srgbClr val="1E293B"/>
+              <a:srgbClr val="3A3A3C"/>
             </a:solidFill>
           </a:ln>
         </p:spPr>
@@ -3979,8 +3979,188 @@
         </p:nvSpPr>
         <p:spPr>
           <a:xfrm>
-            <a:off x="8412480" y="2423160"/>
-            <a:ext cx="1737360" cy="274320"/>
+            <a:off x="8778240" y="2331720"/>
+            <a:ext cx="1920240" cy="228600"/>
+          </a:xfrm>
+          <a:prstGeom prst="rect">
+            <a:avLst/>
+          </a:prstGeom>
+          <a:noFill/>
+        </p:spPr>
+        <p:txBody>
+          <a:bodyPr wrap="square">
+            <a:spAutoFit/>
+          </a:bodyPr>
+          <a:lstStyle/>
+          <a:p>
+            <a:pPr algn="l">
+              <a:defRPr sz="1000" b="0">
+                <a:solidFill>
+                  <a:srgbClr val="767676"/>
+                </a:solidFill>
+                <a:latin typeface="Calibri"/>
+              </a:defRPr>
+            </a:pPr>
+            <a:r>
+              <a:t>MTB POSITION</a:t>
+            </a:r>
+          </a:p>
+        </p:txBody>
+      </p:sp>
+      <p:sp>
+        <p:nvSpPr>
+          <p:cNvPr id="20" name="TextBox 19"/>
+          <p:cNvSpPr txBox="1"/>
+          <p:nvPr/>
+        </p:nvSpPr>
+        <p:spPr>
+          <a:xfrm>
+            <a:off x="8778240" y="2560320"/>
+            <a:ext cx="1920240" cy="411480"/>
+          </a:xfrm>
+          <a:prstGeom prst="rect">
+            <a:avLst/>
+          </a:prstGeom>
+          <a:noFill/>
+        </p:spPr>
+        <p:txBody>
+          <a:bodyPr wrap="square">
+            <a:spAutoFit/>
+          </a:bodyPr>
+          <a:lstStyle/>
+          <a:p>
+            <a:pPr algn="l">
+              <a:defRPr sz="2600" b="1">
+                <a:solidFill>
+                  <a:srgbClr val="E51937"/>
+                </a:solidFill>
+                <a:latin typeface="Calibri"/>
+              </a:defRPr>
+            </a:pPr>
+            <a:r>
+              <a:t>#1</a:t>
+            </a:r>
+          </a:p>
+        </p:txBody>
+      </p:sp>
+      <p:sp>
+        <p:nvSpPr>
+          <p:cNvPr id="21" name="TextBox 20"/>
+          <p:cNvSpPr txBox="1"/>
+          <p:nvPr/>
+        </p:nvSpPr>
+        <p:spPr>
+          <a:xfrm>
+            <a:off x="8778240" y="3017520"/>
+            <a:ext cx="1920240" cy="228600"/>
+          </a:xfrm>
+          <a:prstGeom prst="rect">
+            <a:avLst/>
+          </a:prstGeom>
+          <a:noFill/>
+        </p:spPr>
+        <p:txBody>
+          <a:bodyPr wrap="square">
+            <a:spAutoFit/>
+          </a:bodyPr>
+          <a:lstStyle/>
+          <a:p>
+            <a:pPr algn="l">
+              <a:defRPr sz="900" b="0">
+                <a:solidFill>
+                  <a:srgbClr val="767676"/>
+                </a:solidFill>
+                <a:latin typeface="Calibri"/>
+              </a:defRPr>
+            </a:pPr>
+            <a:r>
+              <a:t>Market leader</a:t>
+            </a:r>
+          </a:p>
+        </p:txBody>
+      </p:sp>
+      <p:sp>
+        <p:nvSpPr>
+          <p:cNvPr id="22" name="TextBox 21"/>
+          <p:cNvSpPr txBox="1"/>
+          <p:nvPr/>
+        </p:nvSpPr>
+        <p:spPr>
+          <a:xfrm>
+            <a:off x="731520" y="3657600"/>
+            <a:ext cx="4572000" cy="320040"/>
+          </a:xfrm>
+          <a:prstGeom prst="rect">
+            <a:avLst/>
+          </a:prstGeom>
+          <a:noFill/>
+        </p:spPr>
+        <p:txBody>
+          <a:bodyPr wrap="square">
+            <a:spAutoFit/>
+          </a:bodyPr>
+          <a:lstStyle/>
+          <a:p>
+            <a:pPr algn="l">
+              <a:defRPr sz="1600" b="1">
+                <a:solidFill>
+                  <a:srgbClr val="FFFFFF"/>
+                </a:solidFill>
+                <a:latin typeface="Calibri"/>
+              </a:defRPr>
+            </a:pPr>
+            <a:r>
+              <a:t>Revenue Architecture</a:t>
+            </a:r>
+          </a:p>
+        </p:txBody>
+      </p:sp>
+      <p:sp>
+        <p:nvSpPr>
+          <p:cNvPr id="23" name="TextBox 22"/>
+          <p:cNvSpPr txBox="1"/>
+          <p:nvPr/>
+        </p:nvSpPr>
+        <p:spPr>
+          <a:xfrm>
+            <a:off x="731520" y="4114800"/>
+            <a:ext cx="2926080" cy="320040"/>
+          </a:xfrm>
+          <a:prstGeom prst="rect">
+            <a:avLst/>
+          </a:prstGeom>
+          <a:noFill/>
+        </p:spPr>
+        <p:txBody>
+          <a:bodyPr wrap="square">
+            <a:spAutoFit/>
+          </a:bodyPr>
+          <a:lstStyle/>
+          <a:p>
+            <a:pPr algn="l">
+              <a:defRPr sz="1200" b="1">
+                <a:solidFill>
+                  <a:srgbClr val="FFFFFF"/>
+                </a:solidFill>
+                <a:latin typeface="Calibri"/>
+              </a:defRPr>
+            </a:pPr>
+            <a:r>
+              <a:t>Drivetrains + Braking</a:t>
+            </a:r>
+          </a:p>
+        </p:txBody>
+      </p:sp>
+      <p:sp>
+        <p:nvSpPr>
+          <p:cNvPr id="24" name="TextBox 23"/>
+          <p:cNvSpPr txBox="1"/>
+          <p:nvPr/>
+        </p:nvSpPr>
+        <p:spPr>
+          <a:xfrm>
+            <a:off x="3840480" y="4114800"/>
+            <a:ext cx="4114800" cy="320040"/>
           </a:xfrm>
           <a:prstGeom prst="rect">
             <a:avLst/>
@@ -3996,134 +4176,26 @@
             <a:pPr algn="l">
               <a:defRPr sz="1100" b="0">
                 <a:solidFill>
-                  <a:srgbClr val="64748B"/>
-                </a:solidFill>
-                <a:latin typeface="Calibri"/>
-              </a:defRPr>
-            </a:pPr>
-            <a:r>
-              <a:t>MTB POSITION</a:t>
-            </a:r>
-          </a:p>
-        </p:txBody>
-      </p:sp>
-      <p:sp>
-        <p:nvSpPr>
-          <p:cNvPr id="20" name="TextBox 19"/>
-          <p:cNvSpPr txBox="1"/>
-          <p:nvPr/>
-        </p:nvSpPr>
-        <p:spPr>
-          <a:xfrm>
-            <a:off x="8412480" y="2697480"/>
-            <a:ext cx="1737360" cy="457200"/>
-          </a:xfrm>
-          <a:prstGeom prst="rect">
-            <a:avLst/>
-          </a:prstGeom>
-          <a:noFill/>
-        </p:spPr>
-        <p:txBody>
-          <a:bodyPr wrap="square">
-            <a:spAutoFit/>
-          </a:bodyPr>
-          <a:lstStyle/>
-          <a:p>
-            <a:pPr algn="l">
-              <a:defRPr sz="2800" b="1">
-                <a:solidFill>
-                  <a:srgbClr val="34D399"/>
-                </a:solidFill>
-                <a:latin typeface="Calibri"/>
-              </a:defRPr>
-            </a:pPr>
-            <a:r>
-              <a:t>#1</a:t>
-            </a:r>
-          </a:p>
-        </p:txBody>
-      </p:sp>
-      <p:sp>
-        <p:nvSpPr>
-          <p:cNvPr id="21" name="TextBox 20"/>
-          <p:cNvSpPr txBox="1"/>
-          <p:nvPr/>
-        </p:nvSpPr>
-        <p:spPr>
-          <a:xfrm>
-            <a:off x="8412480" y="3200400"/>
-            <a:ext cx="1737360" cy="274320"/>
-          </a:xfrm>
-          <a:prstGeom prst="rect">
-            <a:avLst/>
-          </a:prstGeom>
-          <a:noFill/>
-        </p:spPr>
-        <p:txBody>
-          <a:bodyPr wrap="square">
-            <a:spAutoFit/>
-          </a:bodyPr>
-          <a:lstStyle/>
-          <a:p>
-            <a:pPr algn="l">
-              <a:defRPr sz="1000" b="0">
-                <a:solidFill>
-                  <a:srgbClr val="94A3B8"/>
-                </a:solidFill>
-                <a:latin typeface="Calibri"/>
-              </a:defRPr>
-            </a:pPr>
-            <a:r>
-              <a:t>Market leader</a:t>
-            </a:r>
-          </a:p>
-        </p:txBody>
-      </p:sp>
-      <p:sp>
-        <p:nvSpPr>
-          <p:cNvPr id="22" name="TextBox 21"/>
-          <p:cNvSpPr txBox="1"/>
-          <p:nvPr/>
-        </p:nvSpPr>
-        <p:spPr>
-          <a:xfrm>
-            <a:off x="731520" y="3931920"/>
-            <a:ext cx="5486400" cy="365760"/>
-          </a:xfrm>
-          <a:prstGeom prst="rect">
-            <a:avLst/>
-          </a:prstGeom>
-          <a:noFill/>
-        </p:spPr>
-        <p:txBody>
-          <a:bodyPr wrap="square">
-            <a:spAutoFit/>
-          </a:bodyPr>
-          <a:lstStyle/>
-          <a:p>
-            <a:pPr algn="l">
-              <a:defRPr sz="1600" b="1">
-                <a:solidFill>
-                  <a:srgbClr val="F8FAFC"/>
-                </a:solidFill>
-                <a:latin typeface="Calibri"/>
-              </a:defRPr>
-            </a:pPr>
-            <a:r>
-              <a:t>Revenue Architecture</a:t>
-            </a:r>
-          </a:p>
-        </p:txBody>
-      </p:sp>
-      <p:sp>
-        <p:nvSpPr>
-          <p:cNvPr id="23" name="TextBox 22"/>
-          <p:cNvSpPr txBox="1"/>
-          <p:nvPr/>
-        </p:nvSpPr>
-        <p:spPr>
-          <a:xfrm>
-            <a:off x="731520" y="4389120"/>
+                  <a:srgbClr val="767676"/>
+                </a:solidFill>
+                <a:latin typeface="Calibri"/>
+              </a:defRPr>
+            </a:pPr>
+            <a:r>
+              <a:t>SRAM RED, Force, Rival, Eagle</a:t>
+            </a:r>
+          </a:p>
+        </p:txBody>
+      </p:sp>
+      <p:sp>
+        <p:nvSpPr>
+          <p:cNvPr id="25" name="TextBox 24"/>
+          <p:cNvSpPr txBox="1"/>
+          <p:nvPr/>
+        </p:nvSpPr>
+        <p:spPr>
+          <a:xfrm>
+            <a:off x="731520" y="4480560"/>
             <a:ext cx="2926080" cy="320040"/>
           </a:xfrm>
           <a:prstGeom prst="rect">
@@ -4140,27 +4212,27 @@
             <a:pPr algn="l">
               <a:defRPr sz="1200" b="1">
                 <a:solidFill>
-                  <a:srgbClr val="389FF5"/>
-                </a:solidFill>
-                <a:latin typeface="Calibri"/>
-              </a:defRPr>
-            </a:pPr>
-            <a:r>
-              <a:t>Drivetrains + Braking</a:t>
-            </a:r>
-          </a:p>
-        </p:txBody>
-      </p:sp>
-      <p:sp>
-        <p:nvSpPr>
-          <p:cNvPr id="24" name="TextBox 23"/>
-          <p:cNvSpPr txBox="1"/>
-          <p:nvPr/>
-        </p:nvSpPr>
-        <p:spPr>
-          <a:xfrm>
-            <a:off x="3840480" y="4389120"/>
-            <a:ext cx="3657600" cy="320040"/>
+                  <a:srgbClr val="FFFFFF"/>
+                </a:solidFill>
+                <a:latin typeface="Calibri"/>
+              </a:defRPr>
+            </a:pPr>
+            <a:r>
+              <a:t>Suspension</a:t>
+            </a:r>
+          </a:p>
+        </p:txBody>
+      </p:sp>
+      <p:sp>
+        <p:nvSpPr>
+          <p:cNvPr id="26" name="TextBox 25"/>
+          <p:cNvSpPr txBox="1"/>
+          <p:nvPr/>
+        </p:nvSpPr>
+        <p:spPr>
+          <a:xfrm>
+            <a:off x="3840480" y="4480560"/>
+            <a:ext cx="4114800" cy="320040"/>
           </a:xfrm>
           <a:prstGeom prst="rect">
             <a:avLst/>
@@ -4176,26 +4248,26 @@
             <a:pPr algn="l">
               <a:defRPr sz="1100" b="0">
                 <a:solidFill>
-                  <a:srgbClr val="94A3B8"/>
-                </a:solidFill>
-                <a:latin typeface="Calibri"/>
-              </a:defRPr>
-            </a:pPr>
-            <a:r>
-              <a:t>SRAM RED, Force, Rival, Eagle</a:t>
-            </a:r>
-          </a:p>
-        </p:txBody>
-      </p:sp>
-      <p:sp>
-        <p:nvSpPr>
-          <p:cNvPr id="25" name="TextBox 24"/>
-          <p:cNvSpPr txBox="1"/>
-          <p:nvPr/>
-        </p:nvSpPr>
-        <p:spPr>
-          <a:xfrm>
-            <a:off x="731520" y="4736592"/>
+                  <a:srgbClr val="767676"/>
+                </a:solidFill>
+                <a:latin typeface="Calibri"/>
+              </a:defRPr>
+            </a:pPr>
+            <a:r>
+              <a:t>RockShox forks and shocks</a:t>
+            </a:r>
+          </a:p>
+        </p:txBody>
+      </p:sp>
+      <p:sp>
+        <p:nvSpPr>
+          <p:cNvPr id="27" name="TextBox 26"/>
+          <p:cNvSpPr txBox="1"/>
+          <p:nvPr/>
+        </p:nvSpPr>
+        <p:spPr>
+          <a:xfrm>
+            <a:off x="731520" y="4846320"/>
             <a:ext cx="2926080" cy="320040"/>
           </a:xfrm>
           <a:prstGeom prst="rect">
@@ -4212,27 +4284,27 @@
             <a:pPr algn="l">
               <a:defRPr sz="1200" b="1">
                 <a:solidFill>
-                  <a:srgbClr val="389FF5"/>
-                </a:solidFill>
-                <a:latin typeface="Calibri"/>
-              </a:defRPr>
-            </a:pPr>
-            <a:r>
-              <a:t>Suspension</a:t>
-            </a:r>
-          </a:p>
-        </p:txBody>
-      </p:sp>
-      <p:sp>
-        <p:nvSpPr>
-          <p:cNvPr id="26" name="TextBox 25"/>
-          <p:cNvSpPr txBox="1"/>
-          <p:nvPr/>
-        </p:nvSpPr>
-        <p:spPr>
-          <a:xfrm>
-            <a:off x="3840480" y="4736592"/>
-            <a:ext cx="3657600" cy="320040"/>
+                  <a:srgbClr val="FFFFFF"/>
+                </a:solidFill>
+                <a:latin typeface="Calibri"/>
+              </a:defRPr>
+            </a:pPr>
+            <a:r>
+              <a:t>Wheels + Cockpit</a:t>
+            </a:r>
+          </a:p>
+        </p:txBody>
+      </p:sp>
+      <p:sp>
+        <p:nvSpPr>
+          <p:cNvPr id="28" name="TextBox 27"/>
+          <p:cNvSpPr txBox="1"/>
+          <p:nvPr/>
+        </p:nvSpPr>
+        <p:spPr>
+          <a:xfrm>
+            <a:off x="3840480" y="4846320"/>
+            <a:ext cx="4114800" cy="320040"/>
           </a:xfrm>
           <a:prstGeom prst="rect">
             <a:avLst/>
@@ -4248,26 +4320,26 @@
             <a:pPr algn="l">
               <a:defRPr sz="1100" b="0">
                 <a:solidFill>
-                  <a:srgbClr val="94A3B8"/>
-                </a:solidFill>
-                <a:latin typeface="Calibri"/>
-              </a:defRPr>
-            </a:pPr>
-            <a:r>
-              <a:t>RockShox forks and shocks</a:t>
-            </a:r>
-          </a:p>
-        </p:txBody>
-      </p:sp>
-      <p:sp>
-        <p:nvSpPr>
-          <p:cNvPr id="27" name="TextBox 26"/>
-          <p:cNvSpPr txBox="1"/>
-          <p:nvPr/>
-        </p:nvSpPr>
-        <p:spPr>
-          <a:xfrm>
-            <a:off x="731520" y="5084064"/>
+                  <a:srgbClr val="767676"/>
+                </a:solidFill>
+                <a:latin typeface="Calibri"/>
+              </a:defRPr>
+            </a:pPr>
+            <a:r>
+              <a:t>Zipp performance components</a:t>
+            </a:r>
+          </a:p>
+        </p:txBody>
+      </p:sp>
+      <p:sp>
+        <p:nvSpPr>
+          <p:cNvPr id="29" name="TextBox 28"/>
+          <p:cNvSpPr txBox="1"/>
+          <p:nvPr/>
+        </p:nvSpPr>
+        <p:spPr>
+          <a:xfrm>
+            <a:off x="731520" y="5212080"/>
             <a:ext cx="2926080" cy="320040"/>
           </a:xfrm>
           <a:prstGeom prst="rect">
@@ -4284,27 +4356,27 @@
             <a:pPr algn="l">
               <a:defRPr sz="1200" b="1">
                 <a:solidFill>
-                  <a:srgbClr val="389FF5"/>
-                </a:solidFill>
-                <a:latin typeface="Calibri"/>
-              </a:defRPr>
-            </a:pPr>
-            <a:r>
-              <a:t>Wheels + Cockpit</a:t>
-            </a:r>
-          </a:p>
-        </p:txBody>
-      </p:sp>
-      <p:sp>
-        <p:nvSpPr>
-          <p:cNvPr id="28" name="TextBox 27"/>
-          <p:cNvSpPr txBox="1"/>
-          <p:nvPr/>
-        </p:nvSpPr>
-        <p:spPr>
-          <a:xfrm>
-            <a:off x="3840480" y="5084064"/>
-            <a:ext cx="3657600" cy="320040"/>
+                  <a:srgbClr val="FFFFFF"/>
+                </a:solidFill>
+                <a:latin typeface="Calibri"/>
+              </a:defRPr>
+            </a:pPr>
+            <a:r>
+              <a:t>Connected Products</a:t>
+            </a:r>
+          </a:p>
+        </p:txBody>
+      </p:sp>
+      <p:sp>
+        <p:nvSpPr>
+          <p:cNvPr id="30" name="TextBox 29"/>
+          <p:cNvSpPr txBox="1"/>
+          <p:nvPr/>
+        </p:nvSpPr>
+        <p:spPr>
+          <a:xfrm>
+            <a:off x="3840480" y="5212080"/>
+            <a:ext cx="4114800" cy="320040"/>
           </a:xfrm>
           <a:prstGeom prst="rect">
             <a:avLst/>
@@ -4320,26 +4392,26 @@
             <a:pPr algn="l">
               <a:defRPr sz="1100" b="0">
                 <a:solidFill>
-                  <a:srgbClr val="94A3B8"/>
-                </a:solidFill>
-                <a:latin typeface="Calibri"/>
-              </a:defRPr>
-            </a:pPr>
-            <a:r>
-              <a:t>Zipp performance components</a:t>
-            </a:r>
-          </a:p>
-        </p:txBody>
-      </p:sp>
-      <p:sp>
-        <p:nvSpPr>
-          <p:cNvPr id="29" name="TextBox 28"/>
-          <p:cNvSpPr txBox="1"/>
-          <p:nvPr/>
-        </p:nvSpPr>
-        <p:spPr>
-          <a:xfrm>
-            <a:off x="731520" y="5431536"/>
+                  <a:srgbClr val="767676"/>
+                </a:solidFill>
+                <a:latin typeface="Calibri"/>
+              </a:defRPr>
+            </a:pPr>
+            <a:r>
+              <a:t>Hammerhead Karoo, Quarq power</a:t>
+            </a:r>
+          </a:p>
+        </p:txBody>
+      </p:sp>
+      <p:sp>
+        <p:nvSpPr>
+          <p:cNvPr id="31" name="TextBox 30"/>
+          <p:cNvSpPr txBox="1"/>
+          <p:nvPr/>
+        </p:nvSpPr>
+        <p:spPr>
+          <a:xfrm>
+            <a:off x="731520" y="5577840"/>
             <a:ext cx="2926080" cy="320040"/>
           </a:xfrm>
           <a:prstGeom prst="rect">
@@ -4356,27 +4428,27 @@
             <a:pPr algn="l">
               <a:defRPr sz="1200" b="1">
                 <a:solidFill>
-                  <a:srgbClr val="34D399"/>
-                </a:solidFill>
-                <a:latin typeface="Calibri"/>
-              </a:defRPr>
-            </a:pPr>
-            <a:r>
-              <a:t>Connected Products</a:t>
-            </a:r>
-          </a:p>
-        </p:txBody>
-      </p:sp>
-      <p:sp>
-        <p:nvSpPr>
-          <p:cNvPr id="30" name="TextBox 29"/>
-          <p:cNvSpPr txBox="1"/>
-          <p:nvPr/>
-        </p:nvSpPr>
-        <p:spPr>
-          <a:xfrm>
-            <a:off x="3840480" y="5431536"/>
-            <a:ext cx="3657600" cy="320040"/>
+                  <a:srgbClr val="FFFFFF"/>
+                </a:solidFill>
+                <a:latin typeface="Calibri"/>
+              </a:defRPr>
+            </a:pPr>
+            <a:r>
+              <a:t>Wear Parts + Service</a:t>
+            </a:r>
+          </a:p>
+        </p:txBody>
+      </p:sp>
+      <p:sp>
+        <p:nvSpPr>
+          <p:cNvPr id="32" name="TextBox 31"/>
+          <p:cNvSpPr txBox="1"/>
+          <p:nvPr/>
+        </p:nvSpPr>
+        <p:spPr>
+          <a:xfrm>
+            <a:off x="3840480" y="5577840"/>
+            <a:ext cx="4114800" cy="320040"/>
           </a:xfrm>
           <a:prstGeom prst="rect">
             <a:avLst/>
@@ -4392,26 +4464,26 @@
             <a:pPr algn="l">
               <a:defRPr sz="1100" b="0">
                 <a:solidFill>
-                  <a:srgbClr val="94A3B8"/>
-                </a:solidFill>
-                <a:latin typeface="Calibri"/>
-              </a:defRPr>
-            </a:pPr>
-            <a:r>
-              <a:t>Hammerhead Karoo, Quarq power</a:t>
-            </a:r>
-          </a:p>
-        </p:txBody>
-      </p:sp>
-      <p:sp>
-        <p:nvSpPr>
-          <p:cNvPr id="31" name="TextBox 30"/>
-          <p:cNvSpPr txBox="1"/>
-          <p:nvPr/>
-        </p:nvSpPr>
-        <p:spPr>
-          <a:xfrm>
-            <a:off x="731520" y="5779008"/>
+                  <a:srgbClr val="767676"/>
+                </a:solidFill>
+                <a:latin typeface="Calibri"/>
+              </a:defRPr>
+            </a:pPr>
+            <a:r>
+              <a:t>Chains, cassettes, pads, rotors</a:t>
+            </a:r>
+          </a:p>
+        </p:txBody>
+      </p:sp>
+      <p:sp>
+        <p:nvSpPr>
+          <p:cNvPr id="33" name="TextBox 32"/>
+          <p:cNvSpPr txBox="1"/>
+          <p:nvPr/>
+        </p:nvSpPr>
+        <p:spPr>
+          <a:xfrm>
+            <a:off x="731520" y="5943600"/>
             <a:ext cx="2926080" cy="320040"/>
           </a:xfrm>
           <a:prstGeom prst="rect">
@@ -4428,27 +4500,27 @@
             <a:pPr algn="l">
               <a:defRPr sz="1200" b="1">
                 <a:solidFill>
-                  <a:srgbClr val="34D399"/>
-                </a:solidFill>
-                <a:latin typeface="Calibri"/>
-              </a:defRPr>
-            </a:pPr>
-            <a:r>
-              <a:t>Wear Parts + Service</a:t>
-            </a:r>
-          </a:p>
-        </p:txBody>
-      </p:sp>
-      <p:sp>
-        <p:nvSpPr>
-          <p:cNvPr id="32" name="TextBox 31"/>
-          <p:cNvSpPr txBox="1"/>
-          <p:nvPr/>
-        </p:nvSpPr>
-        <p:spPr>
-          <a:xfrm>
-            <a:off x="3840480" y="5779008"/>
-            <a:ext cx="3657600" cy="320040"/>
+                  <a:srgbClr val="FFFFFF"/>
+                </a:solidFill>
+                <a:latin typeface="Calibri"/>
+              </a:defRPr>
+            </a:pPr>
+            <a:r>
+              <a:t>Pedals + Adjacent</a:t>
+            </a:r>
+          </a:p>
+        </p:txBody>
+      </p:sp>
+      <p:sp>
+        <p:nvSpPr>
+          <p:cNvPr id="34" name="TextBox 33"/>
+          <p:cNvSpPr txBox="1"/>
+          <p:nvPr/>
+        </p:nvSpPr>
+        <p:spPr>
+          <a:xfrm>
+            <a:off x="3840480" y="5943600"/>
+            <a:ext cx="4114800" cy="320040"/>
           </a:xfrm>
           <a:prstGeom prst="rect">
             <a:avLst/>
@@ -4464,79 +4536,7 @@
             <a:pPr algn="l">
               <a:defRPr sz="1100" b="0">
                 <a:solidFill>
-                  <a:srgbClr val="94A3B8"/>
-                </a:solidFill>
-                <a:latin typeface="Calibri"/>
-              </a:defRPr>
-            </a:pPr>
-            <a:r>
-              <a:t>Chains, cassettes, pads, rotors</a:t>
-            </a:r>
-          </a:p>
-        </p:txBody>
-      </p:sp>
-      <p:sp>
-        <p:nvSpPr>
-          <p:cNvPr id="33" name="TextBox 32"/>
-          <p:cNvSpPr txBox="1"/>
-          <p:nvPr/>
-        </p:nvSpPr>
-        <p:spPr>
-          <a:xfrm>
-            <a:off x="731520" y="6126480"/>
-            <a:ext cx="2926080" cy="320040"/>
-          </a:xfrm>
-          <a:prstGeom prst="rect">
-            <a:avLst/>
-          </a:prstGeom>
-          <a:noFill/>
-        </p:spPr>
-        <p:txBody>
-          <a:bodyPr wrap="square">
-            <a:spAutoFit/>
-          </a:bodyPr>
-          <a:lstStyle/>
-          <a:p>
-            <a:pPr algn="l">
-              <a:defRPr sz="1200" b="1">
-                <a:solidFill>
-                  <a:srgbClr val="64748B"/>
-                </a:solidFill>
-                <a:latin typeface="Calibri"/>
-              </a:defRPr>
-            </a:pPr>
-            <a:r>
-              <a:t>Pedals + Adjacent</a:t>
-            </a:r>
-          </a:p>
-        </p:txBody>
-      </p:sp>
-      <p:sp>
-        <p:nvSpPr>
-          <p:cNvPr id="34" name="TextBox 33"/>
-          <p:cNvSpPr txBox="1"/>
-          <p:nvPr/>
-        </p:nvSpPr>
-        <p:spPr>
-          <a:xfrm>
-            <a:off x="3840480" y="6126480"/>
-            <a:ext cx="3657600" cy="320040"/>
-          </a:xfrm>
-          <a:prstGeom prst="rect">
-            <a:avLst/>
-          </a:prstGeom>
-          <a:noFill/>
-        </p:spPr>
-        <p:txBody>
-          <a:bodyPr wrap="square">
-            <a:spAutoFit/>
-          </a:bodyPr>
-          <a:lstStyle/>
-          <a:p>
-            <a:pPr algn="l">
-              <a:defRPr sz="1100" b="0">
-                <a:solidFill>
-                  <a:srgbClr val="94A3B8"/>
+                  <a:srgbClr val="767676"/>
                 </a:solidFill>
                 <a:latin typeface="Calibri"/>
               </a:defRPr>
@@ -4555,20 +4555,20 @@
         </p:nvSpPr>
         <p:spPr>
           <a:xfrm>
-            <a:off x="8138160" y="3931920"/>
-            <a:ext cx="3474720" cy="2560320"/>
+            <a:off x="8412480" y="3657600"/>
+            <a:ext cx="3200400" cy="2743200"/>
           </a:xfrm>
           <a:prstGeom prst="roundRect">
             <a:avLst>
-              <a:gd name="adj" fmla="val 5000"/>
+              <a:gd name="adj" fmla="val 4000"/>
             </a:avLst>
           </a:prstGeom>
           <a:solidFill>
-            <a:srgbClr val="16213A"/>
+            <a:srgbClr val="2A2A2C"/>
           </a:solidFill>
           <a:ln w="12700">
             <a:solidFill>
-              <a:srgbClr val="1E293B"/>
+              <a:srgbClr val="3A3A3C"/>
             </a:solidFill>
           </a:ln>
         </p:spPr>
@@ -4602,24 +4602,24 @@
         </p:nvSpPr>
         <p:spPr>
           <a:xfrm>
-            <a:off x="8412480" y="4114800"/>
-            <a:ext cx="2926080" cy="365760"/>
-          </a:xfrm>
-          <a:prstGeom prst="rect">
-            <a:avLst/>
-          </a:prstGeom>
-          <a:noFill/>
-        </p:spPr>
-        <p:txBody>
-          <a:bodyPr wrap="square">
-            <a:spAutoFit/>
-          </a:bodyPr>
-          <a:lstStyle/>
-          <a:p>
-            <a:pPr algn="l">
-              <a:defRPr sz="1600" b="1">
-                <a:solidFill>
-                  <a:srgbClr val="FBBF24"/>
+            <a:off x="8686800" y="3794760"/>
+            <a:ext cx="2743200" cy="320040"/>
+          </a:xfrm>
+          <a:prstGeom prst="rect">
+            <a:avLst/>
+          </a:prstGeom>
+          <a:noFill/>
+        </p:spPr>
+        <p:txBody>
+          <a:bodyPr wrap="square">
+            <a:spAutoFit/>
+          </a:bodyPr>
+          <a:lstStyle/>
+          <a:p>
+            <a:pPr algn="l">
+              <a:defRPr sz="1400" b="1">
+                <a:solidFill>
+                  <a:srgbClr val="E3475E"/>
                 </a:solidFill>
                 <a:latin typeface="Calibri"/>
               </a:defRPr>
@@ -4638,8 +4638,8 @@
         </p:nvSpPr>
         <p:spPr>
           <a:xfrm>
-            <a:off x="8412480" y="4526280"/>
-            <a:ext cx="2926080" cy="1783080"/>
+            <a:off x="8686800" y="4206240"/>
+            <a:ext cx="2743200" cy="2011680"/>
           </a:xfrm>
           <a:prstGeom prst="rect">
             <a:avLst/>
@@ -4654,11 +4654,11 @@
           <a:p>
             <a:pPr>
               <a:spcAft>
-                <a:spcPts val="1200"/>
+                <a:spcPts val="1100"/>
               </a:spcAft>
-              <a:defRPr sz="1200" b="0">
-                <a:solidFill>
-                  <a:srgbClr val="94A3B8"/>
+              <a:defRPr sz="1100" b="0">
+                <a:solidFill>
+                  <a:srgbClr val="D9DBD8"/>
                 </a:solidFill>
                 <a:latin typeface="Calibri"/>
               </a:defRPr>
@@ -4670,11 +4670,11 @@
           <a:p>
             <a:pPr>
               <a:spcAft>
-                <a:spcPts val="1200"/>
+                <a:spcPts val="1100"/>
               </a:spcAft>
-              <a:defRPr sz="1200" b="0">
-                <a:solidFill>
-                  <a:srgbClr val="94A3B8"/>
+              <a:defRPr sz="1100" b="0">
+                <a:solidFill>
+                  <a:srgbClr val="D9DBD8"/>
                 </a:solidFill>
                 <a:latin typeface="Calibri"/>
               </a:defRPr>
@@ -4686,17 +4686,17 @@
           <a:p>
             <a:pPr>
               <a:spcAft>
-                <a:spcPts val="1200"/>
+                <a:spcPts val="1100"/>
               </a:spcAft>
-              <a:defRPr sz="1200" b="0">
-                <a:solidFill>
-                  <a:srgbClr val="94A3B8"/>
-                </a:solidFill>
-                <a:latin typeface="Calibri"/>
-              </a:defRPr>
-            </a:pPr>
-            <a:r>
-              <a:t>•  microSHIFT: value mechanical alternative</a:t>
+              <a:defRPr sz="1100" b="0">
+                <a:solidFill>
+                  <a:srgbClr val="D9DBD8"/>
+                </a:solidFill>
+                <a:latin typeface="Calibri"/>
+              </a:defRPr>
+            </a:pPr>
+            <a:r>
+              <a:t>•  microSHIFT: value mechanical</a:t>
             </a:r>
           </a:p>
         </p:txBody>
@@ -4715,7 +4715,7 @@
     <p:bg>
       <p:bgPr>
         <a:solidFill>
-          <a:srgbClr val="0F172A"/>
+          <a:srgbClr val="1C1C1E"/>
         </a:solidFill>
         <a:effectLst/>
       </p:bgPr>
@@ -4736,29 +4736,29 @@
         <p:spPr>
           <a:xfrm>
             <a:off x="731520" y="274320"/>
-            <a:ext cx="5486400" cy="274320"/>
-          </a:xfrm>
-          <a:prstGeom prst="rect">
-            <a:avLst/>
-          </a:prstGeom>
-          <a:noFill/>
-        </p:spPr>
-        <p:txBody>
-          <a:bodyPr wrap="square">
-            <a:spAutoFit/>
-          </a:bodyPr>
-          <a:lstStyle/>
-          <a:p>
-            <a:pPr algn="l">
-              <a:defRPr sz="1200" b="1">
-                <a:solidFill>
-                  <a:srgbClr val="34D399"/>
-                </a:solidFill>
-                <a:latin typeface="Calibri"/>
-              </a:defRPr>
-            </a:pPr>
-            <a:r>
-              <a:t>WHAT COULD BE</a:t>
+            <a:ext cx="5486400" cy="228600"/>
+          </a:xfrm>
+          <a:prstGeom prst="rect">
+            <a:avLst/>
+          </a:prstGeom>
+          <a:noFill/>
+        </p:spPr>
+        <p:txBody>
+          <a:bodyPr wrap="square">
+            <a:spAutoFit/>
+          </a:bodyPr>
+          <a:lstStyle/>
+          <a:p>
+            <a:pPr algn="l">
+              <a:defRPr sz="1100" b="1">
+                <a:solidFill>
+                  <a:srgbClr val="E51937"/>
+                </a:solidFill>
+                <a:latin typeface="Calibri"/>
+              </a:defRPr>
+            </a:pPr>
+            <a:r>
+              <a:t>THE OPPORTUNITY</a:t>
             </a:r>
           </a:p>
         </p:txBody>
@@ -4771,8 +4771,8 @@
         </p:nvSpPr>
         <p:spPr>
           <a:xfrm>
-            <a:off x="731520" y="594360"/>
-            <a:ext cx="9144000" cy="457200"/>
+            <a:off x="731520" y="548640"/>
+            <a:ext cx="10058400" cy="457200"/>
           </a:xfrm>
           <a:prstGeom prst="rect">
             <a:avLst/>
@@ -4788,13 +4788,13 @@
             <a:pPr algn="l">
               <a:defRPr sz="3200" b="1">
                 <a:solidFill>
-                  <a:srgbClr val="F8FAFC"/>
-                </a:solidFill>
-                <a:latin typeface="Calibri"/>
-              </a:defRPr>
-            </a:pPr>
-            <a:r>
-              <a:t>Where AI Fits Across SRAM</a:t>
+                  <a:srgbClr val="FFFFFF"/>
+                </a:solidFill>
+                <a:latin typeface="Calibri"/>
+              </a:defRPr>
+            </a:pPr>
+            <a:r>
+              <a:t>AI Initiatives Across SRAM</a:t>
             </a:r>
           </a:p>
         </p:txBody>
@@ -4807,14 +4807,14 @@
         </p:nvSpPr>
         <p:spPr>
           <a:xfrm>
-            <a:off x="731520" y="1097280"/>
-            <a:ext cx="1097280" cy="38100"/>
+            <a:off x="731520" y="1051560"/>
+            <a:ext cx="914400" cy="25400"/>
           </a:xfrm>
           <a:prstGeom prst="rect">
             <a:avLst/>
           </a:prstGeom>
           <a:solidFill>
-            <a:srgbClr val="34D399"/>
+            <a:srgbClr val="E51937"/>
           </a:solidFill>
           <a:ln>
             <a:noFill/>
@@ -4850,7 +4850,7 @@
         </p:nvSpPr>
         <p:spPr>
           <a:xfrm>
-            <a:off x="731520" y="1325880"/>
+            <a:off x="731520" y="1280160"/>
             <a:ext cx="10058400" cy="457200"/>
           </a:xfrm>
           <a:prstGeom prst="rect">
@@ -4867,13 +4867,13 @@
             <a:pPr algn="l">
               <a:defRPr sz="1400" b="0">
                 <a:solidFill>
-                  <a:srgbClr val="94A3B8"/>
-                </a:solidFill>
-                <a:latin typeface="Calibri"/>
-              </a:defRPr>
-            </a:pPr>
-            <a:r>
-              <a:t>Four phases ordered by complexity, readiness, and time to return. Start bounded. Scale after proof.</a:t>
+                  <a:srgbClr val="D9DBD8"/>
+                </a:solidFill>
+                <a:latin typeface="Calibri"/>
+              </a:defRPr>
+            </a:pPr>
+            <a:r>
+              <a:t>Every function at SRAM has AI potential. The map below shows initiatives by business area and the specific problem each one solves.</a:t>
             </a:r>
           </a:p>
         </p:txBody>
@@ -4886,20 +4886,20 @@
         </p:nvSpPr>
         <p:spPr>
           <a:xfrm>
-            <a:off x="731520" y="2103120"/>
-            <a:ext cx="2606040" cy="4114800"/>
+            <a:off x="731520" y="2011680"/>
+            <a:ext cx="3520440" cy="960120"/>
           </a:xfrm>
           <a:prstGeom prst="roundRect">
             <a:avLst>
-              <a:gd name="adj" fmla="val 3000"/>
+              <a:gd name="adj" fmla="val 4000"/>
             </a:avLst>
           </a:prstGeom>
           <a:solidFill>
-            <a:srgbClr val="16213A"/>
+            <a:srgbClr val="2A2A2C"/>
           </a:solidFill>
           <a:ln w="12700">
             <a:solidFill>
-              <a:srgbClr val="1E293B"/>
+              <a:srgbClr val="3A3A3C"/>
             </a:solidFill>
           </a:ln>
         </p:spPr>
@@ -4933,30 +4933,30 @@
         </p:nvSpPr>
         <p:spPr>
           <a:xfrm>
-            <a:off x="914400" y="2240280"/>
-            <a:ext cx="1097280" cy="274320"/>
-          </a:xfrm>
-          <a:prstGeom prst="rect">
-            <a:avLst/>
-          </a:prstGeom>
-          <a:noFill/>
-        </p:spPr>
-        <p:txBody>
-          <a:bodyPr wrap="square">
-            <a:spAutoFit/>
-          </a:bodyPr>
-          <a:lstStyle/>
-          <a:p>
-            <a:pPr algn="l">
-              <a:defRPr sz="1100" b="1">
-                <a:solidFill>
-                  <a:srgbClr val="34D399"/>
-                </a:solidFill>
-                <a:latin typeface="Calibri"/>
-              </a:defRPr>
-            </a:pPr>
-            <a:r>
-              <a:t>PHASE 1</a:t>
+            <a:off x="914400" y="2084832"/>
+            <a:ext cx="1371600" cy="182880"/>
+          </a:xfrm>
+          <a:prstGeom prst="rect">
+            <a:avLst/>
+          </a:prstGeom>
+          <a:noFill/>
+        </p:spPr>
+        <p:txBody>
+          <a:bodyPr wrap="square">
+            <a:spAutoFit/>
+          </a:bodyPr>
+          <a:lstStyle/>
+          <a:p>
+            <a:pPr algn="l">
+              <a:defRPr sz="800" b="1">
+                <a:solidFill>
+                  <a:srgbClr val="E51937"/>
+                </a:solidFill>
+                <a:latin typeface="Calibri"/>
+              </a:defRPr>
+            </a:pPr>
+            <a:r>
+              <a:t>SUPPORT</a:t>
             </a:r>
           </a:p>
         </p:txBody>
@@ -4969,89 +4969,93 @@
         </p:nvSpPr>
         <p:spPr>
           <a:xfrm>
-            <a:off x="2103120" y="2240280"/>
-            <a:ext cx="1097280" cy="274320"/>
-          </a:xfrm>
-          <a:prstGeom prst="rect">
-            <a:avLst/>
-          </a:prstGeom>
-          <a:noFill/>
-        </p:spPr>
-        <p:txBody>
-          <a:bodyPr wrap="square">
-            <a:spAutoFit/>
-          </a:bodyPr>
-          <a:lstStyle/>
-          <a:p>
-            <a:pPr algn="r">
+            <a:off x="914400" y="2286000"/>
+            <a:ext cx="3154680" cy="274320"/>
+          </a:xfrm>
+          <a:prstGeom prst="rect">
+            <a:avLst/>
+          </a:prstGeom>
+          <a:noFill/>
+        </p:spPr>
+        <p:txBody>
+          <a:bodyPr wrap="square">
+            <a:spAutoFit/>
+          </a:bodyPr>
+          <a:lstStyle/>
+          <a:p>
+            <a:pPr algn="l">
+              <a:defRPr sz="1300" b="1">
+                <a:solidFill>
+                  <a:srgbClr val="FFFFFF"/>
+                </a:solidFill>
+                <a:latin typeface="Calibri"/>
+              </a:defRPr>
+            </a:pPr>
+            <a:r>
+              <a:t>AI Support Agent</a:t>
+            </a:r>
+          </a:p>
+        </p:txBody>
+      </p:sp>
+      <p:sp>
+        <p:nvSpPr>
+          <p:cNvPr id="9" name="TextBox 8"/>
+          <p:cNvSpPr txBox="1"/>
+          <p:nvPr/>
+        </p:nvSpPr>
+        <p:spPr>
+          <a:xfrm>
+            <a:off x="914400" y="2606040"/>
+            <a:ext cx="3154680" cy="320040"/>
+          </a:xfrm>
+          <a:prstGeom prst="rect">
+            <a:avLst/>
+          </a:prstGeom>
+          <a:noFill/>
+        </p:spPr>
+        <p:txBody>
+          <a:bodyPr wrap="square">
+            <a:spAutoFit/>
+          </a:bodyPr>
+          <a:lstStyle/>
+          <a:p>
+            <a:pPr algn="l">
               <a:defRPr sz="1000" b="0">
                 <a:solidFill>
-                  <a:srgbClr val="64748B"/>
-                </a:solidFill>
-                <a:latin typeface="Calibri"/>
-              </a:defRPr>
-            </a:pPr>
-            <a:r>
-              <a:t>0-90 Days</a:t>
-            </a:r>
-          </a:p>
-        </p:txBody>
-      </p:sp>
-      <p:sp>
-        <p:nvSpPr>
-          <p:cNvPr id="9" name="TextBox 8"/>
-          <p:cNvSpPr txBox="1"/>
-          <p:nvPr/>
-        </p:nvSpPr>
-        <p:spPr>
-          <a:xfrm>
-            <a:off x="914400" y="2560320"/>
-            <a:ext cx="2240280" cy="457200"/>
-          </a:xfrm>
-          <a:prstGeom prst="rect">
-            <a:avLst/>
-          </a:prstGeom>
-          <a:noFill/>
-        </p:spPr>
-        <p:txBody>
-          <a:bodyPr wrap="square">
-            <a:spAutoFit/>
-          </a:bodyPr>
-          <a:lstStyle/>
-          <a:p>
-            <a:pPr algn="l">
-              <a:defRPr sz="1800" b="1">
-                <a:solidFill>
-                  <a:srgbClr val="F8FAFC"/>
-                </a:solidFill>
-                <a:latin typeface="Calibri"/>
-              </a:defRPr>
-            </a:pPr>
-            <a:r>
-              <a:t>Immediate Wins</a:t>
-            </a:r>
-          </a:p>
-        </p:txBody>
-      </p:sp>
-      <p:sp>
-        <p:nvSpPr>
-          <p:cNvPr id="10" name="Rectangle 9"/>
+                  <a:srgbClr val="767676"/>
+                </a:solidFill>
+                <a:latin typeface="Calibri"/>
+              </a:defRPr>
+            </a:pPr>
+            <a:r>
+              <a:t>70% of dealer questions are repetitive</a:t>
+            </a:r>
+          </a:p>
+        </p:txBody>
+      </p:sp>
+      <p:sp>
+        <p:nvSpPr>
+          <p:cNvPr id="10" name="Rounded Rectangle 9"/>
           <p:cNvSpPr/>
           <p:nvPr/>
         </p:nvSpPr>
         <p:spPr>
           <a:xfrm>
-            <a:off x="914400" y="3017520"/>
-            <a:ext cx="731520" cy="38100"/>
-          </a:xfrm>
-          <a:prstGeom prst="rect">
-            <a:avLst/>
+            <a:off x="4480559" y="2011680"/>
+            <a:ext cx="3520440" cy="960120"/>
+          </a:xfrm>
+          <a:prstGeom prst="roundRect">
+            <a:avLst>
+              <a:gd name="adj" fmla="val 4000"/>
+            </a:avLst>
           </a:prstGeom>
           <a:solidFill>
-            <a:srgbClr val="34D399"/>
+            <a:srgbClr val="2A2A2C"/>
           </a:solidFill>
-          <a:ln>
-            <a:noFill/>
+          <a:ln w="12700">
+            <a:solidFill>
+              <a:srgbClr val="3A3A3C"/>
+            </a:solidFill>
           </a:ln>
         </p:spPr>
         <p:style>
@@ -5084,65 +5088,30 @@
         </p:nvSpPr>
         <p:spPr>
           <a:xfrm>
-            <a:off x="914400" y="3200400"/>
-            <a:ext cx="2240280" cy="2011680"/>
-          </a:xfrm>
-          <a:prstGeom prst="rect">
-            <a:avLst/>
-          </a:prstGeom>
-          <a:noFill/>
-        </p:spPr>
-        <p:txBody>
-          <a:bodyPr wrap="square">
-            <a:spAutoFit/>
-          </a:bodyPr>
-          <a:lstStyle/>
-          <a:p>
-            <a:pPr>
-              <a:spcAft>
-                <a:spcPts val="1440"/>
-              </a:spcAft>
-              <a:defRPr sz="1200" b="0">
-                <a:solidFill>
-                  <a:srgbClr val="94A3B8"/>
-                </a:solidFill>
-                <a:latin typeface="Calibri"/>
-              </a:defRPr>
-            </a:pPr>
-            <a:r>
-              <a:t>•  AI coding tools for engineering</a:t>
-            </a:r>
-          </a:p>
-          <a:p>
-            <a:pPr>
-              <a:spcAft>
-                <a:spcPts val="1440"/>
-              </a:spcAft>
-              <a:defRPr sz="1200" b="0">
-                <a:solidFill>
-                  <a:srgbClr val="94A3B8"/>
-                </a:solidFill>
-                <a:latin typeface="Calibri"/>
-              </a:defRPr>
-            </a:pPr>
-            <a:r>
-              <a:t>•  Support + warranty automation</a:t>
-            </a:r>
-          </a:p>
-          <a:p>
-            <a:pPr>
-              <a:spcAft>
-                <a:spcPts val="1440"/>
-              </a:spcAft>
-              <a:defRPr sz="1200" b="0">
-                <a:solidFill>
-                  <a:srgbClr val="94A3B8"/>
-                </a:solidFill>
-                <a:latin typeface="Calibri"/>
-              </a:defRPr>
-            </a:pPr>
-            <a:r>
-              <a:t>•  Individual productivity (notes, email)</a:t>
+            <a:off x="4663439" y="2084832"/>
+            <a:ext cx="1371600" cy="182880"/>
+          </a:xfrm>
+          <a:prstGeom prst="rect">
+            <a:avLst/>
+          </a:prstGeom>
+          <a:noFill/>
+        </p:spPr>
+        <p:txBody>
+          <a:bodyPr wrap="square">
+            <a:spAutoFit/>
+          </a:bodyPr>
+          <a:lstStyle/>
+          <a:p>
+            <a:pPr algn="l">
+              <a:defRPr sz="800" b="1">
+                <a:solidFill>
+                  <a:srgbClr val="E51937"/>
+                </a:solidFill>
+                <a:latin typeface="Calibri"/>
+              </a:defRPr>
+            </a:pPr>
+            <a:r>
+              <a:t>SUPPORT</a:t>
             </a:r>
           </a:p>
         </p:txBody>
@@ -5155,56 +5124,92 @@
         </p:nvSpPr>
         <p:spPr>
           <a:xfrm>
-            <a:off x="914400" y="5303520"/>
-            <a:ext cx="2240280" cy="457200"/>
-          </a:xfrm>
-          <a:prstGeom prst="rect">
-            <a:avLst/>
-          </a:prstGeom>
-          <a:noFill/>
-        </p:spPr>
-        <p:txBody>
-          <a:bodyPr wrap="square">
-            <a:spAutoFit/>
-          </a:bodyPr>
-          <a:lstStyle/>
-          <a:p>
-            <a:pPr algn="l">
-              <a:defRPr sz="900" b="0">
-                <a:solidFill>
-                  <a:srgbClr val="64748B"/>
-                </a:solidFill>
-                <a:latin typeface="Calibri"/>
-              </a:defRPr>
-            </a:pPr>
-            <a:r>
-              <a:t>Low complexity, high visibility</a:t>
-            </a:r>
-          </a:p>
-        </p:txBody>
-      </p:sp>
-      <p:sp>
-        <p:nvSpPr>
-          <p:cNvPr id="13" name="Rounded Rectangle 12"/>
+            <a:off x="4663439" y="2286000"/>
+            <a:ext cx="3154680" cy="274320"/>
+          </a:xfrm>
+          <a:prstGeom prst="rect">
+            <a:avLst/>
+          </a:prstGeom>
+          <a:noFill/>
+        </p:spPr>
+        <p:txBody>
+          <a:bodyPr wrap="square">
+            <a:spAutoFit/>
+          </a:bodyPr>
+          <a:lstStyle/>
+          <a:p>
+            <a:pPr algn="l">
+              <a:defRPr sz="1300" b="1">
+                <a:solidFill>
+                  <a:srgbClr val="FFFFFF"/>
+                </a:solidFill>
+                <a:latin typeface="Calibri"/>
+              </a:defRPr>
+            </a:pPr>
+            <a:r>
+              <a:t>Warranty Automation</a:t>
+            </a:r>
+          </a:p>
+        </p:txBody>
+      </p:sp>
+      <p:sp>
+        <p:nvSpPr>
+          <p:cNvPr id="13" name="TextBox 12"/>
+          <p:cNvSpPr txBox="1"/>
+          <p:nvPr/>
+        </p:nvSpPr>
+        <p:spPr>
+          <a:xfrm>
+            <a:off x="4663439" y="2606040"/>
+            <a:ext cx="3154680" cy="320040"/>
+          </a:xfrm>
+          <a:prstGeom prst="rect">
+            <a:avLst/>
+          </a:prstGeom>
+          <a:noFill/>
+        </p:spPr>
+        <p:txBody>
+          <a:bodyPr wrap="square">
+            <a:spAutoFit/>
+          </a:bodyPr>
+          <a:lstStyle/>
+          <a:p>
+            <a:pPr algn="l">
+              <a:defRPr sz="1000" b="0">
+                <a:solidFill>
+                  <a:srgbClr val="767676"/>
+                </a:solidFill>
+                <a:latin typeface="Calibri"/>
+              </a:defRPr>
+            </a:pPr>
+            <a:r>
+              <a:t>Fraudulent and mis-filed claims cost time</a:t>
+            </a:r>
+          </a:p>
+        </p:txBody>
+      </p:sp>
+      <p:sp>
+        <p:nvSpPr>
+          <p:cNvPr id="14" name="Rounded Rectangle 13"/>
           <p:cNvSpPr/>
           <p:nvPr/>
         </p:nvSpPr>
         <p:spPr>
           <a:xfrm>
-            <a:off x="3566160" y="2103120"/>
-            <a:ext cx="2606040" cy="4114800"/>
+            <a:off x="8229599" y="2011680"/>
+            <a:ext cx="3520440" cy="960120"/>
           </a:xfrm>
           <a:prstGeom prst="roundRect">
             <a:avLst>
-              <a:gd name="adj" fmla="val 3000"/>
+              <a:gd name="adj" fmla="val 4000"/>
             </a:avLst>
           </a:prstGeom>
           <a:solidFill>
-            <a:srgbClr val="16213A"/>
+            <a:srgbClr val="2A2A2C"/>
           </a:solidFill>
           <a:ln w="12700">
             <a:solidFill>
-              <a:srgbClr val="1E293B"/>
+              <a:srgbClr val="3A3A3C"/>
             </a:solidFill>
           </a:ln>
         </p:spPr>
@@ -5232,131 +5237,135 @@
       </p:sp>
       <p:sp>
         <p:nvSpPr>
-          <p:cNvPr id="14" name="TextBox 13"/>
-          <p:cNvSpPr txBox="1"/>
-          <p:nvPr/>
-        </p:nvSpPr>
-        <p:spPr>
-          <a:xfrm>
-            <a:off x="3749040" y="2240280"/>
-            <a:ext cx="1097280" cy="274320"/>
-          </a:xfrm>
-          <a:prstGeom prst="rect">
-            <a:avLst/>
-          </a:prstGeom>
-          <a:noFill/>
-        </p:spPr>
-        <p:txBody>
-          <a:bodyPr wrap="square">
-            <a:spAutoFit/>
-          </a:bodyPr>
-          <a:lstStyle/>
-          <a:p>
-            <a:pPr algn="l">
-              <a:defRPr sz="1100" b="1">
-                <a:solidFill>
-                  <a:srgbClr val="389FF5"/>
-                </a:solidFill>
-                <a:latin typeface="Calibri"/>
-              </a:defRPr>
-            </a:pPr>
-            <a:r>
-              <a:t>PHASE 2</a:t>
-            </a:r>
-          </a:p>
-        </p:txBody>
-      </p:sp>
-      <p:sp>
-        <p:nvSpPr>
           <p:cNvPr id="15" name="TextBox 14"/>
           <p:cNvSpPr txBox="1"/>
           <p:nvPr/>
         </p:nvSpPr>
         <p:spPr>
           <a:xfrm>
-            <a:off x="4937760" y="2240280"/>
-            <a:ext cx="1097280" cy="274320"/>
-          </a:xfrm>
-          <a:prstGeom prst="rect">
-            <a:avLst/>
-          </a:prstGeom>
-          <a:noFill/>
-        </p:spPr>
-        <p:txBody>
-          <a:bodyPr wrap="square">
-            <a:spAutoFit/>
-          </a:bodyPr>
-          <a:lstStyle/>
-          <a:p>
-            <a:pPr algn="r">
+            <a:off x="8412479" y="2084832"/>
+            <a:ext cx="1371600" cy="182880"/>
+          </a:xfrm>
+          <a:prstGeom prst="rect">
+            <a:avLst/>
+          </a:prstGeom>
+          <a:noFill/>
+        </p:spPr>
+        <p:txBody>
+          <a:bodyPr wrap="square">
+            <a:spAutoFit/>
+          </a:bodyPr>
+          <a:lstStyle/>
+          <a:p>
+            <a:pPr algn="l">
+              <a:defRPr sz="800" b="1">
+                <a:solidFill>
+                  <a:srgbClr val="E51937"/>
+                </a:solidFill>
+                <a:latin typeface="Calibri"/>
+              </a:defRPr>
+            </a:pPr>
+            <a:r>
+              <a:t>SUPPORT</a:t>
+            </a:r>
+          </a:p>
+        </p:txBody>
+      </p:sp>
+      <p:sp>
+        <p:nvSpPr>
+          <p:cNvPr id="16" name="TextBox 15"/>
+          <p:cNvSpPr txBox="1"/>
+          <p:nvPr/>
+        </p:nvSpPr>
+        <p:spPr>
+          <a:xfrm>
+            <a:off x="8412479" y="2286000"/>
+            <a:ext cx="3154680" cy="274320"/>
+          </a:xfrm>
+          <a:prstGeom prst="rect">
+            <a:avLst/>
+          </a:prstGeom>
+          <a:noFill/>
+        </p:spPr>
+        <p:txBody>
+          <a:bodyPr wrap="square">
+            <a:spAutoFit/>
+          </a:bodyPr>
+          <a:lstStyle/>
+          <a:p>
+            <a:pPr algn="l">
+              <a:defRPr sz="1300" b="1">
+                <a:solidFill>
+                  <a:srgbClr val="FFFFFF"/>
+                </a:solidFill>
+                <a:latin typeface="Calibri"/>
+              </a:defRPr>
+            </a:pPr>
+            <a:r>
+              <a:t>Compatibility Assistant</a:t>
+            </a:r>
+          </a:p>
+        </p:txBody>
+      </p:sp>
+      <p:sp>
+        <p:nvSpPr>
+          <p:cNvPr id="17" name="TextBox 16"/>
+          <p:cNvSpPr txBox="1"/>
+          <p:nvPr/>
+        </p:nvSpPr>
+        <p:spPr>
+          <a:xfrm>
+            <a:off x="8412479" y="2606040"/>
+            <a:ext cx="3154680" cy="320040"/>
+          </a:xfrm>
+          <a:prstGeom prst="rect">
+            <a:avLst/>
+          </a:prstGeom>
+          <a:noFill/>
+        </p:spPr>
+        <p:txBody>
+          <a:bodyPr wrap="square">
+            <a:spAutoFit/>
+          </a:bodyPr>
+          <a:lstStyle/>
+          <a:p>
+            <a:pPr algn="l">
               <a:defRPr sz="1000" b="0">
                 <a:solidFill>
-                  <a:srgbClr val="64748B"/>
-                </a:solidFill>
-                <a:latin typeface="Calibri"/>
-              </a:defRPr>
-            </a:pPr>
-            <a:r>
-              <a:t>90-180 Days</a:t>
-            </a:r>
-          </a:p>
-        </p:txBody>
-      </p:sp>
-      <p:sp>
-        <p:nvSpPr>
-          <p:cNvPr id="16" name="TextBox 15"/>
-          <p:cNvSpPr txBox="1"/>
-          <p:nvPr/>
-        </p:nvSpPr>
-        <p:spPr>
-          <a:xfrm>
-            <a:off x="3749040" y="2560320"/>
-            <a:ext cx="2240280" cy="457200"/>
-          </a:xfrm>
-          <a:prstGeom prst="rect">
-            <a:avLst/>
-          </a:prstGeom>
-          <a:noFill/>
-        </p:spPr>
-        <p:txBody>
-          <a:bodyPr wrap="square">
-            <a:spAutoFit/>
-          </a:bodyPr>
-          <a:lstStyle/>
-          <a:p>
-            <a:pPr algn="l">
-              <a:defRPr sz="1800" b="1">
-                <a:solidFill>
-                  <a:srgbClr val="F8FAFC"/>
-                </a:solidFill>
-                <a:latin typeface="Calibri"/>
-              </a:defRPr>
-            </a:pPr>
-            <a:r>
-              <a:t>Data Foundation</a:t>
-            </a:r>
-          </a:p>
-        </p:txBody>
-      </p:sp>
-      <p:sp>
-        <p:nvSpPr>
-          <p:cNvPr id="17" name="Rectangle 16"/>
+                  <a:srgbClr val="767676"/>
+                </a:solidFill>
+                <a:latin typeface="Calibri"/>
+              </a:defRPr>
+            </a:pPr>
+            <a:r>
+              <a:t>Riders get wrong parts, return them</a:t>
+            </a:r>
+          </a:p>
+        </p:txBody>
+      </p:sp>
+      <p:sp>
+        <p:nvSpPr>
+          <p:cNvPr id="18" name="Rounded Rectangle 17"/>
           <p:cNvSpPr/>
           <p:nvPr/>
         </p:nvSpPr>
         <p:spPr>
           <a:xfrm>
-            <a:off x="3749040" y="3017520"/>
-            <a:ext cx="731520" cy="38100"/>
-          </a:xfrm>
-          <a:prstGeom prst="rect">
-            <a:avLst/>
+            <a:off x="731520" y="3154680"/>
+            <a:ext cx="3520440" cy="960120"/>
+          </a:xfrm>
+          <a:prstGeom prst="roundRect">
+            <a:avLst>
+              <a:gd name="adj" fmla="val 4000"/>
+            </a:avLst>
           </a:prstGeom>
           <a:solidFill>
-            <a:srgbClr val="389FF5"/>
+            <a:srgbClr val="2A2A2C"/>
           </a:solidFill>
-          <a:ln>
-            <a:noFill/>
+          <a:ln w="12700">
+            <a:solidFill>
+              <a:srgbClr val="3A3A3C"/>
+            </a:solidFill>
           </a:ln>
         </p:spPr>
         <p:style>
@@ -5383,133 +5392,134 @@
       </p:sp>
       <p:sp>
         <p:nvSpPr>
-          <p:cNvPr id="18" name="TextBox 17"/>
-          <p:cNvSpPr txBox="1"/>
-          <p:nvPr/>
-        </p:nvSpPr>
-        <p:spPr>
-          <a:xfrm>
-            <a:off x="3749040" y="3200400"/>
-            <a:ext cx="2240280" cy="2011680"/>
-          </a:xfrm>
-          <a:prstGeom prst="rect">
-            <a:avLst/>
-          </a:prstGeom>
-          <a:noFill/>
-        </p:spPr>
-        <p:txBody>
-          <a:bodyPr wrap="square">
-            <a:spAutoFit/>
-          </a:bodyPr>
-          <a:lstStyle/>
-          <a:p>
-            <a:pPr>
-              <a:spcAft>
-                <a:spcPts val="1440"/>
-              </a:spcAft>
-              <a:defRPr sz="1200" b="0">
-                <a:solidFill>
-                  <a:srgbClr val="94A3B8"/>
-                </a:solidFill>
-                <a:latin typeface="Calibri"/>
-              </a:defRPr>
-            </a:pPr>
-            <a:r>
-              <a:t>•  Unified data layer (no ERP today)</a:t>
-            </a:r>
-          </a:p>
-          <a:p>
-            <a:pPr>
-              <a:spcAft>
-                <a:spcPts val="1440"/>
-              </a:spcAft>
-              <a:defRPr sz="1200" b="0">
-                <a:solidFill>
-                  <a:srgbClr val="94A3B8"/>
-                </a:solidFill>
-                <a:latin typeface="Calibri"/>
-              </a:defRPr>
-            </a:pPr>
-            <a:r>
-              <a:t>•  Demand forecasting</a:t>
-            </a:r>
-          </a:p>
-          <a:p>
-            <a:pPr>
-              <a:spcAft>
-                <a:spcPts val="1440"/>
-              </a:spcAft>
-              <a:defRPr sz="1200" b="0">
-                <a:solidFill>
-                  <a:srgbClr val="94A3B8"/>
-                </a:solidFill>
-                <a:latin typeface="Calibri"/>
-              </a:defRPr>
-            </a:pPr>
-            <a:r>
-              <a:t>•  Customer analytics (Shopify + telemetry)</a:t>
-            </a:r>
-          </a:p>
-        </p:txBody>
-      </p:sp>
-      <p:sp>
-        <p:nvSpPr>
           <p:cNvPr id="19" name="TextBox 18"/>
           <p:cNvSpPr txBox="1"/>
           <p:nvPr/>
         </p:nvSpPr>
         <p:spPr>
           <a:xfrm>
-            <a:off x="3749040" y="5303520"/>
-            <a:ext cx="2240280" cy="457200"/>
-          </a:xfrm>
-          <a:prstGeom prst="rect">
-            <a:avLst/>
-          </a:prstGeom>
-          <a:noFill/>
-        </p:spPr>
-        <p:txBody>
-          <a:bodyPr wrap="square">
-            <a:spAutoFit/>
-          </a:bodyPr>
-          <a:lstStyle/>
-          <a:p>
-            <a:pPr algn="l">
-              <a:defRPr sz="900" b="0">
-                <a:solidFill>
-                  <a:srgbClr val="64748B"/>
-                </a:solidFill>
-                <a:latin typeface="Calibri"/>
-              </a:defRPr>
-            </a:pPr>
-            <a:r>
-              <a:t>Requires data infrastructure</a:t>
-            </a:r>
-          </a:p>
-        </p:txBody>
-      </p:sp>
-      <p:sp>
-        <p:nvSpPr>
-          <p:cNvPr id="20" name="Rounded Rectangle 19"/>
+            <a:off x="914400" y="3227832"/>
+            <a:ext cx="1371600" cy="182880"/>
+          </a:xfrm>
+          <a:prstGeom prst="rect">
+            <a:avLst/>
+          </a:prstGeom>
+          <a:noFill/>
+        </p:spPr>
+        <p:txBody>
+          <a:bodyPr wrap="square">
+            <a:spAutoFit/>
+          </a:bodyPr>
+          <a:lstStyle/>
+          <a:p>
+            <a:pPr algn="l">
+              <a:defRPr sz="800" b="1">
+                <a:solidFill>
+                  <a:srgbClr val="E51937"/>
+                </a:solidFill>
+                <a:latin typeface="Calibri"/>
+              </a:defRPr>
+            </a:pPr>
+            <a:r>
+              <a:t>SUPPLY CHAIN</a:t>
+            </a:r>
+          </a:p>
+        </p:txBody>
+      </p:sp>
+      <p:sp>
+        <p:nvSpPr>
+          <p:cNvPr id="20" name="TextBox 19"/>
+          <p:cNvSpPr txBox="1"/>
+          <p:nvPr/>
+        </p:nvSpPr>
+        <p:spPr>
+          <a:xfrm>
+            <a:off x="914400" y="3429000"/>
+            <a:ext cx="3154680" cy="274320"/>
+          </a:xfrm>
+          <a:prstGeom prst="rect">
+            <a:avLst/>
+          </a:prstGeom>
+          <a:noFill/>
+        </p:spPr>
+        <p:txBody>
+          <a:bodyPr wrap="square">
+            <a:spAutoFit/>
+          </a:bodyPr>
+          <a:lstStyle/>
+          <a:p>
+            <a:pPr algn="l">
+              <a:defRPr sz="1300" b="1">
+                <a:solidFill>
+                  <a:srgbClr val="FFFFFF"/>
+                </a:solidFill>
+                <a:latin typeface="Calibri"/>
+              </a:defRPr>
+            </a:pPr>
+            <a:r>
+              <a:t>Demand Forecasting</a:t>
+            </a:r>
+          </a:p>
+        </p:txBody>
+      </p:sp>
+      <p:sp>
+        <p:nvSpPr>
+          <p:cNvPr id="21" name="TextBox 20"/>
+          <p:cNvSpPr txBox="1"/>
+          <p:nvPr/>
+        </p:nvSpPr>
+        <p:spPr>
+          <a:xfrm>
+            <a:off x="914400" y="3749040"/>
+            <a:ext cx="3154680" cy="320040"/>
+          </a:xfrm>
+          <a:prstGeom prst="rect">
+            <a:avLst/>
+          </a:prstGeom>
+          <a:noFill/>
+        </p:spPr>
+        <p:txBody>
+          <a:bodyPr wrap="square">
+            <a:spAutoFit/>
+          </a:bodyPr>
+          <a:lstStyle/>
+          <a:p>
+            <a:pPr algn="l">
+              <a:defRPr sz="1000" b="0">
+                <a:solidFill>
+                  <a:srgbClr val="767676"/>
+                </a:solidFill>
+                <a:latin typeface="Calibri"/>
+              </a:defRPr>
+            </a:pPr>
+            <a:r>
+              <a:t>No forecasting system exists today</a:t>
+            </a:r>
+          </a:p>
+        </p:txBody>
+      </p:sp>
+      <p:sp>
+        <p:nvSpPr>
+          <p:cNvPr id="22" name="Rounded Rectangle 21"/>
           <p:cNvSpPr/>
           <p:nvPr/>
         </p:nvSpPr>
         <p:spPr>
           <a:xfrm>
-            <a:off x="6400800" y="2103120"/>
-            <a:ext cx="2606040" cy="4114800"/>
+            <a:off x="4480559" y="3154680"/>
+            <a:ext cx="3520440" cy="960120"/>
           </a:xfrm>
           <a:prstGeom prst="roundRect">
             <a:avLst>
-              <a:gd name="adj" fmla="val 3000"/>
+              <a:gd name="adj" fmla="val 4000"/>
             </a:avLst>
           </a:prstGeom>
           <a:solidFill>
-            <a:srgbClr val="16213A"/>
+            <a:srgbClr val="2A2A2C"/>
           </a:solidFill>
           <a:ln w="12700">
             <a:solidFill>
-              <a:srgbClr val="1E293B"/>
+              <a:srgbClr val="3A3A3C"/>
             </a:solidFill>
           </a:ln>
         </p:spPr>
@@ -5537,131 +5547,135 @@
       </p:sp>
       <p:sp>
         <p:nvSpPr>
-          <p:cNvPr id="21" name="TextBox 20"/>
-          <p:cNvSpPr txBox="1"/>
-          <p:nvPr/>
-        </p:nvSpPr>
-        <p:spPr>
-          <a:xfrm>
-            <a:off x="6583680" y="2240280"/>
-            <a:ext cx="1097280" cy="274320"/>
-          </a:xfrm>
-          <a:prstGeom prst="rect">
-            <a:avLst/>
-          </a:prstGeom>
-          <a:noFill/>
-        </p:spPr>
-        <p:txBody>
-          <a:bodyPr wrap="square">
-            <a:spAutoFit/>
-          </a:bodyPr>
-          <a:lstStyle/>
-          <a:p>
-            <a:pPr algn="l">
-              <a:defRPr sz="1100" b="1">
-                <a:solidFill>
-                  <a:srgbClr val="389FF5"/>
-                </a:solidFill>
-                <a:latin typeface="Calibri"/>
-              </a:defRPr>
-            </a:pPr>
-            <a:r>
-              <a:t>PHASE 3</a:t>
-            </a:r>
-          </a:p>
-        </p:txBody>
-      </p:sp>
-      <p:sp>
-        <p:nvSpPr>
-          <p:cNvPr id="22" name="TextBox 21"/>
-          <p:cNvSpPr txBox="1"/>
-          <p:nvPr/>
-        </p:nvSpPr>
-        <p:spPr>
-          <a:xfrm>
-            <a:off x="7772400" y="2240280"/>
-            <a:ext cx="1097280" cy="274320"/>
-          </a:xfrm>
-          <a:prstGeom prst="rect">
-            <a:avLst/>
-          </a:prstGeom>
-          <a:noFill/>
-        </p:spPr>
-        <p:txBody>
-          <a:bodyPr wrap="square">
-            <a:spAutoFit/>
-          </a:bodyPr>
-          <a:lstStyle/>
-          <a:p>
-            <a:pPr algn="r">
+          <p:cNvPr id="23" name="TextBox 22"/>
+          <p:cNvSpPr txBox="1"/>
+          <p:nvPr/>
+        </p:nvSpPr>
+        <p:spPr>
+          <a:xfrm>
+            <a:off x="4663439" y="3227832"/>
+            <a:ext cx="1371600" cy="182880"/>
+          </a:xfrm>
+          <a:prstGeom prst="rect">
+            <a:avLst/>
+          </a:prstGeom>
+          <a:noFill/>
+        </p:spPr>
+        <p:txBody>
+          <a:bodyPr wrap="square">
+            <a:spAutoFit/>
+          </a:bodyPr>
+          <a:lstStyle/>
+          <a:p>
+            <a:pPr algn="l">
+              <a:defRPr sz="800" b="1">
+                <a:solidFill>
+                  <a:srgbClr val="E51937"/>
+                </a:solidFill>
+                <a:latin typeface="Calibri"/>
+              </a:defRPr>
+            </a:pPr>
+            <a:r>
+              <a:t>SUPPLY CHAIN</a:t>
+            </a:r>
+          </a:p>
+        </p:txBody>
+      </p:sp>
+      <p:sp>
+        <p:nvSpPr>
+          <p:cNvPr id="24" name="TextBox 23"/>
+          <p:cNvSpPr txBox="1"/>
+          <p:nvPr/>
+        </p:nvSpPr>
+        <p:spPr>
+          <a:xfrm>
+            <a:off x="4663439" y="3429000"/>
+            <a:ext cx="3154680" cy="274320"/>
+          </a:xfrm>
+          <a:prstGeom prst="rect">
+            <a:avLst/>
+          </a:prstGeom>
+          <a:noFill/>
+        </p:spPr>
+        <p:txBody>
+          <a:bodyPr wrap="square">
+            <a:spAutoFit/>
+          </a:bodyPr>
+          <a:lstStyle/>
+          <a:p>
+            <a:pPr algn="l">
+              <a:defRPr sz="1300" b="1">
+                <a:solidFill>
+                  <a:srgbClr val="FFFFFF"/>
+                </a:solidFill>
+                <a:latin typeface="Calibri"/>
+              </a:defRPr>
+            </a:pPr>
+            <a:r>
+              <a:t>Inventory Allocation</a:t>
+            </a:r>
+          </a:p>
+        </p:txBody>
+      </p:sp>
+      <p:sp>
+        <p:nvSpPr>
+          <p:cNvPr id="25" name="TextBox 24"/>
+          <p:cNvSpPr txBox="1"/>
+          <p:nvPr/>
+        </p:nvSpPr>
+        <p:spPr>
+          <a:xfrm>
+            <a:off x="4663439" y="3749040"/>
+            <a:ext cx="3154680" cy="320040"/>
+          </a:xfrm>
+          <a:prstGeom prst="rect">
+            <a:avLst/>
+          </a:prstGeom>
+          <a:noFill/>
+        </p:spPr>
+        <p:txBody>
+          <a:bodyPr wrap="square">
+            <a:spAutoFit/>
+          </a:bodyPr>
+          <a:lstStyle/>
+          <a:p>
+            <a:pPr algn="l">
               <a:defRPr sz="1000" b="0">
                 <a:solidFill>
-                  <a:srgbClr val="64748B"/>
-                </a:solidFill>
-                <a:latin typeface="Calibri"/>
-              </a:defRPr>
-            </a:pPr>
-            <a:r>
-              <a:t>180-365 Days</a:t>
-            </a:r>
-          </a:p>
-        </p:txBody>
-      </p:sp>
-      <p:sp>
-        <p:nvSpPr>
-          <p:cNvPr id="23" name="TextBox 22"/>
-          <p:cNvSpPr txBox="1"/>
-          <p:nvPr/>
-        </p:nvSpPr>
-        <p:spPr>
-          <a:xfrm>
-            <a:off x="6583680" y="2560320"/>
-            <a:ext cx="2240280" cy="457200"/>
-          </a:xfrm>
-          <a:prstGeom prst="rect">
-            <a:avLst/>
-          </a:prstGeom>
-          <a:noFill/>
-        </p:spPr>
-        <p:txBody>
-          <a:bodyPr wrap="square">
-            <a:spAutoFit/>
-          </a:bodyPr>
-          <a:lstStyle/>
-          <a:p>
-            <a:pPr algn="l">
-              <a:defRPr sz="1800" b="1">
-                <a:solidFill>
-                  <a:srgbClr val="F8FAFC"/>
-                </a:solidFill>
-                <a:latin typeface="Calibri"/>
-              </a:defRPr>
-            </a:pPr>
-            <a:r>
-              <a:t>Revenue Acceleration</a:t>
-            </a:r>
-          </a:p>
-        </p:txBody>
-      </p:sp>
-      <p:sp>
-        <p:nvSpPr>
-          <p:cNvPr id="24" name="Rectangle 23"/>
+                  <a:srgbClr val="767676"/>
+                </a:solidFill>
+                <a:latin typeface="Calibri"/>
+              </a:defRPr>
+            </a:pPr>
+            <a:r>
+              <a:t>Stockouts and rush shipping losses</a:t>
+            </a:r>
+          </a:p>
+        </p:txBody>
+      </p:sp>
+      <p:sp>
+        <p:nvSpPr>
+          <p:cNvPr id="26" name="Rounded Rectangle 25"/>
           <p:cNvSpPr/>
           <p:nvPr/>
         </p:nvSpPr>
         <p:spPr>
           <a:xfrm>
-            <a:off x="6583680" y="3017520"/>
-            <a:ext cx="731520" cy="38100"/>
-          </a:xfrm>
-          <a:prstGeom prst="rect">
-            <a:avLst/>
+            <a:off x="8229599" y="3154680"/>
+            <a:ext cx="3520440" cy="960120"/>
+          </a:xfrm>
+          <a:prstGeom prst="roundRect">
+            <a:avLst>
+              <a:gd name="adj" fmla="val 4000"/>
+            </a:avLst>
           </a:prstGeom>
           <a:solidFill>
-            <a:srgbClr val="389FF5"/>
+            <a:srgbClr val="2A2A2C"/>
           </a:solidFill>
-          <a:ln>
-            <a:noFill/>
+          <a:ln w="12700">
+            <a:solidFill>
+              <a:srgbClr val="3A3A3C"/>
+            </a:solidFill>
           </a:ln>
         </p:spPr>
         <p:style>
@@ -5688,133 +5702,134 @@
       </p:sp>
       <p:sp>
         <p:nvSpPr>
-          <p:cNvPr id="25" name="TextBox 24"/>
-          <p:cNvSpPr txBox="1"/>
-          <p:nvPr/>
-        </p:nvSpPr>
-        <p:spPr>
-          <a:xfrm>
-            <a:off x="6583680" y="3200400"/>
-            <a:ext cx="2240280" cy="2011680"/>
-          </a:xfrm>
-          <a:prstGeom prst="rect">
-            <a:avLst/>
-          </a:prstGeom>
-          <a:noFill/>
-        </p:spPr>
-        <p:txBody>
-          <a:bodyPr wrap="square">
-            <a:spAutoFit/>
-          </a:bodyPr>
-          <a:lstStyle/>
-          <a:p>
-            <a:pPr>
-              <a:spcAft>
-                <a:spcPts val="1440"/>
-              </a:spcAft>
-              <a:defRPr sz="1200" b="0">
-                <a:solidFill>
-                  <a:srgbClr val="94A3B8"/>
-                </a:solidFill>
-                <a:latin typeface="Calibri"/>
-              </a:defRPr>
-            </a:pPr>
-            <a:r>
-              <a:t>•  OEM proposal automation</a:t>
-            </a:r>
-          </a:p>
-          <a:p>
-            <a:pPr>
-              <a:spcAft>
-                <a:spcPts val="1440"/>
-              </a:spcAft>
-              <a:defRPr sz="1200" b="0">
-                <a:solidFill>
-                  <a:srgbClr val="94A3B8"/>
-                </a:solidFill>
-                <a:latin typeface="Calibri"/>
-              </a:defRPr>
-            </a:pPr>
-            <a:r>
-              <a:t>•  Compatible part recommendations</a:t>
-            </a:r>
-          </a:p>
-          <a:p>
-            <a:pPr>
-              <a:spcAft>
-                <a:spcPts val="1440"/>
-              </a:spcAft>
-              <a:defRPr sz="1200" b="0">
-                <a:solidFill>
-                  <a:srgbClr val="94A3B8"/>
-                </a:solidFill>
-                <a:latin typeface="Calibri"/>
-              </a:defRPr>
-            </a:pPr>
-            <a:r>
-              <a:t>•  Documentation + translation</a:t>
-            </a:r>
-          </a:p>
-        </p:txBody>
-      </p:sp>
-      <p:sp>
-        <p:nvSpPr>
-          <p:cNvPr id="26" name="TextBox 25"/>
-          <p:cNvSpPr txBox="1"/>
-          <p:nvPr/>
-        </p:nvSpPr>
-        <p:spPr>
-          <a:xfrm>
-            <a:off x="6583680" y="5303520"/>
-            <a:ext cx="2240280" cy="457200"/>
-          </a:xfrm>
-          <a:prstGeom prst="rect">
-            <a:avLst/>
-          </a:prstGeom>
-          <a:noFill/>
-        </p:spPr>
-        <p:txBody>
-          <a:bodyPr wrap="square">
-            <a:spAutoFit/>
-          </a:bodyPr>
-          <a:lstStyle/>
-          <a:p>
-            <a:pPr algn="l">
-              <a:defRPr sz="900" b="0">
-                <a:solidFill>
-                  <a:srgbClr val="64748B"/>
-                </a:solidFill>
-                <a:latin typeface="Calibri"/>
-              </a:defRPr>
-            </a:pPr>
-            <a:r>
-              <a:t>Builds on Phase 2 data</a:t>
-            </a:r>
-          </a:p>
-        </p:txBody>
-      </p:sp>
-      <p:sp>
-        <p:nvSpPr>
-          <p:cNvPr id="27" name="Rounded Rectangle 26"/>
+          <p:cNvPr id="27" name="TextBox 26"/>
+          <p:cNvSpPr txBox="1"/>
+          <p:nvPr/>
+        </p:nvSpPr>
+        <p:spPr>
+          <a:xfrm>
+            <a:off x="8412479" y="3227832"/>
+            <a:ext cx="1371600" cy="182880"/>
+          </a:xfrm>
+          <a:prstGeom prst="rect">
+            <a:avLst/>
+          </a:prstGeom>
+          <a:noFill/>
+        </p:spPr>
+        <p:txBody>
+          <a:bodyPr wrap="square">
+            <a:spAutoFit/>
+          </a:bodyPr>
+          <a:lstStyle/>
+          <a:p>
+            <a:pPr algn="l">
+              <a:defRPr sz="800" b="1">
+                <a:solidFill>
+                  <a:srgbClr val="E51937"/>
+                </a:solidFill>
+                <a:latin typeface="Calibri"/>
+              </a:defRPr>
+            </a:pPr>
+            <a:r>
+              <a:t>SUPPLY CHAIN</a:t>
+            </a:r>
+          </a:p>
+        </p:txBody>
+      </p:sp>
+      <p:sp>
+        <p:nvSpPr>
+          <p:cNvPr id="28" name="TextBox 27"/>
+          <p:cNvSpPr txBox="1"/>
+          <p:nvPr/>
+        </p:nvSpPr>
+        <p:spPr>
+          <a:xfrm>
+            <a:off x="8412479" y="3429000"/>
+            <a:ext cx="3154680" cy="274320"/>
+          </a:xfrm>
+          <a:prstGeom prst="rect">
+            <a:avLst/>
+          </a:prstGeom>
+          <a:noFill/>
+        </p:spPr>
+        <p:txBody>
+          <a:bodyPr wrap="square">
+            <a:spAutoFit/>
+          </a:bodyPr>
+          <a:lstStyle/>
+          <a:p>
+            <a:pPr algn="l">
+              <a:defRPr sz="1300" b="1">
+                <a:solidFill>
+                  <a:srgbClr val="FFFFFF"/>
+                </a:solidFill>
+                <a:latin typeface="Calibri"/>
+              </a:defRPr>
+            </a:pPr>
+            <a:r>
+              <a:t>Customer Analytics</a:t>
+            </a:r>
+          </a:p>
+        </p:txBody>
+      </p:sp>
+      <p:sp>
+        <p:nvSpPr>
+          <p:cNvPr id="29" name="TextBox 28"/>
+          <p:cNvSpPr txBox="1"/>
+          <p:nvPr/>
+        </p:nvSpPr>
+        <p:spPr>
+          <a:xfrm>
+            <a:off x="8412479" y="3749040"/>
+            <a:ext cx="3154680" cy="320040"/>
+          </a:xfrm>
+          <a:prstGeom prst="rect">
+            <a:avLst/>
+          </a:prstGeom>
+          <a:noFill/>
+        </p:spPr>
+        <p:txBody>
+          <a:bodyPr wrap="square">
+            <a:spAutoFit/>
+          </a:bodyPr>
+          <a:lstStyle/>
+          <a:p>
+            <a:pPr algn="l">
+              <a:defRPr sz="1000" b="0">
+                <a:solidFill>
+                  <a:srgbClr val="767676"/>
+                </a:solidFill>
+                <a:latin typeface="Calibri"/>
+              </a:defRPr>
+            </a:pPr>
+            <a:r>
+              <a:t>Shopify data is siloed, unused</a:t>
+            </a:r>
+          </a:p>
+        </p:txBody>
+      </p:sp>
+      <p:sp>
+        <p:nvSpPr>
+          <p:cNvPr id="30" name="Rounded Rectangle 29"/>
           <p:cNvSpPr/>
           <p:nvPr/>
         </p:nvSpPr>
         <p:spPr>
           <a:xfrm>
-            <a:off x="9235440" y="2103120"/>
-            <a:ext cx="2606040" cy="4114800"/>
+            <a:off x="731520" y="4297680"/>
+            <a:ext cx="3520440" cy="960120"/>
           </a:xfrm>
           <a:prstGeom prst="roundRect">
             <a:avLst>
-              <a:gd name="adj" fmla="val 3000"/>
+              <a:gd name="adj" fmla="val 4000"/>
             </a:avLst>
           </a:prstGeom>
           <a:solidFill>
-            <a:srgbClr val="16213A"/>
+            <a:srgbClr val="2A2A2C"/>
           </a:solidFill>
           <a:ln w="12700">
             <a:solidFill>
-              <a:srgbClr val="1E293B"/>
+              <a:srgbClr val="3A3A3C"/>
             </a:solidFill>
           </a:ln>
         </p:spPr>
@@ -5842,131 +5857,135 @@
       </p:sp>
       <p:sp>
         <p:nvSpPr>
-          <p:cNvPr id="28" name="TextBox 27"/>
-          <p:cNvSpPr txBox="1"/>
-          <p:nvPr/>
-        </p:nvSpPr>
-        <p:spPr>
-          <a:xfrm>
-            <a:off x="9418320" y="2240280"/>
-            <a:ext cx="1097280" cy="274320"/>
-          </a:xfrm>
-          <a:prstGeom prst="rect">
-            <a:avLst/>
-          </a:prstGeom>
-          <a:noFill/>
-        </p:spPr>
-        <p:txBody>
-          <a:bodyPr wrap="square">
-            <a:spAutoFit/>
-          </a:bodyPr>
-          <a:lstStyle/>
-          <a:p>
-            <a:pPr algn="l">
-              <a:defRPr sz="1100" b="1">
-                <a:solidFill>
-                  <a:srgbClr val="FBBF24"/>
-                </a:solidFill>
-                <a:latin typeface="Calibri"/>
-              </a:defRPr>
-            </a:pPr>
-            <a:r>
-              <a:t>PHASE 4</a:t>
-            </a:r>
-          </a:p>
-        </p:txBody>
-      </p:sp>
-      <p:sp>
-        <p:nvSpPr>
-          <p:cNvPr id="29" name="TextBox 28"/>
-          <p:cNvSpPr txBox="1"/>
-          <p:nvPr/>
-        </p:nvSpPr>
-        <p:spPr>
-          <a:xfrm>
-            <a:off x="10607040" y="2240280"/>
-            <a:ext cx="1097280" cy="274320"/>
-          </a:xfrm>
-          <a:prstGeom prst="rect">
-            <a:avLst/>
-          </a:prstGeom>
-          <a:noFill/>
-        </p:spPr>
-        <p:txBody>
-          <a:bodyPr wrap="square">
-            <a:spAutoFit/>
-          </a:bodyPr>
-          <a:lstStyle/>
-          <a:p>
-            <a:pPr algn="r">
+          <p:cNvPr id="31" name="TextBox 30"/>
+          <p:cNvSpPr txBox="1"/>
+          <p:nvPr/>
+        </p:nvSpPr>
+        <p:spPr>
+          <a:xfrm>
+            <a:off x="914400" y="4370832"/>
+            <a:ext cx="1371600" cy="182880"/>
+          </a:xfrm>
+          <a:prstGeom prst="rect">
+            <a:avLst/>
+          </a:prstGeom>
+          <a:noFill/>
+        </p:spPr>
+        <p:txBody>
+          <a:bodyPr wrap="square">
+            <a:spAutoFit/>
+          </a:bodyPr>
+          <a:lstStyle/>
+          <a:p>
+            <a:pPr algn="l">
+              <a:defRPr sz="800" b="1">
+                <a:solidFill>
+                  <a:srgbClr val="E51937"/>
+                </a:solidFill>
+                <a:latin typeface="Calibri"/>
+              </a:defRPr>
+            </a:pPr>
+            <a:r>
+              <a:t>SALES</a:t>
+            </a:r>
+          </a:p>
+        </p:txBody>
+      </p:sp>
+      <p:sp>
+        <p:nvSpPr>
+          <p:cNvPr id="32" name="TextBox 31"/>
+          <p:cNvSpPr txBox="1"/>
+          <p:nvPr/>
+        </p:nvSpPr>
+        <p:spPr>
+          <a:xfrm>
+            <a:off x="914400" y="4572000"/>
+            <a:ext cx="3154680" cy="274320"/>
+          </a:xfrm>
+          <a:prstGeom prst="rect">
+            <a:avLst/>
+          </a:prstGeom>
+          <a:noFill/>
+        </p:spPr>
+        <p:txBody>
+          <a:bodyPr wrap="square">
+            <a:spAutoFit/>
+          </a:bodyPr>
+          <a:lstStyle/>
+          <a:p>
+            <a:pPr algn="l">
+              <a:defRPr sz="1300" b="1">
+                <a:solidFill>
+                  <a:srgbClr val="FFFFFF"/>
+                </a:solidFill>
+                <a:latin typeface="Calibri"/>
+              </a:defRPr>
+            </a:pPr>
+            <a:r>
+              <a:t>OEM Proposal Automation</a:t>
+            </a:r>
+          </a:p>
+        </p:txBody>
+      </p:sp>
+      <p:sp>
+        <p:nvSpPr>
+          <p:cNvPr id="33" name="TextBox 32"/>
+          <p:cNvSpPr txBox="1"/>
+          <p:nvPr/>
+        </p:nvSpPr>
+        <p:spPr>
+          <a:xfrm>
+            <a:off x="914400" y="4892040"/>
+            <a:ext cx="3154680" cy="320040"/>
+          </a:xfrm>
+          <a:prstGeom prst="rect">
+            <a:avLst/>
+          </a:prstGeom>
+          <a:noFill/>
+        </p:spPr>
+        <p:txBody>
+          <a:bodyPr wrap="square">
+            <a:spAutoFit/>
+          </a:bodyPr>
+          <a:lstStyle/>
+          <a:p>
+            <a:pPr algn="l">
               <a:defRPr sz="1000" b="0">
                 <a:solidFill>
-                  <a:srgbClr val="64748B"/>
-                </a:solidFill>
-                <a:latin typeface="Calibri"/>
-              </a:defRPr>
-            </a:pPr>
-            <a:r>
-              <a:t>Year 2+</a:t>
-            </a:r>
-          </a:p>
-        </p:txBody>
-      </p:sp>
-      <p:sp>
-        <p:nvSpPr>
-          <p:cNvPr id="30" name="TextBox 29"/>
-          <p:cNvSpPr txBox="1"/>
-          <p:nvPr/>
-        </p:nvSpPr>
-        <p:spPr>
-          <a:xfrm>
-            <a:off x="9418320" y="2560320"/>
-            <a:ext cx="2240280" cy="457200"/>
-          </a:xfrm>
-          <a:prstGeom prst="rect">
-            <a:avLst/>
-          </a:prstGeom>
-          <a:noFill/>
-        </p:spPr>
-        <p:txBody>
-          <a:bodyPr wrap="square">
-            <a:spAutoFit/>
-          </a:bodyPr>
-          <a:lstStyle/>
-          <a:p>
-            <a:pPr algn="l">
-              <a:defRPr sz="1800" b="1">
-                <a:solidFill>
-                  <a:srgbClr val="F8FAFC"/>
-                </a:solidFill>
-                <a:latin typeface="Calibri"/>
-              </a:defRPr>
-            </a:pPr>
-            <a:r>
-              <a:t>AI-First Culture</a:t>
-            </a:r>
-          </a:p>
-        </p:txBody>
-      </p:sp>
-      <p:sp>
-        <p:nvSpPr>
-          <p:cNvPr id="31" name="Rectangle 30"/>
+                  <a:srgbClr val="767676"/>
+                </a:solidFill>
+                <a:latin typeface="Calibri"/>
+              </a:defRPr>
+            </a:pPr>
+            <a:r>
+              <a:t>Proposal cycles are slow, manual</a:t>
+            </a:r>
+          </a:p>
+        </p:txBody>
+      </p:sp>
+      <p:sp>
+        <p:nvSpPr>
+          <p:cNvPr id="34" name="Rounded Rectangle 33"/>
           <p:cNvSpPr/>
           <p:nvPr/>
         </p:nvSpPr>
         <p:spPr>
           <a:xfrm>
-            <a:off x="9418320" y="3017520"/>
-            <a:ext cx="731520" cy="38100"/>
-          </a:xfrm>
-          <a:prstGeom prst="rect">
-            <a:avLst/>
+            <a:off x="4480559" y="4297680"/>
+            <a:ext cx="3520440" cy="960120"/>
+          </a:xfrm>
+          <a:prstGeom prst="roundRect">
+            <a:avLst>
+              <a:gd name="adj" fmla="val 4000"/>
+            </a:avLst>
           </a:prstGeom>
           <a:solidFill>
-            <a:srgbClr val="FBBF24"/>
+            <a:srgbClr val="2A2A2C"/>
           </a:solidFill>
-          <a:ln>
-            <a:noFill/>
+          <a:ln w="12700">
+            <a:solidFill>
+              <a:srgbClr val="3A3A3C"/>
+            </a:solidFill>
           </a:ln>
         </p:spPr>
         <p:style>
@@ -5993,143 +6012,811 @@
       </p:sp>
       <p:sp>
         <p:nvSpPr>
-          <p:cNvPr id="32" name="TextBox 31"/>
-          <p:cNvSpPr txBox="1"/>
-          <p:nvPr/>
-        </p:nvSpPr>
-        <p:spPr>
-          <a:xfrm>
-            <a:off x="9418320" y="3200400"/>
-            <a:ext cx="2240280" cy="2011680"/>
-          </a:xfrm>
-          <a:prstGeom prst="rect">
-            <a:avLst/>
-          </a:prstGeom>
-          <a:noFill/>
-        </p:spPr>
-        <p:txBody>
-          <a:bodyPr wrap="square">
-            <a:spAutoFit/>
-          </a:bodyPr>
-          <a:lstStyle/>
-          <a:p>
-            <a:pPr>
-              <a:spcAft>
-                <a:spcPts val="1440"/>
-              </a:spcAft>
-              <a:defRPr sz="1200" b="0">
-                <a:solidFill>
-                  <a:srgbClr val="94A3B8"/>
-                </a:solidFill>
-                <a:latin typeface="Calibri"/>
-              </a:defRPr>
-            </a:pPr>
-            <a:r>
-              <a:t>•  AXS Intelligence Platform</a:t>
-            </a:r>
-          </a:p>
-          <a:p>
-            <a:pPr>
-              <a:spcAft>
-                <a:spcPts val="1440"/>
-              </a:spcAft>
-              <a:defRPr sz="1200" b="0">
-                <a:solidFill>
-                  <a:srgbClr val="94A3B8"/>
-                </a:solidFill>
-                <a:latin typeface="Calibri"/>
-              </a:defRPr>
-            </a:pPr>
-            <a:r>
-              <a:t>•  Generative design + R&amp;D</a:t>
-            </a:r>
-          </a:p>
-          <a:p>
-            <a:pPr>
-              <a:spcAft>
-                <a:spcPts val="1440"/>
-              </a:spcAft>
-              <a:defRPr sz="1200" b="0">
-                <a:solidFill>
-                  <a:srgbClr val="94A3B8"/>
-                </a:solidFill>
-                <a:latin typeface="Calibri"/>
-              </a:defRPr>
-            </a:pPr>
-            <a:r>
-              <a:t>•  AI-tuned component performance</a:t>
-            </a:r>
-          </a:p>
-        </p:txBody>
-      </p:sp>
-      <p:sp>
-        <p:nvSpPr>
-          <p:cNvPr id="33" name="TextBox 32"/>
-          <p:cNvSpPr txBox="1"/>
-          <p:nvPr/>
-        </p:nvSpPr>
-        <p:spPr>
-          <a:xfrm>
-            <a:off x="9418320" y="5303520"/>
-            <a:ext cx="2240280" cy="457200"/>
-          </a:xfrm>
-          <a:prstGeom prst="rect">
-            <a:avLst/>
-          </a:prstGeom>
-          <a:noFill/>
-        </p:spPr>
-        <p:txBody>
-          <a:bodyPr wrap="square">
-            <a:spAutoFit/>
-          </a:bodyPr>
-          <a:lstStyle/>
-          <a:p>
-            <a:pPr algn="l">
-              <a:defRPr sz="900" b="0">
-                <a:solidFill>
-                  <a:srgbClr val="64748B"/>
-                </a:solidFill>
-                <a:latin typeface="Calibri"/>
-              </a:defRPr>
-            </a:pPr>
-            <a:r>
-              <a:t>Transformation territory</a:t>
-            </a:r>
-          </a:p>
-        </p:txBody>
-      </p:sp>
-      <p:sp>
-        <p:nvSpPr>
-          <p:cNvPr id="34" name="TextBox 33"/>
-          <p:cNvSpPr txBox="1"/>
+          <p:cNvPr id="35" name="TextBox 34"/>
+          <p:cNvSpPr txBox="1"/>
+          <p:nvPr/>
+        </p:nvSpPr>
+        <p:spPr>
+          <a:xfrm>
+            <a:off x="4663439" y="4370832"/>
+            <a:ext cx="1371600" cy="182880"/>
+          </a:xfrm>
+          <a:prstGeom prst="rect">
+            <a:avLst/>
+          </a:prstGeom>
+          <a:noFill/>
+        </p:spPr>
+        <p:txBody>
+          <a:bodyPr wrap="square">
+            <a:spAutoFit/>
+          </a:bodyPr>
+          <a:lstStyle/>
+          <a:p>
+            <a:pPr algn="l">
+              <a:defRPr sz="800" b="1">
+                <a:solidFill>
+                  <a:srgbClr val="E51937"/>
+                </a:solidFill>
+                <a:latin typeface="Calibri"/>
+              </a:defRPr>
+            </a:pPr>
+            <a:r>
+              <a:t>SALES</a:t>
+            </a:r>
+          </a:p>
+        </p:txBody>
+      </p:sp>
+      <p:sp>
+        <p:nvSpPr>
+          <p:cNvPr id="36" name="TextBox 35"/>
+          <p:cNvSpPr txBox="1"/>
+          <p:nvPr/>
+        </p:nvSpPr>
+        <p:spPr>
+          <a:xfrm>
+            <a:off x="4663439" y="4572000"/>
+            <a:ext cx="3154680" cy="274320"/>
+          </a:xfrm>
+          <a:prstGeom prst="rect">
+            <a:avLst/>
+          </a:prstGeom>
+          <a:noFill/>
+        </p:spPr>
+        <p:txBody>
+          <a:bodyPr wrap="square">
+            <a:spAutoFit/>
+          </a:bodyPr>
+          <a:lstStyle/>
+          <a:p>
+            <a:pPr algn="l">
+              <a:defRPr sz="1300" b="1">
+                <a:solidFill>
+                  <a:srgbClr val="FFFFFF"/>
+                </a:solidFill>
+                <a:latin typeface="Calibri"/>
+              </a:defRPr>
+            </a:pPr>
+            <a:r>
+              <a:t>Part Recommendations</a:t>
+            </a:r>
+          </a:p>
+        </p:txBody>
+      </p:sp>
+      <p:sp>
+        <p:nvSpPr>
+          <p:cNvPr id="37" name="TextBox 36"/>
+          <p:cNvSpPr txBox="1"/>
+          <p:nvPr/>
+        </p:nvSpPr>
+        <p:spPr>
+          <a:xfrm>
+            <a:off x="4663439" y="4892040"/>
+            <a:ext cx="3154680" cy="320040"/>
+          </a:xfrm>
+          <a:prstGeom prst="rect">
+            <a:avLst/>
+          </a:prstGeom>
+          <a:noFill/>
+        </p:spPr>
+        <p:txBody>
+          <a:bodyPr wrap="square">
+            <a:spAutoFit/>
+          </a:bodyPr>
+          <a:lstStyle/>
+          <a:p>
+            <a:pPr algn="l">
+              <a:defRPr sz="1000" b="0">
+                <a:solidFill>
+                  <a:srgbClr val="767676"/>
+                </a:solidFill>
+                <a:latin typeface="Calibri"/>
+              </a:defRPr>
+            </a:pPr>
+            <a:r>
+              <a:t>No guided upsell at point of service</a:t>
+            </a:r>
+          </a:p>
+        </p:txBody>
+      </p:sp>
+      <p:sp>
+        <p:nvSpPr>
+          <p:cNvPr id="38" name="Rounded Rectangle 37"/>
+          <p:cNvSpPr/>
+          <p:nvPr/>
+        </p:nvSpPr>
+        <p:spPr>
+          <a:xfrm>
+            <a:off x="8229599" y="4297680"/>
+            <a:ext cx="3520440" cy="960120"/>
+          </a:xfrm>
+          <a:prstGeom prst="roundRect">
+            <a:avLst>
+              <a:gd name="adj" fmla="val 4000"/>
+            </a:avLst>
+          </a:prstGeom>
+          <a:solidFill>
+            <a:srgbClr val="2A2A2C"/>
+          </a:solidFill>
+          <a:ln w="12700">
+            <a:solidFill>
+              <a:srgbClr val="3A3A3C"/>
+            </a:solidFill>
+          </a:ln>
+        </p:spPr>
+        <p:style>
+          <a:lnRef idx="1">
+            <a:schemeClr val="accent1"/>
+          </a:lnRef>
+          <a:fillRef idx="3">
+            <a:schemeClr val="accent1"/>
+          </a:fillRef>
+          <a:effectRef idx="2">
+            <a:schemeClr val="accent1"/>
+          </a:effectRef>
+          <a:fontRef idx="minor">
+            <a:schemeClr val="lt1"/>
+          </a:fontRef>
+        </p:style>
+        <p:txBody>
+          <a:bodyPr rtlCol="0" anchor="ctr"/>
+          <a:lstStyle/>
+          <a:p>
+            <a:pPr algn="ctr"/>
+          </a:p>
+        </p:txBody>
+      </p:sp>
+      <p:sp>
+        <p:nvSpPr>
+          <p:cNvPr id="39" name="TextBox 38"/>
+          <p:cNvSpPr txBox="1"/>
+          <p:nvPr/>
+        </p:nvSpPr>
+        <p:spPr>
+          <a:xfrm>
+            <a:off x="8412479" y="4370832"/>
+            <a:ext cx="1371600" cy="182880"/>
+          </a:xfrm>
+          <a:prstGeom prst="rect">
+            <a:avLst/>
+          </a:prstGeom>
+          <a:noFill/>
+        </p:spPr>
+        <p:txBody>
+          <a:bodyPr wrap="square">
+            <a:spAutoFit/>
+          </a:bodyPr>
+          <a:lstStyle/>
+          <a:p>
+            <a:pPr algn="l">
+              <a:defRPr sz="800" b="1">
+                <a:solidFill>
+                  <a:srgbClr val="E51937"/>
+                </a:solidFill>
+                <a:latin typeface="Calibri"/>
+              </a:defRPr>
+            </a:pPr>
+            <a:r>
+              <a:t>SALES</a:t>
+            </a:r>
+          </a:p>
+        </p:txBody>
+      </p:sp>
+      <p:sp>
+        <p:nvSpPr>
+          <p:cNvPr id="40" name="TextBox 39"/>
+          <p:cNvSpPr txBox="1"/>
+          <p:nvPr/>
+        </p:nvSpPr>
+        <p:spPr>
+          <a:xfrm>
+            <a:off x="8412479" y="4572000"/>
+            <a:ext cx="3154680" cy="274320"/>
+          </a:xfrm>
+          <a:prstGeom prst="rect">
+            <a:avLst/>
+          </a:prstGeom>
+          <a:noFill/>
+        </p:spPr>
+        <p:txBody>
+          <a:bodyPr wrap="square">
+            <a:spAutoFit/>
+          </a:bodyPr>
+          <a:lstStyle/>
+          <a:p>
+            <a:pPr algn="l">
+              <a:defRPr sz="1300" b="1">
+                <a:solidFill>
+                  <a:srgbClr val="FFFFFF"/>
+                </a:solidFill>
+                <a:latin typeface="Calibri"/>
+              </a:defRPr>
+            </a:pPr>
+            <a:r>
+              <a:t>DTC Personalization</a:t>
+            </a:r>
+          </a:p>
+        </p:txBody>
+      </p:sp>
+      <p:sp>
+        <p:nvSpPr>
+          <p:cNvPr id="41" name="TextBox 40"/>
+          <p:cNvSpPr txBox="1"/>
+          <p:nvPr/>
+        </p:nvSpPr>
+        <p:spPr>
+          <a:xfrm>
+            <a:off x="8412479" y="4892040"/>
+            <a:ext cx="3154680" cy="320040"/>
+          </a:xfrm>
+          <a:prstGeom prst="rect">
+            <a:avLst/>
+          </a:prstGeom>
+          <a:noFill/>
+        </p:spPr>
+        <p:txBody>
+          <a:bodyPr wrap="square">
+            <a:spAutoFit/>
+          </a:bodyPr>
+          <a:lstStyle/>
+          <a:p>
+            <a:pPr algn="l">
+              <a:defRPr sz="1000" b="0">
+                <a:solidFill>
+                  <a:srgbClr val="767676"/>
+                </a:solidFill>
+                <a:latin typeface="Calibri"/>
+              </a:defRPr>
+            </a:pPr>
+            <a:r>
+              <a:t>Velocio has no targeting capability</a:t>
+            </a:r>
+          </a:p>
+        </p:txBody>
+      </p:sp>
+      <p:sp>
+        <p:nvSpPr>
+          <p:cNvPr id="42" name="Rounded Rectangle 41"/>
+          <p:cNvSpPr/>
+          <p:nvPr/>
+        </p:nvSpPr>
+        <p:spPr>
+          <a:xfrm>
+            <a:off x="731520" y="5440680"/>
+            <a:ext cx="3520440" cy="960120"/>
+          </a:xfrm>
+          <a:prstGeom prst="roundRect">
+            <a:avLst>
+              <a:gd name="adj" fmla="val 4000"/>
+            </a:avLst>
+          </a:prstGeom>
+          <a:solidFill>
+            <a:srgbClr val="2A2A2C"/>
+          </a:solidFill>
+          <a:ln w="12700">
+            <a:solidFill>
+              <a:srgbClr val="3A3A3C"/>
+            </a:solidFill>
+          </a:ln>
+        </p:spPr>
+        <p:style>
+          <a:lnRef idx="1">
+            <a:schemeClr val="accent1"/>
+          </a:lnRef>
+          <a:fillRef idx="3">
+            <a:schemeClr val="accent1"/>
+          </a:fillRef>
+          <a:effectRef idx="2">
+            <a:schemeClr val="accent1"/>
+          </a:effectRef>
+          <a:fontRef idx="minor">
+            <a:schemeClr val="lt1"/>
+          </a:fontRef>
+        </p:style>
+        <p:txBody>
+          <a:bodyPr rtlCol="0" anchor="ctr"/>
+          <a:lstStyle/>
+          <a:p>
+            <a:pPr algn="ctr"/>
+          </a:p>
+        </p:txBody>
+      </p:sp>
+      <p:sp>
+        <p:nvSpPr>
+          <p:cNvPr id="43" name="TextBox 42"/>
+          <p:cNvSpPr txBox="1"/>
+          <p:nvPr/>
+        </p:nvSpPr>
+        <p:spPr>
+          <a:xfrm>
+            <a:off x="914400" y="5513832"/>
+            <a:ext cx="1371600" cy="182880"/>
+          </a:xfrm>
+          <a:prstGeom prst="rect">
+            <a:avLst/>
+          </a:prstGeom>
+          <a:noFill/>
+        </p:spPr>
+        <p:txBody>
+          <a:bodyPr wrap="square">
+            <a:spAutoFit/>
+          </a:bodyPr>
+          <a:lstStyle/>
+          <a:p>
+            <a:pPr algn="l">
+              <a:defRPr sz="800" b="1">
+                <a:solidFill>
+                  <a:srgbClr val="E51937"/>
+                </a:solidFill>
+                <a:latin typeface="Calibri"/>
+              </a:defRPr>
+            </a:pPr>
+            <a:r>
+              <a:t>ENGINEERING</a:t>
+            </a:r>
+          </a:p>
+        </p:txBody>
+      </p:sp>
+      <p:sp>
+        <p:nvSpPr>
+          <p:cNvPr id="44" name="TextBox 43"/>
+          <p:cNvSpPr txBox="1"/>
+          <p:nvPr/>
+        </p:nvSpPr>
+        <p:spPr>
+          <a:xfrm>
+            <a:off x="914400" y="5715000"/>
+            <a:ext cx="3154680" cy="274320"/>
+          </a:xfrm>
+          <a:prstGeom prst="rect">
+            <a:avLst/>
+          </a:prstGeom>
+          <a:noFill/>
+        </p:spPr>
+        <p:txBody>
+          <a:bodyPr wrap="square">
+            <a:spAutoFit/>
+          </a:bodyPr>
+          <a:lstStyle/>
+          <a:p>
+            <a:pPr algn="l">
+              <a:defRPr sz="1300" b="1">
+                <a:solidFill>
+                  <a:srgbClr val="FFFFFF"/>
+                </a:solidFill>
+                <a:latin typeface="Calibri"/>
+              </a:defRPr>
+            </a:pPr>
+            <a:r>
+              <a:t>Generative Design</a:t>
+            </a:r>
+          </a:p>
+        </p:txBody>
+      </p:sp>
+      <p:sp>
+        <p:nvSpPr>
+          <p:cNvPr id="45" name="TextBox 44"/>
+          <p:cNvSpPr txBox="1"/>
+          <p:nvPr/>
+        </p:nvSpPr>
+        <p:spPr>
+          <a:xfrm>
+            <a:off x="914400" y="6035040"/>
+            <a:ext cx="3154680" cy="320040"/>
+          </a:xfrm>
+          <a:prstGeom prst="rect">
+            <a:avLst/>
+          </a:prstGeom>
+          <a:noFill/>
+        </p:spPr>
+        <p:txBody>
+          <a:bodyPr wrap="square">
+            <a:spAutoFit/>
+          </a:bodyPr>
+          <a:lstStyle/>
+          <a:p>
+            <a:pPr algn="l">
+              <a:defRPr sz="1000" b="0">
+                <a:solidFill>
+                  <a:srgbClr val="767676"/>
+                </a:solidFill>
+                <a:latin typeface="Calibri"/>
+              </a:defRPr>
+            </a:pPr>
+            <a:r>
+              <a:t>Physical testing is slow and expensive</a:t>
+            </a:r>
+          </a:p>
+        </p:txBody>
+      </p:sp>
+      <p:sp>
+        <p:nvSpPr>
+          <p:cNvPr id="46" name="Rounded Rectangle 45"/>
+          <p:cNvSpPr/>
+          <p:nvPr/>
+        </p:nvSpPr>
+        <p:spPr>
+          <a:xfrm>
+            <a:off x="4480559" y="5440680"/>
+            <a:ext cx="3520440" cy="960120"/>
+          </a:xfrm>
+          <a:prstGeom prst="roundRect">
+            <a:avLst>
+              <a:gd name="adj" fmla="val 4000"/>
+            </a:avLst>
+          </a:prstGeom>
+          <a:solidFill>
+            <a:srgbClr val="2A2A2C"/>
+          </a:solidFill>
+          <a:ln w="12700">
+            <a:solidFill>
+              <a:srgbClr val="3A3A3C"/>
+            </a:solidFill>
+          </a:ln>
+        </p:spPr>
+        <p:style>
+          <a:lnRef idx="1">
+            <a:schemeClr val="accent1"/>
+          </a:lnRef>
+          <a:fillRef idx="3">
+            <a:schemeClr val="accent1"/>
+          </a:fillRef>
+          <a:effectRef idx="2">
+            <a:schemeClr val="accent1"/>
+          </a:effectRef>
+          <a:fontRef idx="minor">
+            <a:schemeClr val="lt1"/>
+          </a:fontRef>
+        </p:style>
+        <p:txBody>
+          <a:bodyPr rtlCol="0" anchor="ctr"/>
+          <a:lstStyle/>
+          <a:p>
+            <a:pPr algn="ctr"/>
+          </a:p>
+        </p:txBody>
+      </p:sp>
+      <p:sp>
+        <p:nvSpPr>
+          <p:cNvPr id="47" name="TextBox 46"/>
+          <p:cNvSpPr txBox="1"/>
+          <p:nvPr/>
+        </p:nvSpPr>
+        <p:spPr>
+          <a:xfrm>
+            <a:off x="4663439" y="5513832"/>
+            <a:ext cx="1371600" cy="182880"/>
+          </a:xfrm>
+          <a:prstGeom prst="rect">
+            <a:avLst/>
+          </a:prstGeom>
+          <a:noFill/>
+        </p:spPr>
+        <p:txBody>
+          <a:bodyPr wrap="square">
+            <a:spAutoFit/>
+          </a:bodyPr>
+          <a:lstStyle/>
+          <a:p>
+            <a:pPr algn="l">
+              <a:defRPr sz="800" b="1">
+                <a:solidFill>
+                  <a:srgbClr val="E51937"/>
+                </a:solidFill>
+                <a:latin typeface="Calibri"/>
+              </a:defRPr>
+            </a:pPr>
+            <a:r>
+              <a:t>ENGINEERING</a:t>
+            </a:r>
+          </a:p>
+        </p:txBody>
+      </p:sp>
+      <p:sp>
+        <p:nvSpPr>
+          <p:cNvPr id="48" name="TextBox 47"/>
+          <p:cNvSpPr txBox="1"/>
+          <p:nvPr/>
+        </p:nvSpPr>
+        <p:spPr>
+          <a:xfrm>
+            <a:off x="4663439" y="5715000"/>
+            <a:ext cx="3154680" cy="274320"/>
+          </a:xfrm>
+          <a:prstGeom prst="rect">
+            <a:avLst/>
+          </a:prstGeom>
+          <a:noFill/>
+        </p:spPr>
+        <p:txBody>
+          <a:bodyPr wrap="square">
+            <a:spAutoFit/>
+          </a:bodyPr>
+          <a:lstStyle/>
+          <a:p>
+            <a:pPr algn="l">
+              <a:defRPr sz="1300" b="1">
+                <a:solidFill>
+                  <a:srgbClr val="FFFFFF"/>
+                </a:solidFill>
+                <a:latin typeface="Calibri"/>
+              </a:defRPr>
+            </a:pPr>
+            <a:r>
+              <a:t>AXS Intelligence</a:t>
+            </a:r>
+          </a:p>
+        </p:txBody>
+      </p:sp>
+      <p:sp>
+        <p:nvSpPr>
+          <p:cNvPr id="49" name="TextBox 48"/>
+          <p:cNvSpPr txBox="1"/>
+          <p:nvPr/>
+        </p:nvSpPr>
+        <p:spPr>
+          <a:xfrm>
+            <a:off x="4663439" y="6035040"/>
+            <a:ext cx="3154680" cy="320040"/>
+          </a:xfrm>
+          <a:prstGeom prst="rect">
+            <a:avLst/>
+          </a:prstGeom>
+          <a:noFill/>
+        </p:spPr>
+        <p:txBody>
+          <a:bodyPr wrap="square">
+            <a:spAutoFit/>
+          </a:bodyPr>
+          <a:lstStyle/>
+          <a:p>
+            <a:pPr algn="l">
+              <a:defRPr sz="1000" b="0">
+                <a:solidFill>
+                  <a:srgbClr val="767676"/>
+                </a:solidFill>
+                <a:latin typeface="Calibri"/>
+              </a:defRPr>
+            </a:pPr>
+            <a:r>
+              <a:t>Telemetry data is collected but unused</a:t>
+            </a:r>
+          </a:p>
+        </p:txBody>
+      </p:sp>
+      <p:sp>
+        <p:nvSpPr>
+          <p:cNvPr id="50" name="Rounded Rectangle 49"/>
+          <p:cNvSpPr/>
+          <p:nvPr/>
+        </p:nvSpPr>
+        <p:spPr>
+          <a:xfrm>
+            <a:off x="8229599" y="5440680"/>
+            <a:ext cx="3520440" cy="960120"/>
+          </a:xfrm>
+          <a:prstGeom prst="roundRect">
+            <a:avLst>
+              <a:gd name="adj" fmla="val 4000"/>
+            </a:avLst>
+          </a:prstGeom>
+          <a:solidFill>
+            <a:srgbClr val="2A2A2C"/>
+          </a:solidFill>
+          <a:ln w="12700">
+            <a:solidFill>
+              <a:srgbClr val="3A3A3C"/>
+            </a:solidFill>
+          </a:ln>
+        </p:spPr>
+        <p:style>
+          <a:lnRef idx="1">
+            <a:schemeClr val="accent1"/>
+          </a:lnRef>
+          <a:fillRef idx="3">
+            <a:schemeClr val="accent1"/>
+          </a:fillRef>
+          <a:effectRef idx="2">
+            <a:schemeClr val="accent1"/>
+          </a:effectRef>
+          <a:fontRef idx="minor">
+            <a:schemeClr val="lt1"/>
+          </a:fontRef>
+        </p:style>
+        <p:txBody>
+          <a:bodyPr rtlCol="0" anchor="ctr"/>
+          <a:lstStyle/>
+          <a:p>
+            <a:pPr algn="ctr"/>
+          </a:p>
+        </p:txBody>
+      </p:sp>
+      <p:sp>
+        <p:nvSpPr>
+          <p:cNvPr id="51" name="TextBox 50"/>
+          <p:cNvSpPr txBox="1"/>
+          <p:nvPr/>
+        </p:nvSpPr>
+        <p:spPr>
+          <a:xfrm>
+            <a:off x="8412479" y="5513832"/>
+            <a:ext cx="1371600" cy="182880"/>
+          </a:xfrm>
+          <a:prstGeom prst="rect">
+            <a:avLst/>
+          </a:prstGeom>
+          <a:noFill/>
+        </p:spPr>
+        <p:txBody>
+          <a:bodyPr wrap="square">
+            <a:spAutoFit/>
+          </a:bodyPr>
+          <a:lstStyle/>
+          <a:p>
+            <a:pPr algn="l">
+              <a:defRPr sz="800" b="1">
+                <a:solidFill>
+                  <a:srgbClr val="E51937"/>
+                </a:solidFill>
+                <a:latin typeface="Calibri"/>
+              </a:defRPr>
+            </a:pPr>
+            <a:r>
+              <a:t>ENGINEERING</a:t>
+            </a:r>
+          </a:p>
+        </p:txBody>
+      </p:sp>
+      <p:sp>
+        <p:nvSpPr>
+          <p:cNvPr id="52" name="TextBox 51"/>
+          <p:cNvSpPr txBox="1"/>
+          <p:nvPr/>
+        </p:nvSpPr>
+        <p:spPr>
+          <a:xfrm>
+            <a:off x="8412479" y="5715000"/>
+            <a:ext cx="3154680" cy="274320"/>
+          </a:xfrm>
+          <a:prstGeom prst="rect">
+            <a:avLst/>
+          </a:prstGeom>
+          <a:noFill/>
+        </p:spPr>
+        <p:txBody>
+          <a:bodyPr wrap="square">
+            <a:spAutoFit/>
+          </a:bodyPr>
+          <a:lstStyle/>
+          <a:p>
+            <a:pPr algn="l">
+              <a:defRPr sz="1300" b="1">
+                <a:solidFill>
+                  <a:srgbClr val="FFFFFF"/>
+                </a:solidFill>
+                <a:latin typeface="Calibri"/>
+              </a:defRPr>
+            </a:pPr>
+            <a:r>
+              <a:t>AI-Tuned Components</a:t>
+            </a:r>
+          </a:p>
+        </p:txBody>
+      </p:sp>
+      <p:sp>
+        <p:nvSpPr>
+          <p:cNvPr id="53" name="TextBox 52"/>
+          <p:cNvSpPr txBox="1"/>
+          <p:nvPr/>
+        </p:nvSpPr>
+        <p:spPr>
+          <a:xfrm>
+            <a:off x="8412479" y="6035040"/>
+            <a:ext cx="3154680" cy="320040"/>
+          </a:xfrm>
+          <a:prstGeom prst="rect">
+            <a:avLst/>
+          </a:prstGeom>
+          <a:noFill/>
+        </p:spPr>
+        <p:txBody>
+          <a:bodyPr wrap="square">
+            <a:spAutoFit/>
+          </a:bodyPr>
+          <a:lstStyle/>
+          <a:p>
+            <a:pPr algn="l">
+              <a:defRPr sz="1000" b="0">
+                <a:solidFill>
+                  <a:srgbClr val="767676"/>
+                </a:solidFill>
+                <a:latin typeface="Calibri"/>
+              </a:defRPr>
+            </a:pPr>
+            <a:r>
+              <a:t>Suspension and shifting are static</a:t>
+            </a:r>
+          </a:p>
+        </p:txBody>
+      </p:sp>
+      <p:sp>
+        <p:nvSpPr>
+          <p:cNvPr id="54" name="Rounded Rectangle 53"/>
+          <p:cNvSpPr/>
           <p:nvPr/>
         </p:nvSpPr>
         <p:spPr>
           <a:xfrm>
             <a:off x="731520" y="6400800"/>
-            <a:ext cx="10972800" cy="365760"/>
-          </a:xfrm>
-          <a:prstGeom prst="rect">
-            <a:avLst/>
-          </a:prstGeom>
-          <a:noFill/>
-        </p:spPr>
-        <p:txBody>
-          <a:bodyPr wrap="square">
-            <a:spAutoFit/>
-          </a:bodyPr>
-          <a:lstStyle/>
-          <a:p>
-            <a:pPr algn="l">
-              <a:defRPr sz="1300" b="1">
-                <a:solidFill>
-                  <a:srgbClr val="34D399"/>
-                </a:solidFill>
-                <a:latin typeface="Calibri"/>
-              </a:defRPr>
-            </a:pPr>
-            <a:r>
-              <a:t>▶  We recommend starting with Phase 1 Support Automation as the deep-dive pilot</a:t>
+            <a:ext cx="10698480" cy="320040"/>
+          </a:xfrm>
+          <a:prstGeom prst="roundRect">
+            <a:avLst>
+              <a:gd name="adj" fmla="val 10000"/>
+            </a:avLst>
+          </a:prstGeom>
+          <a:solidFill>
+            <a:srgbClr val="2A2A2C"/>
+          </a:solidFill>
+          <a:ln w="12700">
+            <a:solidFill>
+              <a:srgbClr val="E51937"/>
+            </a:solidFill>
+          </a:ln>
+        </p:spPr>
+        <p:style>
+          <a:lnRef idx="1">
+            <a:schemeClr val="accent1"/>
+          </a:lnRef>
+          <a:fillRef idx="3">
+            <a:schemeClr val="accent1"/>
+          </a:fillRef>
+          <a:effectRef idx="2">
+            <a:schemeClr val="accent1"/>
+          </a:effectRef>
+          <a:fontRef idx="minor">
+            <a:schemeClr val="lt1"/>
+          </a:fontRef>
+        </p:style>
+        <p:txBody>
+          <a:bodyPr rtlCol="0" anchor="ctr"/>
+          <a:lstStyle/>
+          <a:p>
+            <a:pPr algn="ctr"/>
+          </a:p>
+        </p:txBody>
+      </p:sp>
+      <p:sp>
+        <p:nvSpPr>
+          <p:cNvPr id="55" name="TextBox 54"/>
+          <p:cNvSpPr txBox="1"/>
+          <p:nvPr/>
+        </p:nvSpPr>
+        <p:spPr>
+          <a:xfrm>
+            <a:off x="1097280" y="6428232"/>
+            <a:ext cx="10058400" cy="274320"/>
+          </a:xfrm>
+          <a:prstGeom prst="rect">
+            <a:avLst/>
+          </a:prstGeom>
+          <a:noFill/>
+        </p:spPr>
+        <p:txBody>
+          <a:bodyPr wrap="square">
+            <a:spAutoFit/>
+          </a:bodyPr>
+          <a:lstStyle/>
+          <a:p>
+            <a:pPr algn="ctr">
+              <a:defRPr sz="1200" b="1">
+                <a:solidFill>
+                  <a:srgbClr val="E51937"/>
+                </a:solidFill>
+                <a:latin typeface="Calibri"/>
+              </a:defRPr>
+            </a:pPr>
+            <a:r>
+              <a:t>We will focus on one area with the highest uplift and fastest proof: Customer and Dealer Support</a:t>
             </a:r>
           </a:p>
         </p:txBody>
@@ -6148,7 +6835,7 @@
     <p:bg>
       <p:bgPr>
         <a:solidFill>
-          <a:srgbClr val="0F172A"/>
+          <a:srgbClr val="1C1C1E"/>
         </a:solidFill>
         <a:effectLst/>
       </p:bgPr>
@@ -6169,29 +6856,29 @@
         <p:spPr>
           <a:xfrm>
             <a:off x="731520" y="274320"/>
-            <a:ext cx="5486400" cy="274320"/>
-          </a:xfrm>
-          <a:prstGeom prst="rect">
-            <a:avLst/>
-          </a:prstGeom>
-          <a:noFill/>
-        </p:spPr>
-        <p:txBody>
-          <a:bodyPr wrap="square">
-            <a:spAutoFit/>
-          </a:bodyPr>
-          <a:lstStyle/>
-          <a:p>
-            <a:pPr algn="l">
-              <a:defRPr sz="1200" b="1">
-                <a:solidFill>
-                  <a:srgbClr val="EF4444"/>
-                </a:solidFill>
-                <a:latin typeface="Calibri"/>
-              </a:defRPr>
-            </a:pPr>
-            <a:r>
-              <a:t>BUT WHAT IS</a:t>
+            <a:ext cx="5486400" cy="228600"/>
+          </a:xfrm>
+          <a:prstGeom prst="rect">
+            <a:avLst/>
+          </a:prstGeom>
+          <a:noFill/>
+        </p:spPr>
+        <p:txBody>
+          <a:bodyPr wrap="square">
+            <a:spAutoFit/>
+          </a:bodyPr>
+          <a:lstStyle/>
+          <a:p>
+            <a:pPr algn="l">
+              <a:defRPr sz="1100" b="1">
+                <a:solidFill>
+                  <a:srgbClr val="E51937"/>
+                </a:solidFill>
+                <a:latin typeface="Calibri"/>
+              </a:defRPr>
+            </a:pPr>
+            <a:r>
+              <a:t>THE PROBLEM</a:t>
             </a:r>
           </a:p>
         </p:txBody>
@@ -6204,8 +6891,8 @@
         </p:nvSpPr>
         <p:spPr>
           <a:xfrm>
-            <a:off x="731520" y="594360"/>
-            <a:ext cx="9144000" cy="457200"/>
+            <a:off x="731520" y="548640"/>
+            <a:ext cx="10058400" cy="457200"/>
           </a:xfrm>
           <a:prstGeom prst="rect">
             <a:avLst/>
@@ -6221,13 +6908,13 @@
             <a:pPr algn="l">
               <a:defRPr sz="3200" b="1">
                 <a:solidFill>
-                  <a:srgbClr val="F8FAFC"/>
-                </a:solidFill>
-                <a:latin typeface="Calibri"/>
-              </a:defRPr>
-            </a:pPr>
-            <a:r>
-              <a:t>The Support Problem is Visible</a:t>
+                  <a:srgbClr val="FFFFFF"/>
+                </a:solidFill>
+                <a:latin typeface="Calibri"/>
+              </a:defRPr>
+            </a:pPr>
+            <a:r>
+              <a:t>Support Quality Drives Churn, Not Product Quality</a:t>
             </a:r>
           </a:p>
         </p:txBody>
@@ -6240,14 +6927,14 @@
         </p:nvSpPr>
         <p:spPr>
           <a:xfrm>
-            <a:off x="731520" y="1097280"/>
-            <a:ext cx="1097280" cy="38100"/>
+            <a:off x="731520" y="1051560"/>
+            <a:ext cx="914400" cy="25400"/>
           </a:xfrm>
           <a:prstGeom prst="rect">
             <a:avLst/>
           </a:prstGeom>
           <a:solidFill>
-            <a:srgbClr val="EF4444"/>
+            <a:srgbClr val="E51937"/>
           </a:solidFill>
           <a:ln>
             <a:noFill/>
@@ -6283,7 +6970,7 @@
         </p:nvSpPr>
         <p:spPr>
           <a:xfrm>
-            <a:off x="731520" y="1325880"/>
+            <a:off x="731520" y="1280160"/>
             <a:ext cx="10058400" cy="457200"/>
           </a:xfrm>
           <a:prstGeom prst="rect">
@@ -6300,13 +6987,13 @@
             <a:pPr algn="l">
               <a:defRPr sz="1400" b="0">
                 <a:solidFill>
-                  <a:srgbClr val="94A3B8"/>
-                </a:solidFill>
-                <a:latin typeface="Calibri"/>
-              </a:defRPr>
-            </a:pPr>
-            <a:r>
-              <a:t>SRAM's churn risk is driven by support quality, not product quality. Riders love SRAM components but struggle with firmware, compatibility, and warranty resolution.</a:t>
+                  <a:srgbClr val="D9DBD8"/>
+                </a:solidFill>
+                <a:latin typeface="Calibri"/>
+              </a:defRPr>
+            </a:pPr>
+            <a:r>
+              <a:t>Riders love SRAM components but struggle with firmware, compatibility, and warranty resolution. The data is clear.</a:t>
             </a:r>
           </a:p>
         </p:txBody>
@@ -6319,20 +7006,20 @@
         </p:nvSpPr>
         <p:spPr>
           <a:xfrm>
-            <a:off x="731520" y="2286000"/>
-            <a:ext cx="3200400" cy="1463040"/>
+            <a:off x="731520" y="2011680"/>
+            <a:ext cx="3291840" cy="1371600"/>
           </a:xfrm>
           <a:prstGeom prst="roundRect">
             <a:avLst>
-              <a:gd name="adj" fmla="val 5000"/>
+              <a:gd name="adj" fmla="val 4000"/>
             </a:avLst>
           </a:prstGeom>
           <a:solidFill>
-            <a:srgbClr val="16213A"/>
+            <a:srgbClr val="2A2A2C"/>
           </a:solidFill>
           <a:ln w="12700">
             <a:solidFill>
-              <a:srgbClr val="1E293B"/>
+              <a:srgbClr val="3A3A3C"/>
             </a:solidFill>
           </a:ln>
         </p:spPr>
@@ -6366,24 +7053,24 @@
         </p:nvSpPr>
         <p:spPr>
           <a:xfrm>
-            <a:off x="1005840" y="2423160"/>
-            <a:ext cx="2651760" cy="274320"/>
-          </a:xfrm>
-          <a:prstGeom prst="rect">
-            <a:avLst/>
-          </a:prstGeom>
-          <a:noFill/>
-        </p:spPr>
-        <p:txBody>
-          <a:bodyPr wrap="square">
-            <a:spAutoFit/>
-          </a:bodyPr>
-          <a:lstStyle/>
-          <a:p>
-            <a:pPr algn="l">
-              <a:defRPr sz="1100" b="0">
-                <a:solidFill>
-                  <a:srgbClr val="64748B"/>
+            <a:off x="960120" y="2148840"/>
+            <a:ext cx="2834640" cy="228600"/>
+          </a:xfrm>
+          <a:prstGeom prst="rect">
+            <a:avLst/>
+          </a:prstGeom>
+          <a:noFill/>
+        </p:spPr>
+        <p:txBody>
+          <a:bodyPr wrap="square">
+            <a:spAutoFit/>
+          </a:bodyPr>
+          <a:lstStyle/>
+          <a:p>
+            <a:pPr algn="l">
+              <a:defRPr sz="1000" b="0">
+                <a:solidFill>
+                  <a:srgbClr val="767676"/>
                 </a:solidFill>
                 <a:latin typeface="Calibri"/>
               </a:defRPr>
@@ -6402,24 +7089,24 @@
         </p:nvSpPr>
         <p:spPr>
           <a:xfrm>
-            <a:off x="1005840" y="2697480"/>
-            <a:ext cx="2651760" cy="457200"/>
-          </a:xfrm>
-          <a:prstGeom prst="rect">
-            <a:avLst/>
-          </a:prstGeom>
-          <a:noFill/>
-        </p:spPr>
-        <p:txBody>
-          <a:bodyPr wrap="square">
-            <a:spAutoFit/>
-          </a:bodyPr>
-          <a:lstStyle/>
-          <a:p>
-            <a:pPr algn="l">
-              <a:defRPr sz="2800" b="1">
-                <a:solidFill>
-                  <a:srgbClr val="EF4444"/>
+            <a:off x="960120" y="2377440"/>
+            <a:ext cx="2834640" cy="411480"/>
+          </a:xfrm>
+          <a:prstGeom prst="rect">
+            <a:avLst/>
+          </a:prstGeom>
+          <a:noFill/>
+        </p:spPr>
+        <p:txBody>
+          <a:bodyPr wrap="square">
+            <a:spAutoFit/>
+          </a:bodyPr>
+          <a:lstStyle/>
+          <a:p>
+            <a:pPr algn="l">
+              <a:defRPr sz="2600" b="1">
+                <a:solidFill>
+                  <a:srgbClr val="E3475E"/>
                 </a:solidFill>
                 <a:latin typeface="Calibri"/>
               </a:defRPr>
@@ -6438,24 +7125,24 @@
         </p:nvSpPr>
         <p:spPr>
           <a:xfrm>
-            <a:off x="1005840" y="3200400"/>
-            <a:ext cx="2651760" cy="274320"/>
-          </a:xfrm>
-          <a:prstGeom prst="rect">
-            <a:avLst/>
-          </a:prstGeom>
-          <a:noFill/>
-        </p:spPr>
-        <p:txBody>
-          <a:bodyPr wrap="square">
-            <a:spAutoFit/>
-          </a:bodyPr>
-          <a:lstStyle/>
-          <a:p>
-            <a:pPr algn="l">
-              <a:defRPr sz="1000" b="0">
-                <a:solidFill>
-                  <a:srgbClr val="94A3B8"/>
+            <a:off x="960120" y="2834640"/>
+            <a:ext cx="2834640" cy="228600"/>
+          </a:xfrm>
+          <a:prstGeom prst="rect">
+            <a:avLst/>
+          </a:prstGeom>
+          <a:noFill/>
+        </p:spPr>
+        <p:txBody>
+          <a:bodyPr wrap="square">
+            <a:spAutoFit/>
+          </a:bodyPr>
+          <a:lstStyle/>
+          <a:p>
+            <a:pPr algn="l">
+              <a:defRPr sz="900" b="0">
+                <a:solidFill>
+                  <a:srgbClr val="767676"/>
                 </a:solidFill>
                 <a:latin typeface="Calibri"/>
               </a:defRPr>
@@ -6474,20 +7161,20 @@
         </p:nvSpPr>
         <p:spPr>
           <a:xfrm>
-            <a:off x="4206240" y="2286000"/>
-            <a:ext cx="3200400" cy="1463040"/>
+            <a:off x="4297680" y="2011680"/>
+            <a:ext cx="3291840" cy="1371600"/>
           </a:xfrm>
           <a:prstGeom prst="roundRect">
             <a:avLst>
-              <a:gd name="adj" fmla="val 5000"/>
+              <a:gd name="adj" fmla="val 4000"/>
             </a:avLst>
           </a:prstGeom>
           <a:solidFill>
-            <a:srgbClr val="16213A"/>
+            <a:srgbClr val="2A2A2C"/>
           </a:solidFill>
           <a:ln w="12700">
             <a:solidFill>
-              <a:srgbClr val="1E293B"/>
+              <a:srgbClr val="3A3A3C"/>
             </a:solidFill>
           </a:ln>
         </p:spPr>
@@ -6521,24 +7208,24 @@
         </p:nvSpPr>
         <p:spPr>
           <a:xfrm>
-            <a:off x="4480560" y="2423160"/>
-            <a:ext cx="2651760" cy="274320"/>
-          </a:xfrm>
-          <a:prstGeom prst="rect">
-            <a:avLst/>
-          </a:prstGeom>
-          <a:noFill/>
-        </p:spPr>
-        <p:txBody>
-          <a:bodyPr wrap="square">
-            <a:spAutoFit/>
-          </a:bodyPr>
-          <a:lstStyle/>
-          <a:p>
-            <a:pPr algn="l">
-              <a:defRPr sz="1100" b="0">
-                <a:solidFill>
-                  <a:srgbClr val="64748B"/>
+            <a:off x="4526280" y="2148840"/>
+            <a:ext cx="2834640" cy="228600"/>
+          </a:xfrm>
+          <a:prstGeom prst="rect">
+            <a:avLst/>
+          </a:prstGeom>
+          <a:noFill/>
+        </p:spPr>
+        <p:txBody>
+          <a:bodyPr wrap="square">
+            <a:spAutoFit/>
+          </a:bodyPr>
+          <a:lstStyle/>
+          <a:p>
+            <a:pPr algn="l">
+              <a:defRPr sz="1000" b="0">
+                <a:solidFill>
+                  <a:srgbClr val="767676"/>
                 </a:solidFill>
                 <a:latin typeface="Calibri"/>
               </a:defRPr>
@@ -6557,24 +7244,24 @@
         </p:nvSpPr>
         <p:spPr>
           <a:xfrm>
-            <a:off x="4480560" y="2697480"/>
-            <a:ext cx="2651760" cy="457200"/>
-          </a:xfrm>
-          <a:prstGeom prst="rect">
-            <a:avLst/>
-          </a:prstGeom>
-          <a:noFill/>
-        </p:spPr>
-        <p:txBody>
-          <a:bodyPr wrap="square">
-            <a:spAutoFit/>
-          </a:bodyPr>
-          <a:lstStyle/>
-          <a:p>
-            <a:pPr algn="l">
-              <a:defRPr sz="2800" b="1">
-                <a:solidFill>
-                  <a:srgbClr val="34D399"/>
+            <a:off x="4526280" y="2377440"/>
+            <a:ext cx="2834640" cy="411480"/>
+          </a:xfrm>
+          <a:prstGeom prst="rect">
+            <a:avLst/>
+          </a:prstGeom>
+          <a:noFill/>
+        </p:spPr>
+        <p:txBody>
+          <a:bodyPr wrap="square">
+            <a:spAutoFit/>
+          </a:bodyPr>
+          <a:lstStyle/>
+          <a:p>
+            <a:pPr algn="l">
+              <a:defRPr sz="2600" b="1">
+                <a:solidFill>
+                  <a:srgbClr val="FFFFFF"/>
                 </a:solidFill>
                 <a:latin typeface="Calibri"/>
               </a:defRPr>
@@ -6593,24 +7280,24 @@
         </p:nvSpPr>
         <p:spPr>
           <a:xfrm>
-            <a:off x="4480560" y="3200400"/>
-            <a:ext cx="2651760" cy="274320"/>
-          </a:xfrm>
-          <a:prstGeom prst="rect">
-            <a:avLst/>
-          </a:prstGeom>
-          <a:noFill/>
-        </p:spPr>
-        <p:txBody>
-          <a:bodyPr wrap="square">
-            <a:spAutoFit/>
-          </a:bodyPr>
-          <a:lstStyle/>
-          <a:p>
-            <a:pPr algn="l">
-              <a:defRPr sz="1000" b="0">
-                <a:solidFill>
-                  <a:srgbClr val="94A3B8"/>
+            <a:off x="4526280" y="2834640"/>
+            <a:ext cx="2834640" cy="228600"/>
+          </a:xfrm>
+          <a:prstGeom prst="rect">
+            <a:avLst/>
+          </a:prstGeom>
+          <a:noFill/>
+        </p:spPr>
+        <p:txBody>
+          <a:bodyPr wrap="square">
+            <a:spAutoFit/>
+          </a:bodyPr>
+          <a:lstStyle/>
+          <a:p>
+            <a:pPr algn="l">
+              <a:defRPr sz="900" b="0">
+                <a:solidFill>
+                  <a:srgbClr val="767676"/>
                 </a:solidFill>
                 <a:latin typeface="Calibri"/>
               </a:defRPr>
@@ -6629,20 +7316,20 @@
         </p:nvSpPr>
         <p:spPr>
           <a:xfrm>
-            <a:off x="7680960" y="2286000"/>
-            <a:ext cx="3749039" cy="1463040"/>
+            <a:off x="7863840" y="2011680"/>
+            <a:ext cx="3657600" cy="1371600"/>
           </a:xfrm>
           <a:prstGeom prst="roundRect">
             <a:avLst>
-              <a:gd name="adj" fmla="val 5000"/>
+              <a:gd name="adj" fmla="val 4000"/>
             </a:avLst>
           </a:prstGeom>
           <a:solidFill>
-            <a:srgbClr val="16213A"/>
+            <a:srgbClr val="2A2A2C"/>
           </a:solidFill>
           <a:ln w="12700">
             <a:solidFill>
-              <a:srgbClr val="1E293B"/>
+              <a:srgbClr val="3A3A3C"/>
             </a:solidFill>
           </a:ln>
         </p:spPr>
@@ -6676,30 +7363,30 @@
         </p:nvSpPr>
         <p:spPr>
           <a:xfrm>
-            <a:off x="7955280" y="2423160"/>
-            <a:ext cx="3200399" cy="274320"/>
-          </a:xfrm>
-          <a:prstGeom prst="rect">
-            <a:avLst/>
-          </a:prstGeom>
-          <a:noFill/>
-        </p:spPr>
-        <p:txBody>
-          <a:bodyPr wrap="square">
-            <a:spAutoFit/>
-          </a:bodyPr>
-          <a:lstStyle/>
-          <a:p>
-            <a:pPr algn="l">
-              <a:defRPr sz="1100" b="0">
-                <a:solidFill>
-                  <a:srgbClr val="64748B"/>
-                </a:solidFill>
-                <a:latin typeface="Calibri"/>
-              </a:defRPr>
-            </a:pPr>
-            <a:r>
-              <a:t>TOP COMPLAINT THEMES</a:t>
+            <a:off x="8092440" y="2148840"/>
+            <a:ext cx="3200400" cy="228600"/>
+          </a:xfrm>
+          <a:prstGeom prst="rect">
+            <a:avLst/>
+          </a:prstGeom>
+          <a:noFill/>
+        </p:spPr>
+        <p:txBody>
+          <a:bodyPr wrap="square">
+            <a:spAutoFit/>
+          </a:bodyPr>
+          <a:lstStyle/>
+          <a:p>
+            <a:pPr algn="l">
+              <a:defRPr sz="1000" b="0">
+                <a:solidFill>
+                  <a:srgbClr val="767676"/>
+                </a:solidFill>
+                <a:latin typeface="Calibri"/>
+              </a:defRPr>
+            </a:pPr>
+            <a:r>
+              <a:t>TOP COMPLAINTS</a:t>
             </a:r>
           </a:p>
         </p:txBody>
@@ -6712,24 +7399,24 @@
         </p:nvSpPr>
         <p:spPr>
           <a:xfrm>
-            <a:off x="7955280" y="2697480"/>
-            <a:ext cx="3200399" cy="457200"/>
-          </a:xfrm>
-          <a:prstGeom prst="rect">
-            <a:avLst/>
-          </a:prstGeom>
-          <a:noFill/>
-        </p:spPr>
-        <p:txBody>
-          <a:bodyPr wrap="square">
-            <a:spAutoFit/>
-          </a:bodyPr>
-          <a:lstStyle/>
-          <a:p>
-            <a:pPr algn="l">
-              <a:defRPr sz="2800" b="1">
-                <a:solidFill>
-                  <a:srgbClr val="FBBF24"/>
+            <a:off x="8092440" y="2377440"/>
+            <a:ext cx="3200400" cy="411480"/>
+          </a:xfrm>
+          <a:prstGeom prst="rect">
+            <a:avLst/>
+          </a:prstGeom>
+          <a:noFill/>
+        </p:spPr>
+        <p:txBody>
+          <a:bodyPr wrap="square">
+            <a:spAutoFit/>
+          </a:bodyPr>
+          <a:lstStyle/>
+          <a:p>
+            <a:pPr algn="l">
+              <a:defRPr sz="2600" b="1">
+                <a:solidFill>
+                  <a:srgbClr val="E3475E"/>
                 </a:solidFill>
                 <a:latin typeface="Calibri"/>
               </a:defRPr>
@@ -6748,24 +7435,24 @@
         </p:nvSpPr>
         <p:spPr>
           <a:xfrm>
-            <a:off x="7955280" y="3200400"/>
-            <a:ext cx="3200399" cy="274320"/>
-          </a:xfrm>
-          <a:prstGeom prst="rect">
-            <a:avLst/>
-          </a:prstGeom>
-          <a:noFill/>
-        </p:spPr>
-        <p:txBody>
-          <a:bodyPr wrap="square">
-            <a:spAutoFit/>
-          </a:bodyPr>
-          <a:lstStyle/>
-          <a:p>
-            <a:pPr algn="l">
-              <a:defRPr sz="1000" b="0">
-                <a:solidFill>
-                  <a:srgbClr val="94A3B8"/>
+            <a:off x="8092440" y="2834640"/>
+            <a:ext cx="3200400" cy="228600"/>
+          </a:xfrm>
+          <a:prstGeom prst="rect">
+            <a:avLst/>
+          </a:prstGeom>
+          <a:noFill/>
+        </p:spPr>
+        <p:txBody>
+          <a:bodyPr wrap="square">
+            <a:spAutoFit/>
+          </a:bodyPr>
+          <a:lstStyle/>
+          <a:p>
+            <a:pPr algn="l">
+              <a:defRPr sz="900" b="0">
+                <a:solidFill>
+                  <a:srgbClr val="767676"/>
                 </a:solidFill>
                 <a:latin typeface="Calibri"/>
               </a:defRPr>
@@ -6784,20 +7471,20 @@
         </p:nvSpPr>
         <p:spPr>
           <a:xfrm>
-            <a:off x="731520" y="4114800"/>
-            <a:ext cx="3200400" cy="2468880"/>
+            <a:off x="731520" y="3749039"/>
+            <a:ext cx="5029200" cy="2743200"/>
           </a:xfrm>
           <a:prstGeom prst="roundRect">
             <a:avLst>
-              <a:gd name="adj" fmla="val 5000"/>
+              <a:gd name="adj" fmla="val 4000"/>
             </a:avLst>
           </a:prstGeom>
           <a:solidFill>
-            <a:srgbClr val="16213A"/>
+            <a:srgbClr val="2A2A2C"/>
           </a:solidFill>
           <a:ln w="12700">
             <a:solidFill>
-              <a:srgbClr val="1E293B"/>
+              <a:srgbClr val="3A3A3C"/>
             </a:solidFill>
           </a:ln>
         </p:spPr>
@@ -6831,44 +7518,44 @@
         </p:nvSpPr>
         <p:spPr>
           <a:xfrm>
+            <a:off x="1005840" y="3886200"/>
+            <a:ext cx="4114800" cy="320040"/>
+          </a:xfrm>
+          <a:prstGeom prst="rect">
+            <a:avLst/>
+          </a:prstGeom>
+          <a:noFill/>
+        </p:spPr>
+        <p:txBody>
+          <a:bodyPr wrap="square">
+            <a:spAutoFit/>
+          </a:bodyPr>
+          <a:lstStyle/>
+          <a:p>
+            <a:pPr algn="l">
+              <a:defRPr sz="1400" b="1">
+                <a:solidFill>
+                  <a:srgbClr val="E3475E"/>
+                </a:solidFill>
+                <a:latin typeface="Calibri"/>
+              </a:defRPr>
+            </a:pPr>
+            <a:r>
+              <a:t>Customer Pain Signals</a:t>
+            </a:r>
+          </a:p>
+        </p:txBody>
+      </p:sp>
+      <p:sp>
+        <p:nvSpPr>
+          <p:cNvPr id="20" name="TextBox 19"/>
+          <p:cNvSpPr txBox="1"/>
+          <p:nvPr/>
+        </p:nvSpPr>
+        <p:spPr>
+          <a:xfrm>
             <a:off x="1005840" y="4297680"/>
-            <a:ext cx="2651760" cy="365760"/>
-          </a:xfrm>
-          <a:prstGeom prst="rect">
-            <a:avLst/>
-          </a:prstGeom>
-          <a:noFill/>
-        </p:spPr>
-        <p:txBody>
-          <a:bodyPr wrap="square">
-            <a:spAutoFit/>
-          </a:bodyPr>
-          <a:lstStyle/>
-          <a:p>
-            <a:pPr algn="l">
-              <a:defRPr sz="1600" b="1">
-                <a:solidFill>
-                  <a:srgbClr val="EF4444"/>
-                </a:solidFill>
-                <a:latin typeface="Calibri"/>
-              </a:defRPr>
-            </a:pPr>
-            <a:r>
-              <a:t>Customer Pain Signals</a:t>
-            </a:r>
-          </a:p>
-        </p:txBody>
-      </p:sp>
-      <p:sp>
-        <p:nvSpPr>
-          <p:cNvPr id="20" name="TextBox 19"/>
-          <p:cNvSpPr txBox="1"/>
-          <p:nvPr/>
-        </p:nvSpPr>
-        <p:spPr>
-          <a:xfrm>
-            <a:off x="1005840" y="4709160"/>
-            <a:ext cx="2651760" cy="1691640"/>
+            <a:ext cx="4389120" cy="2011680"/>
           </a:xfrm>
           <a:prstGeom prst="rect">
             <a:avLst/>
@@ -6883,65 +7570,65 @@
           <a:p>
             <a:pPr>
               <a:spcAft>
-                <a:spcPts val="1200"/>
+                <a:spcPts val="1100"/>
               </a:spcAft>
-              <a:defRPr sz="1200" b="0">
-                <a:solidFill>
-                  <a:srgbClr val="94A3B8"/>
-                </a:solidFill>
-                <a:latin typeface="Calibri"/>
-              </a:defRPr>
-            </a:pPr>
-            <a:r>
-              <a:t>•  Trustpilot: warranty frustration</a:t>
+              <a:defRPr sz="1100" b="0">
+                <a:solidFill>
+                  <a:srgbClr val="D9DBD8"/>
+                </a:solidFill>
+                <a:latin typeface="Calibri"/>
+              </a:defRPr>
+            </a:pPr>
+            <a:r>
+              <a:t>•  Trustpilot: warranty frustration and support delays</a:t>
             </a:r>
           </a:p>
           <a:p>
             <a:pPr>
               <a:spcAft>
-                <a:spcPts val="1200"/>
+                <a:spcPts val="1100"/>
               </a:spcAft>
-              <a:defRPr sz="1200" b="0">
-                <a:solidFill>
-                  <a:srgbClr val="94A3B8"/>
-                </a:solidFill>
-                <a:latin typeface="Calibri"/>
-              </a:defRPr>
-            </a:pPr>
-            <a:r>
-              <a:t>•  Reddit: pairing + firmware failures</a:t>
+              <a:defRPr sz="1100" b="0">
+                <a:solidFill>
+                  <a:srgbClr val="D9DBD8"/>
+                </a:solidFill>
+                <a:latin typeface="Calibri"/>
+              </a:defRPr>
+            </a:pPr>
+            <a:r>
+              <a:t>•  Reddit: pairing issues, firmware failures, shifting anomalies</a:t>
             </a:r>
           </a:p>
           <a:p>
             <a:pPr>
               <a:spcAft>
-                <a:spcPts val="1200"/>
+                <a:spcPts val="1100"/>
               </a:spcAft>
-              <a:defRPr sz="1200" b="0">
-                <a:solidFill>
-                  <a:srgbClr val="94A3B8"/>
-                </a:solidFill>
-                <a:latin typeface="Calibri"/>
-              </a:defRPr>
-            </a:pPr>
-            <a:r>
-              <a:t>•  App store: AXS + Hammerhead complaints</a:t>
+              <a:defRPr sz="1100" b="0">
+                <a:solidFill>
+                  <a:srgbClr val="D9DBD8"/>
+                </a:solidFill>
+                <a:latin typeface="Calibri"/>
+              </a:defRPr>
+            </a:pPr>
+            <a:r>
+              <a:t>•  App stores: AXS and Hammerhead companion complaints</a:t>
             </a:r>
           </a:p>
           <a:p>
             <a:pPr>
               <a:spcAft>
-                <a:spcPts val="1200"/>
+                <a:spcPts val="1100"/>
               </a:spcAft>
-              <a:defRPr sz="1200" b="0">
-                <a:solidFill>
-                  <a:srgbClr val="94A3B8"/>
-                </a:solidFill>
-                <a:latin typeface="Calibri"/>
-              </a:defRPr>
-            </a:pPr>
-            <a:r>
-              <a:t>•  Riders stating intent to switch to Shimano</a:t>
+              <a:defRPr sz="1100" b="0">
+                <a:solidFill>
+                  <a:srgbClr val="D9DBD8"/>
+                </a:solidFill>
+                <a:latin typeface="Calibri"/>
+              </a:defRPr>
+            </a:pPr>
+            <a:r>
+              <a:t>•  Riders explicitly stating intent to switch to Shimano</a:t>
             </a:r>
           </a:p>
         </p:txBody>
@@ -6954,20 +7641,20 @@
         </p:nvSpPr>
         <p:spPr>
           <a:xfrm>
-            <a:off x="4206240" y="4114800"/>
-            <a:ext cx="3200400" cy="2468880"/>
+            <a:off x="6035040" y="3749039"/>
+            <a:ext cx="5486400" cy="2743200"/>
           </a:xfrm>
           <a:prstGeom prst="roundRect">
             <a:avLst>
-              <a:gd name="adj" fmla="val 5000"/>
+              <a:gd name="adj" fmla="val 4000"/>
             </a:avLst>
           </a:prstGeom>
           <a:solidFill>
-            <a:srgbClr val="16213A"/>
+            <a:srgbClr val="2A2A2C"/>
           </a:solidFill>
           <a:ln w="12700">
             <a:solidFill>
-              <a:srgbClr val="1E293B"/>
+              <a:srgbClr val="3A3A3C"/>
             </a:solidFill>
           </a:ln>
         </p:spPr>
@@ -7001,30 +7688,30 @@
         </p:nvSpPr>
         <p:spPr>
           <a:xfrm>
-            <a:off x="4480560" y="4297680"/>
-            <a:ext cx="2651760" cy="365760"/>
-          </a:xfrm>
-          <a:prstGeom prst="rect">
-            <a:avLst/>
-          </a:prstGeom>
-          <a:noFill/>
-        </p:spPr>
-        <p:txBody>
-          <a:bodyPr wrap="square">
-            <a:spAutoFit/>
-          </a:bodyPr>
-          <a:lstStyle/>
-          <a:p>
-            <a:pPr algn="l">
-              <a:defRPr sz="1600" b="1">
-                <a:solidFill>
-                  <a:srgbClr val="34D399"/>
-                </a:solidFill>
-                <a:latin typeface="Calibri"/>
-              </a:defRPr>
-            </a:pPr>
-            <a:r>
-              <a:t>Why Support is the Right Pilot</a:t>
+            <a:off x="6309360" y="3886200"/>
+            <a:ext cx="4572000" cy="320040"/>
+          </a:xfrm>
+          <a:prstGeom prst="rect">
+            <a:avLst/>
+          </a:prstGeom>
+          <a:noFill/>
+        </p:spPr>
+        <p:txBody>
+          <a:bodyPr wrap="square">
+            <a:spAutoFit/>
+          </a:bodyPr>
+          <a:lstStyle/>
+          <a:p>
+            <a:pPr algn="l">
+              <a:defRPr sz="1400" b="1">
+                <a:solidFill>
+                  <a:srgbClr val="FFFFFF"/>
+                </a:solidFill>
+                <a:latin typeface="Calibri"/>
+              </a:defRPr>
+            </a:pPr>
+            <a:r>
+              <a:t>Why SRAM Has the Data to Fix This</a:t>
             </a:r>
           </a:p>
         </p:txBody>
@@ -7037,8 +7724,8 @@
         </p:nvSpPr>
         <p:spPr>
           <a:xfrm>
-            <a:off x="4480560" y="4709160"/>
-            <a:ext cx="2651760" cy="1691640"/>
+            <a:off x="6309360" y="4297680"/>
+            <a:ext cx="4937760" cy="2011680"/>
           </a:xfrm>
           <a:prstGeom prst="rect">
             <a:avLst/>
@@ -7053,235 +7740,65 @@
           <a:p>
             <a:pPr>
               <a:spcAft>
-                <a:spcPts val="1200"/>
+                <a:spcPts val="1100"/>
               </a:spcAft>
-              <a:defRPr sz="1200" b="0">
-                <a:solidFill>
-                  <a:srgbClr val="94A3B8"/>
-                </a:solidFill>
-                <a:latin typeface="Calibri"/>
-              </a:defRPr>
-            </a:pPr>
-            <a:r>
-              <a:t>•  Pain is visible and measurable</a:t>
+              <a:defRPr sz="1100" b="0">
+                <a:solidFill>
+                  <a:srgbClr val="D9DBD8"/>
+                </a:solidFill>
+                <a:latin typeface="Calibri"/>
+              </a:defRPr>
+            </a:pPr>
+            <a:r>
+              <a:t>•  Structured knowledge base: manuals, compatibility guides, troubleshooting</a:t>
             </a:r>
           </a:p>
           <a:p>
             <a:pPr>
               <a:spcAft>
-                <a:spcPts val="1200"/>
+                <a:spcPts val="1100"/>
               </a:spcAft>
-              <a:defRPr sz="1200" b="0">
-                <a:solidFill>
-                  <a:srgbClr val="94A3B8"/>
-                </a:solidFill>
-                <a:latin typeface="Calibri"/>
-              </a:defRPr>
-            </a:pPr>
-            <a:r>
-              <a:t>•  Data advantage already in place</a:t>
+              <a:defRPr sz="1100" b="0">
+                <a:solidFill>
+                  <a:srgbClr val="D9DBD8"/>
+                </a:solidFill>
+                <a:latin typeface="Calibri"/>
+              </a:defRPr>
+            </a:pPr>
+            <a:r>
+              <a:t>•  AXS telemetry: firmware versions, error codes, device state</a:t>
             </a:r>
           </a:p>
           <a:p>
             <a:pPr>
               <a:spcAft>
-                <a:spcPts val="1200"/>
+                <a:spcPts val="1100"/>
               </a:spcAft>
-              <a:defRPr sz="1200" b="0">
-                <a:solidFill>
-                  <a:srgbClr val="94A3B8"/>
-                </a:solidFill>
-                <a:latin typeface="Calibri"/>
-              </a:defRPr>
-            </a:pPr>
-            <a:r>
-              <a:t>•  High volume of repeatable questions</a:t>
+              <a:defRPr sz="1100" b="0">
+                <a:solidFill>
+                  <a:srgbClr val="D9DBD8"/>
+                </a:solidFill>
+                <a:latin typeface="Calibri"/>
+              </a:defRPr>
+            </a:pPr>
+            <a:r>
+              <a:t>•  Hammerhead ride and device data</a:t>
             </a:r>
           </a:p>
           <a:p>
             <a:pPr>
               <a:spcAft>
-                <a:spcPts val="1200"/>
+                <a:spcPts val="1100"/>
               </a:spcAft>
-              <a:defRPr sz="1200" b="0">
-                <a:solidFill>
-                  <a:srgbClr val="94A3B8"/>
-                </a:solidFill>
-                <a:latin typeface="Calibri"/>
-              </a:defRPr>
-            </a:pPr>
-            <a:r>
-              <a:t>•  No new data collection required</a:t>
-            </a:r>
-          </a:p>
-        </p:txBody>
-      </p:sp>
-      <p:sp>
-        <p:nvSpPr>
-          <p:cNvPr id="24" name="Rounded Rectangle 23"/>
-          <p:cNvSpPr/>
-          <p:nvPr/>
-        </p:nvSpPr>
-        <p:spPr>
-          <a:xfrm>
-            <a:off x="7680960" y="4114800"/>
-            <a:ext cx="3749039" cy="2468880"/>
-          </a:xfrm>
-          <a:prstGeom prst="roundRect">
-            <a:avLst>
-              <a:gd name="adj" fmla="val 5000"/>
-            </a:avLst>
-          </a:prstGeom>
-          <a:solidFill>
-            <a:srgbClr val="16213A"/>
-          </a:solidFill>
-          <a:ln w="12700">
-            <a:solidFill>
-              <a:srgbClr val="1E293B"/>
-            </a:solidFill>
-          </a:ln>
-        </p:spPr>
-        <p:style>
-          <a:lnRef idx="1">
-            <a:schemeClr val="accent1"/>
-          </a:lnRef>
-          <a:fillRef idx="3">
-            <a:schemeClr val="accent1"/>
-          </a:fillRef>
-          <a:effectRef idx="2">
-            <a:schemeClr val="accent1"/>
-          </a:effectRef>
-          <a:fontRef idx="minor">
-            <a:schemeClr val="lt1"/>
-          </a:fontRef>
-        </p:style>
-        <p:txBody>
-          <a:bodyPr rtlCol="0" anchor="ctr"/>
-          <a:lstStyle/>
-          <a:p>
-            <a:pPr algn="ctr"/>
-          </a:p>
-        </p:txBody>
-      </p:sp>
-      <p:sp>
-        <p:nvSpPr>
-          <p:cNvPr id="25" name="TextBox 24"/>
-          <p:cNvSpPr txBox="1"/>
-          <p:nvPr/>
-        </p:nvSpPr>
-        <p:spPr>
-          <a:xfrm>
-            <a:off x="7955280" y="4297680"/>
-            <a:ext cx="3200399" cy="365760"/>
-          </a:xfrm>
-          <a:prstGeom prst="rect">
-            <a:avLst/>
-          </a:prstGeom>
-          <a:noFill/>
-        </p:spPr>
-        <p:txBody>
-          <a:bodyPr wrap="square">
-            <a:spAutoFit/>
-          </a:bodyPr>
-          <a:lstStyle/>
-          <a:p>
-            <a:pPr algn="l">
-              <a:defRPr sz="1600" b="1">
-                <a:solidFill>
-                  <a:srgbClr val="389FF5"/>
-                </a:solidFill>
-                <a:latin typeface="Calibri"/>
-              </a:defRPr>
-            </a:pPr>
-            <a:r>
-              <a:t>SRAM's Data Advantage</a:t>
-            </a:r>
-          </a:p>
-        </p:txBody>
-      </p:sp>
-      <p:sp>
-        <p:nvSpPr>
-          <p:cNvPr id="26" name="TextBox 25"/>
-          <p:cNvSpPr txBox="1"/>
-          <p:nvPr/>
-        </p:nvSpPr>
-        <p:spPr>
-          <a:xfrm>
-            <a:off x="7955280" y="4709160"/>
-            <a:ext cx="3200399" cy="1691640"/>
-          </a:xfrm>
-          <a:prstGeom prst="rect">
-            <a:avLst/>
-          </a:prstGeom>
-          <a:noFill/>
-        </p:spPr>
-        <p:txBody>
-          <a:bodyPr wrap="square">
-            <a:spAutoFit/>
-          </a:bodyPr>
-          <a:lstStyle/>
-          <a:p>
-            <a:pPr>
-              <a:spcAft>
-                <a:spcPts val="1200"/>
-              </a:spcAft>
-              <a:defRPr sz="1200" b="0">
-                <a:solidFill>
-                  <a:srgbClr val="94A3B8"/>
-                </a:solidFill>
-                <a:latin typeface="Calibri"/>
-              </a:defRPr>
-            </a:pPr>
-            <a:r>
-              <a:t>•  Structured knowledge base (manuals, guides)</a:t>
-            </a:r>
-          </a:p>
-          <a:p>
-            <a:pPr>
-              <a:spcAft>
-                <a:spcPts val="1200"/>
-              </a:spcAft>
-              <a:defRPr sz="1200" b="0">
-                <a:solidFill>
-                  <a:srgbClr val="94A3B8"/>
-                </a:solidFill>
-                <a:latin typeface="Calibri"/>
-              </a:defRPr>
-            </a:pPr>
-            <a:r>
-              <a:t>•  AXS telemetry (firmware, error codes)</a:t>
-            </a:r>
-          </a:p>
-          <a:p>
-            <a:pPr>
-              <a:spcAft>
-                <a:spcPts val="1200"/>
-              </a:spcAft>
-              <a:defRPr sz="1200" b="0">
-                <a:solidFill>
-                  <a:srgbClr val="94A3B8"/>
-                </a:solidFill>
-                <a:latin typeface="Calibri"/>
-              </a:defRPr>
-            </a:pPr>
-            <a:r>
-              <a:t>•  Hammerhead device data</a:t>
-            </a:r>
-          </a:p>
-          <a:p>
-            <a:pPr>
-              <a:spcAft>
-                <a:spcPts val="1200"/>
-              </a:spcAft>
-              <a:defRPr sz="1200" b="0">
-                <a:solidFill>
-                  <a:srgbClr val="94A3B8"/>
-                </a:solidFill>
-                <a:latin typeface="Calibri"/>
-              </a:defRPr>
-            </a:pPr>
-            <a:r>
-              <a:t>•  Compatibility rules already documented</a:t>
+              <a:defRPr sz="1100" b="0">
+                <a:solidFill>
+                  <a:srgbClr val="D9DBD8"/>
+                </a:solidFill>
+                <a:latin typeface="Calibri"/>
+              </a:defRPr>
+            </a:pPr>
+            <a:r>
+              <a:t>•  Compatibility rules already documented and maintained</a:t>
             </a:r>
           </a:p>
         </p:txBody>
@@ -7300,7 +7817,7 @@
     <p:bg>
       <p:bgPr>
         <a:solidFill>
-          <a:srgbClr val="0F172A"/>
+          <a:srgbClr val="1C1C1E"/>
         </a:solidFill>
         <a:effectLst/>
       </p:bgPr>
@@ -7321,29 +7838,29 @@
         <p:spPr>
           <a:xfrm>
             <a:off x="731520" y="274320"/>
-            <a:ext cx="5486400" cy="274320"/>
-          </a:xfrm>
-          <a:prstGeom prst="rect">
-            <a:avLst/>
-          </a:prstGeom>
-          <a:noFill/>
-        </p:spPr>
-        <p:txBody>
-          <a:bodyPr wrap="square">
-            <a:spAutoFit/>
-          </a:bodyPr>
-          <a:lstStyle/>
-          <a:p>
-            <a:pPr algn="l">
-              <a:defRPr sz="1200" b="1">
-                <a:solidFill>
-                  <a:srgbClr val="34D399"/>
-                </a:solidFill>
-                <a:latin typeface="Calibri"/>
-              </a:defRPr>
-            </a:pPr>
-            <a:r>
-              <a:t>WHAT COULD BE</a:t>
+            <a:ext cx="5486400" cy="228600"/>
+          </a:xfrm>
+          <a:prstGeom prst="rect">
+            <a:avLst/>
+          </a:prstGeom>
+          <a:noFill/>
+        </p:spPr>
+        <p:txBody>
+          <a:bodyPr wrap="square">
+            <a:spAutoFit/>
+          </a:bodyPr>
+          <a:lstStyle/>
+          <a:p>
+            <a:pPr algn="l">
+              <a:defRPr sz="1100" b="1">
+                <a:solidFill>
+                  <a:srgbClr val="E51937"/>
+                </a:solidFill>
+                <a:latin typeface="Calibri"/>
+              </a:defRPr>
+            </a:pPr>
+            <a:r>
+              <a:t>THE SOLUTION</a:t>
             </a:r>
           </a:p>
         </p:txBody>
@@ -7356,8 +7873,8 @@
         </p:nvSpPr>
         <p:spPr>
           <a:xfrm>
-            <a:off x="731520" y="594360"/>
-            <a:ext cx="9144000" cy="457200"/>
+            <a:off x="731520" y="548640"/>
+            <a:ext cx="10058400" cy="457200"/>
           </a:xfrm>
           <a:prstGeom prst="rect">
             <a:avLst/>
@@ -7373,13 +7890,13 @@
             <a:pPr algn="l">
               <a:defRPr sz="3200" b="1">
                 <a:solidFill>
-                  <a:srgbClr val="F8FAFC"/>
-                </a:solidFill>
-                <a:latin typeface="Calibri"/>
-              </a:defRPr>
-            </a:pPr>
-            <a:r>
-              <a:t>The 90-Day Support Pilot</a:t>
+                  <a:srgbClr val="FFFFFF"/>
+                </a:solidFill>
+                <a:latin typeface="Calibri"/>
+              </a:defRPr>
+            </a:pPr>
+            <a:r>
+              <a:t>90-Day Support Pilot</a:t>
             </a:r>
           </a:p>
         </p:txBody>
@@ -7392,14 +7909,14 @@
         </p:nvSpPr>
         <p:spPr>
           <a:xfrm>
-            <a:off x="731520" y="1097280"/>
-            <a:ext cx="1097280" cy="38100"/>
+            <a:off x="731520" y="1051560"/>
+            <a:ext cx="914400" cy="25400"/>
           </a:xfrm>
           <a:prstGeom prst="rect">
             <a:avLst/>
           </a:prstGeom>
           <a:solidFill>
-            <a:srgbClr val="34D399"/>
+            <a:srgbClr val="E51937"/>
           </a:solidFill>
           <a:ln>
             <a:noFill/>
@@ -7429,50 +7946,14 @@
       </p:sp>
       <p:sp>
         <p:nvSpPr>
-          <p:cNvPr id="5" name="TextBox 4"/>
-          <p:cNvSpPr txBox="1"/>
+          <p:cNvPr id="5" name="Rounded Rectangle 4"/>
+          <p:cNvSpPr/>
           <p:nvPr/>
         </p:nvSpPr>
         <p:spPr>
           <a:xfrm>
             <a:off x="731520" y="1463040"/>
-            <a:ext cx="5486400" cy="365760"/>
-          </a:xfrm>
-          <a:prstGeom prst="rect">
-            <a:avLst/>
-          </a:prstGeom>
-          <a:noFill/>
-        </p:spPr>
-        <p:txBody>
-          <a:bodyPr wrap="square">
-            <a:spAutoFit/>
-          </a:bodyPr>
-          <a:lstStyle/>
-          <a:p>
-            <a:pPr algn="l">
-              <a:defRPr sz="1800" b="1">
-                <a:solidFill>
-                  <a:srgbClr val="F8FAFC"/>
-                </a:solidFill>
-                <a:latin typeface="Calibri"/>
-              </a:defRPr>
-            </a:pPr>
-            <a:r>
-              <a:t>How It Works</a:t>
-            </a:r>
-          </a:p>
-        </p:txBody>
-      </p:sp>
-      <p:sp>
-        <p:nvSpPr>
-          <p:cNvPr id="6" name="Rounded Rectangle 5"/>
-          <p:cNvSpPr/>
-          <p:nvPr/>
-        </p:nvSpPr>
-        <p:spPr>
-          <a:xfrm>
-            <a:off x="731520" y="1920240"/>
-            <a:ext cx="2057400" cy="2103120"/>
+            <a:ext cx="2057400" cy="2011680"/>
           </a:xfrm>
           <a:prstGeom prst="roundRect">
             <a:avLst>
@@ -7480,11 +7961,11 @@
             </a:avLst>
           </a:prstGeom>
           <a:solidFill>
-            <a:srgbClr val="16213A"/>
+            <a:srgbClr val="2A2A2C"/>
           </a:solidFill>
           <a:ln w="12700">
             <a:solidFill>
-              <a:srgbClr val="1E293B"/>
+              <a:srgbClr val="3A3A3C"/>
             </a:solidFill>
           </a:ln>
         </p:spPr>
@@ -7512,20 +7993,20 @@
       </p:sp>
       <p:sp>
         <p:nvSpPr>
-          <p:cNvPr id="7" name="Oval 6"/>
+          <p:cNvPr id="6" name="Oval 5"/>
           <p:cNvSpPr/>
           <p:nvPr/>
         </p:nvSpPr>
         <p:spPr>
           <a:xfrm>
-            <a:off x="868680" y="2057400"/>
-            <a:ext cx="365760" cy="365760"/>
+            <a:off x="868680" y="1600200"/>
+            <a:ext cx="320040" cy="320040"/>
           </a:xfrm>
           <a:prstGeom prst="ellipse">
             <a:avLst/>
           </a:prstGeom>
           <a:solidFill>
-            <a:srgbClr val="389FF5"/>
+            <a:srgbClr val="E51937"/>
           </a:solidFill>
           <a:ln>
             <a:noFill/>
@@ -7546,13 +8027,13 @@
           </a:fontRef>
         </p:style>
         <p:txBody>
-          <a:bodyPr rtlCol="0" anchor="ctr" wrap="none"/>
+          <a:bodyPr rtlCol="0" anchor="ctr"/>
           <a:lstStyle/>
           <a:p>
             <a:pPr algn="ctr">
-              <a:defRPr sz="1600" b="1">
-                <a:solidFill>
-                  <a:srgbClr val="F8FAFC"/>
+              <a:defRPr sz="1400" b="1">
+                <a:solidFill>
+                  <a:srgbClr val="FFFFFF"/>
                 </a:solidFill>
               </a:defRPr>
             </a:pPr>
@@ -7564,50 +8045,50 @@
       </p:sp>
       <p:sp>
         <p:nvSpPr>
+          <p:cNvPr id="7" name="TextBox 6"/>
+          <p:cNvSpPr txBox="1"/>
+          <p:nvPr/>
+        </p:nvSpPr>
+        <p:spPr>
+          <a:xfrm>
+            <a:off x="868680" y="2011680"/>
+            <a:ext cx="1783080" cy="228600"/>
+          </a:xfrm>
+          <a:prstGeom prst="rect">
+            <a:avLst/>
+          </a:prstGeom>
+          <a:noFill/>
+        </p:spPr>
+        <p:txBody>
+          <a:bodyPr wrap="square">
+            <a:spAutoFit/>
+          </a:bodyPr>
+          <a:lstStyle/>
+          <a:p>
+            <a:pPr algn="l">
+              <a:defRPr sz="1000" b="1">
+                <a:solidFill>
+                  <a:srgbClr val="E51937"/>
+                </a:solidFill>
+                <a:latin typeface="Calibri"/>
+              </a:defRPr>
+            </a:pPr>
+            <a:r>
+              <a:t>TICKET IN</a:t>
+            </a:r>
+          </a:p>
+        </p:txBody>
+      </p:sp>
+      <p:sp>
+        <p:nvSpPr>
           <p:cNvPr id="8" name="TextBox 7"/>
           <p:cNvSpPr txBox="1"/>
           <p:nvPr/>
         </p:nvSpPr>
         <p:spPr>
           <a:xfrm>
-            <a:off x="868680" y="2514600"/>
-            <a:ext cx="1783080" cy="320040"/>
-          </a:xfrm>
-          <a:prstGeom prst="rect">
-            <a:avLst/>
-          </a:prstGeom>
-          <a:noFill/>
-        </p:spPr>
-        <p:txBody>
-          <a:bodyPr wrap="square">
-            <a:spAutoFit/>
-          </a:bodyPr>
-          <a:lstStyle/>
-          <a:p>
-            <a:pPr algn="l">
-              <a:defRPr sz="1100" b="1">
-                <a:solidFill>
-                  <a:srgbClr val="389FF5"/>
-                </a:solidFill>
-                <a:latin typeface="Calibri"/>
-              </a:defRPr>
-            </a:pPr>
-            <a:r>
-              <a:t>TICKET ARRIVES</a:t>
-            </a:r>
-          </a:p>
-        </p:txBody>
-      </p:sp>
-      <p:sp>
-        <p:nvSpPr>
-          <p:cNvPr id="9" name="TextBox 8"/>
-          <p:cNvSpPr txBox="1"/>
-          <p:nvPr/>
-        </p:nvSpPr>
-        <p:spPr>
-          <a:xfrm>
-            <a:off x="868680" y="2834640"/>
-            <a:ext cx="1783080" cy="457200"/>
+            <a:off x="868680" y="2286000"/>
+            <a:ext cx="1783080" cy="914400"/>
           </a:xfrm>
           <a:prstGeom prst="rect">
             <a:avLst/>
@@ -7623,7 +8104,7 @@
             <a:pPr algn="l">
               <a:defRPr sz="1100" b="0">
                 <a:solidFill>
-                  <a:srgbClr val="94A3B8"/>
+                  <a:srgbClr val="D9DBD8"/>
                 </a:solidFill>
                 <a:latin typeface="Calibri"/>
               </a:defRPr>
@@ -7636,50 +8117,14 @@
       </p:sp>
       <p:sp>
         <p:nvSpPr>
-          <p:cNvPr id="10" name="TextBox 9"/>
-          <p:cNvSpPr txBox="1"/>
-          <p:nvPr/>
-        </p:nvSpPr>
-        <p:spPr>
-          <a:xfrm>
-            <a:off x="868680" y="3246120"/>
-            <a:ext cx="1783080" cy="457200"/>
-          </a:xfrm>
-          <a:prstGeom prst="rect">
-            <a:avLst/>
-          </a:prstGeom>
-          <a:noFill/>
-        </p:spPr>
-        <p:txBody>
-          <a:bodyPr wrap="square">
-            <a:spAutoFit/>
-          </a:bodyPr>
-          <a:lstStyle/>
-          <a:p>
-            <a:pPr algn="l">
-              <a:defRPr sz="1000" b="0">
-                <a:solidFill>
-                  <a:srgbClr val="64748B"/>
-                </a:solidFill>
-                <a:latin typeface="Calibri"/>
-              </a:defRPr>
-            </a:pPr>
-            <a:r>
-              <a:t>Zendesk AI routes and classifies</a:t>
-            </a:r>
-          </a:p>
-        </p:txBody>
-      </p:sp>
-      <p:sp>
-        <p:nvSpPr>
-          <p:cNvPr id="11" name="Rounded Rectangle 10"/>
+          <p:cNvPr id="9" name="Rounded Rectangle 8"/>
           <p:cNvSpPr/>
           <p:nvPr/>
         </p:nvSpPr>
         <p:spPr>
           <a:xfrm>
-            <a:off x="2971800" y="1920240"/>
-            <a:ext cx="2057400" cy="2103120"/>
+            <a:off x="2971800" y="1463040"/>
+            <a:ext cx="2057400" cy="2011680"/>
           </a:xfrm>
           <a:prstGeom prst="roundRect">
             <a:avLst>
@@ -7687,11 +8132,11 @@
             </a:avLst>
           </a:prstGeom>
           <a:solidFill>
-            <a:srgbClr val="16213A"/>
+            <a:srgbClr val="2A2A2C"/>
           </a:solidFill>
           <a:ln w="12700">
             <a:solidFill>
-              <a:srgbClr val="1E293B"/>
+              <a:srgbClr val="3A3A3C"/>
             </a:solidFill>
           </a:ln>
         </p:spPr>
@@ -7719,20 +8164,20 @@
       </p:sp>
       <p:sp>
         <p:nvSpPr>
-          <p:cNvPr id="12" name="Oval 11"/>
+          <p:cNvPr id="10" name="Oval 9"/>
           <p:cNvSpPr/>
           <p:nvPr/>
         </p:nvSpPr>
         <p:spPr>
           <a:xfrm>
-            <a:off x="3108960" y="2057400"/>
-            <a:ext cx="365760" cy="365760"/>
+            <a:off x="3108960" y="1600200"/>
+            <a:ext cx="320040" cy="320040"/>
           </a:xfrm>
           <a:prstGeom prst="ellipse">
             <a:avLst/>
           </a:prstGeom>
           <a:solidFill>
-            <a:srgbClr val="389FF5"/>
+            <a:srgbClr val="E51937"/>
           </a:solidFill>
           <a:ln>
             <a:noFill/>
@@ -7753,13 +8198,13 @@
           </a:fontRef>
         </p:style>
         <p:txBody>
-          <a:bodyPr rtlCol="0" anchor="ctr" wrap="none"/>
+          <a:bodyPr rtlCol="0" anchor="ctr"/>
           <a:lstStyle/>
           <a:p>
             <a:pPr algn="ctr">
-              <a:defRPr sz="1600" b="1">
-                <a:solidFill>
-                  <a:srgbClr val="F8FAFC"/>
+              <a:defRPr sz="1400" b="1">
+                <a:solidFill>
+                  <a:srgbClr val="FFFFFF"/>
                 </a:solidFill>
               </a:defRPr>
             </a:pPr>
@@ -7771,30 +8216,30 @@
       </p:sp>
       <p:sp>
         <p:nvSpPr>
-          <p:cNvPr id="13" name="TextBox 12"/>
-          <p:cNvSpPr txBox="1"/>
-          <p:nvPr/>
-        </p:nvSpPr>
-        <p:spPr>
-          <a:xfrm>
-            <a:off x="3108960" y="2514600"/>
-            <a:ext cx="1783080" cy="320040"/>
-          </a:xfrm>
-          <a:prstGeom prst="rect">
-            <a:avLst/>
-          </a:prstGeom>
-          <a:noFill/>
-        </p:spPr>
-        <p:txBody>
-          <a:bodyPr wrap="square">
-            <a:spAutoFit/>
-          </a:bodyPr>
-          <a:lstStyle/>
-          <a:p>
-            <a:pPr algn="l">
-              <a:defRPr sz="1100" b="1">
-                <a:solidFill>
-                  <a:srgbClr val="389FF5"/>
+          <p:cNvPr id="11" name="TextBox 10"/>
+          <p:cNvSpPr txBox="1"/>
+          <p:nvPr/>
+        </p:nvSpPr>
+        <p:spPr>
+          <a:xfrm>
+            <a:off x="3108960" y="2011680"/>
+            <a:ext cx="1783080" cy="228600"/>
+          </a:xfrm>
+          <a:prstGeom prst="rect">
+            <a:avLst/>
+          </a:prstGeom>
+          <a:noFill/>
+        </p:spPr>
+        <p:txBody>
+          <a:bodyPr wrap="square">
+            <a:spAutoFit/>
+          </a:bodyPr>
+          <a:lstStyle/>
+          <a:p>
+            <a:pPr algn="l">
+              <a:defRPr sz="1000" b="1">
+                <a:solidFill>
+                  <a:srgbClr val="E51937"/>
                 </a:solidFill>
                 <a:latin typeface="Calibri"/>
               </a:defRPr>
@@ -7807,14 +8252,14 @@
       </p:sp>
       <p:sp>
         <p:nvSpPr>
-          <p:cNvPr id="14" name="TextBox 13"/>
-          <p:cNvSpPr txBox="1"/>
-          <p:nvPr/>
-        </p:nvSpPr>
-        <p:spPr>
-          <a:xfrm>
-            <a:off x="3108960" y="2834640"/>
-            <a:ext cx="1783080" cy="457200"/>
+          <p:cNvPr id="12" name="TextBox 11"/>
+          <p:cNvSpPr txBox="1"/>
+          <p:nvPr/>
+        </p:nvSpPr>
+        <p:spPr>
+          <a:xfrm>
+            <a:off x="3108960" y="2286000"/>
+            <a:ext cx="1783080" cy="914400"/>
           </a:xfrm>
           <a:prstGeom prst="rect">
             <a:avLst/>
@@ -7830,63 +8275,27 @@
             <a:pPr algn="l">
               <a:defRPr sz="1100" b="0">
                 <a:solidFill>
-                  <a:srgbClr val="94A3B8"/>
-                </a:solidFill>
-                <a:latin typeface="Calibri"/>
-              </a:defRPr>
-            </a:pPr>
-            <a:r>
-              <a:t>Azure AI Search finds approved docs</a:t>
-            </a:r>
-          </a:p>
-        </p:txBody>
-      </p:sp>
-      <p:sp>
-        <p:nvSpPr>
-          <p:cNvPr id="15" name="TextBox 14"/>
-          <p:cNvSpPr txBox="1"/>
-          <p:nvPr/>
-        </p:nvSpPr>
-        <p:spPr>
-          <a:xfrm>
-            <a:off x="3108960" y="3246120"/>
-            <a:ext cx="1783080" cy="457200"/>
-          </a:xfrm>
-          <a:prstGeom prst="rect">
-            <a:avLst/>
-          </a:prstGeom>
-          <a:noFill/>
-        </p:spPr>
-        <p:txBody>
-          <a:bodyPr wrap="square">
-            <a:spAutoFit/>
-          </a:bodyPr>
-          <a:lstStyle/>
-          <a:p>
-            <a:pPr algn="l">
-              <a:defRPr sz="1000" b="0">
-                <a:solidFill>
-                  <a:srgbClr val="64748B"/>
-                </a:solidFill>
-                <a:latin typeface="Calibri"/>
-              </a:defRPr>
-            </a:pPr>
-            <a:r>
-              <a:t>Pulls telemetry context from AXS</a:t>
-            </a:r>
-          </a:p>
-        </p:txBody>
-      </p:sp>
-      <p:sp>
-        <p:nvSpPr>
-          <p:cNvPr id="16" name="Rounded Rectangle 15"/>
+                  <a:srgbClr val="D9DBD8"/>
+                </a:solidFill>
+                <a:latin typeface="Calibri"/>
+              </a:defRPr>
+            </a:pPr>
+            <a:r>
+              <a:t>Azure AI Search finds approved docs + AXS telemetry</a:t>
+            </a:r>
+          </a:p>
+        </p:txBody>
+      </p:sp>
+      <p:sp>
+        <p:nvSpPr>
+          <p:cNvPr id="13" name="Rounded Rectangle 12"/>
           <p:cNvSpPr/>
           <p:nvPr/>
         </p:nvSpPr>
         <p:spPr>
           <a:xfrm>
-            <a:off x="5212080" y="1920240"/>
-            <a:ext cx="2057400" cy="2103120"/>
+            <a:off x="5212080" y="1463040"/>
+            <a:ext cx="2057400" cy="2011680"/>
           </a:xfrm>
           <a:prstGeom prst="roundRect">
             <a:avLst>
@@ -7894,11 +8303,11 @@
             </a:avLst>
           </a:prstGeom>
           <a:solidFill>
-            <a:srgbClr val="16213A"/>
+            <a:srgbClr val="2A2A2C"/>
           </a:solidFill>
           <a:ln w="12700">
             <a:solidFill>
-              <a:srgbClr val="1E293B"/>
+              <a:srgbClr val="3A3A3C"/>
             </a:solidFill>
           </a:ln>
         </p:spPr>
@@ -7926,20 +8335,20 @@
       </p:sp>
       <p:sp>
         <p:nvSpPr>
-          <p:cNvPr id="17" name="Oval 16"/>
+          <p:cNvPr id="14" name="Oval 13"/>
           <p:cNvSpPr/>
           <p:nvPr/>
         </p:nvSpPr>
         <p:spPr>
           <a:xfrm>
-            <a:off x="5349240" y="2057400"/>
-            <a:ext cx="365760" cy="365760"/>
+            <a:off x="5349240" y="1600200"/>
+            <a:ext cx="320040" cy="320040"/>
           </a:xfrm>
           <a:prstGeom prst="ellipse">
             <a:avLst/>
           </a:prstGeom>
           <a:solidFill>
-            <a:srgbClr val="389FF5"/>
+            <a:srgbClr val="E51937"/>
           </a:solidFill>
           <a:ln>
             <a:noFill/>
@@ -7960,13 +8369,13 @@
           </a:fontRef>
         </p:style>
         <p:txBody>
-          <a:bodyPr rtlCol="0" anchor="ctr" wrap="none"/>
+          <a:bodyPr rtlCol="0" anchor="ctr"/>
           <a:lstStyle/>
           <a:p>
             <a:pPr algn="ctr">
-              <a:defRPr sz="1600" b="1">
-                <a:solidFill>
-                  <a:srgbClr val="F8FAFC"/>
+              <a:defRPr sz="1400" b="1">
+                <a:solidFill>
+                  <a:srgbClr val="FFFFFF"/>
                 </a:solidFill>
               </a:defRPr>
             </a:pPr>
@@ -7978,30 +8387,30 @@
       </p:sp>
       <p:sp>
         <p:nvSpPr>
-          <p:cNvPr id="18" name="TextBox 17"/>
-          <p:cNvSpPr txBox="1"/>
-          <p:nvPr/>
-        </p:nvSpPr>
-        <p:spPr>
-          <a:xfrm>
-            <a:off x="5349240" y="2514600"/>
-            <a:ext cx="1783080" cy="320040"/>
-          </a:xfrm>
-          <a:prstGeom prst="rect">
-            <a:avLst/>
-          </a:prstGeom>
-          <a:noFill/>
-        </p:spPr>
-        <p:txBody>
-          <a:bodyPr wrap="square">
-            <a:spAutoFit/>
-          </a:bodyPr>
-          <a:lstStyle/>
-          <a:p>
-            <a:pPr algn="l">
-              <a:defRPr sz="1100" b="1">
-                <a:solidFill>
-                  <a:srgbClr val="389FF5"/>
+          <p:cNvPr id="15" name="TextBox 14"/>
+          <p:cNvSpPr txBox="1"/>
+          <p:nvPr/>
+        </p:nvSpPr>
+        <p:spPr>
+          <a:xfrm>
+            <a:off x="5349240" y="2011680"/>
+            <a:ext cx="1783080" cy="228600"/>
+          </a:xfrm>
+          <a:prstGeom prst="rect">
+            <a:avLst/>
+          </a:prstGeom>
+          <a:noFill/>
+        </p:spPr>
+        <p:txBody>
+          <a:bodyPr wrap="square">
+            <a:spAutoFit/>
+          </a:bodyPr>
+          <a:lstStyle/>
+          <a:p>
+            <a:pPr algn="l">
+              <a:defRPr sz="1000" b="1">
+                <a:solidFill>
+                  <a:srgbClr val="E51937"/>
                 </a:solidFill>
                 <a:latin typeface="Calibri"/>
               </a:defRPr>
@@ -8014,14 +8423,14 @@
       </p:sp>
       <p:sp>
         <p:nvSpPr>
-          <p:cNvPr id="19" name="TextBox 18"/>
-          <p:cNvSpPr txBox="1"/>
-          <p:nvPr/>
-        </p:nvSpPr>
-        <p:spPr>
-          <a:xfrm>
-            <a:off x="5349240" y="2834640"/>
-            <a:ext cx="1783080" cy="457200"/>
+          <p:cNvPr id="16" name="TextBox 15"/>
+          <p:cNvSpPr txBox="1"/>
+          <p:nvPr/>
+        </p:nvSpPr>
+        <p:spPr>
+          <a:xfrm>
+            <a:off x="5349240" y="2286000"/>
+            <a:ext cx="1783080" cy="914400"/>
           </a:xfrm>
           <a:prstGeom prst="rect">
             <a:avLst/>
@@ -8037,63 +8446,27 @@
             <a:pPr algn="l">
               <a:defRPr sz="1100" b="0">
                 <a:solidFill>
-                  <a:srgbClr val="94A3B8"/>
-                </a:solidFill>
-                <a:latin typeface="Calibri"/>
-              </a:defRPr>
-            </a:pPr>
-            <a:r>
-              <a:t>OpenAI generates clear response</a:t>
-            </a:r>
-          </a:p>
-        </p:txBody>
-      </p:sp>
-      <p:sp>
-        <p:nvSpPr>
-          <p:cNvPr id="20" name="TextBox 19"/>
-          <p:cNvSpPr txBox="1"/>
-          <p:nvPr/>
-        </p:nvSpPr>
-        <p:spPr>
-          <a:xfrm>
-            <a:off x="5349240" y="3246120"/>
-            <a:ext cx="1783080" cy="457200"/>
-          </a:xfrm>
-          <a:prstGeom prst="rect">
-            <a:avLst/>
-          </a:prstGeom>
-          <a:noFill/>
-        </p:spPr>
-        <p:txBody>
-          <a:bodyPr wrap="square">
-            <a:spAutoFit/>
-          </a:bodyPr>
-          <a:lstStyle/>
-          <a:p>
-            <a:pPr algn="l">
-              <a:defRPr sz="1000" b="0">
-                <a:solidFill>
-                  <a:srgbClr val="64748B"/>
-                </a:solidFill>
-                <a:latin typeface="Calibri"/>
-              </a:defRPr>
-            </a:pPr>
-            <a:r>
-              <a:t>Sourced from knowledge base only</a:t>
-            </a:r>
-          </a:p>
-        </p:txBody>
-      </p:sp>
-      <p:sp>
-        <p:nvSpPr>
-          <p:cNvPr id="21" name="Rounded Rectangle 20"/>
+                  <a:srgbClr val="D9DBD8"/>
+                </a:solidFill>
+                <a:latin typeface="Calibri"/>
+              </a:defRPr>
+            </a:pPr>
+            <a:r>
+              <a:t>OpenAI generates response from knowledge base only</a:t>
+            </a:r>
+          </a:p>
+        </p:txBody>
+      </p:sp>
+      <p:sp>
+        <p:nvSpPr>
+          <p:cNvPr id="17" name="Rounded Rectangle 16"/>
           <p:cNvSpPr/>
           <p:nvPr/>
         </p:nvSpPr>
         <p:spPr>
           <a:xfrm>
-            <a:off x="7452360" y="1920240"/>
-            <a:ext cx="2057400" cy="2103120"/>
+            <a:off x="7452360" y="1463040"/>
+            <a:ext cx="2057400" cy="2011680"/>
           </a:xfrm>
           <a:prstGeom prst="roundRect">
             <a:avLst>
@@ -8101,11 +8474,11 @@
             </a:avLst>
           </a:prstGeom>
           <a:solidFill>
-            <a:srgbClr val="16213A"/>
+            <a:srgbClr val="2A2A2C"/>
           </a:solidFill>
           <a:ln w="12700">
             <a:solidFill>
-              <a:srgbClr val="1E293B"/>
+              <a:srgbClr val="3A3A3C"/>
             </a:solidFill>
           </a:ln>
         </p:spPr>
@@ -8133,20 +8506,20 @@
       </p:sp>
       <p:sp>
         <p:nvSpPr>
-          <p:cNvPr id="22" name="Oval 21"/>
+          <p:cNvPr id="18" name="Oval 17"/>
           <p:cNvSpPr/>
           <p:nvPr/>
         </p:nvSpPr>
         <p:spPr>
           <a:xfrm>
-            <a:off x="7589520" y="2057400"/>
-            <a:ext cx="365760" cy="365760"/>
+            <a:off x="7589520" y="1600200"/>
+            <a:ext cx="320040" cy="320040"/>
           </a:xfrm>
           <a:prstGeom prst="ellipse">
             <a:avLst/>
           </a:prstGeom>
           <a:solidFill>
-            <a:srgbClr val="389FF5"/>
+            <a:srgbClr val="E51937"/>
           </a:solidFill>
           <a:ln>
             <a:noFill/>
@@ -8167,13 +8540,13 @@
           </a:fontRef>
         </p:style>
         <p:txBody>
-          <a:bodyPr rtlCol="0" anchor="ctr" wrap="none"/>
+          <a:bodyPr rtlCol="0" anchor="ctr"/>
           <a:lstStyle/>
           <a:p>
             <a:pPr algn="ctr">
-              <a:defRPr sz="1600" b="1">
-                <a:solidFill>
-                  <a:srgbClr val="F8FAFC"/>
+              <a:defRPr sz="1400" b="1">
+                <a:solidFill>
+                  <a:srgbClr val="FFFFFF"/>
                 </a:solidFill>
               </a:defRPr>
             </a:pPr>
@@ -8185,30 +8558,30 @@
       </p:sp>
       <p:sp>
         <p:nvSpPr>
-          <p:cNvPr id="23" name="TextBox 22"/>
-          <p:cNvSpPr txBox="1"/>
-          <p:nvPr/>
-        </p:nvSpPr>
-        <p:spPr>
-          <a:xfrm>
-            <a:off x="7589520" y="2514600"/>
-            <a:ext cx="1783080" cy="320040"/>
-          </a:xfrm>
-          <a:prstGeom prst="rect">
-            <a:avLst/>
-          </a:prstGeom>
-          <a:noFill/>
-        </p:spPr>
-        <p:txBody>
-          <a:bodyPr wrap="square">
-            <a:spAutoFit/>
-          </a:bodyPr>
-          <a:lstStyle/>
-          <a:p>
-            <a:pPr algn="l">
-              <a:defRPr sz="1100" b="1">
-                <a:solidFill>
-                  <a:srgbClr val="389FF5"/>
+          <p:cNvPr id="19" name="TextBox 18"/>
+          <p:cNvSpPr txBox="1"/>
+          <p:nvPr/>
+        </p:nvSpPr>
+        <p:spPr>
+          <a:xfrm>
+            <a:off x="7589520" y="2011680"/>
+            <a:ext cx="1783080" cy="228600"/>
+          </a:xfrm>
+          <a:prstGeom prst="rect">
+            <a:avLst/>
+          </a:prstGeom>
+          <a:noFill/>
+        </p:spPr>
+        <p:txBody>
+          <a:bodyPr wrap="square">
+            <a:spAutoFit/>
+          </a:bodyPr>
+          <a:lstStyle/>
+          <a:p>
+            <a:pPr algn="l">
+              <a:defRPr sz="1000" b="1">
+                <a:solidFill>
+                  <a:srgbClr val="E51937"/>
                 </a:solidFill>
                 <a:latin typeface="Calibri"/>
               </a:defRPr>
@@ -8221,14 +8594,14 @@
       </p:sp>
       <p:sp>
         <p:nvSpPr>
-          <p:cNvPr id="24" name="TextBox 23"/>
-          <p:cNvSpPr txBox="1"/>
-          <p:nvPr/>
-        </p:nvSpPr>
-        <p:spPr>
-          <a:xfrm>
-            <a:off x="7589520" y="2834640"/>
-            <a:ext cx="1783080" cy="457200"/>
+          <p:cNvPr id="20" name="TextBox 19"/>
+          <p:cNvSpPr txBox="1"/>
+          <p:nvPr/>
+        </p:nvSpPr>
+        <p:spPr>
+          <a:xfrm>
+            <a:off x="7589520" y="2286000"/>
+            <a:ext cx="1783080" cy="914400"/>
           </a:xfrm>
           <a:prstGeom prst="rect">
             <a:avLst/>
@@ -8244,63 +8617,27 @@
             <a:pPr algn="l">
               <a:defRPr sz="1100" b="0">
                 <a:solidFill>
-                  <a:srgbClr val="94A3B8"/>
-                </a:solidFill>
-                <a:latin typeface="Calibri"/>
-              </a:defRPr>
-            </a:pPr>
-            <a:r>
-              <a:t>Agent approves before sending</a:t>
-            </a:r>
-          </a:p>
-        </p:txBody>
-      </p:sp>
-      <p:sp>
-        <p:nvSpPr>
-          <p:cNvPr id="25" name="TextBox 24"/>
-          <p:cNvSpPr txBox="1"/>
-          <p:nvPr/>
-        </p:nvSpPr>
-        <p:spPr>
-          <a:xfrm>
-            <a:off x="7589520" y="3246120"/>
-            <a:ext cx="1783080" cy="457200"/>
-          </a:xfrm>
-          <a:prstGeom prst="rect">
-            <a:avLst/>
-          </a:prstGeom>
-          <a:noFill/>
-        </p:spPr>
-        <p:txBody>
-          <a:bodyPr wrap="square">
-            <a:spAutoFit/>
-          </a:bodyPr>
-          <a:lstStyle/>
-          <a:p>
-            <a:pPr algn="l">
-              <a:defRPr sz="1000" b="0">
-                <a:solidFill>
-                  <a:srgbClr val="64748B"/>
-                </a:solidFill>
-                <a:latin typeface="Calibri"/>
-              </a:defRPr>
-            </a:pPr>
-            <a:r>
-              <a:t>100% human approval in pilot</a:t>
-            </a:r>
-          </a:p>
-        </p:txBody>
-      </p:sp>
-      <p:sp>
-        <p:nvSpPr>
-          <p:cNvPr id="26" name="Rounded Rectangle 25"/>
+                  <a:srgbClr val="D9DBD8"/>
+                </a:solidFill>
+                <a:latin typeface="Calibri"/>
+              </a:defRPr>
+            </a:pPr>
+            <a:r>
+              <a:t>Agent approves before sending (100% in pilot)</a:t>
+            </a:r>
+          </a:p>
+        </p:txBody>
+      </p:sp>
+      <p:sp>
+        <p:nvSpPr>
+          <p:cNvPr id="21" name="Rounded Rectangle 20"/>
           <p:cNvSpPr/>
           <p:nvPr/>
         </p:nvSpPr>
         <p:spPr>
           <a:xfrm>
-            <a:off x="9692640" y="1920240"/>
-            <a:ext cx="2057400" cy="2103120"/>
+            <a:off x="9692640" y="1463040"/>
+            <a:ext cx="2057400" cy="2011680"/>
           </a:xfrm>
           <a:prstGeom prst="roundRect">
             <a:avLst>
@@ -8308,11 +8645,11 @@
             </a:avLst>
           </a:prstGeom>
           <a:solidFill>
-            <a:srgbClr val="16213A"/>
+            <a:srgbClr val="2A2A2C"/>
           </a:solidFill>
           <a:ln w="12700">
             <a:solidFill>
-              <a:srgbClr val="1E293B"/>
+              <a:srgbClr val="3A3A3C"/>
             </a:solidFill>
           </a:ln>
         </p:spPr>
@@ -8340,20 +8677,20 @@
       </p:sp>
       <p:sp>
         <p:nvSpPr>
-          <p:cNvPr id="27" name="Oval 26"/>
+          <p:cNvPr id="22" name="Oval 21"/>
           <p:cNvSpPr/>
           <p:nvPr/>
         </p:nvSpPr>
         <p:spPr>
           <a:xfrm>
-            <a:off x="9829800" y="2057400"/>
-            <a:ext cx="365760" cy="365760"/>
+            <a:off x="9829800" y="1600200"/>
+            <a:ext cx="320040" cy="320040"/>
           </a:xfrm>
           <a:prstGeom prst="ellipse">
             <a:avLst/>
           </a:prstGeom>
           <a:solidFill>
-            <a:srgbClr val="389FF5"/>
+            <a:srgbClr val="E51937"/>
           </a:solidFill>
           <a:ln>
             <a:noFill/>
@@ -8374,13 +8711,13 @@
           </a:fontRef>
         </p:style>
         <p:txBody>
-          <a:bodyPr rtlCol="0" anchor="ctr" wrap="none"/>
+          <a:bodyPr rtlCol="0" anchor="ctr"/>
           <a:lstStyle/>
           <a:p>
             <a:pPr algn="ctr">
-              <a:defRPr sz="1600" b="1">
-                <a:solidFill>
-                  <a:srgbClr val="F8FAFC"/>
+              <a:defRPr sz="1400" b="1">
+                <a:solidFill>
+                  <a:srgbClr val="FFFFFF"/>
                 </a:solidFill>
               </a:defRPr>
             </a:pPr>
@@ -8392,30 +8729,30 @@
       </p:sp>
       <p:sp>
         <p:nvSpPr>
-          <p:cNvPr id="28" name="TextBox 27"/>
-          <p:cNvSpPr txBox="1"/>
-          <p:nvPr/>
-        </p:nvSpPr>
-        <p:spPr>
-          <a:xfrm>
-            <a:off x="9829800" y="2514600"/>
-            <a:ext cx="1783080" cy="320040"/>
-          </a:xfrm>
-          <a:prstGeom prst="rect">
-            <a:avLst/>
-          </a:prstGeom>
-          <a:noFill/>
-        </p:spPr>
-        <p:txBody>
-          <a:bodyPr wrap="square">
-            <a:spAutoFit/>
-          </a:bodyPr>
-          <a:lstStyle/>
-          <a:p>
-            <a:pPr algn="l">
-              <a:defRPr sz="1100" b="1">
-                <a:solidFill>
-                  <a:srgbClr val="389FF5"/>
+          <p:cNvPr id="23" name="TextBox 22"/>
+          <p:cNvSpPr txBox="1"/>
+          <p:nvPr/>
+        </p:nvSpPr>
+        <p:spPr>
+          <a:xfrm>
+            <a:off x="9829800" y="2011680"/>
+            <a:ext cx="1783080" cy="228600"/>
+          </a:xfrm>
+          <a:prstGeom prst="rect">
+            <a:avLst/>
+          </a:prstGeom>
+          <a:noFill/>
+        </p:spPr>
+        <p:txBody>
+          <a:bodyPr wrap="square">
+            <a:spAutoFit/>
+          </a:bodyPr>
+          <a:lstStyle/>
+          <a:p>
+            <a:pPr algn="l">
+              <a:defRPr sz="1000" b="1">
+                <a:solidFill>
+                  <a:srgbClr val="E51937"/>
                 </a:solidFill>
                 <a:latin typeface="Calibri"/>
               </a:defRPr>
@@ -8428,14 +8765,14 @@
       </p:sp>
       <p:sp>
         <p:nvSpPr>
-          <p:cNvPr id="29" name="TextBox 28"/>
-          <p:cNvSpPr txBox="1"/>
-          <p:nvPr/>
-        </p:nvSpPr>
-        <p:spPr>
-          <a:xfrm>
-            <a:off x="9829800" y="2834640"/>
-            <a:ext cx="1783080" cy="457200"/>
+          <p:cNvPr id="24" name="TextBox 23"/>
+          <p:cNvSpPr txBox="1"/>
+          <p:nvPr/>
+        </p:nvSpPr>
+        <p:spPr>
+          <a:xfrm>
+            <a:off x="9829800" y="2286000"/>
+            <a:ext cx="1783080" cy="914400"/>
           </a:xfrm>
           <a:prstGeom prst="rect">
             <a:avLst/>
@@ -8451,111 +8788,39 @@
             <a:pPr algn="l">
               <a:defRPr sz="1100" b="0">
                 <a:solidFill>
-                  <a:srgbClr val="94A3B8"/>
-                </a:solidFill>
-                <a:latin typeface="Calibri"/>
-              </a:defRPr>
-            </a:pPr>
-            <a:r>
-              <a:t>Metrics tracked per interaction</a:t>
-            </a:r>
-          </a:p>
-        </p:txBody>
-      </p:sp>
-      <p:sp>
-        <p:nvSpPr>
-          <p:cNvPr id="30" name="TextBox 29"/>
-          <p:cNvSpPr txBox="1"/>
-          <p:nvPr/>
-        </p:nvSpPr>
-        <p:spPr>
-          <a:xfrm>
-            <a:off x="9829800" y="3246120"/>
-            <a:ext cx="1783080" cy="457200"/>
-          </a:xfrm>
-          <a:prstGeom prst="rect">
-            <a:avLst/>
-          </a:prstGeom>
-          <a:noFill/>
-        </p:spPr>
-        <p:txBody>
-          <a:bodyPr wrap="square">
-            <a:spAutoFit/>
-          </a:bodyPr>
-          <a:lstStyle/>
-          <a:p>
-            <a:pPr algn="l">
-              <a:defRPr sz="1000" b="0">
-                <a:solidFill>
-                  <a:srgbClr val="64748B"/>
-                </a:solidFill>
-                <a:latin typeface="Calibri"/>
-              </a:defRPr>
-            </a:pPr>
-            <a:r>
-              <a:t>Weekly review with rollback trigger</a:t>
-            </a:r>
-          </a:p>
-        </p:txBody>
-      </p:sp>
-      <p:sp>
-        <p:nvSpPr>
-          <p:cNvPr id="31" name="TextBox 30"/>
-          <p:cNvSpPr txBox="1"/>
-          <p:nvPr/>
-        </p:nvSpPr>
-        <p:spPr>
-          <a:xfrm>
-            <a:off x="731520" y="4297680"/>
-            <a:ext cx="5486400" cy="365760"/>
-          </a:xfrm>
-          <a:prstGeom prst="rect">
-            <a:avLst/>
-          </a:prstGeom>
-          <a:noFill/>
-        </p:spPr>
-        <p:txBody>
-          <a:bodyPr wrap="square">
-            <a:spAutoFit/>
-          </a:bodyPr>
-          <a:lstStyle/>
-          <a:p>
-            <a:pPr algn="l">
-              <a:defRPr sz="1800" b="1">
-                <a:solidFill>
-                  <a:srgbClr val="F8FAFC"/>
-                </a:solidFill>
-                <a:latin typeface="Calibri"/>
-              </a:defRPr>
-            </a:pPr>
-            <a:r>
-              <a:t>Pilot Scope</a:t>
-            </a:r>
-          </a:p>
-        </p:txBody>
-      </p:sp>
-      <p:sp>
-        <p:nvSpPr>
-          <p:cNvPr id="32" name="Rounded Rectangle 31"/>
+                  <a:srgbClr val="D9DBD8"/>
+                </a:solidFill>
+                <a:latin typeface="Calibri"/>
+              </a:defRPr>
+            </a:pPr>
+            <a:r>
+              <a:t>Metrics tracked; weekly review with rollback trigger</a:t>
+            </a:r>
+          </a:p>
+        </p:txBody>
+      </p:sp>
+      <p:sp>
+        <p:nvSpPr>
+          <p:cNvPr id="25" name="Rounded Rectangle 24"/>
           <p:cNvSpPr/>
           <p:nvPr/>
         </p:nvSpPr>
         <p:spPr>
           <a:xfrm>
-            <a:off x="731520" y="4709160"/>
-            <a:ext cx="5029200" cy="1920240"/>
+            <a:off x="731520" y="3794760"/>
+            <a:ext cx="5303520" cy="2743200"/>
           </a:xfrm>
           <a:prstGeom prst="roundRect">
             <a:avLst>
-              <a:gd name="adj" fmla="val 5000"/>
+              <a:gd name="adj" fmla="val 4000"/>
             </a:avLst>
           </a:prstGeom>
           <a:solidFill>
-            <a:srgbClr val="16213A"/>
+            <a:srgbClr val="2A2A2C"/>
           </a:solidFill>
           <a:ln w="12700">
             <a:solidFill>
-              <a:srgbClr val="1E293B"/>
+              <a:srgbClr val="3A3A3C"/>
             </a:solidFill>
           </a:ln>
         </p:spPr>
@@ -8583,50 +8848,50 @@
       </p:sp>
       <p:sp>
         <p:nvSpPr>
-          <p:cNvPr id="33" name="TextBox 32"/>
-          <p:cNvSpPr txBox="1"/>
-          <p:nvPr/>
-        </p:nvSpPr>
-        <p:spPr>
-          <a:xfrm>
-            <a:off x="1005840" y="4892040"/>
-            <a:ext cx="4480560" cy="365760"/>
-          </a:xfrm>
-          <a:prstGeom prst="rect">
-            <a:avLst/>
-          </a:prstGeom>
-          <a:noFill/>
-        </p:spPr>
-        <p:txBody>
-          <a:bodyPr wrap="square">
-            <a:spAutoFit/>
-          </a:bodyPr>
-          <a:lstStyle/>
-          <a:p>
-            <a:pPr algn="l">
-              <a:defRPr sz="1600" b="1">
-                <a:solidFill>
-                  <a:srgbClr val="389FF5"/>
-                </a:solidFill>
-                <a:latin typeface="Calibri"/>
-              </a:defRPr>
-            </a:pPr>
-            <a:r>
-              <a:t>Bounded Starting Point</a:t>
-            </a:r>
-          </a:p>
-        </p:txBody>
-      </p:sp>
-      <p:sp>
-        <p:nvSpPr>
-          <p:cNvPr id="34" name="TextBox 33"/>
-          <p:cNvSpPr txBox="1"/>
-          <p:nvPr/>
-        </p:nvSpPr>
-        <p:spPr>
-          <a:xfrm>
-            <a:off x="1005840" y="5303520"/>
-            <a:ext cx="4480560" cy="1143000"/>
+          <p:cNvPr id="26" name="TextBox 25"/>
+          <p:cNvSpPr txBox="1"/>
+          <p:nvPr/>
+        </p:nvSpPr>
+        <p:spPr>
+          <a:xfrm>
+            <a:off x="1005840" y="3931920"/>
+            <a:ext cx="4572000" cy="320040"/>
+          </a:xfrm>
+          <a:prstGeom prst="rect">
+            <a:avLst/>
+          </a:prstGeom>
+          <a:noFill/>
+        </p:spPr>
+        <p:txBody>
+          <a:bodyPr wrap="square">
+            <a:spAutoFit/>
+          </a:bodyPr>
+          <a:lstStyle/>
+          <a:p>
+            <a:pPr algn="l">
+              <a:defRPr sz="1400" b="1">
+                <a:solidFill>
+                  <a:srgbClr val="FFFFFF"/>
+                </a:solidFill>
+                <a:latin typeface="Calibri"/>
+              </a:defRPr>
+            </a:pPr>
+            <a:r>
+              <a:t>Pilot Scope</a:t>
+            </a:r>
+          </a:p>
+        </p:txBody>
+      </p:sp>
+      <p:sp>
+        <p:nvSpPr>
+          <p:cNvPr id="27" name="TextBox 26"/>
+          <p:cNvSpPr txBox="1"/>
+          <p:nvPr/>
+        </p:nvSpPr>
+        <p:spPr>
+          <a:xfrm>
+            <a:off x="1005840" y="4297680"/>
+            <a:ext cx="4754880" cy="2011680"/>
           </a:xfrm>
           <a:prstGeom prst="rect">
             <a:avLst/>
@@ -8641,11 +8906,11 @@
           <a:p>
             <a:pPr>
               <a:spcAft>
-                <a:spcPts val="1200"/>
+                <a:spcPts val="1100"/>
               </a:spcAft>
-              <a:defRPr sz="1200" b="0">
-                <a:solidFill>
-                  <a:srgbClr val="94A3B8"/>
+              <a:defRPr sz="1100" b="0">
+                <a:solidFill>
+                  <a:srgbClr val="D9DBD8"/>
                 </a:solidFill>
                 <a:latin typeface="Calibri"/>
               </a:defRPr>
@@ -8657,27 +8922,27 @@
           <a:p>
             <a:pPr>
               <a:spcAft>
-                <a:spcPts val="1200"/>
+                <a:spcPts val="1100"/>
               </a:spcAft>
-              <a:defRPr sz="1200" b="0">
-                <a:solidFill>
-                  <a:srgbClr val="94A3B8"/>
-                </a:solidFill>
-                <a:latin typeface="Calibri"/>
-              </a:defRPr>
-            </a:pPr>
-            <a:r>
-              <a:t>•  Dealer inbox + high-volume web forms only</a:t>
+              <a:defRPr sz="1100" b="0">
+                <a:solidFill>
+                  <a:srgbClr val="D9DBD8"/>
+                </a:solidFill>
+                <a:latin typeface="Calibri"/>
+              </a:defRPr>
+            </a:pPr>
+            <a:r>
+              <a:t>•  Dealer inbox and high-volume web forms</a:t>
             </a:r>
           </a:p>
           <a:p>
             <a:pPr>
               <a:spcAft>
-                <a:spcPts val="1200"/>
+                <a:spcPts val="1100"/>
               </a:spcAft>
-              <a:defRPr sz="1200" b="0">
-                <a:solidFill>
-                  <a:srgbClr val="94A3B8"/>
+              <a:defRPr sz="1100" b="0">
+                <a:solidFill>
+                  <a:srgbClr val="D9DBD8"/>
                 </a:solidFill>
                 <a:latin typeface="Calibri"/>
               </a:defRPr>
@@ -8689,11 +8954,11 @@
           <a:p>
             <a:pPr>
               <a:spcAft>
-                <a:spcPts val="1200"/>
+                <a:spcPts val="1100"/>
               </a:spcAft>
-              <a:defRPr sz="1200" b="0">
-                <a:solidFill>
-                  <a:srgbClr val="94A3B8"/>
+              <a:defRPr sz="1100" b="0">
+                <a:solidFill>
+                  <a:srgbClr val="D9DBD8"/>
                 </a:solidFill>
                 <a:latin typeface="Calibri"/>
               </a:defRPr>
@@ -8706,26 +8971,26 @@
       </p:sp>
       <p:sp>
         <p:nvSpPr>
-          <p:cNvPr id="35" name="Rounded Rectangle 34"/>
+          <p:cNvPr id="28" name="Rounded Rectangle 27"/>
           <p:cNvSpPr/>
           <p:nvPr/>
         </p:nvSpPr>
         <p:spPr>
           <a:xfrm>
-            <a:off x="6035040" y="4709160"/>
-            <a:ext cx="5029200" cy="1920240"/>
+            <a:off x="6263640" y="3794760"/>
+            <a:ext cx="5303520" cy="2743200"/>
           </a:xfrm>
           <a:prstGeom prst="roundRect">
             <a:avLst>
-              <a:gd name="adj" fmla="val 5000"/>
+              <a:gd name="adj" fmla="val 4000"/>
             </a:avLst>
           </a:prstGeom>
           <a:solidFill>
-            <a:srgbClr val="16213A"/>
+            <a:srgbClr val="2A2A2C"/>
           </a:solidFill>
           <a:ln w="12700">
             <a:solidFill>
-              <a:srgbClr val="1E293B"/>
+              <a:srgbClr val="3A3A3C"/>
             </a:solidFill>
           </a:ln>
         </p:spPr>
@@ -8753,30 +9018,30 @@
       </p:sp>
       <p:sp>
         <p:nvSpPr>
-          <p:cNvPr id="36" name="TextBox 35"/>
-          <p:cNvSpPr txBox="1"/>
-          <p:nvPr/>
-        </p:nvSpPr>
-        <p:spPr>
-          <a:xfrm>
-            <a:off x="6309360" y="4892040"/>
-            <a:ext cx="4480560" cy="365760"/>
-          </a:xfrm>
-          <a:prstGeom prst="rect">
-            <a:avLst/>
-          </a:prstGeom>
-          <a:noFill/>
-        </p:spPr>
-        <p:txBody>
-          <a:bodyPr wrap="square">
-            <a:spAutoFit/>
-          </a:bodyPr>
-          <a:lstStyle/>
-          <a:p>
-            <a:pPr algn="l">
-              <a:defRPr sz="1600" b="1">
-                <a:solidFill>
-                  <a:srgbClr val="FBBF24"/>
+          <p:cNvPr id="29" name="TextBox 28"/>
+          <p:cNvSpPr txBox="1"/>
+          <p:nvPr/>
+        </p:nvSpPr>
+        <p:spPr>
+          <a:xfrm>
+            <a:off x="6537960" y="3931920"/>
+            <a:ext cx="4572000" cy="320040"/>
+          </a:xfrm>
+          <a:prstGeom prst="rect">
+            <a:avLst/>
+          </a:prstGeom>
+          <a:noFill/>
+        </p:spPr>
+        <p:txBody>
+          <a:bodyPr wrap="square">
+            <a:spAutoFit/>
+          </a:bodyPr>
+          <a:lstStyle/>
+          <a:p>
+            <a:pPr algn="l">
+              <a:defRPr sz="1400" b="1">
+                <a:solidFill>
+                  <a:srgbClr val="FFFFFF"/>
                 </a:solidFill>
                 <a:latin typeface="Calibri"/>
               </a:defRPr>
@@ -8789,14 +9054,14 @@
       </p:sp>
       <p:sp>
         <p:nvSpPr>
-          <p:cNvPr id="37" name="TextBox 36"/>
-          <p:cNvSpPr txBox="1"/>
-          <p:nvPr/>
-        </p:nvSpPr>
-        <p:spPr>
-          <a:xfrm>
-            <a:off x="6309360" y="5303520"/>
-            <a:ext cx="4480560" cy="1143000"/>
+          <p:cNvPr id="30" name="TextBox 29"/>
+          <p:cNvSpPr txBox="1"/>
+          <p:nvPr/>
+        </p:nvSpPr>
+        <p:spPr>
+          <a:xfrm>
+            <a:off x="6537960" y="4297680"/>
+            <a:ext cx="4754880" cy="2011680"/>
           </a:xfrm>
           <a:prstGeom prst="rect">
             <a:avLst/>
@@ -8811,43 +9076,43 @@
           <a:p>
             <a:pPr>
               <a:spcAft>
-                <a:spcPts val="1200"/>
+                <a:spcPts val="1100"/>
               </a:spcAft>
-              <a:defRPr sz="1200" b="0">
-                <a:solidFill>
-                  <a:srgbClr val="94A3B8"/>
-                </a:solidFill>
-                <a:latin typeface="Calibri"/>
-              </a:defRPr>
-            </a:pPr>
-            <a:r>
-              <a:t>•  Human approval for warranty + safety decisions</a:t>
+              <a:defRPr sz="1100" b="0">
+                <a:solidFill>
+                  <a:srgbClr val="D9DBD8"/>
+                </a:solidFill>
+                <a:latin typeface="Calibri"/>
+              </a:defRPr>
+            </a:pPr>
+            <a:r>
+              <a:t>•  Human approval for warranty and safety decisions</a:t>
             </a:r>
           </a:p>
           <a:p>
             <a:pPr>
               <a:spcAft>
-                <a:spcPts val="1200"/>
+                <a:spcPts val="1100"/>
               </a:spcAft>
-              <a:defRPr sz="1200" b="0">
-                <a:solidFill>
-                  <a:srgbClr val="94A3B8"/>
-                </a:solidFill>
-                <a:latin typeface="Calibri"/>
-              </a:defRPr>
-            </a:pPr>
-            <a:r>
-              <a:t>•  Answers from approved docs only, never model knowledge</a:t>
+              <a:defRPr sz="1100" b="0">
+                <a:solidFill>
+                  <a:srgbClr val="D9DBD8"/>
+                </a:solidFill>
+                <a:latin typeface="Calibri"/>
+              </a:defRPr>
+            </a:pPr>
+            <a:r>
+              <a:t>•  Answers sourced from approved docs only</a:t>
             </a:r>
           </a:p>
           <a:p>
             <a:pPr>
               <a:spcAft>
-                <a:spcPts val="1200"/>
+                <a:spcPts val="1100"/>
               </a:spcAft>
-              <a:defRPr sz="1200" b="0">
-                <a:solidFill>
-                  <a:srgbClr val="94A3B8"/>
+              <a:defRPr sz="1100" b="0">
+                <a:solidFill>
+                  <a:srgbClr val="D9DBD8"/>
                 </a:solidFill>
                 <a:latin typeface="Calibri"/>
               </a:defRPr>
@@ -8859,11 +9124,11 @@
           <a:p>
             <a:pPr>
               <a:spcAft>
-                <a:spcPts val="1200"/>
+                <a:spcPts val="1100"/>
               </a:spcAft>
-              <a:defRPr sz="1200" b="0">
-                <a:solidFill>
-                  <a:srgbClr val="94A3B8"/>
+              <a:defRPr sz="1100" b="0">
+                <a:solidFill>
+                  <a:srgbClr val="D9DBD8"/>
                 </a:solidFill>
                 <a:latin typeface="Calibri"/>
               </a:defRPr>
@@ -8888,7 +9153,7 @@
     <p:bg>
       <p:bgPr>
         <a:solidFill>
-          <a:srgbClr val="0F172A"/>
+          <a:srgbClr val="1C1C1E"/>
         </a:solidFill>
         <a:effectLst/>
       </p:bgPr>
@@ -8909,23 +9174,23 @@
         <p:spPr>
           <a:xfrm>
             <a:off x="731520" y="274320"/>
-            <a:ext cx="5486400" cy="274320"/>
-          </a:xfrm>
-          <a:prstGeom prst="rect">
-            <a:avLst/>
-          </a:prstGeom>
-          <a:noFill/>
-        </p:spPr>
-        <p:txBody>
-          <a:bodyPr wrap="square">
-            <a:spAutoFit/>
-          </a:bodyPr>
-          <a:lstStyle/>
-          <a:p>
-            <a:pPr algn="l">
-              <a:defRPr sz="1200" b="1">
-                <a:solidFill>
-                  <a:srgbClr val="389FF5"/>
+            <a:ext cx="5486400" cy="228600"/>
+          </a:xfrm>
+          <a:prstGeom prst="rect">
+            <a:avLst/>
+          </a:prstGeom>
+          <a:noFill/>
+        </p:spPr>
+        <p:txBody>
+          <a:bodyPr wrap="square">
+            <a:spAutoFit/>
+          </a:bodyPr>
+          <a:lstStyle/>
+          <a:p>
+            <a:pPr algn="l">
+              <a:defRPr sz="1100" b="1">
+                <a:solidFill>
+                  <a:srgbClr val="E51937"/>
                 </a:solidFill>
                 <a:latin typeface="Calibri"/>
               </a:defRPr>
@@ -8944,8 +9209,8 @@
         </p:nvSpPr>
         <p:spPr>
           <a:xfrm>
-            <a:off x="731520" y="594360"/>
-            <a:ext cx="9144000" cy="457200"/>
+            <a:off x="731520" y="548640"/>
+            <a:ext cx="10058400" cy="457200"/>
           </a:xfrm>
           <a:prstGeom prst="rect">
             <a:avLst/>
@@ -8961,7 +9226,7 @@
             <a:pPr algn="l">
               <a:defRPr sz="3200" b="1">
                 <a:solidFill>
-                  <a:srgbClr val="F8FAFC"/>
+                  <a:srgbClr val="FFFFFF"/>
                 </a:solidFill>
                 <a:latin typeface="Calibri"/>
               </a:defRPr>
@@ -8980,14 +9245,14 @@
         </p:nvSpPr>
         <p:spPr>
           <a:xfrm>
-            <a:off x="731520" y="1097280"/>
-            <a:ext cx="1097280" cy="38100"/>
+            <a:off x="731520" y="1051560"/>
+            <a:ext cx="914400" cy="25400"/>
           </a:xfrm>
           <a:prstGeom prst="rect">
             <a:avLst/>
           </a:prstGeom>
           <a:solidFill>
-            <a:srgbClr val="389FF5"/>
+            <a:srgbClr val="E51937"/>
           </a:solidFill>
           <a:ln>
             <a:noFill/>
@@ -9023,30 +9288,30 @@
         </p:nvSpPr>
         <p:spPr>
           <a:xfrm>
-            <a:off x="731520" y="1463040"/>
-            <a:ext cx="5486400" cy="365760"/>
-          </a:xfrm>
-          <a:prstGeom prst="rect">
-            <a:avLst/>
-          </a:prstGeom>
-          <a:noFill/>
-        </p:spPr>
-        <p:txBody>
-          <a:bodyPr wrap="square">
-            <a:spAutoFit/>
-          </a:bodyPr>
-          <a:lstStyle/>
-          <a:p>
-            <a:pPr algn="l">
-              <a:defRPr sz="1800" b="1">
-                <a:solidFill>
-                  <a:srgbClr val="F8FAFC"/>
-                </a:solidFill>
-                <a:latin typeface="Calibri"/>
-              </a:defRPr>
-            </a:pPr>
-            <a:r>
-              <a:t>90-Day Pilot Metrics</a:t>
+            <a:off x="731520" y="1371600"/>
+            <a:ext cx="5486400" cy="320040"/>
+          </a:xfrm>
+          <a:prstGeom prst="rect">
+            <a:avLst/>
+          </a:prstGeom>
+          <a:noFill/>
+        </p:spPr>
+        <p:txBody>
+          <a:bodyPr wrap="square">
+            <a:spAutoFit/>
+          </a:bodyPr>
+          <a:lstStyle/>
+          <a:p>
+            <a:pPr algn="l">
+              <a:defRPr sz="1600" b="1">
+                <a:solidFill>
+                  <a:srgbClr val="FFFFFF"/>
+                </a:solidFill>
+                <a:latin typeface="Calibri"/>
+              </a:defRPr>
+            </a:pPr>
+            <a:r>
+              <a:t>90-Day Pilot Targets</a:t>
             </a:r>
           </a:p>
         </p:txBody>
@@ -9059,24 +9324,24 @@
         </p:nvSpPr>
         <p:spPr>
           <a:xfrm>
-            <a:off x="731520" y="1920240"/>
-            <a:ext cx="3657600" cy="365760"/>
-          </a:xfrm>
-          <a:prstGeom prst="rect">
-            <a:avLst/>
-          </a:prstGeom>
-          <a:noFill/>
-        </p:spPr>
-        <p:txBody>
-          <a:bodyPr wrap="square">
-            <a:spAutoFit/>
-          </a:bodyPr>
-          <a:lstStyle/>
-          <a:p>
-            <a:pPr algn="l">
-              <a:defRPr sz="1300" b="0">
-                <a:solidFill>
-                  <a:srgbClr val="94A3B8"/>
+            <a:off x="731520" y="1828800"/>
+            <a:ext cx="3657600" cy="320040"/>
+          </a:xfrm>
+          <a:prstGeom prst="rect">
+            <a:avLst/>
+          </a:prstGeom>
+          <a:noFill/>
+        </p:spPr>
+        <p:txBody>
+          <a:bodyPr wrap="square">
+            <a:spAutoFit/>
+          </a:bodyPr>
+          <a:lstStyle/>
+          <a:p>
+            <a:pPr algn="l">
+              <a:defRPr sz="1200" b="0">
+                <a:solidFill>
+                  <a:srgbClr val="D9DBD8"/>
                 </a:solidFill>
                 <a:latin typeface="Calibri"/>
               </a:defRPr>
@@ -9095,24 +9360,24 @@
         </p:nvSpPr>
         <p:spPr>
           <a:xfrm>
-            <a:off x="4572000" y="1920240"/>
-            <a:ext cx="2286000" cy="365760"/>
-          </a:xfrm>
-          <a:prstGeom prst="rect">
-            <a:avLst/>
-          </a:prstGeom>
-          <a:noFill/>
-        </p:spPr>
-        <p:txBody>
-          <a:bodyPr wrap="square">
-            <a:spAutoFit/>
-          </a:bodyPr>
-          <a:lstStyle/>
-          <a:p>
-            <a:pPr algn="l">
-              <a:defRPr sz="1300" b="1">
-                <a:solidFill>
-                  <a:srgbClr val="34D399"/>
+            <a:off x="4572000" y="1828800"/>
+            <a:ext cx="1828800" cy="320040"/>
+          </a:xfrm>
+          <a:prstGeom prst="rect">
+            <a:avLst/>
+          </a:prstGeom>
+          <a:noFill/>
+        </p:spPr>
+        <p:txBody>
+          <a:bodyPr wrap="square">
+            <a:spAutoFit/>
+          </a:bodyPr>
+          <a:lstStyle/>
+          <a:p>
+            <a:pPr algn="l">
+              <a:defRPr sz="1200" b="1">
+                <a:solidFill>
+                  <a:srgbClr val="E51937"/>
                 </a:solidFill>
                 <a:latin typeface="Calibri"/>
               </a:defRPr>
@@ -9131,24 +9396,24 @@
         </p:nvSpPr>
         <p:spPr>
           <a:xfrm>
-            <a:off x="731520" y="2331720"/>
-            <a:ext cx="3657600" cy="365760"/>
-          </a:xfrm>
-          <a:prstGeom prst="rect">
-            <a:avLst/>
-          </a:prstGeom>
-          <a:noFill/>
-        </p:spPr>
-        <p:txBody>
-          <a:bodyPr wrap="square">
-            <a:spAutoFit/>
-          </a:bodyPr>
-          <a:lstStyle/>
-          <a:p>
-            <a:pPr algn="l">
-              <a:defRPr sz="1300" b="0">
-                <a:solidFill>
-                  <a:srgbClr val="94A3B8"/>
+            <a:off x="731520" y="2240280"/>
+            <a:ext cx="3657600" cy="320040"/>
+          </a:xfrm>
+          <a:prstGeom prst="rect">
+            <a:avLst/>
+          </a:prstGeom>
+          <a:noFill/>
+        </p:spPr>
+        <p:txBody>
+          <a:bodyPr wrap="square">
+            <a:spAutoFit/>
+          </a:bodyPr>
+          <a:lstStyle/>
+          <a:p>
+            <a:pPr algn="l">
+              <a:defRPr sz="1200" b="0">
+                <a:solidFill>
+                  <a:srgbClr val="D9DBD8"/>
                 </a:solidFill>
                 <a:latin typeface="Calibri"/>
               </a:defRPr>
@@ -9167,24 +9432,24 @@
         </p:nvSpPr>
         <p:spPr>
           <a:xfrm>
-            <a:off x="4572000" y="2331720"/>
-            <a:ext cx="2286000" cy="365760"/>
-          </a:xfrm>
-          <a:prstGeom prst="rect">
-            <a:avLst/>
-          </a:prstGeom>
-          <a:noFill/>
-        </p:spPr>
-        <p:txBody>
-          <a:bodyPr wrap="square">
-            <a:spAutoFit/>
-          </a:bodyPr>
-          <a:lstStyle/>
-          <a:p>
-            <a:pPr algn="l">
-              <a:defRPr sz="1300" b="1">
-                <a:solidFill>
-                  <a:srgbClr val="34D399"/>
+            <a:off x="4572000" y="2240280"/>
+            <a:ext cx="1828800" cy="320040"/>
+          </a:xfrm>
+          <a:prstGeom prst="rect">
+            <a:avLst/>
+          </a:prstGeom>
+          <a:noFill/>
+        </p:spPr>
+        <p:txBody>
+          <a:bodyPr wrap="square">
+            <a:spAutoFit/>
+          </a:bodyPr>
+          <a:lstStyle/>
+          <a:p>
+            <a:pPr algn="l">
+              <a:defRPr sz="1200" b="1">
+                <a:solidFill>
+                  <a:srgbClr val="E51937"/>
                 </a:solidFill>
                 <a:latin typeface="Calibri"/>
               </a:defRPr>
@@ -9203,24 +9468,24 @@
         </p:nvSpPr>
         <p:spPr>
           <a:xfrm>
-            <a:off x="731520" y="2743200"/>
-            <a:ext cx="3657600" cy="365760"/>
-          </a:xfrm>
-          <a:prstGeom prst="rect">
-            <a:avLst/>
-          </a:prstGeom>
-          <a:noFill/>
-        </p:spPr>
-        <p:txBody>
-          <a:bodyPr wrap="square">
-            <a:spAutoFit/>
-          </a:bodyPr>
-          <a:lstStyle/>
-          <a:p>
-            <a:pPr algn="l">
-              <a:defRPr sz="1300" b="0">
-                <a:solidFill>
-                  <a:srgbClr val="94A3B8"/>
+            <a:off x="731520" y="2651760"/>
+            <a:ext cx="3657600" cy="320040"/>
+          </a:xfrm>
+          <a:prstGeom prst="rect">
+            <a:avLst/>
+          </a:prstGeom>
+          <a:noFill/>
+        </p:spPr>
+        <p:txBody>
+          <a:bodyPr wrap="square">
+            <a:spAutoFit/>
+          </a:bodyPr>
+          <a:lstStyle/>
+          <a:p>
+            <a:pPr algn="l">
+              <a:defRPr sz="1200" b="0">
+                <a:solidFill>
+                  <a:srgbClr val="D9DBD8"/>
                 </a:solidFill>
                 <a:latin typeface="Calibri"/>
               </a:defRPr>
@@ -9239,24 +9504,24 @@
         </p:nvSpPr>
         <p:spPr>
           <a:xfrm>
-            <a:off x="4572000" y="2743200"/>
-            <a:ext cx="2286000" cy="365760"/>
-          </a:xfrm>
-          <a:prstGeom prst="rect">
-            <a:avLst/>
-          </a:prstGeom>
-          <a:noFill/>
-        </p:spPr>
-        <p:txBody>
-          <a:bodyPr wrap="square">
-            <a:spAutoFit/>
-          </a:bodyPr>
-          <a:lstStyle/>
-          <a:p>
-            <a:pPr algn="l">
-              <a:defRPr sz="1300" b="1">
-                <a:solidFill>
-                  <a:srgbClr val="34D399"/>
+            <a:off x="4572000" y="2651760"/>
+            <a:ext cx="1828800" cy="320040"/>
+          </a:xfrm>
+          <a:prstGeom prst="rect">
+            <a:avLst/>
+          </a:prstGeom>
+          <a:noFill/>
+        </p:spPr>
+        <p:txBody>
+          <a:bodyPr wrap="square">
+            <a:spAutoFit/>
+          </a:bodyPr>
+          <a:lstStyle/>
+          <a:p>
+            <a:pPr algn="l">
+              <a:defRPr sz="1200" b="1">
+                <a:solidFill>
+                  <a:srgbClr val="E51937"/>
                 </a:solidFill>
                 <a:latin typeface="Calibri"/>
               </a:defRPr>
@@ -9275,24 +9540,24 @@
         </p:nvSpPr>
         <p:spPr>
           <a:xfrm>
-            <a:off x="731520" y="3154680"/>
-            <a:ext cx="3657600" cy="365760"/>
-          </a:xfrm>
-          <a:prstGeom prst="rect">
-            <a:avLst/>
-          </a:prstGeom>
-          <a:noFill/>
-        </p:spPr>
-        <p:txBody>
-          <a:bodyPr wrap="square">
-            <a:spAutoFit/>
-          </a:bodyPr>
-          <a:lstStyle/>
-          <a:p>
-            <a:pPr algn="l">
-              <a:defRPr sz="1300" b="0">
-                <a:solidFill>
-                  <a:srgbClr val="94A3B8"/>
+            <a:off x="731520" y="3063240"/>
+            <a:ext cx="3657600" cy="320040"/>
+          </a:xfrm>
+          <a:prstGeom prst="rect">
+            <a:avLst/>
+          </a:prstGeom>
+          <a:noFill/>
+        </p:spPr>
+        <p:txBody>
+          <a:bodyPr wrap="square">
+            <a:spAutoFit/>
+          </a:bodyPr>
+          <a:lstStyle/>
+          <a:p>
+            <a:pPr algn="l">
+              <a:defRPr sz="1200" b="0">
+                <a:solidFill>
+                  <a:srgbClr val="D9DBD8"/>
                 </a:solidFill>
                 <a:latin typeface="Calibri"/>
               </a:defRPr>
@@ -9311,24 +9576,24 @@
         </p:nvSpPr>
         <p:spPr>
           <a:xfrm>
-            <a:off x="4572000" y="3154680"/>
-            <a:ext cx="2286000" cy="365760"/>
-          </a:xfrm>
-          <a:prstGeom prst="rect">
-            <a:avLst/>
-          </a:prstGeom>
-          <a:noFill/>
-        </p:spPr>
-        <p:txBody>
-          <a:bodyPr wrap="square">
-            <a:spAutoFit/>
-          </a:bodyPr>
-          <a:lstStyle/>
-          <a:p>
-            <a:pPr algn="l">
-              <a:defRPr sz="1300" b="1">
-                <a:solidFill>
-                  <a:srgbClr val="34D399"/>
+            <a:off x="4572000" y="3063240"/>
+            <a:ext cx="1828800" cy="320040"/>
+          </a:xfrm>
+          <a:prstGeom prst="rect">
+            <a:avLst/>
+          </a:prstGeom>
+          <a:noFill/>
+        </p:spPr>
+        <p:txBody>
+          <a:bodyPr wrap="square">
+            <a:spAutoFit/>
+          </a:bodyPr>
+          <a:lstStyle/>
+          <a:p>
+            <a:pPr algn="l">
+              <a:defRPr sz="1200" b="1">
+                <a:solidFill>
+                  <a:srgbClr val="E51937"/>
                 </a:solidFill>
                 <a:latin typeface="Calibri"/>
               </a:defRPr>
@@ -9347,24 +9612,24 @@
         </p:nvSpPr>
         <p:spPr>
           <a:xfrm>
-            <a:off x="731520" y="3566160"/>
-            <a:ext cx="3657600" cy="365760"/>
-          </a:xfrm>
-          <a:prstGeom prst="rect">
-            <a:avLst/>
-          </a:prstGeom>
-          <a:noFill/>
-        </p:spPr>
-        <p:txBody>
-          <a:bodyPr wrap="square">
-            <a:spAutoFit/>
-          </a:bodyPr>
-          <a:lstStyle/>
-          <a:p>
-            <a:pPr algn="l">
-              <a:defRPr sz="1300" b="0">
-                <a:solidFill>
-                  <a:srgbClr val="94A3B8"/>
+            <a:off x="731520" y="3474720"/>
+            <a:ext cx="3657600" cy="320040"/>
+          </a:xfrm>
+          <a:prstGeom prst="rect">
+            <a:avLst/>
+          </a:prstGeom>
+          <a:noFill/>
+        </p:spPr>
+        <p:txBody>
+          <a:bodyPr wrap="square">
+            <a:spAutoFit/>
+          </a:bodyPr>
+          <a:lstStyle/>
+          <a:p>
+            <a:pPr algn="l">
+              <a:defRPr sz="1200" b="0">
+                <a:solidFill>
+                  <a:srgbClr val="D9DBD8"/>
                 </a:solidFill>
                 <a:latin typeface="Calibri"/>
               </a:defRPr>
@@ -9383,30 +9648,30 @@
         </p:nvSpPr>
         <p:spPr>
           <a:xfrm>
-            <a:off x="4572000" y="3566160"/>
-            <a:ext cx="2286000" cy="365760"/>
-          </a:xfrm>
-          <a:prstGeom prst="rect">
-            <a:avLst/>
-          </a:prstGeom>
-          <a:noFill/>
-        </p:spPr>
-        <p:txBody>
-          <a:bodyPr wrap="square">
-            <a:spAutoFit/>
-          </a:bodyPr>
-          <a:lstStyle/>
-          <a:p>
-            <a:pPr algn="l">
-              <a:defRPr sz="1300" b="1">
-                <a:solidFill>
-                  <a:srgbClr val="34D399"/>
-                </a:solidFill>
-                <a:latin typeface="Calibri"/>
-              </a:defRPr>
-            </a:pPr>
-            <a:r>
-              <a:t>No decline from baseline</a:t>
+            <a:off x="4572000" y="3474720"/>
+            <a:ext cx="1828800" cy="320040"/>
+          </a:xfrm>
+          <a:prstGeom prst="rect">
+            <a:avLst/>
+          </a:prstGeom>
+          <a:noFill/>
+        </p:spPr>
+        <p:txBody>
+          <a:bodyPr wrap="square">
+            <a:spAutoFit/>
+          </a:bodyPr>
+          <a:lstStyle/>
+          <a:p>
+            <a:pPr algn="l">
+              <a:defRPr sz="1200" b="1">
+                <a:solidFill>
+                  <a:srgbClr val="E51937"/>
+                </a:solidFill>
+                <a:latin typeface="Calibri"/>
+              </a:defRPr>
+            </a:pPr>
+            <a:r>
+              <a:t>No decline</a:t>
             </a:r>
           </a:p>
         </p:txBody>
@@ -9419,24 +9684,24 @@
         </p:nvSpPr>
         <p:spPr>
           <a:xfrm>
-            <a:off x="6858000" y="1463040"/>
-            <a:ext cx="4572000" cy="365760"/>
-          </a:xfrm>
-          <a:prstGeom prst="rect">
-            <a:avLst/>
-          </a:prstGeom>
-          <a:noFill/>
-        </p:spPr>
-        <p:txBody>
-          <a:bodyPr wrap="square">
-            <a:spAutoFit/>
-          </a:bodyPr>
-          <a:lstStyle/>
-          <a:p>
-            <a:pPr algn="l">
-              <a:defRPr sz="1800" b="1">
-                <a:solidFill>
-                  <a:srgbClr val="F8FAFC"/>
+            <a:off x="6858000" y="1371600"/>
+            <a:ext cx="4572000" cy="320040"/>
+          </a:xfrm>
+          <a:prstGeom prst="rect">
+            <a:avLst/>
+          </a:prstGeom>
+          <a:noFill/>
+        </p:spPr>
+        <p:txBody>
+          <a:bodyPr wrap="square">
+            <a:spAutoFit/>
+          </a:bodyPr>
+          <a:lstStyle/>
+          <a:p>
+            <a:pPr algn="l">
+              <a:defRPr sz="1600" b="1">
+                <a:solidFill>
+                  <a:srgbClr val="FFFFFF"/>
                 </a:solidFill>
                 <a:latin typeface="Calibri"/>
               </a:defRPr>
@@ -9455,20 +9720,20 @@
         </p:nvSpPr>
         <p:spPr>
           <a:xfrm>
-            <a:off x="6858000" y="1920240"/>
-            <a:ext cx="2286000" cy="1280160"/>
+            <a:off x="6858000" y="1828800"/>
+            <a:ext cx="2286000" cy="1188720"/>
           </a:xfrm>
           <a:prstGeom prst="roundRect">
             <a:avLst>
-              <a:gd name="adj" fmla="val 5000"/>
+              <a:gd name="adj" fmla="val 4000"/>
             </a:avLst>
           </a:prstGeom>
           <a:solidFill>
-            <a:srgbClr val="16213A"/>
+            <a:srgbClr val="2A2A2C"/>
           </a:solidFill>
           <a:ln w="12700">
             <a:solidFill>
-              <a:srgbClr val="1E293B"/>
+              <a:srgbClr val="3A3A3C"/>
             </a:solidFill>
           </a:ln>
         </p:spPr>
@@ -9502,24 +9767,24 @@
         </p:nvSpPr>
         <p:spPr>
           <a:xfrm>
-            <a:off x="7132320" y="2057400"/>
-            <a:ext cx="1737360" cy="274320"/>
-          </a:xfrm>
-          <a:prstGeom prst="rect">
-            <a:avLst/>
-          </a:prstGeom>
-          <a:noFill/>
-        </p:spPr>
-        <p:txBody>
-          <a:bodyPr wrap="square">
-            <a:spAutoFit/>
-          </a:bodyPr>
-          <a:lstStyle/>
-          <a:p>
-            <a:pPr algn="l">
-              <a:defRPr sz="1100" b="0">
-                <a:solidFill>
-                  <a:srgbClr val="64748B"/>
+            <a:off x="7086600" y="1965960"/>
+            <a:ext cx="1828800" cy="228600"/>
+          </a:xfrm>
+          <a:prstGeom prst="rect">
+            <a:avLst/>
+          </a:prstGeom>
+          <a:noFill/>
+        </p:spPr>
+        <p:txBody>
+          <a:bodyPr wrap="square">
+            <a:spAutoFit/>
+          </a:bodyPr>
+          <a:lstStyle/>
+          <a:p>
+            <a:pPr algn="l">
+              <a:defRPr sz="1000" b="0">
+                <a:solidFill>
+                  <a:srgbClr val="767676"/>
                 </a:solidFill>
                 <a:latin typeface="Calibri"/>
               </a:defRPr>
@@ -9538,24 +9803,24 @@
         </p:nvSpPr>
         <p:spPr>
           <a:xfrm>
-            <a:off x="7132320" y="2331720"/>
-            <a:ext cx="1737360" cy="457200"/>
-          </a:xfrm>
-          <a:prstGeom prst="rect">
-            <a:avLst/>
-          </a:prstGeom>
-          <a:noFill/>
-        </p:spPr>
-        <p:txBody>
-          <a:bodyPr wrap="square">
-            <a:spAutoFit/>
-          </a:bodyPr>
-          <a:lstStyle/>
-          <a:p>
-            <a:pPr algn="l">
-              <a:defRPr sz="2800" b="1">
-                <a:solidFill>
-                  <a:srgbClr val="34D399"/>
+            <a:off x="7086600" y="2194560"/>
+            <a:ext cx="1828800" cy="411480"/>
+          </a:xfrm>
+          <a:prstGeom prst="rect">
+            <a:avLst/>
+          </a:prstGeom>
+          <a:noFill/>
+        </p:spPr>
+        <p:txBody>
+          <a:bodyPr wrap="square">
+            <a:spAutoFit/>
+          </a:bodyPr>
+          <a:lstStyle/>
+          <a:p>
+            <a:pPr algn="l">
+              <a:defRPr sz="2600" b="1">
+                <a:solidFill>
+                  <a:srgbClr val="E51937"/>
                 </a:solidFill>
                 <a:latin typeface="Calibri"/>
               </a:defRPr>
@@ -9574,24 +9839,24 @@
         </p:nvSpPr>
         <p:spPr>
           <a:xfrm>
-            <a:off x="7132320" y="2834640"/>
-            <a:ext cx="1737360" cy="274320"/>
-          </a:xfrm>
-          <a:prstGeom prst="rect">
-            <a:avLst/>
-          </a:prstGeom>
-          <a:noFill/>
-        </p:spPr>
-        <p:txBody>
-          <a:bodyPr wrap="square">
-            <a:spAutoFit/>
-          </a:bodyPr>
-          <a:lstStyle/>
-          <a:p>
-            <a:pPr algn="l">
-              <a:defRPr sz="1000" b="0">
-                <a:solidFill>
-                  <a:srgbClr val="94A3B8"/>
+            <a:off x="7086600" y="2651760"/>
+            <a:ext cx="1828800" cy="228600"/>
+          </a:xfrm>
+          <a:prstGeom prst="rect">
+            <a:avLst/>
+          </a:prstGeom>
+          <a:noFill/>
+        </p:spPr>
+        <p:txBody>
+          <a:bodyPr wrap="square">
+            <a:spAutoFit/>
+          </a:bodyPr>
+          <a:lstStyle/>
+          <a:p>
+            <a:pPr algn="l">
+              <a:defRPr sz="900" b="0">
+                <a:solidFill>
+                  <a:srgbClr val="767676"/>
                 </a:solidFill>
                 <a:latin typeface="Calibri"/>
               </a:defRPr>
@@ -9610,20 +9875,20 @@
         </p:nvSpPr>
         <p:spPr>
           <a:xfrm>
-            <a:off x="9326880" y="1920240"/>
-            <a:ext cx="2286000" cy="1280160"/>
+            <a:off x="9326880" y="1828800"/>
+            <a:ext cx="2286000" cy="1188720"/>
           </a:xfrm>
           <a:prstGeom prst="roundRect">
             <a:avLst>
-              <a:gd name="adj" fmla="val 5000"/>
+              <a:gd name="adj" fmla="val 4000"/>
             </a:avLst>
           </a:prstGeom>
           <a:solidFill>
-            <a:srgbClr val="16213A"/>
+            <a:srgbClr val="2A2A2C"/>
           </a:solidFill>
           <a:ln w="12700">
             <a:solidFill>
-              <a:srgbClr val="1E293B"/>
+              <a:srgbClr val="3A3A3C"/>
             </a:solidFill>
           </a:ln>
         </p:spPr>
@@ -9657,24 +9922,24 @@
         </p:nvSpPr>
         <p:spPr>
           <a:xfrm>
-            <a:off x="9601200" y="2057400"/>
-            <a:ext cx="1737360" cy="274320"/>
-          </a:xfrm>
-          <a:prstGeom prst="rect">
-            <a:avLst/>
-          </a:prstGeom>
-          <a:noFill/>
-        </p:spPr>
-        <p:txBody>
-          <a:bodyPr wrap="square">
-            <a:spAutoFit/>
-          </a:bodyPr>
-          <a:lstStyle/>
-          <a:p>
-            <a:pPr algn="l">
-              <a:defRPr sz="1100" b="0">
-                <a:solidFill>
-                  <a:srgbClr val="64748B"/>
+            <a:off x="9555480" y="1965960"/>
+            <a:ext cx="1828800" cy="228600"/>
+          </a:xfrm>
+          <a:prstGeom prst="rect">
+            <a:avLst/>
+          </a:prstGeom>
+          <a:noFill/>
+        </p:spPr>
+        <p:txBody>
+          <a:bodyPr wrap="square">
+            <a:spAutoFit/>
+          </a:bodyPr>
+          <a:lstStyle/>
+          <a:p>
+            <a:pPr algn="l">
+              <a:defRPr sz="1000" b="0">
+                <a:solidFill>
+                  <a:srgbClr val="767676"/>
                 </a:solidFill>
                 <a:latin typeface="Calibri"/>
               </a:defRPr>
@@ -9693,24 +9958,24 @@
         </p:nvSpPr>
         <p:spPr>
           <a:xfrm>
-            <a:off x="9601200" y="2331720"/>
-            <a:ext cx="1737360" cy="457200"/>
-          </a:xfrm>
-          <a:prstGeom prst="rect">
-            <a:avLst/>
-          </a:prstGeom>
-          <a:noFill/>
-        </p:spPr>
-        <p:txBody>
-          <a:bodyPr wrap="square">
-            <a:spAutoFit/>
-          </a:bodyPr>
-          <a:lstStyle/>
-          <a:p>
-            <a:pPr algn="l">
-              <a:defRPr sz="2800" b="1">
-                <a:solidFill>
-                  <a:srgbClr val="34D399"/>
+            <a:off x="9555480" y="2194560"/>
+            <a:ext cx="1828800" cy="411480"/>
+          </a:xfrm>
+          <a:prstGeom prst="rect">
+            <a:avLst/>
+          </a:prstGeom>
+          <a:noFill/>
+        </p:spPr>
+        <p:txBody>
+          <a:bodyPr wrap="square">
+            <a:spAutoFit/>
+          </a:bodyPr>
+          <a:lstStyle/>
+          <a:p>
+            <a:pPr algn="l">
+              <a:defRPr sz="2600" b="1">
+                <a:solidFill>
+                  <a:srgbClr val="E51937"/>
                 </a:solidFill>
                 <a:latin typeface="Calibri"/>
               </a:defRPr>
@@ -9729,24 +9994,24 @@
         </p:nvSpPr>
         <p:spPr>
           <a:xfrm>
-            <a:off x="9601200" y="2834640"/>
-            <a:ext cx="1737360" cy="274320"/>
-          </a:xfrm>
-          <a:prstGeom prst="rect">
-            <a:avLst/>
-          </a:prstGeom>
-          <a:noFill/>
-        </p:spPr>
-        <p:txBody>
-          <a:bodyPr wrap="square">
-            <a:spAutoFit/>
-          </a:bodyPr>
-          <a:lstStyle/>
-          <a:p>
-            <a:pPr algn="l">
-              <a:defRPr sz="1000" b="0">
-                <a:solidFill>
-                  <a:srgbClr val="94A3B8"/>
+            <a:off x="9555480" y="2651760"/>
+            <a:ext cx="1828800" cy="228600"/>
+          </a:xfrm>
+          <a:prstGeom prst="rect">
+            <a:avLst/>
+          </a:prstGeom>
+          <a:noFill/>
+        </p:spPr>
+        <p:txBody>
+          <a:bodyPr wrap="square">
+            <a:spAutoFit/>
+          </a:bodyPr>
+          <a:lstStyle/>
+          <a:p>
+            <a:pPr algn="l">
+              <a:defRPr sz="900" b="0">
+                <a:solidFill>
+                  <a:srgbClr val="767676"/>
                 </a:solidFill>
                 <a:latin typeface="Calibri"/>
               </a:defRPr>
@@ -9765,7 +10030,7 @@
         </p:nvSpPr>
         <p:spPr>
           <a:xfrm>
-            <a:off x="6858000" y="3383280"/>
+            <a:off x="6858000" y="3200400"/>
             <a:ext cx="4572000" cy="3200400"/>
           </a:xfrm>
           <a:prstGeom prst="rect">
@@ -9781,11 +10046,11 @@
           <a:p>
             <a:pPr>
               <a:spcAft>
-                <a:spcPts val="840"/>
+                <a:spcPts val="650"/>
               </a:spcAft>
-              <a:defRPr sz="1400" b="1">
-                <a:solidFill>
-                  <a:srgbClr val="F8FAFC"/>
+              <a:defRPr sz="1300" b="1">
+                <a:solidFill>
+                  <a:srgbClr val="FFFFFF"/>
                 </a:solidFill>
                 <a:latin typeface="Calibri"/>
               </a:defRPr>
@@ -9797,181 +10062,181 @@
           <a:p>
             <a:pPr>
               <a:spcAft>
-                <a:spcPts val="720"/>
+                <a:spcPts val="550"/>
+              </a:spcAft>
+              <a:defRPr sz="1100" b="0">
+                <a:solidFill>
+                  <a:srgbClr val="D9DBD8"/>
+                </a:solidFill>
+                <a:latin typeface="Calibri"/>
+              </a:defRPr>
+            </a:pPr>
+            <a:r>
+              <a:t>Support automation: $1.6M</a:t>
+            </a:r>
+          </a:p>
+          <a:p>
+            <a:pPr>
+              <a:spcAft>
+                <a:spcPts val="550"/>
+              </a:spcAft>
+              <a:defRPr sz="1100" b="0">
+                <a:solidFill>
+                  <a:srgbClr val="D9DBD8"/>
+                </a:solidFill>
+                <a:latin typeface="Calibri"/>
+              </a:defRPr>
+            </a:pPr>
+            <a:r>
+              <a:t>Demand forecasting: $1.6M</a:t>
+            </a:r>
+          </a:p>
+          <a:p>
+            <a:pPr>
+              <a:spcAft>
+                <a:spcPts val="550"/>
+              </a:spcAft>
+              <a:defRPr sz="1100" b="0">
+                <a:solidFill>
+                  <a:srgbClr val="D9DBD8"/>
+                </a:solidFill>
+                <a:latin typeface="Calibri"/>
+              </a:defRPr>
+            </a:pPr>
+            <a:r>
+              <a:t>Documentation: $0.24M</a:t>
+            </a:r>
+          </a:p>
+          <a:p>
+            <a:pPr>
+              <a:spcAft>
+                <a:spcPts val="300"/>
+              </a:spcAft>
+              <a:defRPr sz="600" b="0">
+                <a:solidFill>
+                  <a:srgbClr val="767676"/>
+                </a:solidFill>
+                <a:latin typeface="Calibri"/>
+              </a:defRPr>
+            </a:pPr>
+          </a:p>
+          <a:p>
+            <a:pPr>
+              <a:spcAft>
+                <a:spcPts val="650"/>
+              </a:spcAft>
+              <a:defRPr sz="1300" b="1">
+                <a:solidFill>
+                  <a:srgbClr val="FFFFFF"/>
+                </a:solidFill>
+                <a:latin typeface="Calibri"/>
+              </a:defRPr>
+            </a:pPr>
+            <a:r>
+              <a:t>Revenue Growth</a:t>
+            </a:r>
+          </a:p>
+          <a:p>
+            <a:pPr>
+              <a:spcAft>
+                <a:spcPts val="550"/>
+              </a:spcAft>
+              <a:defRPr sz="1100" b="0">
+                <a:solidFill>
+                  <a:srgbClr val="D9DBD8"/>
+                </a:solidFill>
+                <a:latin typeface="Calibri"/>
+              </a:defRPr>
+            </a:pPr>
+            <a:r>
+              <a:t>Customer retention: $3.0M</a:t>
+            </a:r>
+          </a:p>
+          <a:p>
+            <a:pPr>
+              <a:spcAft>
+                <a:spcPts val="550"/>
+              </a:spcAft>
+              <a:defRPr sz="1100" b="0">
+                <a:solidFill>
+                  <a:srgbClr val="D9DBD8"/>
+                </a:solidFill>
+                <a:latin typeface="Calibri"/>
+              </a:defRPr>
+            </a:pPr>
+            <a:r>
+              <a:t>Package size increase: $4.0M</a:t>
+            </a:r>
+          </a:p>
+          <a:p>
+            <a:pPr>
+              <a:spcAft>
+                <a:spcPts val="550"/>
+              </a:spcAft>
+              <a:defRPr sz="1100" b="0">
+                <a:solidFill>
+                  <a:srgbClr val="D9DBD8"/>
+                </a:solidFill>
+                <a:latin typeface="Calibri"/>
+              </a:defRPr>
+            </a:pPr>
+            <a:r>
+              <a:t>Proposal win rate: $2.5M</a:t>
+            </a:r>
+          </a:p>
+          <a:p>
+            <a:pPr>
+              <a:spcAft>
+                <a:spcPts val="300"/>
+              </a:spcAft>
+              <a:defRPr sz="600" b="0">
+                <a:solidFill>
+                  <a:srgbClr val="767676"/>
+                </a:solidFill>
+                <a:latin typeface="Calibri"/>
+              </a:defRPr>
+            </a:pPr>
+          </a:p>
+          <a:p>
+            <a:pPr>
+              <a:spcAft>
+                <a:spcPts val="600"/>
+              </a:spcAft>
+              <a:defRPr sz="1200" b="1">
+                <a:solidFill>
+                  <a:srgbClr val="FFFFFF"/>
+                </a:solidFill>
+                <a:latin typeface="Calibri"/>
+              </a:defRPr>
+            </a:pPr>
+            <a:r>
+              <a:t>Gross value: $12.9M</a:t>
+            </a:r>
+          </a:p>
+          <a:p>
+            <a:pPr>
+              <a:spcAft>
+                <a:spcPts val="600"/>
               </a:spcAft>
               <a:defRPr sz="1200" b="0">
                 <a:solidFill>
-                  <a:srgbClr val="94A3B8"/>
-                </a:solidFill>
-                <a:latin typeface="Calibri"/>
-              </a:defRPr>
-            </a:pPr>
-            <a:r>
-              <a:t>Support automation: $1.6M</a:t>
+                  <a:srgbClr val="767676"/>
+                </a:solidFill>
+                <a:latin typeface="Calibri"/>
+              </a:defRPr>
+            </a:pPr>
+            <a:r>
+              <a:t>Total spend: ($2.7M)</a:t>
             </a:r>
           </a:p>
           <a:p>
             <a:pPr>
               <a:spcAft>
-                <a:spcPts val="720"/>
+                <a:spcPts val="600"/>
               </a:spcAft>
-              <a:defRPr sz="1200" b="0">
-                <a:solidFill>
-                  <a:srgbClr val="94A3B8"/>
-                </a:solidFill>
-                <a:latin typeface="Calibri"/>
-              </a:defRPr>
-            </a:pPr>
-            <a:r>
-              <a:t>Demand forecasting: $1.6M</a:t>
-            </a:r>
-          </a:p>
-          <a:p>
-            <a:pPr>
-              <a:spcAft>
-                <a:spcPts val="720"/>
-              </a:spcAft>
-              <a:defRPr sz="1200" b="0">
-                <a:solidFill>
-                  <a:srgbClr val="94A3B8"/>
-                </a:solidFill>
-                <a:latin typeface="Calibri"/>
-              </a:defRPr>
-            </a:pPr>
-            <a:r>
-              <a:t>Documentation: $0.24M</a:t>
-            </a:r>
-          </a:p>
-          <a:p>
-            <a:pPr>
-              <a:spcAft>
-                <a:spcPts val="480"/>
-              </a:spcAft>
-              <a:defRPr sz="800" b="0">
-                <a:solidFill>
-                  <a:srgbClr val="64748B"/>
-                </a:solidFill>
-                <a:latin typeface="Calibri"/>
-              </a:defRPr>
-            </a:pPr>
-          </a:p>
-          <a:p>
-            <a:pPr>
-              <a:spcAft>
-                <a:spcPts val="840"/>
-              </a:spcAft>
-              <a:defRPr sz="1400" b="1">
-                <a:solidFill>
-                  <a:srgbClr val="F8FAFC"/>
-                </a:solidFill>
-                <a:latin typeface="Calibri"/>
-              </a:defRPr>
-            </a:pPr>
-            <a:r>
-              <a:t>Revenue Growth</a:t>
-            </a:r>
-          </a:p>
-          <a:p>
-            <a:pPr>
-              <a:spcAft>
-                <a:spcPts val="720"/>
-              </a:spcAft>
-              <a:defRPr sz="1200" b="0">
-                <a:solidFill>
-                  <a:srgbClr val="94A3B8"/>
-                </a:solidFill>
-                <a:latin typeface="Calibri"/>
-              </a:defRPr>
-            </a:pPr>
-            <a:r>
-              <a:t>Customer retention: $3.0M</a:t>
-            </a:r>
-          </a:p>
-          <a:p>
-            <a:pPr>
-              <a:spcAft>
-                <a:spcPts val="720"/>
-              </a:spcAft>
-              <a:defRPr sz="1200" b="0">
-                <a:solidFill>
-                  <a:srgbClr val="94A3B8"/>
-                </a:solidFill>
-                <a:latin typeface="Calibri"/>
-              </a:defRPr>
-            </a:pPr>
-            <a:r>
-              <a:t>Package size increase: $4.0M</a:t>
-            </a:r>
-          </a:p>
-          <a:p>
-            <a:pPr>
-              <a:spcAft>
-                <a:spcPts val="720"/>
-              </a:spcAft>
-              <a:defRPr sz="1200" b="0">
-                <a:solidFill>
-                  <a:srgbClr val="94A3B8"/>
-                </a:solidFill>
-                <a:latin typeface="Calibri"/>
-              </a:defRPr>
-            </a:pPr>
-            <a:r>
-              <a:t>Proposal win rate: $2.5M</a:t>
-            </a:r>
-          </a:p>
-          <a:p>
-            <a:pPr>
-              <a:spcAft>
-                <a:spcPts val="480"/>
-              </a:spcAft>
-              <a:defRPr sz="800" b="0">
-                <a:solidFill>
-                  <a:srgbClr val="64748B"/>
-                </a:solidFill>
-                <a:latin typeface="Calibri"/>
-              </a:defRPr>
-            </a:pPr>
-          </a:p>
-          <a:p>
-            <a:pPr>
-              <a:spcAft>
-                <a:spcPts val="780"/>
-              </a:spcAft>
-              <a:defRPr sz="1300" b="1">
-                <a:solidFill>
-                  <a:srgbClr val="389FF5"/>
-                </a:solidFill>
-                <a:latin typeface="Calibri"/>
-              </a:defRPr>
-            </a:pPr>
-            <a:r>
-              <a:t>Gross value: $12.9M</a:t>
-            </a:r>
-          </a:p>
-          <a:p>
-            <a:pPr>
-              <a:spcAft>
-                <a:spcPts val="780"/>
-              </a:spcAft>
-              <a:defRPr sz="1300" b="0">
-                <a:solidFill>
-                  <a:srgbClr val="FBBF24"/>
-                </a:solidFill>
-                <a:latin typeface="Calibri"/>
-              </a:defRPr>
-            </a:pPr>
-            <a:r>
-              <a:t>Total spend: ($2.7M)</a:t>
-            </a:r>
-          </a:p>
-          <a:p>
-            <a:pPr>
-              <a:spcAft>
-                <a:spcPts val="780"/>
-              </a:spcAft>
-              <a:defRPr sz="1300" b="1">
-                <a:solidFill>
-                  <a:srgbClr val="34D399"/>
+              <a:defRPr sz="1200" b="1">
+                <a:solidFill>
+                  <a:srgbClr val="E51937"/>
                 </a:solidFill>
                 <a:latin typeface="Calibri"/>
               </a:defRPr>
@@ -9996,7 +10261,7 @@
     <p:bg>
       <p:bgPr>
         <a:solidFill>
-          <a:srgbClr val="0F172A"/>
+          <a:srgbClr val="1C1C1E"/>
         </a:solidFill>
         <a:effectLst/>
       </p:bgPr>
@@ -10017,29 +10282,29 @@
         <p:spPr>
           <a:xfrm>
             <a:off x="731520" y="274320"/>
-            <a:ext cx="5486400" cy="274320"/>
-          </a:xfrm>
-          <a:prstGeom prst="rect">
-            <a:avLst/>
-          </a:prstGeom>
-          <a:noFill/>
-        </p:spPr>
-        <p:txBody>
-          <a:bodyPr wrap="square">
-            <a:spAutoFit/>
-          </a:bodyPr>
-          <a:lstStyle/>
-          <a:p>
-            <a:pPr algn="l">
-              <a:defRPr sz="1200" b="1">
-                <a:solidFill>
-                  <a:srgbClr val="34D399"/>
-                </a:solidFill>
-                <a:latin typeface="Calibri"/>
-              </a:defRPr>
-            </a:pPr>
-            <a:r>
-              <a:t>WHAT COULD BE</a:t>
+            <a:ext cx="5486400" cy="228600"/>
+          </a:xfrm>
+          <a:prstGeom prst="rect">
+            <a:avLst/>
+          </a:prstGeom>
+          <a:noFill/>
+        </p:spPr>
+        <p:txBody>
+          <a:bodyPr wrap="square">
+            <a:spAutoFit/>
+          </a:bodyPr>
+          <a:lstStyle/>
+          <a:p>
+            <a:pPr algn="l">
+              <a:defRPr sz="1100" b="1">
+                <a:solidFill>
+                  <a:srgbClr val="E51937"/>
+                </a:solidFill>
+                <a:latin typeface="Calibri"/>
+              </a:defRPr>
+            </a:pPr>
+            <a:r>
+              <a:t>2031 VISION</a:t>
             </a:r>
           </a:p>
         </p:txBody>
@@ -10052,8 +10317,8 @@
         </p:nvSpPr>
         <p:spPr>
           <a:xfrm>
-            <a:off x="731520" y="594360"/>
-            <a:ext cx="9144000" cy="457200"/>
+            <a:off x="731520" y="548640"/>
+            <a:ext cx="10058400" cy="457200"/>
           </a:xfrm>
           <a:prstGeom prst="rect">
             <a:avLst/>
@@ -10069,13 +10334,13 @@
             <a:pPr algn="l">
               <a:defRPr sz="3200" b="1">
                 <a:solidFill>
-                  <a:srgbClr val="F8FAFC"/>
-                </a:solidFill>
-                <a:latin typeface="Calibri"/>
-              </a:defRPr>
-            </a:pPr>
-            <a:r>
-              <a:t>SRAM 2031 - From Hardware to Intelligence</a:t>
+                  <a:srgbClr val="FFFFFF"/>
+                </a:solidFill>
+                <a:latin typeface="Calibri"/>
+              </a:defRPr>
+            </a:pPr>
+            <a:r>
+              <a:t>From Hardware Manufacturer to Performance Intelligence</a:t>
             </a:r>
           </a:p>
         </p:txBody>
@@ -10088,14 +10353,14 @@
         </p:nvSpPr>
         <p:spPr>
           <a:xfrm>
-            <a:off x="731520" y="1097280"/>
-            <a:ext cx="1097280" cy="38100"/>
+            <a:off x="731520" y="1051560"/>
+            <a:ext cx="914400" cy="25400"/>
           </a:xfrm>
           <a:prstGeom prst="rect">
             <a:avLst/>
           </a:prstGeom>
           <a:solidFill>
-            <a:srgbClr val="34D399"/>
+            <a:srgbClr val="E51937"/>
           </a:solidFill>
           <a:ln>
             <a:noFill/>
@@ -10131,7 +10396,7 @@
         </p:nvSpPr>
         <p:spPr>
           <a:xfrm>
-            <a:off x="731520" y="1325880"/>
+            <a:off x="731520" y="1280160"/>
             <a:ext cx="10058400" cy="457200"/>
           </a:xfrm>
           <a:prstGeom prst="rect">
@@ -10148,13 +10413,13 @@
             <a:pPr algn="l">
               <a:defRPr sz="1400" b="0">
                 <a:solidFill>
-                  <a:srgbClr val="94A3B8"/>
-                </a:solidFill>
-                <a:latin typeface="Calibri"/>
-              </a:defRPr>
-            </a:pPr>
-            <a:r>
-              <a:t>SRAM's full product stack creates a data moat no competitor can replicate. The rider who buys SRAM drivetrain, RockShox suspension, Quarq power, and Hammerhead computer gets a unified intelligence layer impossible with mixed components.</a:t>
+                  <a:srgbClr val="D9DBD8"/>
+                </a:solidFill>
+                <a:latin typeface="Calibri"/>
+              </a:defRPr>
+            </a:pPr>
+            <a:r>
+              <a:t>SRAM's full product stack creates a data moat no competitor can replicate. The rider with SRAM drivetrain, RockShox suspension, Quarq power, and Hammerhead computer gets a unified intelligence layer impossible with mixed components.</a:t>
             </a:r>
           </a:p>
         </p:txBody>
@@ -10167,8 +10432,8 @@
         </p:nvSpPr>
         <p:spPr>
           <a:xfrm>
-            <a:off x="731520" y="2286000"/>
-            <a:ext cx="5029200" cy="1737360"/>
+            <a:off x="731520" y="2011680"/>
+            <a:ext cx="5166360" cy="1691640"/>
           </a:xfrm>
           <a:prstGeom prst="roundRect">
             <a:avLst>
@@ -10176,11 +10441,11 @@
             </a:avLst>
           </a:prstGeom>
           <a:solidFill>
-            <a:srgbClr val="16213A"/>
+            <a:srgbClr val="2A2A2C"/>
           </a:solidFill>
           <a:ln w="12700">
             <a:solidFill>
-              <a:srgbClr val="1E293B"/>
+              <a:srgbClr val="3A3A3C"/>
             </a:solidFill>
           </a:ln>
         </p:spPr>
@@ -10214,24 +10479,24 @@
         </p:nvSpPr>
         <p:spPr>
           <a:xfrm>
-            <a:off x="1005840" y="2468880"/>
-            <a:ext cx="4480560" cy="365760"/>
-          </a:xfrm>
-          <a:prstGeom prst="rect">
-            <a:avLst/>
-          </a:prstGeom>
-          <a:noFill/>
-        </p:spPr>
-        <p:txBody>
-          <a:bodyPr wrap="square">
-            <a:spAutoFit/>
-          </a:bodyPr>
-          <a:lstStyle/>
-          <a:p>
-            <a:pPr algn="l">
-              <a:defRPr sz="1600" b="1">
-                <a:solidFill>
-                  <a:srgbClr val="389FF5"/>
+            <a:off x="1005840" y="2148840"/>
+            <a:ext cx="4617720" cy="320040"/>
+          </a:xfrm>
+          <a:prstGeom prst="rect">
+            <a:avLst/>
+          </a:prstGeom>
+          <a:noFill/>
+        </p:spPr>
+        <p:txBody>
+          <a:bodyPr wrap="square">
+            <a:spAutoFit/>
+          </a:bodyPr>
+          <a:lstStyle/>
+          <a:p>
+            <a:pPr algn="l">
+              <a:defRPr sz="1500" b="1">
+                <a:solidFill>
+                  <a:srgbClr val="E51937"/>
                 </a:solidFill>
                 <a:latin typeface="Calibri"/>
               </a:defRPr>
@@ -10250,8 +10515,8 @@
         </p:nvSpPr>
         <p:spPr>
           <a:xfrm>
-            <a:off x="1005840" y="2880360"/>
-            <a:ext cx="4480560" cy="914400"/>
+            <a:off x="1005840" y="2514600"/>
+            <a:ext cx="4617720" cy="1005840"/>
           </a:xfrm>
           <a:prstGeom prst="rect">
             <a:avLst/>
@@ -10267,7 +10532,7 @@
             <a:pPr algn="l">
               <a:defRPr sz="1200" b="0">
                 <a:solidFill>
-                  <a:srgbClr val="94A3B8"/>
+                  <a:srgbClr val="D9DBD8"/>
                 </a:solidFill>
                 <a:latin typeface="Calibri"/>
               </a:defRPr>
@@ -10286,8 +10551,8 @@
         </p:nvSpPr>
         <p:spPr>
           <a:xfrm>
-            <a:off x="6035040" y="2286000"/>
-            <a:ext cx="5029200" cy="1737360"/>
+            <a:off x="6126480" y="2011680"/>
+            <a:ext cx="5166360" cy="1691640"/>
           </a:xfrm>
           <a:prstGeom prst="roundRect">
             <a:avLst>
@@ -10295,11 +10560,11 @@
             </a:avLst>
           </a:prstGeom>
           <a:solidFill>
-            <a:srgbClr val="16213A"/>
+            <a:srgbClr val="2A2A2C"/>
           </a:solidFill>
           <a:ln w="12700">
             <a:solidFill>
-              <a:srgbClr val="1E293B"/>
+              <a:srgbClr val="3A3A3C"/>
             </a:solidFill>
           </a:ln>
         </p:spPr>
@@ -10333,24 +10598,24 @@
         </p:nvSpPr>
         <p:spPr>
           <a:xfrm>
-            <a:off x="6309360" y="2468880"/>
-            <a:ext cx="4480560" cy="365760"/>
-          </a:xfrm>
-          <a:prstGeom prst="rect">
-            <a:avLst/>
-          </a:prstGeom>
-          <a:noFill/>
-        </p:spPr>
-        <p:txBody>
-          <a:bodyPr wrap="square">
-            <a:spAutoFit/>
-          </a:bodyPr>
-          <a:lstStyle/>
-          <a:p>
-            <a:pPr algn="l">
-              <a:defRPr sz="1600" b="1">
-                <a:solidFill>
-                  <a:srgbClr val="34D399"/>
+            <a:off x="6400800" y="2148840"/>
+            <a:ext cx="4617720" cy="320040"/>
+          </a:xfrm>
+          <a:prstGeom prst="rect">
+            <a:avLst/>
+          </a:prstGeom>
+          <a:noFill/>
+        </p:spPr>
+        <p:txBody>
+          <a:bodyPr wrap="square">
+            <a:spAutoFit/>
+          </a:bodyPr>
+          <a:lstStyle/>
+          <a:p>
+            <a:pPr algn="l">
+              <a:defRPr sz="1500" b="1">
+                <a:solidFill>
+                  <a:srgbClr val="E51937"/>
                 </a:solidFill>
                 <a:latin typeface="Calibri"/>
               </a:defRPr>
@@ -10369,8 +10634,8 @@
         </p:nvSpPr>
         <p:spPr>
           <a:xfrm>
-            <a:off x="6309360" y="2880360"/>
-            <a:ext cx="4480560" cy="914400"/>
+            <a:off x="6400800" y="2514600"/>
+            <a:ext cx="4617720" cy="1005840"/>
           </a:xfrm>
           <a:prstGeom prst="rect">
             <a:avLst/>
@@ -10386,13 +10651,13 @@
             <a:pPr algn="l">
               <a:defRPr sz="1200" b="0">
                 <a:solidFill>
-                  <a:srgbClr val="94A3B8"/>
-                </a:solidFill>
-                <a:latin typeface="Calibri"/>
-              </a:defRPr>
-            </a:pPr>
-            <a:r>
-              <a:t>Connected components predict chain, cassette, and brake pad replacement before failure. Installed base becomes recurring revenue.</a:t>
+                  <a:srgbClr val="D9DBD8"/>
+                </a:solidFill>
+                <a:latin typeface="Calibri"/>
+              </a:defRPr>
+            </a:pPr>
+            <a:r>
+              <a:t>Connected components predict chain, cassette, and brake pad replacement before failure. Installed base becomes a recurring revenue platform.</a:t>
             </a:r>
           </a:p>
         </p:txBody>
@@ -10405,8 +10670,8 @@
         </p:nvSpPr>
         <p:spPr>
           <a:xfrm>
-            <a:off x="731520" y="4297680"/>
-            <a:ext cx="5029200" cy="1737360"/>
+            <a:off x="731520" y="3931920"/>
+            <a:ext cx="5166360" cy="1691640"/>
           </a:xfrm>
           <a:prstGeom prst="roundRect">
             <a:avLst>
@@ -10414,11 +10679,11 @@
             </a:avLst>
           </a:prstGeom>
           <a:solidFill>
-            <a:srgbClr val="16213A"/>
+            <a:srgbClr val="2A2A2C"/>
           </a:solidFill>
           <a:ln w="12700">
             <a:solidFill>
-              <a:srgbClr val="1E293B"/>
+              <a:srgbClr val="3A3A3C"/>
             </a:solidFill>
           </a:ln>
         </p:spPr>
@@ -10452,24 +10717,24 @@
         </p:nvSpPr>
         <p:spPr>
           <a:xfrm>
-            <a:off x="1005840" y="4480560"/>
-            <a:ext cx="4480560" cy="365760"/>
-          </a:xfrm>
-          <a:prstGeom prst="rect">
-            <a:avLst/>
-          </a:prstGeom>
-          <a:noFill/>
-        </p:spPr>
-        <p:txBody>
-          <a:bodyPr wrap="square">
-            <a:spAutoFit/>
-          </a:bodyPr>
-          <a:lstStyle/>
-          <a:p>
-            <a:pPr algn="l">
-              <a:defRPr sz="1600" b="1">
-                <a:solidFill>
-                  <a:srgbClr val="34D399"/>
+            <a:off x="1005840" y="4069080"/>
+            <a:ext cx="4617720" cy="320040"/>
+          </a:xfrm>
+          <a:prstGeom prst="rect">
+            <a:avLst/>
+          </a:prstGeom>
+          <a:noFill/>
+        </p:spPr>
+        <p:txBody>
+          <a:bodyPr wrap="square">
+            <a:spAutoFit/>
+          </a:bodyPr>
+          <a:lstStyle/>
+          <a:p>
+            <a:pPr algn="l">
+              <a:defRPr sz="1500" b="1">
+                <a:solidFill>
+                  <a:srgbClr val="E51937"/>
                 </a:solidFill>
                 <a:latin typeface="Calibri"/>
               </a:defRPr>
@@ -10488,8 +10753,8 @@
         </p:nvSpPr>
         <p:spPr>
           <a:xfrm>
-            <a:off x="1005840" y="4892040"/>
-            <a:ext cx="4480560" cy="914400"/>
+            <a:off x="1005840" y="4434840"/>
+            <a:ext cx="4617720" cy="1005840"/>
           </a:xfrm>
           <a:prstGeom prst="rect">
             <a:avLst/>
@@ -10505,7 +10770,7 @@
             <a:pPr algn="l">
               <a:defRPr sz="1200" b="0">
                 <a:solidFill>
-                  <a:srgbClr val="94A3B8"/>
+                  <a:srgbClr val="D9DBD8"/>
                 </a:solidFill>
                 <a:latin typeface="Calibri"/>
               </a:defRPr>
@@ -10524,8 +10789,8 @@
         </p:nvSpPr>
         <p:spPr>
           <a:xfrm>
-            <a:off x="6035040" y="4297680"/>
-            <a:ext cx="5029200" cy="1737360"/>
+            <a:off x="6126480" y="3931920"/>
+            <a:ext cx="5166360" cy="1691640"/>
           </a:xfrm>
           <a:prstGeom prst="roundRect">
             <a:avLst>
@@ -10533,11 +10798,11 @@
             </a:avLst>
           </a:prstGeom>
           <a:solidFill>
-            <a:srgbClr val="16213A"/>
+            <a:srgbClr val="2A2A2C"/>
           </a:solidFill>
           <a:ln w="12700">
             <a:solidFill>
-              <a:srgbClr val="1E293B"/>
+              <a:srgbClr val="3A3A3C"/>
             </a:solidFill>
           </a:ln>
         </p:spPr>
@@ -10571,24 +10836,24 @@
         </p:nvSpPr>
         <p:spPr>
           <a:xfrm>
-            <a:off x="6309360" y="4480560"/>
-            <a:ext cx="4480560" cy="365760"/>
-          </a:xfrm>
-          <a:prstGeom prst="rect">
-            <a:avLst/>
-          </a:prstGeom>
-          <a:noFill/>
-        </p:spPr>
-        <p:txBody>
-          <a:bodyPr wrap="square">
-            <a:spAutoFit/>
-          </a:bodyPr>
-          <a:lstStyle/>
-          <a:p>
-            <a:pPr algn="l">
-              <a:defRPr sz="1600" b="1">
-                <a:solidFill>
-                  <a:srgbClr val="389FF5"/>
+            <a:off x="6400800" y="4069080"/>
+            <a:ext cx="4617720" cy="320040"/>
+          </a:xfrm>
+          <a:prstGeom prst="rect">
+            <a:avLst/>
+          </a:prstGeom>
+          <a:noFill/>
+        </p:spPr>
+        <p:txBody>
+          <a:bodyPr wrap="square">
+            <a:spAutoFit/>
+          </a:bodyPr>
+          <a:lstStyle/>
+          <a:p>
+            <a:pPr algn="l">
+              <a:defRPr sz="1500" b="1">
+                <a:solidFill>
+                  <a:srgbClr val="E51937"/>
                 </a:solidFill>
                 <a:latin typeface="Calibri"/>
               </a:defRPr>
@@ -10607,8 +10872,8 @@
         </p:nvSpPr>
         <p:spPr>
           <a:xfrm>
-            <a:off x="6309360" y="4892040"/>
-            <a:ext cx="4480560" cy="914400"/>
+            <a:off x="6400800" y="4434840"/>
+            <a:ext cx="4617720" cy="1005840"/>
           </a:xfrm>
           <a:prstGeom prst="rect">
             <a:avLst/>
@@ -10624,7 +10889,7 @@
             <a:pPr algn="l">
               <a:defRPr sz="1200" b="0">
                 <a:solidFill>
-                  <a:srgbClr val="94A3B8"/>
+                  <a:srgbClr val="D9DBD8"/>
                 </a:solidFill>
                 <a:latin typeface="Calibri"/>
               </a:defRPr>
@@ -10643,8 +10908,8 @@
         </p:nvSpPr>
         <p:spPr>
           <a:xfrm>
-            <a:off x="731520" y="6217920"/>
-            <a:ext cx="10515600" cy="457200"/>
+            <a:off x="731520" y="5943600"/>
+            <a:ext cx="10698480" cy="411480"/>
           </a:xfrm>
           <a:prstGeom prst="roundRect">
             <a:avLst>
@@ -10652,11 +10917,11 @@
             </a:avLst>
           </a:prstGeom>
           <a:solidFill>
-            <a:srgbClr val="16213A"/>
+            <a:srgbClr val="2A2A2C"/>
           </a:solidFill>
           <a:ln w="12700">
             <a:solidFill>
-              <a:srgbClr val="34D399"/>
+              <a:srgbClr val="E51937"/>
             </a:solidFill>
           </a:ln>
         </p:spPr>
@@ -10690,8 +10955,8 @@
         </p:nvSpPr>
         <p:spPr>
           <a:xfrm>
-            <a:off x="1188720" y="6263640"/>
-            <a:ext cx="9601200" cy="365760"/>
+            <a:off x="1097280" y="5989320"/>
+            <a:ext cx="10058400" cy="320040"/>
           </a:xfrm>
           <a:prstGeom prst="rect">
             <a:avLst/>
@@ -10705,15 +10970,15 @@
           <a:lstStyle/>
           <a:p>
             <a:pPr algn="ctr">
-              <a:defRPr sz="1400" b="1">
-                <a:solidFill>
-                  <a:srgbClr val="34D399"/>
-                </a:solidFill>
-                <a:latin typeface="Calibri"/>
-              </a:defRPr>
-            </a:pPr>
-            <a:r>
-              <a:t>The Flywheel: Hardware sells data access  →  Data improves performance  →  Performance sells hardware</a:t>
+              <a:defRPr sz="1300" b="1">
+                <a:solidFill>
+                  <a:srgbClr val="E51937"/>
+                </a:solidFill>
+                <a:latin typeface="Calibri"/>
+              </a:defRPr>
+            </a:pPr>
+            <a:r>
+              <a:t>Hardware sells data access  →  Data improves performance  →  Performance sells hardware</a:t>
             </a:r>
           </a:p>
         </p:txBody>
@@ -10732,7 +10997,7 @@
     <p:bg>
       <p:bgPr>
         <a:solidFill>
-          <a:srgbClr val="0F172A"/>
+          <a:srgbClr val="1C1C1E"/>
         </a:solidFill>
         <a:effectLst/>
       </p:bgPr>
@@ -10753,23 +11018,23 @@
         <p:spPr>
           <a:xfrm>
             <a:off x="731520" y="274320"/>
-            <a:ext cx="5486400" cy="274320"/>
-          </a:xfrm>
-          <a:prstGeom prst="rect">
-            <a:avLst/>
-          </a:prstGeom>
-          <a:noFill/>
-        </p:spPr>
-        <p:txBody>
-          <a:bodyPr wrap="square">
-            <a:spAutoFit/>
-          </a:bodyPr>
-          <a:lstStyle/>
-          <a:p>
-            <a:pPr algn="l">
-              <a:defRPr sz="1200" b="1">
-                <a:solidFill>
-                  <a:srgbClr val="389FF5"/>
+            <a:ext cx="5486400" cy="228600"/>
+          </a:xfrm>
+          <a:prstGeom prst="rect">
+            <a:avLst/>
+          </a:prstGeom>
+          <a:noFill/>
+        </p:spPr>
+        <p:txBody>
+          <a:bodyPr wrap="square">
+            <a:spAutoFit/>
+          </a:bodyPr>
+          <a:lstStyle/>
+          <a:p>
+            <a:pPr algn="l">
+              <a:defRPr sz="1100" b="1">
+                <a:solidFill>
+                  <a:srgbClr val="E51937"/>
                 </a:solidFill>
                 <a:latin typeface="Calibri"/>
               </a:defRPr>
@@ -10788,8 +11053,8 @@
         </p:nvSpPr>
         <p:spPr>
           <a:xfrm>
-            <a:off x="731520" y="594360"/>
-            <a:ext cx="9144000" cy="457200"/>
+            <a:off x="731520" y="548640"/>
+            <a:ext cx="10058400" cy="457200"/>
           </a:xfrm>
           <a:prstGeom prst="rect">
             <a:avLst/>
@@ -10805,7 +11070,7 @@
             <a:pPr algn="l">
               <a:defRPr sz="3200" b="1">
                 <a:solidFill>
-                  <a:srgbClr val="F8FAFC"/>
+                  <a:srgbClr val="FFFFFF"/>
                 </a:solidFill>
                 <a:latin typeface="Calibri"/>
               </a:defRPr>
@@ -10824,14 +11089,14 @@
         </p:nvSpPr>
         <p:spPr>
           <a:xfrm>
-            <a:off x="731520" y="1097280"/>
-            <a:ext cx="1097280" cy="38100"/>
+            <a:off x="731520" y="1051560"/>
+            <a:ext cx="914400" cy="25400"/>
           </a:xfrm>
           <a:prstGeom prst="rect">
             <a:avLst/>
           </a:prstGeom>
           <a:solidFill>
-            <a:srgbClr val="389FF5"/>
+            <a:srgbClr val="E51937"/>
           </a:solidFill>
           <a:ln>
             <a:noFill/>
@@ -10868,19 +11133,19 @@
         <p:spPr>
           <a:xfrm>
             <a:off x="731520" y="1371600"/>
-            <a:ext cx="10515600" cy="1280160"/>
+            <a:ext cx="10515600" cy="1234440"/>
           </a:xfrm>
           <a:prstGeom prst="roundRect">
             <a:avLst>
-              <a:gd name="adj" fmla="val 3000"/>
+              <a:gd name="adj" fmla="val 4000"/>
             </a:avLst>
           </a:prstGeom>
           <a:solidFill>
-            <a:srgbClr val="16213A"/>
+            <a:srgbClr val="2A2A2C"/>
           </a:solidFill>
           <a:ln w="12700">
             <a:solidFill>
-              <a:srgbClr val="34D399"/>
+              <a:srgbClr val="3A3A3C"/>
             </a:solidFill>
           </a:ln>
         </p:spPr>
@@ -10914,14 +11179,14 @@
         </p:nvSpPr>
         <p:spPr>
           <a:xfrm>
-            <a:off x="1097280" y="1645920"/>
-            <a:ext cx="502920" cy="502920"/>
+            <a:off x="1097280" y="1627632"/>
+            <a:ext cx="457200" cy="457200"/>
           </a:xfrm>
           <a:prstGeom prst="ellipse">
             <a:avLst/>
           </a:prstGeom>
           <a:solidFill>
-            <a:srgbClr val="34D399"/>
+            <a:srgbClr val="E51937"/>
           </a:solidFill>
           <a:ln>
             <a:noFill/>
@@ -10942,13 +11207,13 @@
           </a:fontRef>
         </p:style>
         <p:txBody>
-          <a:bodyPr rtlCol="0" anchor="ctr" wrap="none"/>
+          <a:bodyPr rtlCol="0" anchor="ctr"/>
           <a:lstStyle/>
           <a:p>
             <a:pPr algn="ctr">
-              <a:defRPr sz="2000" b="1">
-                <a:solidFill>
-                  <a:srgbClr val="0F172A"/>
+              <a:defRPr sz="1800" b="1">
+                <a:solidFill>
+                  <a:srgbClr val="FFFFFF"/>
                 </a:solidFill>
               </a:defRPr>
             </a:pPr>
@@ -10966,8 +11231,8 @@
         </p:nvSpPr>
         <p:spPr>
           <a:xfrm>
-            <a:off x="1920240" y="1508760"/>
-            <a:ext cx="8686800" cy="411480"/>
+            <a:off x="1828800" y="1481328"/>
+            <a:ext cx="8961120" cy="365760"/>
           </a:xfrm>
           <a:prstGeom prst="rect">
             <a:avLst/>
@@ -10983,7 +11248,7 @@
             <a:pPr algn="l">
               <a:defRPr sz="1800" b="1">
                 <a:solidFill>
-                  <a:srgbClr val="F8FAFC"/>
+                  <a:srgbClr val="FFFFFF"/>
                 </a:solidFill>
                 <a:latin typeface="Calibri"/>
               </a:defRPr>
@@ -11002,8 +11267,8 @@
         </p:nvSpPr>
         <p:spPr>
           <a:xfrm>
-            <a:off x="1920240" y="1920240"/>
-            <a:ext cx="8686800" cy="594360"/>
+            <a:off x="1828800" y="1874520"/>
+            <a:ext cx="8961120" cy="594360"/>
           </a:xfrm>
           <a:prstGeom prst="rect">
             <a:avLst/>
@@ -11019,13 +11284,13 @@
             <a:pPr algn="l">
               <a:defRPr sz="1200" b="0">
                 <a:solidFill>
-                  <a:srgbClr val="94A3B8"/>
-                </a:solidFill>
-                <a:latin typeface="Calibri"/>
-              </a:defRPr>
-            </a:pPr>
-            <a:r>
-              <a:t>Scope it to AXS and Hammerhead dealer support. One product owner, one integration engineer. Human approval on all customer-facing outputs. Weekly quality reviews.</a:t>
+                  <a:srgbClr val="D9DBD8"/>
+                </a:solidFill>
+                <a:latin typeface="Calibri"/>
+              </a:defRPr>
+            </a:pPr>
+            <a:r>
+              <a:t>Scope it to AXS and Hammerhead dealer support. One product owner, one integration engineer. Human approval on all outputs. Weekly quality reviews.</a:t>
             </a:r>
           </a:p>
         </p:txBody>
@@ -11038,20 +11303,20 @@
         </p:nvSpPr>
         <p:spPr>
           <a:xfrm>
-            <a:off x="731520" y="2880360"/>
-            <a:ext cx="10515600" cy="1280160"/>
+            <a:off x="731520" y="2834640"/>
+            <a:ext cx="10515600" cy="1234440"/>
           </a:xfrm>
           <a:prstGeom prst="roundRect">
             <a:avLst>
-              <a:gd name="adj" fmla="val 3000"/>
+              <a:gd name="adj" fmla="val 4000"/>
             </a:avLst>
           </a:prstGeom>
           <a:solidFill>
-            <a:srgbClr val="16213A"/>
+            <a:srgbClr val="2A2A2C"/>
           </a:solidFill>
           <a:ln w="12700">
             <a:solidFill>
-              <a:srgbClr val="389FF5"/>
+              <a:srgbClr val="3A3A3C"/>
             </a:solidFill>
           </a:ln>
         </p:spPr>
@@ -11085,14 +11350,14 @@
         </p:nvSpPr>
         <p:spPr>
           <a:xfrm>
-            <a:off x="1097280" y="3154680"/>
-            <a:ext cx="502920" cy="502920"/>
+            <a:off x="1097280" y="3090672"/>
+            <a:ext cx="457200" cy="457200"/>
           </a:xfrm>
           <a:prstGeom prst="ellipse">
             <a:avLst/>
           </a:prstGeom>
           <a:solidFill>
-            <a:srgbClr val="389FF5"/>
+            <a:srgbClr val="E51937"/>
           </a:solidFill>
           <a:ln>
             <a:noFill/>
@@ -11113,13 +11378,13 @@
           </a:fontRef>
         </p:style>
         <p:txBody>
-          <a:bodyPr rtlCol="0" anchor="ctr" wrap="none"/>
+          <a:bodyPr rtlCol="0" anchor="ctr"/>
           <a:lstStyle/>
           <a:p>
             <a:pPr algn="ctr">
-              <a:defRPr sz="2000" b="1">
-                <a:solidFill>
-                  <a:srgbClr val="0F172A"/>
+              <a:defRPr sz="1800" b="1">
+                <a:solidFill>
+                  <a:srgbClr val="FFFFFF"/>
                 </a:solidFill>
               </a:defRPr>
             </a:pPr>
@@ -11137,8 +11402,8 @@
         </p:nvSpPr>
         <p:spPr>
           <a:xfrm>
-            <a:off x="1920240" y="3017520"/>
-            <a:ext cx="8686800" cy="411480"/>
+            <a:off x="1828800" y="2944368"/>
+            <a:ext cx="8961120" cy="365760"/>
           </a:xfrm>
           <a:prstGeom prst="rect">
             <a:avLst/>
@@ -11154,7 +11419,7 @@
             <a:pPr algn="l">
               <a:defRPr sz="1800" b="1">
                 <a:solidFill>
-                  <a:srgbClr val="F8FAFC"/>
+                  <a:srgbClr val="FFFFFF"/>
                 </a:solidFill>
                 <a:latin typeface="Calibri"/>
               </a:defRPr>
@@ -11173,8 +11438,8 @@
         </p:nvSpPr>
         <p:spPr>
           <a:xfrm>
-            <a:off x="1920240" y="3429000"/>
-            <a:ext cx="8686800" cy="594360"/>
+            <a:off x="1828800" y="3337560"/>
+            <a:ext cx="8961120" cy="594360"/>
           </a:xfrm>
           <a:prstGeom prst="rect">
             <a:avLst/>
@@ -11190,13 +11455,13 @@
             <a:pPr algn="l">
               <a:defRPr sz="1200" b="0">
                 <a:solidFill>
-                  <a:srgbClr val="94A3B8"/>
-                </a:solidFill>
-                <a:latin typeface="Calibri"/>
-              </a:defRPr>
-            </a:pPr>
-            <a:r>
-              <a:t>Initiate requirements for a unified data layer connecting Shopify, support systems, and telemetry data. This is the foundation for demand forecasting and AXS Intelligence.</a:t>
+                  <a:srgbClr val="D9DBD8"/>
+                </a:solidFill>
+                <a:latin typeface="Calibri"/>
+              </a:defRPr>
+            </a:pPr>
+            <a:r>
+              <a:t>Initiate requirements for a unified data layer connecting Shopify, support systems, and telemetry data. This is the foundation for forecasting and AXS Intelligence.</a:t>
             </a:r>
           </a:p>
         </p:txBody>
@@ -11209,20 +11474,20 @@
         </p:nvSpPr>
         <p:spPr>
           <a:xfrm>
-            <a:off x="731520" y="4389120"/>
-            <a:ext cx="10515600" cy="1280160"/>
+            <a:off x="731520" y="4297680"/>
+            <a:ext cx="10515600" cy="1234440"/>
           </a:xfrm>
           <a:prstGeom prst="roundRect">
             <a:avLst>
-              <a:gd name="adj" fmla="val 3000"/>
+              <a:gd name="adj" fmla="val 4000"/>
             </a:avLst>
           </a:prstGeom>
           <a:solidFill>
-            <a:srgbClr val="16213A"/>
+            <a:srgbClr val="2A2A2C"/>
           </a:solidFill>
           <a:ln w="12700">
             <a:solidFill>
-              <a:srgbClr val="FBBF24"/>
+              <a:srgbClr val="3A3A3C"/>
             </a:solidFill>
           </a:ln>
         </p:spPr>
@@ -11256,14 +11521,14 @@
         </p:nvSpPr>
         <p:spPr>
           <a:xfrm>
-            <a:off x="1097280" y="4663440"/>
-            <a:ext cx="502920" cy="502920"/>
+            <a:off x="1097280" y="4553712"/>
+            <a:ext cx="457200" cy="457200"/>
           </a:xfrm>
           <a:prstGeom prst="ellipse">
             <a:avLst/>
           </a:prstGeom>
           <a:solidFill>
-            <a:srgbClr val="FBBF24"/>
+            <a:srgbClr val="E51937"/>
           </a:solidFill>
           <a:ln>
             <a:noFill/>
@@ -11284,13 +11549,13 @@
           </a:fontRef>
         </p:style>
         <p:txBody>
-          <a:bodyPr rtlCol="0" anchor="ctr" wrap="none"/>
+          <a:bodyPr rtlCol="0" anchor="ctr"/>
           <a:lstStyle/>
           <a:p>
             <a:pPr algn="ctr">
-              <a:defRPr sz="2000" b="1">
-                <a:solidFill>
-                  <a:srgbClr val="0F172A"/>
+              <a:defRPr sz="1800" b="1">
+                <a:solidFill>
+                  <a:srgbClr val="FFFFFF"/>
                 </a:solidFill>
               </a:defRPr>
             </a:pPr>
@@ -11308,8 +11573,8 @@
         </p:nvSpPr>
         <p:spPr>
           <a:xfrm>
-            <a:off x="1920240" y="4526280"/>
-            <a:ext cx="8686800" cy="411480"/>
+            <a:off x="1828800" y="4407408"/>
+            <a:ext cx="8961120" cy="365760"/>
           </a:xfrm>
           <a:prstGeom prst="rect">
             <a:avLst/>
@@ -11325,7 +11590,7 @@
             <a:pPr algn="l">
               <a:defRPr sz="1800" b="1">
                 <a:solidFill>
-                  <a:srgbClr val="F8FAFC"/>
+                  <a:srgbClr val="FFFFFF"/>
                 </a:solidFill>
                 <a:latin typeface="Calibri"/>
               </a:defRPr>
@@ -11344,8 +11609,8 @@
         </p:nvSpPr>
         <p:spPr>
           <a:xfrm>
-            <a:off x="1920240" y="4937760"/>
-            <a:ext cx="8686800" cy="594360"/>
+            <a:off x="1828800" y="4800600"/>
+            <a:ext cx="8961120" cy="594360"/>
           </a:xfrm>
           <a:prstGeom prst="rect">
             <a:avLst/>
@@ -11361,7 +11626,7 @@
             <a:pPr algn="l">
               <a:defRPr sz="1200" b="0">
                 <a:solidFill>
-                  <a:srgbClr val="94A3B8"/>
+                  <a:srgbClr val="D9DBD8"/>
                 </a:solidFill>
                 <a:latin typeface="Calibri"/>
               </a:defRPr>
@@ -11380,8 +11645,8 @@
         </p:nvSpPr>
         <p:spPr>
           <a:xfrm>
-            <a:off x="731520" y="6172200"/>
-            <a:ext cx="10515600" cy="457200"/>
+            <a:off x="731520" y="5897880"/>
+            <a:ext cx="10515600" cy="365760"/>
           </a:xfrm>
           <a:prstGeom prst="roundRect">
             <a:avLst>
@@ -11389,11 +11654,11 @@
             </a:avLst>
           </a:prstGeom>
           <a:solidFill>
-            <a:srgbClr val="16213A"/>
+            <a:srgbClr val="2A2A2C"/>
           </a:solidFill>
           <a:ln w="12700">
             <a:solidFill>
-              <a:srgbClr val="34D399"/>
+              <a:srgbClr val="E51937"/>
             </a:solidFill>
           </a:ln>
         </p:spPr>
@@ -11427,8 +11692,8 @@
         </p:nvSpPr>
         <p:spPr>
           <a:xfrm>
-            <a:off x="1188720" y="6217920"/>
-            <a:ext cx="9601200" cy="365760"/>
+            <a:off x="1097280" y="5925312"/>
+            <a:ext cx="9875520" cy="320040"/>
           </a:xfrm>
           <a:prstGeom prst="rect">
             <a:avLst/>
@@ -11442,9 +11707,9 @@
           <a:lstStyle/>
           <a:p>
             <a:pPr algn="ctr">
-              <a:defRPr sz="1300" b="1">
-                <a:solidFill>
-                  <a:srgbClr val="34D399"/>
+              <a:defRPr sz="1200" b="1">
+                <a:solidFill>
+                  <a:srgbClr val="E51937"/>
                 </a:solidFill>
                 <a:latin typeface="Calibri"/>
               </a:defRPr>

--- a/presentation/SRAM_AI_Adoption_Playbook.pptx
+++ b/presentation/SRAM_AI_Adoption_Playbook.pptx
@@ -13,6 +13,7 @@
     <p:sldId id="261" r:id="rId12"/>
     <p:sldId id="262" r:id="rId13"/>
     <p:sldId id="263" r:id="rId14"/>
+    <p:sldId id="264" r:id="rId15"/>
   </p:sldIdLst>
   <p:sldSz cx="12191695" cy="6858000" type="screen4x3"/>
   <p:notesSz cx="6858000" cy="9144000"/>
@@ -6738,132 +6739,6 @@
           </a:p>
         </p:txBody>
       </p:sp>
-      <p:sp>
-        <p:nvSpPr>
-          <p:cNvPr id="54" name="Rounded Rectangle 53"/>
-          <p:cNvSpPr/>
-          <p:nvPr/>
-        </p:nvSpPr>
-        <p:spPr>
-          <a:xfrm>
-            <a:off x="731520" y="6400800"/>
-            <a:ext cx="10698480" cy="320040"/>
-          </a:xfrm>
-          <a:prstGeom prst="roundRect">
-            <a:avLst>
-              <a:gd name="adj" fmla="val 10000"/>
-            </a:avLst>
-          </a:prstGeom>
-          <a:solidFill>
-            <a:srgbClr val="FFFFFF"/>
-          </a:solidFill>
-          <a:ln w="12700">
-            <a:solidFill>
-              <a:srgbClr val="E0E0DE"/>
-            </a:solidFill>
-          </a:ln>
-        </p:spPr>
-        <p:style>
-          <a:lnRef idx="1">
-            <a:schemeClr val="accent1"/>
-          </a:lnRef>
-          <a:fillRef idx="3">
-            <a:schemeClr val="accent1"/>
-          </a:fillRef>
-          <a:effectRef idx="2">
-            <a:schemeClr val="accent1"/>
-          </a:effectRef>
-          <a:fontRef idx="minor">
-            <a:schemeClr val="lt1"/>
-          </a:fontRef>
-        </p:style>
-        <p:txBody>
-          <a:bodyPr rtlCol="0" anchor="ctr"/>
-          <a:lstStyle/>
-          <a:p>
-            <a:pPr algn="ctr"/>
-          </a:p>
-        </p:txBody>
-      </p:sp>
-      <p:sp>
-        <p:nvSpPr>
-          <p:cNvPr id="55" name="Rectangle 54"/>
-          <p:cNvSpPr/>
-          <p:nvPr/>
-        </p:nvSpPr>
-        <p:spPr>
-          <a:xfrm>
-            <a:off x="731520" y="6400800"/>
-            <a:ext cx="50800" cy="320040"/>
-          </a:xfrm>
-          <a:prstGeom prst="rect">
-            <a:avLst/>
-          </a:prstGeom>
-          <a:solidFill>
-            <a:srgbClr val="E51937"/>
-          </a:solidFill>
-          <a:ln>
-            <a:noFill/>
-          </a:ln>
-        </p:spPr>
-        <p:style>
-          <a:lnRef idx="1">
-            <a:schemeClr val="accent1"/>
-          </a:lnRef>
-          <a:fillRef idx="3">
-            <a:schemeClr val="accent1"/>
-          </a:fillRef>
-          <a:effectRef idx="2">
-            <a:schemeClr val="accent1"/>
-          </a:effectRef>
-          <a:fontRef idx="minor">
-            <a:schemeClr val="lt1"/>
-          </a:fontRef>
-        </p:style>
-        <p:txBody>
-          <a:bodyPr rtlCol="0" anchor="ctr"/>
-          <a:lstStyle/>
-          <a:p>
-            <a:pPr algn="ctr"/>
-          </a:p>
-        </p:txBody>
-      </p:sp>
-      <p:sp>
-        <p:nvSpPr>
-          <p:cNvPr id="56" name="TextBox 55"/>
-          <p:cNvSpPr txBox="1"/>
-          <p:nvPr/>
-        </p:nvSpPr>
-        <p:spPr>
-          <a:xfrm>
-            <a:off x="1097280" y="6428232"/>
-            <a:ext cx="10058400" cy="274320"/>
-          </a:xfrm>
-          <a:prstGeom prst="rect">
-            <a:avLst/>
-          </a:prstGeom>
-          <a:noFill/>
-        </p:spPr>
-        <p:txBody>
-          <a:bodyPr wrap="square">
-            <a:spAutoFit/>
-          </a:bodyPr>
-          <a:lstStyle/>
-          <a:p>
-            <a:pPr algn="ctr">
-              <a:defRPr sz="1200" b="1">
-                <a:solidFill>
-                  <a:srgbClr val="1C1C1E"/>
-                </a:solidFill>
-                <a:latin typeface="Calibri"/>
-              </a:defRPr>
-            </a:pPr>
-            <a:r>
-              <a:t>We focus on the area with the highest uplift and fastest proof: Customer and Dealer Support</a:t>
-            </a:r>
-          </a:p>
-        </p:txBody>
-      </p:sp>
     </p:spTree>
   </p:cSld>
   <p:clrMapOvr>
@@ -6898,22 +6773,58 @@
         </p:nvSpPr>
         <p:spPr>
           <a:xfrm>
-            <a:off x="731520" y="274320"/>
-            <a:ext cx="5486400" cy="228600"/>
-          </a:xfrm>
-          <a:prstGeom prst="rect">
-            <a:avLst/>
-          </a:prstGeom>
-          <a:noFill/>
-        </p:spPr>
-        <p:txBody>
-          <a:bodyPr wrap="square">
-            <a:spAutoFit/>
-          </a:bodyPr>
-          <a:lstStyle/>
-          <a:p>
-            <a:pPr algn="l">
-              <a:defRPr sz="1100" b="1">
+            <a:off x="1371600" y="2011680"/>
+            <a:ext cx="9418320" cy="548640"/>
+          </a:xfrm>
+          <a:prstGeom prst="rect">
+            <a:avLst/>
+          </a:prstGeom>
+          <a:noFill/>
+        </p:spPr>
+        <p:txBody>
+          <a:bodyPr wrap="square">
+            <a:spAutoFit/>
+          </a:bodyPr>
+          <a:lstStyle/>
+          <a:p>
+            <a:pPr algn="ctr">
+              <a:defRPr sz="2800" b="1">
+                <a:solidFill>
+                  <a:srgbClr val="1C1C1E"/>
+                </a:solidFill>
+                <a:latin typeface="Calibri"/>
+              </a:defRPr>
+            </a:pPr>
+            <a:r>
+              <a:t>Of these 12 initiatives, one stands out.</a:t>
+            </a:r>
+          </a:p>
+        </p:txBody>
+      </p:sp>
+      <p:sp>
+        <p:nvSpPr>
+          <p:cNvPr id="3" name="TextBox 2"/>
+          <p:cNvSpPr txBox="1"/>
+          <p:nvPr/>
+        </p:nvSpPr>
+        <p:spPr>
+          <a:xfrm>
+            <a:off x="1371600" y="2926080"/>
+            <a:ext cx="9418320" cy="457200"/>
+          </a:xfrm>
+          <a:prstGeom prst="rect">
+            <a:avLst/>
+          </a:prstGeom>
+          <a:noFill/>
+        </p:spPr>
+        <p:txBody>
+          <a:bodyPr wrap="square">
+            <a:spAutoFit/>
+          </a:bodyPr>
+          <a:lstStyle/>
+          <a:p>
+            <a:pPr algn="ctr">
+              <a:defRPr sz="1600" b="0">
                 <a:solidFill>
                   <a:srgbClr val="767676"/>
                 </a:solidFill>
@@ -6921,136 +6832,21 @@
               </a:defRPr>
             </a:pPr>
             <a:r>
-              <a:t>THE PROBLEM</a:t>
-            </a:r>
-          </a:p>
-        </p:txBody>
-      </p:sp>
-      <p:sp>
-        <p:nvSpPr>
-          <p:cNvPr id="3" name="TextBox 2"/>
-          <p:cNvSpPr txBox="1"/>
-          <p:nvPr/>
-        </p:nvSpPr>
-        <p:spPr>
-          <a:xfrm>
-            <a:off x="731520" y="548640"/>
-            <a:ext cx="10058400" cy="457200"/>
-          </a:xfrm>
-          <a:prstGeom prst="rect">
-            <a:avLst/>
-          </a:prstGeom>
-          <a:noFill/>
-        </p:spPr>
-        <p:txBody>
-          <a:bodyPr wrap="square">
-            <a:spAutoFit/>
-          </a:bodyPr>
-          <a:lstStyle/>
-          <a:p>
-            <a:pPr algn="l">
-              <a:defRPr sz="3200" b="1">
-                <a:solidFill>
-                  <a:srgbClr val="1C1C1E"/>
-                </a:solidFill>
-                <a:latin typeface="Calibri"/>
-              </a:defRPr>
-            </a:pPr>
-            <a:r>
-              <a:t>Support Quality Drives Churn, Not Product Quality</a:t>
-            </a:r>
-          </a:p>
-        </p:txBody>
-      </p:sp>
-      <p:sp>
-        <p:nvSpPr>
-          <p:cNvPr id="4" name="Rectangle 3"/>
+              <a:t>Highest pain signal. Strongest data advantage. Fastest path to proof.</a:t>
+            </a:r>
+          </a:p>
+        </p:txBody>
+      </p:sp>
+      <p:sp>
+        <p:nvSpPr>
+          <p:cNvPr id="4" name="Rounded Rectangle 3"/>
           <p:cNvSpPr/>
           <p:nvPr/>
         </p:nvSpPr>
         <p:spPr>
           <a:xfrm>
-            <a:off x="731520" y="1051560"/>
-            <a:ext cx="731520" cy="38100"/>
-          </a:xfrm>
-          <a:prstGeom prst="rect">
-            <a:avLst/>
-          </a:prstGeom>
-          <a:solidFill>
-            <a:srgbClr val="E51937"/>
-          </a:solidFill>
-          <a:ln>
-            <a:noFill/>
-          </a:ln>
-        </p:spPr>
-        <p:style>
-          <a:lnRef idx="1">
-            <a:schemeClr val="accent1"/>
-          </a:lnRef>
-          <a:fillRef idx="3">
-            <a:schemeClr val="accent1"/>
-          </a:fillRef>
-          <a:effectRef idx="2">
-            <a:schemeClr val="accent1"/>
-          </a:effectRef>
-          <a:fontRef idx="minor">
-            <a:schemeClr val="lt1"/>
-          </a:fontRef>
-        </p:style>
-        <p:txBody>
-          <a:bodyPr rtlCol="0" anchor="ctr"/>
-          <a:lstStyle/>
-          <a:p>
-            <a:pPr algn="ctr"/>
-          </a:p>
-        </p:txBody>
-      </p:sp>
-      <p:sp>
-        <p:nvSpPr>
-          <p:cNvPr id="5" name="TextBox 4"/>
-          <p:cNvSpPr txBox="1"/>
-          <p:nvPr/>
-        </p:nvSpPr>
-        <p:spPr>
-          <a:xfrm>
-            <a:off x="731520" y="1280160"/>
-            <a:ext cx="10058400" cy="457200"/>
-          </a:xfrm>
-          <a:prstGeom prst="rect">
-            <a:avLst/>
-          </a:prstGeom>
-          <a:noFill/>
-        </p:spPr>
-        <p:txBody>
-          <a:bodyPr wrap="square">
-            <a:spAutoFit/>
-          </a:bodyPr>
-          <a:lstStyle/>
-          <a:p>
-            <a:pPr algn="l">
-              <a:defRPr sz="1400" b="0">
-                <a:solidFill>
-                  <a:srgbClr val="3A3A3C"/>
-                </a:solidFill>
-                <a:latin typeface="Calibri"/>
-              </a:defRPr>
-            </a:pPr>
-            <a:r>
-              <a:t>Riders love SRAM components but struggle with firmware, compatibility, and warranty resolution. The data is clear.</a:t>
-            </a:r>
-          </a:p>
-        </p:txBody>
-      </p:sp>
-      <p:sp>
-        <p:nvSpPr>
-          <p:cNvPr id="6" name="Rounded Rectangle 5"/>
-          <p:cNvSpPr/>
-          <p:nvPr/>
-        </p:nvSpPr>
-        <p:spPr>
-          <a:xfrm>
-            <a:off x="731520" y="2011680"/>
-            <a:ext cx="3291840" cy="1371600"/>
+            <a:off x="3200400" y="3840480"/>
+            <a:ext cx="5760720" cy="1463040"/>
           </a:xfrm>
           <a:prstGeom prst="roundRect">
             <a:avLst>
@@ -7090,135 +6886,23 @@
       </p:sp>
       <p:sp>
         <p:nvSpPr>
-          <p:cNvPr id="7" name="TextBox 6"/>
-          <p:cNvSpPr txBox="1"/>
-          <p:nvPr/>
-        </p:nvSpPr>
-        <p:spPr>
-          <a:xfrm>
-            <a:off x="960120" y="2148840"/>
-            <a:ext cx="2834640" cy="228600"/>
-          </a:xfrm>
-          <a:prstGeom prst="rect">
-            <a:avLst/>
-          </a:prstGeom>
-          <a:noFill/>
-        </p:spPr>
-        <p:txBody>
-          <a:bodyPr wrap="square">
-            <a:spAutoFit/>
-          </a:bodyPr>
-          <a:lstStyle/>
-          <a:p>
-            <a:pPr algn="l">
-              <a:defRPr sz="1000" b="0">
-                <a:solidFill>
-                  <a:srgbClr val="767676"/>
-                </a:solidFill>
-                <a:latin typeface="Calibri"/>
-              </a:defRPr>
-            </a:pPr>
-            <a:r>
-              <a:t>TRUSTPILOT RATING</a:t>
-            </a:r>
-          </a:p>
-        </p:txBody>
-      </p:sp>
-      <p:sp>
-        <p:nvSpPr>
-          <p:cNvPr id="8" name="TextBox 7"/>
-          <p:cNvSpPr txBox="1"/>
-          <p:nvPr/>
-        </p:nvSpPr>
-        <p:spPr>
-          <a:xfrm>
-            <a:off x="960120" y="2377440"/>
-            <a:ext cx="2834640" cy="411480"/>
-          </a:xfrm>
-          <a:prstGeom prst="rect">
-            <a:avLst/>
-          </a:prstGeom>
-          <a:noFill/>
-        </p:spPr>
-        <p:txBody>
-          <a:bodyPr wrap="square">
-            <a:spAutoFit/>
-          </a:bodyPr>
-          <a:lstStyle/>
-          <a:p>
-            <a:pPr algn="l">
-              <a:defRPr sz="2600" b="1">
-                <a:solidFill>
-                  <a:srgbClr val="C43B4F"/>
-                </a:solidFill>
-                <a:latin typeface="Calibri"/>
-              </a:defRPr>
-            </a:pPr>
-            <a:r>
-              <a:t>1.6 / 5.0</a:t>
-            </a:r>
-          </a:p>
-        </p:txBody>
-      </p:sp>
-      <p:sp>
-        <p:nvSpPr>
-          <p:cNvPr id="9" name="TextBox 8"/>
-          <p:cNvSpPr txBox="1"/>
-          <p:nvPr/>
-        </p:nvSpPr>
-        <p:spPr>
-          <a:xfrm>
-            <a:off x="960120" y="2834640"/>
-            <a:ext cx="2834640" cy="228600"/>
-          </a:xfrm>
-          <a:prstGeom prst="rect">
-            <a:avLst/>
-          </a:prstGeom>
-          <a:noFill/>
-        </p:spPr>
-        <p:txBody>
-          <a:bodyPr wrap="square">
-            <a:spAutoFit/>
-          </a:bodyPr>
-          <a:lstStyle/>
-          <a:p>
-            <a:pPr algn="l">
-              <a:defRPr sz="900" b="0">
-                <a:solidFill>
-                  <a:srgbClr val="767676"/>
-                </a:solidFill>
-                <a:latin typeface="Calibri"/>
-              </a:defRPr>
-            </a:pPr>
-            <a:r>
-              <a:t>Driven by warranty and support friction</a:t>
-            </a:r>
-          </a:p>
-        </p:txBody>
-      </p:sp>
-      <p:sp>
-        <p:nvSpPr>
-          <p:cNvPr id="10" name="Rounded Rectangle 9"/>
+          <p:cNvPr id="5" name="Rectangle 4"/>
           <p:cNvSpPr/>
           <p:nvPr/>
         </p:nvSpPr>
         <p:spPr>
           <a:xfrm>
-            <a:off x="4297680" y="2011680"/>
-            <a:ext cx="3291840" cy="1371600"/>
-          </a:xfrm>
-          <a:prstGeom prst="roundRect">
-            <a:avLst>
-              <a:gd name="adj" fmla="val 4000"/>
-            </a:avLst>
+            <a:off x="3200400" y="3840480"/>
+            <a:ext cx="50800" cy="1463040"/>
+          </a:xfrm>
+          <a:prstGeom prst="rect">
+            <a:avLst/>
           </a:prstGeom>
           <a:solidFill>
-            <a:srgbClr val="FFFFFF"/>
+            <a:srgbClr val="E51937"/>
           </a:solidFill>
-          <a:ln w="12700">
-            <a:solidFill>
-              <a:srgbClr val="E0E0DE"/>
-            </a:solidFill>
+          <a:ln>
+            <a:noFill/>
           </a:ln>
         </p:spPr>
         <p:style>
@@ -7245,28 +6929,28 @@
       </p:sp>
       <p:sp>
         <p:nvSpPr>
-          <p:cNvPr id="11" name="TextBox 10"/>
-          <p:cNvSpPr txBox="1"/>
-          <p:nvPr/>
-        </p:nvSpPr>
-        <p:spPr>
-          <a:xfrm>
-            <a:off x="4526280" y="2148840"/>
-            <a:ext cx="2834640" cy="228600"/>
-          </a:xfrm>
-          <a:prstGeom prst="rect">
-            <a:avLst/>
-          </a:prstGeom>
-          <a:noFill/>
-        </p:spPr>
-        <p:txBody>
-          <a:bodyPr wrap="square">
-            <a:spAutoFit/>
-          </a:bodyPr>
-          <a:lstStyle/>
-          <a:p>
-            <a:pPr algn="l">
-              <a:defRPr sz="1000" b="0">
+          <p:cNvPr id="6" name="TextBox 5"/>
+          <p:cNvSpPr txBox="1"/>
+          <p:nvPr/>
+        </p:nvSpPr>
+        <p:spPr>
+          <a:xfrm>
+            <a:off x="3566160" y="3977639"/>
+            <a:ext cx="5029200" cy="274320"/>
+          </a:xfrm>
+          <a:prstGeom prst="rect">
+            <a:avLst/>
+          </a:prstGeom>
+          <a:noFill/>
+        </p:spPr>
+        <p:txBody>
+          <a:bodyPr wrap="square">
+            <a:spAutoFit/>
+          </a:bodyPr>
+          <a:lstStyle/>
+          <a:p>
+            <a:pPr algn="l">
+              <a:defRPr sz="1000" b="1">
                 <a:solidFill>
                   <a:srgbClr val="767676"/>
                 </a:solidFill>
@@ -7274,35 +6958,35 @@
               </a:defRPr>
             </a:pPr>
             <a:r>
-              <a:t>DEALER QUESTIONS AUTOMATABLE</a:t>
-            </a:r>
-          </a:p>
-        </p:txBody>
-      </p:sp>
-      <p:sp>
-        <p:nvSpPr>
-          <p:cNvPr id="12" name="TextBox 11"/>
-          <p:cNvSpPr txBox="1"/>
-          <p:nvPr/>
-        </p:nvSpPr>
-        <p:spPr>
-          <a:xfrm>
-            <a:off x="4526280" y="2377440"/>
-            <a:ext cx="2834640" cy="411480"/>
-          </a:xfrm>
-          <a:prstGeom prst="rect">
-            <a:avLst/>
-          </a:prstGeom>
-          <a:noFill/>
-        </p:spPr>
-        <p:txBody>
-          <a:bodyPr wrap="square">
-            <a:spAutoFit/>
-          </a:bodyPr>
-          <a:lstStyle/>
-          <a:p>
-            <a:pPr algn="l">
-              <a:defRPr sz="2600" b="1">
+              <a:t>SUPPORT</a:t>
+            </a:r>
+          </a:p>
+        </p:txBody>
+      </p:sp>
+      <p:sp>
+        <p:nvSpPr>
+          <p:cNvPr id="7" name="TextBox 6"/>
+          <p:cNvSpPr txBox="1"/>
+          <p:nvPr/>
+        </p:nvSpPr>
+        <p:spPr>
+          <a:xfrm>
+            <a:off x="3566160" y="4251960"/>
+            <a:ext cx="5029200" cy="365760"/>
+          </a:xfrm>
+          <a:prstGeom prst="rect">
+            <a:avLst/>
+          </a:prstGeom>
+          <a:noFill/>
+        </p:spPr>
+        <p:txBody>
+          <a:bodyPr wrap="square">
+            <a:spAutoFit/>
+          </a:bodyPr>
+          <a:lstStyle/>
+          <a:p>
+            <a:pPr algn="l">
+              <a:defRPr sz="2200" b="1">
                 <a:solidFill>
                   <a:srgbClr val="1C1C1E"/>
                 </a:solidFill>
@@ -7310,312 +6994,35 @@
               </a:defRPr>
             </a:pPr>
             <a:r>
-              <a:t>~70%</a:t>
-            </a:r>
-          </a:p>
-        </p:txBody>
-      </p:sp>
-      <p:sp>
-        <p:nvSpPr>
-          <p:cNvPr id="13" name="TextBox 12"/>
-          <p:cNvSpPr txBox="1"/>
-          <p:nvPr/>
-        </p:nvSpPr>
-        <p:spPr>
-          <a:xfrm>
-            <a:off x="4526280" y="2834640"/>
-            <a:ext cx="2834640" cy="228600"/>
-          </a:xfrm>
-          <a:prstGeom prst="rect">
-            <a:avLst/>
-          </a:prstGeom>
-          <a:noFill/>
-        </p:spPr>
-        <p:txBody>
-          <a:bodyPr wrap="square">
-            <a:spAutoFit/>
-          </a:bodyPr>
-          <a:lstStyle/>
-          <a:p>
-            <a:pPr algn="l">
-              <a:defRPr sz="900" b="0">
-                <a:solidFill>
-                  <a:srgbClr val="767676"/>
-                </a:solidFill>
-                <a:latin typeface="Calibri"/>
-              </a:defRPr>
-            </a:pPr>
-            <a:r>
-              <a:t>Follow repeatable patterns</a:t>
-            </a:r>
-          </a:p>
-        </p:txBody>
-      </p:sp>
-      <p:sp>
-        <p:nvSpPr>
-          <p:cNvPr id="14" name="Rounded Rectangle 13"/>
-          <p:cNvSpPr/>
-          <p:nvPr/>
-        </p:nvSpPr>
-        <p:spPr>
-          <a:xfrm>
-            <a:off x="7863840" y="2011680"/>
-            <a:ext cx="3657600" cy="1371600"/>
-          </a:xfrm>
-          <a:prstGeom prst="roundRect">
-            <a:avLst>
-              <a:gd name="adj" fmla="val 4000"/>
-            </a:avLst>
-          </a:prstGeom>
-          <a:solidFill>
-            <a:srgbClr val="FFFFFF"/>
-          </a:solidFill>
-          <a:ln w="12700">
-            <a:solidFill>
-              <a:srgbClr val="E0E0DE"/>
-            </a:solidFill>
-          </a:ln>
-        </p:spPr>
-        <p:style>
-          <a:lnRef idx="1">
-            <a:schemeClr val="accent1"/>
-          </a:lnRef>
-          <a:fillRef idx="3">
-            <a:schemeClr val="accent1"/>
-          </a:fillRef>
-          <a:effectRef idx="2">
-            <a:schemeClr val="accent1"/>
-          </a:effectRef>
-          <a:fontRef idx="minor">
-            <a:schemeClr val="lt1"/>
-          </a:fontRef>
-        </p:style>
-        <p:txBody>
-          <a:bodyPr rtlCol="0" anchor="ctr"/>
-          <a:lstStyle/>
-          <a:p>
-            <a:pPr algn="ctr"/>
-          </a:p>
-        </p:txBody>
-      </p:sp>
-      <p:sp>
-        <p:nvSpPr>
-          <p:cNvPr id="15" name="TextBox 14"/>
-          <p:cNvSpPr txBox="1"/>
-          <p:nvPr/>
-        </p:nvSpPr>
-        <p:spPr>
-          <a:xfrm>
-            <a:off x="8092440" y="2148840"/>
-            <a:ext cx="3200400" cy="228600"/>
-          </a:xfrm>
-          <a:prstGeom prst="rect">
-            <a:avLst/>
-          </a:prstGeom>
-          <a:noFill/>
-        </p:spPr>
-        <p:txBody>
-          <a:bodyPr wrap="square">
-            <a:spAutoFit/>
-          </a:bodyPr>
-          <a:lstStyle/>
-          <a:p>
-            <a:pPr algn="l">
-              <a:defRPr sz="1000" b="0">
-                <a:solidFill>
-                  <a:srgbClr val="767676"/>
-                </a:solidFill>
-                <a:latin typeface="Calibri"/>
-              </a:defRPr>
-            </a:pPr>
-            <a:r>
-              <a:t>TOP COMPLAINTS</a:t>
-            </a:r>
-          </a:p>
-        </p:txBody>
-      </p:sp>
-      <p:sp>
-        <p:nvSpPr>
-          <p:cNvPr id="16" name="TextBox 15"/>
-          <p:cNvSpPr txBox="1"/>
-          <p:nvPr/>
-        </p:nvSpPr>
-        <p:spPr>
-          <a:xfrm>
-            <a:off x="8092440" y="2377440"/>
-            <a:ext cx="3200400" cy="411480"/>
-          </a:xfrm>
-          <a:prstGeom prst="rect">
-            <a:avLst/>
-          </a:prstGeom>
-          <a:noFill/>
-        </p:spPr>
-        <p:txBody>
-          <a:bodyPr wrap="square">
-            <a:spAutoFit/>
-          </a:bodyPr>
-          <a:lstStyle/>
-          <a:p>
-            <a:pPr algn="l">
-              <a:defRPr sz="2600" b="1">
-                <a:solidFill>
-                  <a:srgbClr val="C43B4F"/>
-                </a:solidFill>
-                <a:latin typeface="Calibri"/>
-              </a:defRPr>
-            </a:pPr>
-            <a:r>
-              <a:t>Firmware + Pairing</a:t>
-            </a:r>
-          </a:p>
-        </p:txBody>
-      </p:sp>
-      <p:sp>
-        <p:nvSpPr>
-          <p:cNvPr id="17" name="TextBox 16"/>
-          <p:cNvSpPr txBox="1"/>
-          <p:nvPr/>
-        </p:nvSpPr>
-        <p:spPr>
-          <a:xfrm>
-            <a:off x="8092440" y="2834640"/>
-            <a:ext cx="3200400" cy="228600"/>
-          </a:xfrm>
-          <a:prstGeom prst="rect">
-            <a:avLst/>
-          </a:prstGeom>
-          <a:noFill/>
-        </p:spPr>
-        <p:txBody>
-          <a:bodyPr wrap="square">
-            <a:spAutoFit/>
-          </a:bodyPr>
-          <a:lstStyle/>
-          <a:p>
-            <a:pPr algn="l">
-              <a:defRPr sz="900" b="0">
-                <a:solidFill>
-                  <a:srgbClr val="767676"/>
-                </a:solidFill>
-                <a:latin typeface="Calibri"/>
-              </a:defRPr>
-            </a:pPr>
-            <a:r>
-              <a:t>Reddit 2024-2025: shifting, updates, compatibility</a:t>
-            </a:r>
-          </a:p>
-        </p:txBody>
-      </p:sp>
-      <p:sp>
-        <p:nvSpPr>
-          <p:cNvPr id="18" name="Rounded Rectangle 17"/>
-          <p:cNvSpPr/>
-          <p:nvPr/>
-        </p:nvSpPr>
-        <p:spPr>
-          <a:xfrm>
-            <a:off x="731520" y="3749039"/>
-            <a:ext cx="5029200" cy="2743200"/>
-          </a:xfrm>
-          <a:prstGeom prst="roundRect">
-            <a:avLst>
-              <a:gd name="adj" fmla="val 4000"/>
-            </a:avLst>
-          </a:prstGeom>
-          <a:solidFill>
-            <a:srgbClr val="FFFFFF"/>
-          </a:solidFill>
-          <a:ln w="12700">
-            <a:solidFill>
-              <a:srgbClr val="E0E0DE"/>
-            </a:solidFill>
-          </a:ln>
-        </p:spPr>
-        <p:style>
-          <a:lnRef idx="1">
-            <a:schemeClr val="accent1"/>
-          </a:lnRef>
-          <a:fillRef idx="3">
-            <a:schemeClr val="accent1"/>
-          </a:fillRef>
-          <a:effectRef idx="2">
-            <a:schemeClr val="accent1"/>
-          </a:effectRef>
-          <a:fontRef idx="minor">
-            <a:schemeClr val="lt1"/>
-          </a:fontRef>
-        </p:style>
-        <p:txBody>
-          <a:bodyPr rtlCol="0" anchor="ctr"/>
-          <a:lstStyle/>
-          <a:p>
-            <a:pPr algn="ctr"/>
-          </a:p>
-        </p:txBody>
-      </p:sp>
-      <p:sp>
-        <p:nvSpPr>
-          <p:cNvPr id="19" name="TextBox 18"/>
-          <p:cNvSpPr txBox="1"/>
-          <p:nvPr/>
-        </p:nvSpPr>
-        <p:spPr>
-          <a:xfrm>
-            <a:off x="1005840" y="3886200"/>
-            <a:ext cx="4114800" cy="320040"/>
-          </a:xfrm>
-          <a:prstGeom prst="rect">
-            <a:avLst/>
-          </a:prstGeom>
-          <a:noFill/>
-        </p:spPr>
-        <p:txBody>
-          <a:bodyPr wrap="square">
-            <a:spAutoFit/>
-          </a:bodyPr>
-          <a:lstStyle/>
-          <a:p>
-            <a:pPr algn="l">
-              <a:defRPr sz="1400" b="1">
-                <a:solidFill>
-                  <a:srgbClr val="1C1C1E"/>
-                </a:solidFill>
-                <a:latin typeface="Calibri"/>
-              </a:defRPr>
-            </a:pPr>
-            <a:r>
-              <a:t>Customer Pain Signals</a:t>
-            </a:r>
-          </a:p>
-        </p:txBody>
-      </p:sp>
-      <p:sp>
-        <p:nvSpPr>
-          <p:cNvPr id="20" name="TextBox 19"/>
-          <p:cNvSpPr txBox="1"/>
-          <p:nvPr/>
-        </p:nvSpPr>
-        <p:spPr>
-          <a:xfrm>
-            <a:off x="1005840" y="4297680"/>
-            <a:ext cx="4389120" cy="2011680"/>
-          </a:xfrm>
-          <a:prstGeom prst="rect">
-            <a:avLst/>
-          </a:prstGeom>
-          <a:noFill/>
-        </p:spPr>
-        <p:txBody>
-          <a:bodyPr wrap="square">
-            <a:spAutoFit/>
-          </a:bodyPr>
-          <a:lstStyle/>
-          <a:p>
-            <a:pPr>
-              <a:spcAft>
-                <a:spcPts val="1100"/>
-              </a:spcAft>
-              <a:defRPr sz="1100" b="0">
+              <a:t>Customer and Dealer Support Automation</a:t>
+            </a:r>
+          </a:p>
+        </p:txBody>
+      </p:sp>
+      <p:sp>
+        <p:nvSpPr>
+          <p:cNvPr id="8" name="TextBox 7"/>
+          <p:cNvSpPr txBox="1"/>
+          <p:nvPr/>
+        </p:nvSpPr>
+        <p:spPr>
+          <a:xfrm>
+            <a:off x="3566160" y="4709160"/>
+            <a:ext cx="5029200" cy="365760"/>
+          </a:xfrm>
+          <a:prstGeom prst="rect">
+            <a:avLst/>
+          </a:prstGeom>
+          <a:noFill/>
+        </p:spPr>
+        <p:txBody>
+          <a:bodyPr wrap="square">
+            <a:spAutoFit/>
+          </a:bodyPr>
+          <a:lstStyle/>
+          <a:p>
+            <a:pPr algn="l">
+              <a:defRPr sz="1300" b="0">
                 <a:solidFill>
                   <a:srgbClr val="3A3A3C"/>
                 </a:solidFill>
@@ -7623,225 +7030,7 @@
               </a:defRPr>
             </a:pPr>
             <a:r>
-              <a:t>•  Trustpilot: warranty frustration and support delays</a:t>
-            </a:r>
-          </a:p>
-          <a:p>
-            <a:pPr>
-              <a:spcAft>
-                <a:spcPts val="1100"/>
-              </a:spcAft>
-              <a:defRPr sz="1100" b="0">
-                <a:solidFill>
-                  <a:srgbClr val="3A3A3C"/>
-                </a:solidFill>
-                <a:latin typeface="Calibri"/>
-              </a:defRPr>
-            </a:pPr>
-            <a:r>
-              <a:t>•  Reddit: pairing issues, firmware failures, shifting anomalies</a:t>
-            </a:r>
-          </a:p>
-          <a:p>
-            <a:pPr>
-              <a:spcAft>
-                <a:spcPts val="1100"/>
-              </a:spcAft>
-              <a:defRPr sz="1100" b="0">
-                <a:solidFill>
-                  <a:srgbClr val="3A3A3C"/>
-                </a:solidFill>
-                <a:latin typeface="Calibri"/>
-              </a:defRPr>
-            </a:pPr>
-            <a:r>
-              <a:t>•  App stores: AXS and Hammerhead companion complaints</a:t>
-            </a:r>
-          </a:p>
-          <a:p>
-            <a:pPr>
-              <a:spcAft>
-                <a:spcPts val="1100"/>
-              </a:spcAft>
-              <a:defRPr sz="1100" b="0">
-                <a:solidFill>
-                  <a:srgbClr val="3A3A3C"/>
-                </a:solidFill>
-                <a:latin typeface="Calibri"/>
-              </a:defRPr>
-            </a:pPr>
-            <a:r>
-              <a:t>•  Riders explicitly stating intent to switch to Shimano</a:t>
-            </a:r>
-          </a:p>
-        </p:txBody>
-      </p:sp>
-      <p:sp>
-        <p:nvSpPr>
-          <p:cNvPr id="21" name="Rounded Rectangle 20"/>
-          <p:cNvSpPr/>
-          <p:nvPr/>
-        </p:nvSpPr>
-        <p:spPr>
-          <a:xfrm>
-            <a:off x="6035040" y="3749039"/>
-            <a:ext cx="5486400" cy="2743200"/>
-          </a:xfrm>
-          <a:prstGeom prst="roundRect">
-            <a:avLst>
-              <a:gd name="adj" fmla="val 4000"/>
-            </a:avLst>
-          </a:prstGeom>
-          <a:solidFill>
-            <a:srgbClr val="FFFFFF"/>
-          </a:solidFill>
-          <a:ln w="12700">
-            <a:solidFill>
-              <a:srgbClr val="E0E0DE"/>
-            </a:solidFill>
-          </a:ln>
-        </p:spPr>
-        <p:style>
-          <a:lnRef idx="1">
-            <a:schemeClr val="accent1"/>
-          </a:lnRef>
-          <a:fillRef idx="3">
-            <a:schemeClr val="accent1"/>
-          </a:fillRef>
-          <a:effectRef idx="2">
-            <a:schemeClr val="accent1"/>
-          </a:effectRef>
-          <a:fontRef idx="minor">
-            <a:schemeClr val="lt1"/>
-          </a:fontRef>
-        </p:style>
-        <p:txBody>
-          <a:bodyPr rtlCol="0" anchor="ctr"/>
-          <a:lstStyle/>
-          <a:p>
-            <a:pPr algn="ctr"/>
-          </a:p>
-        </p:txBody>
-      </p:sp>
-      <p:sp>
-        <p:nvSpPr>
-          <p:cNvPr id="22" name="TextBox 21"/>
-          <p:cNvSpPr txBox="1"/>
-          <p:nvPr/>
-        </p:nvSpPr>
-        <p:spPr>
-          <a:xfrm>
-            <a:off x="6309360" y="3886200"/>
-            <a:ext cx="4572000" cy="320040"/>
-          </a:xfrm>
-          <a:prstGeom prst="rect">
-            <a:avLst/>
-          </a:prstGeom>
-          <a:noFill/>
-        </p:spPr>
-        <p:txBody>
-          <a:bodyPr wrap="square">
-            <a:spAutoFit/>
-          </a:bodyPr>
-          <a:lstStyle/>
-          <a:p>
-            <a:pPr algn="l">
-              <a:defRPr sz="1400" b="1">
-                <a:solidFill>
-                  <a:srgbClr val="1C1C1E"/>
-                </a:solidFill>
-                <a:latin typeface="Calibri"/>
-              </a:defRPr>
-            </a:pPr>
-            <a:r>
-              <a:t>Why SRAM Has the Data to Fix This</a:t>
-            </a:r>
-          </a:p>
-        </p:txBody>
-      </p:sp>
-      <p:sp>
-        <p:nvSpPr>
-          <p:cNvPr id="23" name="TextBox 22"/>
-          <p:cNvSpPr txBox="1"/>
-          <p:nvPr/>
-        </p:nvSpPr>
-        <p:spPr>
-          <a:xfrm>
-            <a:off x="6309360" y="4297680"/>
-            <a:ext cx="4937760" cy="2011680"/>
-          </a:xfrm>
-          <a:prstGeom prst="rect">
-            <a:avLst/>
-          </a:prstGeom>
-          <a:noFill/>
-        </p:spPr>
-        <p:txBody>
-          <a:bodyPr wrap="square">
-            <a:spAutoFit/>
-          </a:bodyPr>
-          <a:lstStyle/>
-          <a:p>
-            <a:pPr>
-              <a:spcAft>
-                <a:spcPts val="1100"/>
-              </a:spcAft>
-              <a:defRPr sz="1100" b="0">
-                <a:solidFill>
-                  <a:srgbClr val="3A3A3C"/>
-                </a:solidFill>
-                <a:latin typeface="Calibri"/>
-              </a:defRPr>
-            </a:pPr>
-            <a:r>
-              <a:t>•  Structured knowledge base: manuals, compatibility guides, troubleshooting</a:t>
-            </a:r>
-          </a:p>
-          <a:p>
-            <a:pPr>
-              <a:spcAft>
-                <a:spcPts val="1100"/>
-              </a:spcAft>
-              <a:defRPr sz="1100" b="0">
-                <a:solidFill>
-                  <a:srgbClr val="3A3A3C"/>
-                </a:solidFill>
-                <a:latin typeface="Calibri"/>
-              </a:defRPr>
-            </a:pPr>
-            <a:r>
-              <a:t>•  AXS telemetry: firmware versions, error codes, device state</a:t>
-            </a:r>
-          </a:p>
-          <a:p>
-            <a:pPr>
-              <a:spcAft>
-                <a:spcPts val="1100"/>
-              </a:spcAft>
-              <a:defRPr sz="1100" b="0">
-                <a:solidFill>
-                  <a:srgbClr val="3A3A3C"/>
-                </a:solidFill>
-                <a:latin typeface="Calibri"/>
-              </a:defRPr>
-            </a:pPr>
-            <a:r>
-              <a:t>•  Hammerhead ride and device data</a:t>
-            </a:r>
-          </a:p>
-          <a:p>
-            <a:pPr>
-              <a:spcAft>
-                <a:spcPts val="1100"/>
-              </a:spcAft>
-              <a:defRPr sz="1100" b="0">
-                <a:solidFill>
-                  <a:srgbClr val="3A3A3C"/>
-                </a:solidFill>
-                <a:latin typeface="Calibri"/>
-              </a:defRPr>
-            </a:pPr>
-            <a:r>
-              <a:t>•  Compatibility rules already documented and maintained</a:t>
+              <a:t>70% of dealer questions are repetitive. Trustpilot sits at 1.6 / 5.0.</a:t>
             </a:r>
           </a:p>
         </p:txBody>
@@ -7903,7 +7092,7 @@
               </a:defRPr>
             </a:pPr>
             <a:r>
-              <a:t>THE SOLUTION</a:t>
+              <a:t>THE PROBLEM</a:t>
             </a:r>
           </a:p>
         </p:txBody>
@@ -7939,7 +7128,7 @@
               </a:defRPr>
             </a:pPr>
             <a:r>
-              <a:t>90-Day Support Pilot</a:t>
+              <a:t>Support Quality Drives Churn, Not Product Quality</a:t>
             </a:r>
           </a:p>
         </p:txBody>
@@ -7989,14 +7178,50 @@
       </p:sp>
       <p:sp>
         <p:nvSpPr>
-          <p:cNvPr id="5" name="Rounded Rectangle 4"/>
+          <p:cNvPr id="5" name="TextBox 4"/>
+          <p:cNvSpPr txBox="1"/>
+          <p:nvPr/>
+        </p:nvSpPr>
+        <p:spPr>
+          <a:xfrm>
+            <a:off x="731520" y="1280160"/>
+            <a:ext cx="10058400" cy="457200"/>
+          </a:xfrm>
+          <a:prstGeom prst="rect">
+            <a:avLst/>
+          </a:prstGeom>
+          <a:noFill/>
+        </p:spPr>
+        <p:txBody>
+          <a:bodyPr wrap="square">
+            <a:spAutoFit/>
+          </a:bodyPr>
+          <a:lstStyle/>
+          <a:p>
+            <a:pPr algn="l">
+              <a:defRPr sz="1400" b="0">
+                <a:solidFill>
+                  <a:srgbClr val="3A3A3C"/>
+                </a:solidFill>
+                <a:latin typeface="Calibri"/>
+              </a:defRPr>
+            </a:pPr>
+            <a:r>
+              <a:t>Riders love SRAM components but struggle with firmware, compatibility, and warranty resolution. The data is clear.</a:t>
+            </a:r>
+          </a:p>
+        </p:txBody>
+      </p:sp>
+      <p:sp>
+        <p:nvSpPr>
+          <p:cNvPr id="6" name="Rounded Rectangle 5"/>
           <p:cNvSpPr/>
           <p:nvPr/>
         </p:nvSpPr>
         <p:spPr>
           <a:xfrm>
-            <a:off x="731520" y="1463040"/>
-            <a:ext cx="2057400" cy="2011680"/>
+            <a:off x="731520" y="2011680"/>
+            <a:ext cx="3291840" cy="1371600"/>
           </a:xfrm>
           <a:prstGeom prst="roundRect">
             <a:avLst>
@@ -8036,138 +7261,122 @@
       </p:sp>
       <p:sp>
         <p:nvSpPr>
-          <p:cNvPr id="6" name="Oval 5"/>
+          <p:cNvPr id="7" name="TextBox 6"/>
+          <p:cNvSpPr txBox="1"/>
+          <p:nvPr/>
+        </p:nvSpPr>
+        <p:spPr>
+          <a:xfrm>
+            <a:off x="960120" y="2148840"/>
+            <a:ext cx="2834640" cy="228600"/>
+          </a:xfrm>
+          <a:prstGeom prst="rect">
+            <a:avLst/>
+          </a:prstGeom>
+          <a:noFill/>
+        </p:spPr>
+        <p:txBody>
+          <a:bodyPr wrap="square">
+            <a:spAutoFit/>
+          </a:bodyPr>
+          <a:lstStyle/>
+          <a:p>
+            <a:pPr algn="l">
+              <a:defRPr sz="1000" b="0">
+                <a:solidFill>
+                  <a:srgbClr val="767676"/>
+                </a:solidFill>
+                <a:latin typeface="Calibri"/>
+              </a:defRPr>
+            </a:pPr>
+            <a:r>
+              <a:t>TRUSTPILOT RATING</a:t>
+            </a:r>
+          </a:p>
+        </p:txBody>
+      </p:sp>
+      <p:sp>
+        <p:nvSpPr>
+          <p:cNvPr id="8" name="TextBox 7"/>
+          <p:cNvSpPr txBox="1"/>
+          <p:nvPr/>
+        </p:nvSpPr>
+        <p:spPr>
+          <a:xfrm>
+            <a:off x="960120" y="2377440"/>
+            <a:ext cx="2834640" cy="411480"/>
+          </a:xfrm>
+          <a:prstGeom prst="rect">
+            <a:avLst/>
+          </a:prstGeom>
+          <a:noFill/>
+        </p:spPr>
+        <p:txBody>
+          <a:bodyPr wrap="square">
+            <a:spAutoFit/>
+          </a:bodyPr>
+          <a:lstStyle/>
+          <a:p>
+            <a:pPr algn="l">
+              <a:defRPr sz="2600" b="1">
+                <a:solidFill>
+                  <a:srgbClr val="C43B4F"/>
+                </a:solidFill>
+                <a:latin typeface="Calibri"/>
+              </a:defRPr>
+            </a:pPr>
+            <a:r>
+              <a:t>1.6 / 5.0</a:t>
+            </a:r>
+          </a:p>
+        </p:txBody>
+      </p:sp>
+      <p:sp>
+        <p:nvSpPr>
+          <p:cNvPr id="9" name="TextBox 8"/>
+          <p:cNvSpPr txBox="1"/>
+          <p:nvPr/>
+        </p:nvSpPr>
+        <p:spPr>
+          <a:xfrm>
+            <a:off x="960120" y="2834640"/>
+            <a:ext cx="2834640" cy="228600"/>
+          </a:xfrm>
+          <a:prstGeom prst="rect">
+            <a:avLst/>
+          </a:prstGeom>
+          <a:noFill/>
+        </p:spPr>
+        <p:txBody>
+          <a:bodyPr wrap="square">
+            <a:spAutoFit/>
+          </a:bodyPr>
+          <a:lstStyle/>
+          <a:p>
+            <a:pPr algn="l">
+              <a:defRPr sz="900" b="0">
+                <a:solidFill>
+                  <a:srgbClr val="767676"/>
+                </a:solidFill>
+                <a:latin typeface="Calibri"/>
+              </a:defRPr>
+            </a:pPr>
+            <a:r>
+              <a:t>Driven by warranty and support friction</a:t>
+            </a:r>
+          </a:p>
+        </p:txBody>
+      </p:sp>
+      <p:sp>
+        <p:nvSpPr>
+          <p:cNvPr id="10" name="Rounded Rectangle 9"/>
           <p:cNvSpPr/>
           <p:nvPr/>
         </p:nvSpPr>
         <p:spPr>
           <a:xfrm>
-            <a:off x="868680" y="1600200"/>
-            <a:ext cx="320040" cy="320040"/>
-          </a:xfrm>
-          <a:prstGeom prst="ellipse">
-            <a:avLst/>
-          </a:prstGeom>
-          <a:solidFill>
-            <a:srgbClr val="1C1C1E"/>
-          </a:solidFill>
-          <a:ln>
-            <a:noFill/>
-          </a:ln>
-        </p:spPr>
-        <p:style>
-          <a:lnRef idx="1">
-            <a:schemeClr val="accent1"/>
-          </a:lnRef>
-          <a:fillRef idx="3">
-            <a:schemeClr val="accent1"/>
-          </a:fillRef>
-          <a:effectRef idx="2">
-            <a:schemeClr val="accent1"/>
-          </a:effectRef>
-          <a:fontRef idx="minor">
-            <a:schemeClr val="lt1"/>
-          </a:fontRef>
-        </p:style>
-        <p:txBody>
-          <a:bodyPr rtlCol="0" anchor="ctr"/>
-          <a:lstStyle/>
-          <a:p>
-            <a:pPr algn="ctr">
-              <a:defRPr sz="1400" b="1">
-                <a:solidFill>
-                  <a:srgbClr val="F5F5F3"/>
-                </a:solidFill>
-              </a:defRPr>
-            </a:pPr>
-            <a:r>
-              <a:t>1</a:t>
-            </a:r>
-          </a:p>
-        </p:txBody>
-      </p:sp>
-      <p:sp>
-        <p:nvSpPr>
-          <p:cNvPr id="7" name="TextBox 6"/>
-          <p:cNvSpPr txBox="1"/>
-          <p:nvPr/>
-        </p:nvSpPr>
-        <p:spPr>
-          <a:xfrm>
-            <a:off x="868680" y="2011680"/>
-            <a:ext cx="1783080" cy="228600"/>
-          </a:xfrm>
-          <a:prstGeom prst="rect">
-            <a:avLst/>
-          </a:prstGeom>
-          <a:noFill/>
-        </p:spPr>
-        <p:txBody>
-          <a:bodyPr wrap="square">
-            <a:spAutoFit/>
-          </a:bodyPr>
-          <a:lstStyle/>
-          <a:p>
-            <a:pPr algn="l">
-              <a:defRPr sz="1000" b="1">
-                <a:solidFill>
-                  <a:srgbClr val="1C1C1E"/>
-                </a:solidFill>
-                <a:latin typeface="Calibri"/>
-              </a:defRPr>
-            </a:pPr>
-            <a:r>
-              <a:t>TICKET IN</a:t>
-            </a:r>
-          </a:p>
-        </p:txBody>
-      </p:sp>
-      <p:sp>
-        <p:nvSpPr>
-          <p:cNvPr id="8" name="TextBox 7"/>
-          <p:cNvSpPr txBox="1"/>
-          <p:nvPr/>
-        </p:nvSpPr>
-        <p:spPr>
-          <a:xfrm>
-            <a:off x="868680" y="2286000"/>
-            <a:ext cx="1783080" cy="914400"/>
-          </a:xfrm>
-          <a:prstGeom prst="rect">
-            <a:avLst/>
-          </a:prstGeom>
-          <a:noFill/>
-        </p:spPr>
-        <p:txBody>
-          <a:bodyPr wrap="square">
-            <a:spAutoFit/>
-          </a:bodyPr>
-          <a:lstStyle/>
-          <a:p>
-            <a:pPr algn="l">
-              <a:defRPr sz="1100" b="0">
-                <a:solidFill>
-                  <a:srgbClr val="3A3A3C"/>
-                </a:solidFill>
-                <a:latin typeface="Calibri"/>
-              </a:defRPr>
-            </a:pPr>
-            <a:r>
-              <a:t>Dealer or rider submits via Zendesk</a:t>
-            </a:r>
-          </a:p>
-        </p:txBody>
-      </p:sp>
-      <p:sp>
-        <p:nvSpPr>
-          <p:cNvPr id="9" name="Rounded Rectangle 8"/>
-          <p:cNvSpPr/>
-          <p:nvPr/>
-        </p:nvSpPr>
-        <p:spPr>
-          <a:xfrm>
-            <a:off x="2971800" y="1463040"/>
-            <a:ext cx="2057400" cy="2011680"/>
+            <a:off x="4297680" y="2011680"/>
+            <a:ext cx="3291840" cy="1371600"/>
           </a:xfrm>
           <a:prstGeom prst="roundRect">
             <a:avLst>
@@ -8207,138 +7416,122 @@
       </p:sp>
       <p:sp>
         <p:nvSpPr>
-          <p:cNvPr id="10" name="Oval 9"/>
+          <p:cNvPr id="11" name="TextBox 10"/>
+          <p:cNvSpPr txBox="1"/>
+          <p:nvPr/>
+        </p:nvSpPr>
+        <p:spPr>
+          <a:xfrm>
+            <a:off x="4526280" y="2148840"/>
+            <a:ext cx="2834640" cy="228600"/>
+          </a:xfrm>
+          <a:prstGeom prst="rect">
+            <a:avLst/>
+          </a:prstGeom>
+          <a:noFill/>
+        </p:spPr>
+        <p:txBody>
+          <a:bodyPr wrap="square">
+            <a:spAutoFit/>
+          </a:bodyPr>
+          <a:lstStyle/>
+          <a:p>
+            <a:pPr algn="l">
+              <a:defRPr sz="1000" b="0">
+                <a:solidFill>
+                  <a:srgbClr val="767676"/>
+                </a:solidFill>
+                <a:latin typeface="Calibri"/>
+              </a:defRPr>
+            </a:pPr>
+            <a:r>
+              <a:t>DEALER QUESTIONS AUTOMATABLE</a:t>
+            </a:r>
+          </a:p>
+        </p:txBody>
+      </p:sp>
+      <p:sp>
+        <p:nvSpPr>
+          <p:cNvPr id="12" name="TextBox 11"/>
+          <p:cNvSpPr txBox="1"/>
+          <p:nvPr/>
+        </p:nvSpPr>
+        <p:spPr>
+          <a:xfrm>
+            <a:off x="4526280" y="2377440"/>
+            <a:ext cx="2834640" cy="411480"/>
+          </a:xfrm>
+          <a:prstGeom prst="rect">
+            <a:avLst/>
+          </a:prstGeom>
+          <a:noFill/>
+        </p:spPr>
+        <p:txBody>
+          <a:bodyPr wrap="square">
+            <a:spAutoFit/>
+          </a:bodyPr>
+          <a:lstStyle/>
+          <a:p>
+            <a:pPr algn="l">
+              <a:defRPr sz="2600" b="1">
+                <a:solidFill>
+                  <a:srgbClr val="1C1C1E"/>
+                </a:solidFill>
+                <a:latin typeface="Calibri"/>
+              </a:defRPr>
+            </a:pPr>
+            <a:r>
+              <a:t>~70%</a:t>
+            </a:r>
+          </a:p>
+        </p:txBody>
+      </p:sp>
+      <p:sp>
+        <p:nvSpPr>
+          <p:cNvPr id="13" name="TextBox 12"/>
+          <p:cNvSpPr txBox="1"/>
+          <p:nvPr/>
+        </p:nvSpPr>
+        <p:spPr>
+          <a:xfrm>
+            <a:off x="4526280" y="2834640"/>
+            <a:ext cx="2834640" cy="228600"/>
+          </a:xfrm>
+          <a:prstGeom prst="rect">
+            <a:avLst/>
+          </a:prstGeom>
+          <a:noFill/>
+        </p:spPr>
+        <p:txBody>
+          <a:bodyPr wrap="square">
+            <a:spAutoFit/>
+          </a:bodyPr>
+          <a:lstStyle/>
+          <a:p>
+            <a:pPr algn="l">
+              <a:defRPr sz="900" b="0">
+                <a:solidFill>
+                  <a:srgbClr val="767676"/>
+                </a:solidFill>
+                <a:latin typeface="Calibri"/>
+              </a:defRPr>
+            </a:pPr>
+            <a:r>
+              <a:t>Follow repeatable patterns</a:t>
+            </a:r>
+          </a:p>
+        </p:txBody>
+      </p:sp>
+      <p:sp>
+        <p:nvSpPr>
+          <p:cNvPr id="14" name="Rounded Rectangle 13"/>
           <p:cNvSpPr/>
           <p:nvPr/>
         </p:nvSpPr>
         <p:spPr>
           <a:xfrm>
-            <a:off x="3108960" y="1600200"/>
-            <a:ext cx="320040" cy="320040"/>
-          </a:xfrm>
-          <a:prstGeom prst="ellipse">
-            <a:avLst/>
-          </a:prstGeom>
-          <a:solidFill>
-            <a:srgbClr val="1C1C1E"/>
-          </a:solidFill>
-          <a:ln>
-            <a:noFill/>
-          </a:ln>
-        </p:spPr>
-        <p:style>
-          <a:lnRef idx="1">
-            <a:schemeClr val="accent1"/>
-          </a:lnRef>
-          <a:fillRef idx="3">
-            <a:schemeClr val="accent1"/>
-          </a:fillRef>
-          <a:effectRef idx="2">
-            <a:schemeClr val="accent1"/>
-          </a:effectRef>
-          <a:fontRef idx="minor">
-            <a:schemeClr val="lt1"/>
-          </a:fontRef>
-        </p:style>
-        <p:txBody>
-          <a:bodyPr rtlCol="0" anchor="ctr"/>
-          <a:lstStyle/>
-          <a:p>
-            <a:pPr algn="ctr">
-              <a:defRPr sz="1400" b="1">
-                <a:solidFill>
-                  <a:srgbClr val="F5F5F3"/>
-                </a:solidFill>
-              </a:defRPr>
-            </a:pPr>
-            <a:r>
-              <a:t>2</a:t>
-            </a:r>
-          </a:p>
-        </p:txBody>
-      </p:sp>
-      <p:sp>
-        <p:nvSpPr>
-          <p:cNvPr id="11" name="TextBox 10"/>
-          <p:cNvSpPr txBox="1"/>
-          <p:nvPr/>
-        </p:nvSpPr>
-        <p:spPr>
-          <a:xfrm>
-            <a:off x="3108960" y="2011680"/>
-            <a:ext cx="1783080" cy="228600"/>
-          </a:xfrm>
-          <a:prstGeom prst="rect">
-            <a:avLst/>
-          </a:prstGeom>
-          <a:noFill/>
-        </p:spPr>
-        <p:txBody>
-          <a:bodyPr wrap="square">
-            <a:spAutoFit/>
-          </a:bodyPr>
-          <a:lstStyle/>
-          <a:p>
-            <a:pPr algn="l">
-              <a:defRPr sz="1000" b="1">
-                <a:solidFill>
-                  <a:srgbClr val="1C1C1E"/>
-                </a:solidFill>
-                <a:latin typeface="Calibri"/>
-              </a:defRPr>
-            </a:pPr>
-            <a:r>
-              <a:t>AI RETRIEVES</a:t>
-            </a:r>
-          </a:p>
-        </p:txBody>
-      </p:sp>
-      <p:sp>
-        <p:nvSpPr>
-          <p:cNvPr id="12" name="TextBox 11"/>
-          <p:cNvSpPr txBox="1"/>
-          <p:nvPr/>
-        </p:nvSpPr>
-        <p:spPr>
-          <a:xfrm>
-            <a:off x="3108960" y="2286000"/>
-            <a:ext cx="1783080" cy="914400"/>
-          </a:xfrm>
-          <a:prstGeom prst="rect">
-            <a:avLst/>
-          </a:prstGeom>
-          <a:noFill/>
-        </p:spPr>
-        <p:txBody>
-          <a:bodyPr wrap="square">
-            <a:spAutoFit/>
-          </a:bodyPr>
-          <a:lstStyle/>
-          <a:p>
-            <a:pPr algn="l">
-              <a:defRPr sz="1100" b="0">
-                <a:solidFill>
-                  <a:srgbClr val="3A3A3C"/>
-                </a:solidFill>
-                <a:latin typeface="Calibri"/>
-              </a:defRPr>
-            </a:pPr>
-            <a:r>
-              <a:t>Azure AI Search finds approved docs + AXS telemetry</a:t>
-            </a:r>
-          </a:p>
-        </p:txBody>
-      </p:sp>
-      <p:sp>
-        <p:nvSpPr>
-          <p:cNvPr id="13" name="Rounded Rectangle 12"/>
-          <p:cNvSpPr/>
-          <p:nvPr/>
-        </p:nvSpPr>
-        <p:spPr>
-          <a:xfrm>
-            <a:off x="5212080" y="1463040"/>
-            <a:ext cx="2057400" cy="2011680"/>
+            <a:off x="7863840" y="2011680"/>
+            <a:ext cx="3657600" cy="1371600"/>
           </a:xfrm>
           <a:prstGeom prst="roundRect">
             <a:avLst>
@@ -8378,138 +7571,122 @@
       </p:sp>
       <p:sp>
         <p:nvSpPr>
-          <p:cNvPr id="14" name="Oval 13"/>
+          <p:cNvPr id="15" name="TextBox 14"/>
+          <p:cNvSpPr txBox="1"/>
+          <p:nvPr/>
+        </p:nvSpPr>
+        <p:spPr>
+          <a:xfrm>
+            <a:off x="8092440" y="2148840"/>
+            <a:ext cx="3200400" cy="228600"/>
+          </a:xfrm>
+          <a:prstGeom prst="rect">
+            <a:avLst/>
+          </a:prstGeom>
+          <a:noFill/>
+        </p:spPr>
+        <p:txBody>
+          <a:bodyPr wrap="square">
+            <a:spAutoFit/>
+          </a:bodyPr>
+          <a:lstStyle/>
+          <a:p>
+            <a:pPr algn="l">
+              <a:defRPr sz="1000" b="0">
+                <a:solidFill>
+                  <a:srgbClr val="767676"/>
+                </a:solidFill>
+                <a:latin typeface="Calibri"/>
+              </a:defRPr>
+            </a:pPr>
+            <a:r>
+              <a:t>TOP COMPLAINTS</a:t>
+            </a:r>
+          </a:p>
+        </p:txBody>
+      </p:sp>
+      <p:sp>
+        <p:nvSpPr>
+          <p:cNvPr id="16" name="TextBox 15"/>
+          <p:cNvSpPr txBox="1"/>
+          <p:nvPr/>
+        </p:nvSpPr>
+        <p:spPr>
+          <a:xfrm>
+            <a:off x="8092440" y="2377440"/>
+            <a:ext cx="3200400" cy="411480"/>
+          </a:xfrm>
+          <a:prstGeom prst="rect">
+            <a:avLst/>
+          </a:prstGeom>
+          <a:noFill/>
+        </p:spPr>
+        <p:txBody>
+          <a:bodyPr wrap="square">
+            <a:spAutoFit/>
+          </a:bodyPr>
+          <a:lstStyle/>
+          <a:p>
+            <a:pPr algn="l">
+              <a:defRPr sz="2600" b="1">
+                <a:solidFill>
+                  <a:srgbClr val="C43B4F"/>
+                </a:solidFill>
+                <a:latin typeface="Calibri"/>
+              </a:defRPr>
+            </a:pPr>
+            <a:r>
+              <a:t>Firmware + Pairing</a:t>
+            </a:r>
+          </a:p>
+        </p:txBody>
+      </p:sp>
+      <p:sp>
+        <p:nvSpPr>
+          <p:cNvPr id="17" name="TextBox 16"/>
+          <p:cNvSpPr txBox="1"/>
+          <p:nvPr/>
+        </p:nvSpPr>
+        <p:spPr>
+          <a:xfrm>
+            <a:off x="8092440" y="2834640"/>
+            <a:ext cx="3200400" cy="228600"/>
+          </a:xfrm>
+          <a:prstGeom prst="rect">
+            <a:avLst/>
+          </a:prstGeom>
+          <a:noFill/>
+        </p:spPr>
+        <p:txBody>
+          <a:bodyPr wrap="square">
+            <a:spAutoFit/>
+          </a:bodyPr>
+          <a:lstStyle/>
+          <a:p>
+            <a:pPr algn="l">
+              <a:defRPr sz="900" b="0">
+                <a:solidFill>
+                  <a:srgbClr val="767676"/>
+                </a:solidFill>
+                <a:latin typeface="Calibri"/>
+              </a:defRPr>
+            </a:pPr>
+            <a:r>
+              <a:t>Reddit 2024-2025: shifting, updates, compatibility</a:t>
+            </a:r>
+          </a:p>
+        </p:txBody>
+      </p:sp>
+      <p:sp>
+        <p:nvSpPr>
+          <p:cNvPr id="18" name="Rounded Rectangle 17"/>
           <p:cNvSpPr/>
           <p:nvPr/>
         </p:nvSpPr>
         <p:spPr>
           <a:xfrm>
-            <a:off x="5349240" y="1600200"/>
-            <a:ext cx="320040" cy="320040"/>
-          </a:xfrm>
-          <a:prstGeom prst="ellipse">
-            <a:avLst/>
-          </a:prstGeom>
-          <a:solidFill>
-            <a:srgbClr val="1C1C1E"/>
-          </a:solidFill>
-          <a:ln>
-            <a:noFill/>
-          </a:ln>
-        </p:spPr>
-        <p:style>
-          <a:lnRef idx="1">
-            <a:schemeClr val="accent1"/>
-          </a:lnRef>
-          <a:fillRef idx="3">
-            <a:schemeClr val="accent1"/>
-          </a:fillRef>
-          <a:effectRef idx="2">
-            <a:schemeClr val="accent1"/>
-          </a:effectRef>
-          <a:fontRef idx="minor">
-            <a:schemeClr val="lt1"/>
-          </a:fontRef>
-        </p:style>
-        <p:txBody>
-          <a:bodyPr rtlCol="0" anchor="ctr"/>
-          <a:lstStyle/>
-          <a:p>
-            <a:pPr algn="ctr">
-              <a:defRPr sz="1400" b="1">
-                <a:solidFill>
-                  <a:srgbClr val="F5F5F3"/>
-                </a:solidFill>
-              </a:defRPr>
-            </a:pPr>
-            <a:r>
-              <a:t>3</a:t>
-            </a:r>
-          </a:p>
-        </p:txBody>
-      </p:sp>
-      <p:sp>
-        <p:nvSpPr>
-          <p:cNvPr id="15" name="TextBox 14"/>
-          <p:cNvSpPr txBox="1"/>
-          <p:nvPr/>
-        </p:nvSpPr>
-        <p:spPr>
-          <a:xfrm>
-            <a:off x="5349240" y="2011680"/>
-            <a:ext cx="1783080" cy="228600"/>
-          </a:xfrm>
-          <a:prstGeom prst="rect">
-            <a:avLst/>
-          </a:prstGeom>
-          <a:noFill/>
-        </p:spPr>
-        <p:txBody>
-          <a:bodyPr wrap="square">
-            <a:spAutoFit/>
-          </a:bodyPr>
-          <a:lstStyle/>
-          <a:p>
-            <a:pPr algn="l">
-              <a:defRPr sz="1000" b="1">
-                <a:solidFill>
-                  <a:srgbClr val="1C1C1E"/>
-                </a:solidFill>
-                <a:latin typeface="Calibri"/>
-              </a:defRPr>
-            </a:pPr>
-            <a:r>
-              <a:t>AI DRAFTS</a:t>
-            </a:r>
-          </a:p>
-        </p:txBody>
-      </p:sp>
-      <p:sp>
-        <p:nvSpPr>
-          <p:cNvPr id="16" name="TextBox 15"/>
-          <p:cNvSpPr txBox="1"/>
-          <p:nvPr/>
-        </p:nvSpPr>
-        <p:spPr>
-          <a:xfrm>
-            <a:off x="5349240" y="2286000"/>
-            <a:ext cx="1783080" cy="914400"/>
-          </a:xfrm>
-          <a:prstGeom prst="rect">
-            <a:avLst/>
-          </a:prstGeom>
-          <a:noFill/>
-        </p:spPr>
-        <p:txBody>
-          <a:bodyPr wrap="square">
-            <a:spAutoFit/>
-          </a:bodyPr>
-          <a:lstStyle/>
-          <a:p>
-            <a:pPr algn="l">
-              <a:defRPr sz="1100" b="0">
-                <a:solidFill>
-                  <a:srgbClr val="3A3A3C"/>
-                </a:solidFill>
-                <a:latin typeface="Calibri"/>
-              </a:defRPr>
-            </a:pPr>
-            <a:r>
-              <a:t>OpenAI generates response from knowledge base only</a:t>
-            </a:r>
-          </a:p>
-        </p:txBody>
-      </p:sp>
-      <p:sp>
-        <p:nvSpPr>
-          <p:cNvPr id="17" name="Rounded Rectangle 16"/>
-          <p:cNvSpPr/>
-          <p:nvPr/>
-        </p:nvSpPr>
-        <p:spPr>
-          <a:xfrm>
-            <a:off x="7452360" y="1463040"/>
-            <a:ext cx="2057400" cy="2011680"/>
+            <a:off x="731520" y="3749039"/>
+            <a:ext cx="5029200" cy="2743200"/>
           </a:xfrm>
           <a:prstGeom prst="roundRect">
             <a:avLst>
@@ -8549,88 +7726,36 @@
       </p:sp>
       <p:sp>
         <p:nvSpPr>
-          <p:cNvPr id="18" name="Oval 17"/>
-          <p:cNvSpPr/>
-          <p:nvPr/>
-        </p:nvSpPr>
-        <p:spPr>
-          <a:xfrm>
-            <a:off x="7589520" y="1600200"/>
-            <a:ext cx="320040" cy="320040"/>
-          </a:xfrm>
-          <a:prstGeom prst="ellipse">
-            <a:avLst/>
-          </a:prstGeom>
-          <a:solidFill>
-            <a:srgbClr val="1C1C1E"/>
-          </a:solidFill>
-          <a:ln>
-            <a:noFill/>
-          </a:ln>
-        </p:spPr>
-        <p:style>
-          <a:lnRef idx="1">
-            <a:schemeClr val="accent1"/>
-          </a:lnRef>
-          <a:fillRef idx="3">
-            <a:schemeClr val="accent1"/>
-          </a:fillRef>
-          <a:effectRef idx="2">
-            <a:schemeClr val="accent1"/>
-          </a:effectRef>
-          <a:fontRef idx="minor">
-            <a:schemeClr val="lt1"/>
-          </a:fontRef>
-        </p:style>
-        <p:txBody>
-          <a:bodyPr rtlCol="0" anchor="ctr"/>
-          <a:lstStyle/>
-          <a:p>
-            <a:pPr algn="ctr">
+          <p:cNvPr id="19" name="TextBox 18"/>
+          <p:cNvSpPr txBox="1"/>
+          <p:nvPr/>
+        </p:nvSpPr>
+        <p:spPr>
+          <a:xfrm>
+            <a:off x="1005840" y="3886200"/>
+            <a:ext cx="4114800" cy="320040"/>
+          </a:xfrm>
+          <a:prstGeom prst="rect">
+            <a:avLst/>
+          </a:prstGeom>
+          <a:noFill/>
+        </p:spPr>
+        <p:txBody>
+          <a:bodyPr wrap="square">
+            <a:spAutoFit/>
+          </a:bodyPr>
+          <a:lstStyle/>
+          <a:p>
+            <a:pPr algn="l">
               <a:defRPr sz="1400" b="1">
                 <a:solidFill>
-                  <a:srgbClr val="F5F5F3"/>
-                </a:solidFill>
-              </a:defRPr>
-            </a:pPr>
-            <a:r>
-              <a:t>4</a:t>
-            </a:r>
-          </a:p>
-        </p:txBody>
-      </p:sp>
-      <p:sp>
-        <p:nvSpPr>
-          <p:cNvPr id="19" name="TextBox 18"/>
-          <p:cNvSpPr txBox="1"/>
-          <p:nvPr/>
-        </p:nvSpPr>
-        <p:spPr>
-          <a:xfrm>
-            <a:off x="7589520" y="2011680"/>
-            <a:ext cx="1783080" cy="228600"/>
-          </a:xfrm>
-          <a:prstGeom prst="rect">
-            <a:avLst/>
-          </a:prstGeom>
-          <a:noFill/>
-        </p:spPr>
-        <p:txBody>
-          <a:bodyPr wrap="square">
-            <a:spAutoFit/>
-          </a:bodyPr>
-          <a:lstStyle/>
-          <a:p>
-            <a:pPr algn="l">
-              <a:defRPr sz="1000" b="1">
-                <a:solidFill>
                   <a:srgbClr val="1C1C1E"/>
                 </a:solidFill>
                 <a:latin typeface="Calibri"/>
               </a:defRPr>
             </a:pPr>
             <a:r>
-              <a:t>HUMAN REVIEWS</a:t>
+              <a:t>Customer Pain Signals</a:t>
             </a:r>
           </a:p>
         </p:txBody>
@@ -8643,21 +7768,24 @@
         </p:nvSpPr>
         <p:spPr>
           <a:xfrm>
-            <a:off x="7589520" y="2286000"/>
-            <a:ext cx="1783080" cy="914400"/>
-          </a:xfrm>
-          <a:prstGeom prst="rect">
-            <a:avLst/>
-          </a:prstGeom>
-          <a:noFill/>
-        </p:spPr>
-        <p:txBody>
-          <a:bodyPr wrap="square">
-            <a:spAutoFit/>
-          </a:bodyPr>
-          <a:lstStyle/>
-          <a:p>
-            <a:pPr algn="l">
+            <a:off x="1005840" y="4297680"/>
+            <a:ext cx="4389120" cy="2011680"/>
+          </a:xfrm>
+          <a:prstGeom prst="rect">
+            <a:avLst/>
+          </a:prstGeom>
+          <a:noFill/>
+        </p:spPr>
+        <p:txBody>
+          <a:bodyPr wrap="square">
+            <a:spAutoFit/>
+          </a:bodyPr>
+          <a:lstStyle/>
+          <a:p>
+            <a:pPr>
+              <a:spcAft>
+                <a:spcPts val="1100"/>
+              </a:spcAft>
               <a:defRPr sz="1100" b="0">
                 <a:solidFill>
                   <a:srgbClr val="3A3A3C"/>
@@ -8666,7 +7794,55 @@
               </a:defRPr>
             </a:pPr>
             <a:r>
-              <a:t>Agent approves before sending (100% in pilot)</a:t>
+              <a:t>•  Trustpilot: warranty frustration and support delays</a:t>
+            </a:r>
+          </a:p>
+          <a:p>
+            <a:pPr>
+              <a:spcAft>
+                <a:spcPts val="1100"/>
+              </a:spcAft>
+              <a:defRPr sz="1100" b="0">
+                <a:solidFill>
+                  <a:srgbClr val="3A3A3C"/>
+                </a:solidFill>
+                <a:latin typeface="Calibri"/>
+              </a:defRPr>
+            </a:pPr>
+            <a:r>
+              <a:t>•  Reddit: pairing issues, firmware failures, shifting anomalies</a:t>
+            </a:r>
+          </a:p>
+          <a:p>
+            <a:pPr>
+              <a:spcAft>
+                <a:spcPts val="1100"/>
+              </a:spcAft>
+              <a:defRPr sz="1100" b="0">
+                <a:solidFill>
+                  <a:srgbClr val="3A3A3C"/>
+                </a:solidFill>
+                <a:latin typeface="Calibri"/>
+              </a:defRPr>
+            </a:pPr>
+            <a:r>
+              <a:t>•  App stores: AXS and Hammerhead companion complaints</a:t>
+            </a:r>
+          </a:p>
+          <a:p>
+            <a:pPr>
+              <a:spcAft>
+                <a:spcPts val="1100"/>
+              </a:spcAft>
+              <a:defRPr sz="1100" b="0">
+                <a:solidFill>
+                  <a:srgbClr val="3A3A3C"/>
+                </a:solidFill>
+                <a:latin typeface="Calibri"/>
+              </a:defRPr>
+            </a:pPr>
+            <a:r>
+              <a:t>•  Riders explicitly stating intent to switch to Shimano</a:t>
             </a:r>
           </a:p>
         </p:txBody>
@@ -8679,8 +7855,8 @@
         </p:nvSpPr>
         <p:spPr>
           <a:xfrm>
-            <a:off x="9692640" y="1463040"/>
-            <a:ext cx="2057400" cy="2011680"/>
+            <a:off x="6035040" y="3749039"/>
+            <a:ext cx="5486400" cy="2743200"/>
           </a:xfrm>
           <a:prstGeom prst="roundRect">
             <a:avLst>
@@ -8720,52 +7896,36 @@
       </p:sp>
       <p:sp>
         <p:nvSpPr>
-          <p:cNvPr id="22" name="Oval 21"/>
-          <p:cNvSpPr/>
-          <p:nvPr/>
-        </p:nvSpPr>
-        <p:spPr>
-          <a:xfrm>
-            <a:off x="9829800" y="1600200"/>
-            <a:ext cx="320040" cy="320040"/>
-          </a:xfrm>
-          <a:prstGeom prst="ellipse">
-            <a:avLst/>
-          </a:prstGeom>
-          <a:solidFill>
-            <a:srgbClr val="1C1C1E"/>
-          </a:solidFill>
-          <a:ln>
-            <a:noFill/>
-          </a:ln>
-        </p:spPr>
-        <p:style>
-          <a:lnRef idx="1">
-            <a:schemeClr val="accent1"/>
-          </a:lnRef>
-          <a:fillRef idx="3">
-            <a:schemeClr val="accent1"/>
-          </a:fillRef>
-          <a:effectRef idx="2">
-            <a:schemeClr val="accent1"/>
-          </a:effectRef>
-          <a:fontRef idx="minor">
-            <a:schemeClr val="lt1"/>
-          </a:fontRef>
-        </p:style>
-        <p:txBody>
-          <a:bodyPr rtlCol="0" anchor="ctr"/>
-          <a:lstStyle/>
-          <a:p>
-            <a:pPr algn="ctr">
+          <p:cNvPr id="22" name="TextBox 21"/>
+          <p:cNvSpPr txBox="1"/>
+          <p:nvPr/>
+        </p:nvSpPr>
+        <p:spPr>
+          <a:xfrm>
+            <a:off x="6309360" y="3886200"/>
+            <a:ext cx="4572000" cy="320040"/>
+          </a:xfrm>
+          <a:prstGeom prst="rect">
+            <a:avLst/>
+          </a:prstGeom>
+          <a:noFill/>
+        </p:spPr>
+        <p:txBody>
+          <a:bodyPr wrap="square">
+            <a:spAutoFit/>
+          </a:bodyPr>
+          <a:lstStyle/>
+          <a:p>
+            <a:pPr algn="l">
               <a:defRPr sz="1400" b="1">
                 <a:solidFill>
-                  <a:srgbClr val="F5F5F3"/>
-                </a:solidFill>
-              </a:defRPr>
-            </a:pPr>
-            <a:r>
-              <a:t>5</a:t>
+                  <a:srgbClr val="1C1C1E"/>
+                </a:solidFill>
+                <a:latin typeface="Calibri"/>
+              </a:defRPr>
+            </a:pPr>
+            <a:r>
+              <a:t>Why SRAM Has the Data to Fix This</a:t>
             </a:r>
           </a:p>
         </p:txBody>
@@ -8778,163 +7938,8 @@
         </p:nvSpPr>
         <p:spPr>
           <a:xfrm>
-            <a:off x="9829800" y="2011680"/>
-            <a:ext cx="1783080" cy="228600"/>
-          </a:xfrm>
-          <a:prstGeom prst="rect">
-            <a:avLst/>
-          </a:prstGeom>
-          <a:noFill/>
-        </p:spPr>
-        <p:txBody>
-          <a:bodyPr wrap="square">
-            <a:spAutoFit/>
-          </a:bodyPr>
-          <a:lstStyle/>
-          <a:p>
-            <a:pPr algn="l">
-              <a:defRPr sz="1000" b="1">
-                <a:solidFill>
-                  <a:srgbClr val="1C1C1E"/>
-                </a:solidFill>
-                <a:latin typeface="Calibri"/>
-              </a:defRPr>
-            </a:pPr>
-            <a:r>
-              <a:t>QUALITY LOGGED</a:t>
-            </a:r>
-          </a:p>
-        </p:txBody>
-      </p:sp>
-      <p:sp>
-        <p:nvSpPr>
-          <p:cNvPr id="24" name="TextBox 23"/>
-          <p:cNvSpPr txBox="1"/>
-          <p:nvPr/>
-        </p:nvSpPr>
-        <p:spPr>
-          <a:xfrm>
-            <a:off x="9829800" y="2286000"/>
-            <a:ext cx="1783080" cy="914400"/>
-          </a:xfrm>
-          <a:prstGeom prst="rect">
-            <a:avLst/>
-          </a:prstGeom>
-          <a:noFill/>
-        </p:spPr>
-        <p:txBody>
-          <a:bodyPr wrap="square">
-            <a:spAutoFit/>
-          </a:bodyPr>
-          <a:lstStyle/>
-          <a:p>
-            <a:pPr algn="l">
-              <a:defRPr sz="1100" b="0">
-                <a:solidFill>
-                  <a:srgbClr val="3A3A3C"/>
-                </a:solidFill>
-                <a:latin typeface="Calibri"/>
-              </a:defRPr>
-            </a:pPr>
-            <a:r>
-              <a:t>Metrics tracked; weekly review with rollback trigger</a:t>
-            </a:r>
-          </a:p>
-        </p:txBody>
-      </p:sp>
-      <p:sp>
-        <p:nvSpPr>
-          <p:cNvPr id="25" name="Rounded Rectangle 24"/>
-          <p:cNvSpPr/>
-          <p:nvPr/>
-        </p:nvSpPr>
-        <p:spPr>
-          <a:xfrm>
-            <a:off x="731520" y="3794760"/>
-            <a:ext cx="5303520" cy="2743200"/>
-          </a:xfrm>
-          <a:prstGeom prst="roundRect">
-            <a:avLst>
-              <a:gd name="adj" fmla="val 4000"/>
-            </a:avLst>
-          </a:prstGeom>
-          <a:solidFill>
-            <a:srgbClr val="FFFFFF"/>
-          </a:solidFill>
-          <a:ln w="12700">
-            <a:solidFill>
-              <a:srgbClr val="E0E0DE"/>
-            </a:solidFill>
-          </a:ln>
-        </p:spPr>
-        <p:style>
-          <a:lnRef idx="1">
-            <a:schemeClr val="accent1"/>
-          </a:lnRef>
-          <a:fillRef idx="3">
-            <a:schemeClr val="accent1"/>
-          </a:fillRef>
-          <a:effectRef idx="2">
-            <a:schemeClr val="accent1"/>
-          </a:effectRef>
-          <a:fontRef idx="minor">
-            <a:schemeClr val="lt1"/>
-          </a:fontRef>
-        </p:style>
-        <p:txBody>
-          <a:bodyPr rtlCol="0" anchor="ctr"/>
-          <a:lstStyle/>
-          <a:p>
-            <a:pPr algn="ctr"/>
-          </a:p>
-        </p:txBody>
-      </p:sp>
-      <p:sp>
-        <p:nvSpPr>
-          <p:cNvPr id="26" name="TextBox 25"/>
-          <p:cNvSpPr txBox="1"/>
-          <p:nvPr/>
-        </p:nvSpPr>
-        <p:spPr>
-          <a:xfrm>
-            <a:off x="1005840" y="3931920"/>
-            <a:ext cx="4572000" cy="320040"/>
-          </a:xfrm>
-          <a:prstGeom prst="rect">
-            <a:avLst/>
-          </a:prstGeom>
-          <a:noFill/>
-        </p:spPr>
-        <p:txBody>
-          <a:bodyPr wrap="square">
-            <a:spAutoFit/>
-          </a:bodyPr>
-          <a:lstStyle/>
-          <a:p>
-            <a:pPr algn="l">
-              <a:defRPr sz="1400" b="1">
-                <a:solidFill>
-                  <a:srgbClr val="1C1C1E"/>
-                </a:solidFill>
-                <a:latin typeface="Calibri"/>
-              </a:defRPr>
-            </a:pPr>
-            <a:r>
-              <a:t>Pilot Scope</a:t>
-            </a:r>
-          </a:p>
-        </p:txBody>
-      </p:sp>
-      <p:sp>
-        <p:nvSpPr>
-          <p:cNvPr id="27" name="TextBox 26"/>
-          <p:cNvSpPr txBox="1"/>
-          <p:nvPr/>
-        </p:nvSpPr>
-        <p:spPr>
-          <a:xfrm>
-            <a:off x="1005840" y="4297680"/>
-            <a:ext cx="4754880" cy="2011680"/>
+            <a:off x="6309360" y="4297680"/>
+            <a:ext cx="4937760" cy="2011680"/>
           </a:xfrm>
           <a:prstGeom prst="rect">
             <a:avLst/>
@@ -8959,7 +7964,7 @@
               </a:defRPr>
             </a:pPr>
             <a:r>
-              <a:t>•  AXS drivetrain + Hammerhead device support only</a:t>
+              <a:t>•  Structured knowledge base: manuals, compatibility guides, troubleshooting</a:t>
             </a:r>
           </a:p>
           <a:p>
@@ -8975,7 +7980,7 @@
               </a:defRPr>
             </a:pPr>
             <a:r>
-              <a:t>•  Dealer inbox and high-volume web forms</a:t>
+              <a:t>•  AXS telemetry: firmware versions, error codes, device state</a:t>
             </a:r>
           </a:p>
           <a:p>
@@ -8991,7 +7996,7 @@
               </a:defRPr>
             </a:pPr>
             <a:r>
-              <a:t>•  Compatibility and firmware issues first</a:t>
+              <a:t>•  Hammerhead ride and device data</a:t>
             </a:r>
           </a:p>
           <a:p>
@@ -9007,177 +8012,7 @@
               </a:defRPr>
             </a:pPr>
             <a:r>
-              <a:t>•  Human approval on all customer-facing responses</a:t>
-            </a:r>
-          </a:p>
-        </p:txBody>
-      </p:sp>
-      <p:sp>
-        <p:nvSpPr>
-          <p:cNvPr id="28" name="Rounded Rectangle 27"/>
-          <p:cNvSpPr/>
-          <p:nvPr/>
-        </p:nvSpPr>
-        <p:spPr>
-          <a:xfrm>
-            <a:off x="6263640" y="3794760"/>
-            <a:ext cx="5303520" cy="2743200"/>
-          </a:xfrm>
-          <a:prstGeom prst="roundRect">
-            <a:avLst>
-              <a:gd name="adj" fmla="val 4000"/>
-            </a:avLst>
-          </a:prstGeom>
-          <a:solidFill>
-            <a:srgbClr val="FFFFFF"/>
-          </a:solidFill>
-          <a:ln w="12700">
-            <a:solidFill>
-              <a:srgbClr val="E0E0DE"/>
-            </a:solidFill>
-          </a:ln>
-        </p:spPr>
-        <p:style>
-          <a:lnRef idx="1">
-            <a:schemeClr val="accent1"/>
-          </a:lnRef>
-          <a:fillRef idx="3">
-            <a:schemeClr val="accent1"/>
-          </a:fillRef>
-          <a:effectRef idx="2">
-            <a:schemeClr val="accent1"/>
-          </a:effectRef>
-          <a:fontRef idx="minor">
-            <a:schemeClr val="lt1"/>
-          </a:fontRef>
-        </p:style>
-        <p:txBody>
-          <a:bodyPr rtlCol="0" anchor="ctr"/>
-          <a:lstStyle/>
-          <a:p>
-            <a:pPr algn="ctr"/>
-          </a:p>
-        </p:txBody>
-      </p:sp>
-      <p:sp>
-        <p:nvSpPr>
-          <p:cNvPr id="29" name="TextBox 28"/>
-          <p:cNvSpPr txBox="1"/>
-          <p:nvPr/>
-        </p:nvSpPr>
-        <p:spPr>
-          <a:xfrm>
-            <a:off x="6537960" y="3931920"/>
-            <a:ext cx="4572000" cy="320040"/>
-          </a:xfrm>
-          <a:prstGeom prst="rect">
-            <a:avLst/>
-          </a:prstGeom>
-          <a:noFill/>
-        </p:spPr>
-        <p:txBody>
-          <a:bodyPr wrap="square">
-            <a:spAutoFit/>
-          </a:bodyPr>
-          <a:lstStyle/>
-          <a:p>
-            <a:pPr algn="l">
-              <a:defRPr sz="1400" b="1">
-                <a:solidFill>
-                  <a:srgbClr val="1C1C1E"/>
-                </a:solidFill>
-                <a:latin typeface="Calibri"/>
-              </a:defRPr>
-            </a:pPr>
-            <a:r>
-              <a:t>Risk Controls</a:t>
-            </a:r>
-          </a:p>
-        </p:txBody>
-      </p:sp>
-      <p:sp>
-        <p:nvSpPr>
-          <p:cNvPr id="30" name="TextBox 29"/>
-          <p:cNvSpPr txBox="1"/>
-          <p:nvPr/>
-        </p:nvSpPr>
-        <p:spPr>
-          <a:xfrm>
-            <a:off x="6537960" y="4297680"/>
-            <a:ext cx="4754880" cy="2011680"/>
-          </a:xfrm>
-          <a:prstGeom prst="rect">
-            <a:avLst/>
-          </a:prstGeom>
-          <a:noFill/>
-        </p:spPr>
-        <p:txBody>
-          <a:bodyPr wrap="square">
-            <a:spAutoFit/>
-          </a:bodyPr>
-          <a:lstStyle/>
-          <a:p>
-            <a:pPr>
-              <a:spcAft>
-                <a:spcPts val="1100"/>
-              </a:spcAft>
-              <a:defRPr sz="1100" b="0">
-                <a:solidFill>
-                  <a:srgbClr val="3A3A3C"/>
-                </a:solidFill>
-                <a:latin typeface="Calibri"/>
-              </a:defRPr>
-            </a:pPr>
-            <a:r>
-              <a:t>•  Human approval for warranty and safety decisions</a:t>
-            </a:r>
-          </a:p>
-          <a:p>
-            <a:pPr>
-              <a:spcAft>
-                <a:spcPts val="1100"/>
-              </a:spcAft>
-              <a:defRPr sz="1100" b="0">
-                <a:solidFill>
-                  <a:srgbClr val="3A3A3C"/>
-                </a:solidFill>
-                <a:latin typeface="Calibri"/>
-              </a:defRPr>
-            </a:pPr>
-            <a:r>
-              <a:t>•  Answers sourced from approved docs only</a:t>
-            </a:r>
-          </a:p>
-          <a:p>
-            <a:pPr>
-              <a:spcAft>
-                <a:spcPts val="1100"/>
-              </a:spcAft>
-              <a:defRPr sz="1100" b="0">
-                <a:solidFill>
-                  <a:srgbClr val="3A3A3C"/>
-                </a:solidFill>
-                <a:latin typeface="Calibri"/>
-              </a:defRPr>
-            </a:pPr>
-            <a:r>
-              <a:t>•  Weekly quality review with rollback trigger</a:t>
-            </a:r>
-          </a:p>
-          <a:p>
-            <a:pPr>
-              <a:spcAft>
-                <a:spcPts val="1100"/>
-              </a:spcAft>
-              <a:defRPr sz="1100" b="0">
-                <a:solidFill>
-                  <a:srgbClr val="3A3A3C"/>
-                </a:solidFill>
-                <a:latin typeface="Calibri"/>
-              </a:defRPr>
-            </a:pPr>
-            <a:r>
-              <a:t>•  No automated warranty adjudication in Phase 1</a:t>
+              <a:t>•  Compatibility rules already documented and maintained</a:t>
             </a:r>
           </a:p>
         </p:txBody>
@@ -9239,7 +8074,7 @@
               </a:defRPr>
             </a:pPr>
             <a:r>
-              <a:t>MEASURING SUCCESS</a:t>
+              <a:t>THE SOLUTION</a:t>
             </a:r>
           </a:p>
         </p:txBody>
@@ -9275,7 +8110,7 @@
               </a:defRPr>
             </a:pPr>
             <a:r>
-              <a:t>Pilot Metrics and Year-1 Financial Impact</a:t>
+              <a:t>90-Day Support Pilot</a:t>
             </a:r>
           </a:p>
         </p:txBody>
@@ -9325,446 +8160,14 @@
       </p:sp>
       <p:sp>
         <p:nvSpPr>
-          <p:cNvPr id="5" name="TextBox 4"/>
-          <p:cNvSpPr txBox="1"/>
-          <p:nvPr/>
-        </p:nvSpPr>
-        <p:spPr>
-          <a:xfrm>
-            <a:off x="731520" y="1371600"/>
-            <a:ext cx="5486400" cy="320040"/>
-          </a:xfrm>
-          <a:prstGeom prst="rect">
-            <a:avLst/>
-          </a:prstGeom>
-          <a:noFill/>
-        </p:spPr>
-        <p:txBody>
-          <a:bodyPr wrap="square">
-            <a:spAutoFit/>
-          </a:bodyPr>
-          <a:lstStyle/>
-          <a:p>
-            <a:pPr algn="l">
-              <a:defRPr sz="1600" b="1">
-                <a:solidFill>
-                  <a:srgbClr val="1C1C1E"/>
-                </a:solidFill>
-                <a:latin typeface="Calibri"/>
-              </a:defRPr>
-            </a:pPr>
-            <a:r>
-              <a:t>90-Day Pilot Targets</a:t>
-            </a:r>
-          </a:p>
-        </p:txBody>
-      </p:sp>
-      <p:sp>
-        <p:nvSpPr>
-          <p:cNvPr id="6" name="TextBox 5"/>
-          <p:cNvSpPr txBox="1"/>
-          <p:nvPr/>
-        </p:nvSpPr>
-        <p:spPr>
-          <a:xfrm>
-            <a:off x="731520" y="1828800"/>
-            <a:ext cx="3657600" cy="320040"/>
-          </a:xfrm>
-          <a:prstGeom prst="rect">
-            <a:avLst/>
-          </a:prstGeom>
-          <a:noFill/>
-        </p:spPr>
-        <p:txBody>
-          <a:bodyPr wrap="square">
-            <a:spAutoFit/>
-          </a:bodyPr>
-          <a:lstStyle/>
-          <a:p>
-            <a:pPr algn="l">
-              <a:defRPr sz="1200" b="0">
-                <a:solidFill>
-                  <a:srgbClr val="3A3A3C"/>
-                </a:solidFill>
-                <a:latin typeface="Calibri"/>
-              </a:defRPr>
-            </a:pPr>
-            <a:r>
-              <a:t>Time-to-first-response</a:t>
-            </a:r>
-          </a:p>
-        </p:txBody>
-      </p:sp>
-      <p:sp>
-        <p:nvSpPr>
-          <p:cNvPr id="7" name="TextBox 6"/>
-          <p:cNvSpPr txBox="1"/>
-          <p:nvPr/>
-        </p:nvSpPr>
-        <p:spPr>
-          <a:xfrm>
-            <a:off x="4572000" y="1828800"/>
-            <a:ext cx="1828800" cy="320040"/>
-          </a:xfrm>
-          <a:prstGeom prst="rect">
-            <a:avLst/>
-          </a:prstGeom>
-          <a:noFill/>
-        </p:spPr>
-        <p:txBody>
-          <a:bodyPr wrap="square">
-            <a:spAutoFit/>
-          </a:bodyPr>
-          <a:lstStyle/>
-          <a:p>
-            <a:pPr algn="l">
-              <a:defRPr sz="1200" b="1">
-                <a:solidFill>
-                  <a:srgbClr val="1C1C1E"/>
-                </a:solidFill>
-                <a:latin typeface="Calibri"/>
-              </a:defRPr>
-            </a:pPr>
-            <a:r>
-              <a:t>40% reduction</a:t>
-            </a:r>
-          </a:p>
-        </p:txBody>
-      </p:sp>
-      <p:sp>
-        <p:nvSpPr>
-          <p:cNvPr id="8" name="TextBox 7"/>
-          <p:cNvSpPr txBox="1"/>
-          <p:nvPr/>
-        </p:nvSpPr>
-        <p:spPr>
-          <a:xfrm>
-            <a:off x="731520" y="2240280"/>
-            <a:ext cx="3657600" cy="320040"/>
-          </a:xfrm>
-          <a:prstGeom prst="rect">
-            <a:avLst/>
-          </a:prstGeom>
-          <a:noFill/>
-        </p:spPr>
-        <p:txBody>
-          <a:bodyPr wrap="square">
-            <a:spAutoFit/>
-          </a:bodyPr>
-          <a:lstStyle/>
-          <a:p>
-            <a:pPr algn="l">
-              <a:defRPr sz="1200" b="0">
-                <a:solidFill>
-                  <a:srgbClr val="3A3A3C"/>
-                </a:solidFill>
-                <a:latin typeface="Calibri"/>
-              </a:defRPr>
-            </a:pPr>
-            <a:r>
-              <a:t>Tickets without escalation</a:t>
-            </a:r>
-          </a:p>
-        </p:txBody>
-      </p:sp>
-      <p:sp>
-        <p:nvSpPr>
-          <p:cNvPr id="9" name="TextBox 8"/>
-          <p:cNvSpPr txBox="1"/>
-          <p:nvPr/>
-        </p:nvSpPr>
-        <p:spPr>
-          <a:xfrm>
-            <a:off x="4572000" y="2240280"/>
-            <a:ext cx="1828800" cy="320040"/>
-          </a:xfrm>
-          <a:prstGeom prst="rect">
-            <a:avLst/>
-          </a:prstGeom>
-          <a:noFill/>
-        </p:spPr>
-        <p:txBody>
-          <a:bodyPr wrap="square">
-            <a:spAutoFit/>
-          </a:bodyPr>
-          <a:lstStyle/>
-          <a:p>
-            <a:pPr algn="l">
-              <a:defRPr sz="1200" b="1">
-                <a:solidFill>
-                  <a:srgbClr val="1C1C1E"/>
-                </a:solidFill>
-                <a:latin typeface="Calibri"/>
-              </a:defRPr>
-            </a:pPr>
-            <a:r>
-              <a:t>15% improvement</a:t>
-            </a:r>
-          </a:p>
-        </p:txBody>
-      </p:sp>
-      <p:sp>
-        <p:nvSpPr>
-          <p:cNvPr id="10" name="TextBox 9"/>
-          <p:cNvSpPr txBox="1"/>
-          <p:nvPr/>
-        </p:nvSpPr>
-        <p:spPr>
-          <a:xfrm>
-            <a:off x="731520" y="2651760"/>
-            <a:ext cx="3657600" cy="320040"/>
-          </a:xfrm>
-          <a:prstGeom prst="rect">
-            <a:avLst/>
-          </a:prstGeom>
-          <a:noFill/>
-        </p:spPr>
-        <p:txBody>
-          <a:bodyPr wrap="square">
-            <a:spAutoFit/>
-          </a:bodyPr>
-          <a:lstStyle/>
-          <a:p>
-            <a:pPr algn="l">
-              <a:defRPr sz="1200" b="0">
-                <a:solidFill>
-                  <a:srgbClr val="3A3A3C"/>
-                </a:solidFill>
-                <a:latin typeface="Calibri"/>
-              </a:defRPr>
-            </a:pPr>
-            <a:r>
-              <a:t>Agent productivity</a:t>
-            </a:r>
-          </a:p>
-        </p:txBody>
-      </p:sp>
-      <p:sp>
-        <p:nvSpPr>
-          <p:cNvPr id="11" name="TextBox 10"/>
-          <p:cNvSpPr txBox="1"/>
-          <p:nvPr/>
-        </p:nvSpPr>
-        <p:spPr>
-          <a:xfrm>
-            <a:off x="4572000" y="2651760"/>
-            <a:ext cx="1828800" cy="320040"/>
-          </a:xfrm>
-          <a:prstGeom prst="rect">
-            <a:avLst/>
-          </a:prstGeom>
-          <a:noFill/>
-        </p:spPr>
-        <p:txBody>
-          <a:bodyPr wrap="square">
-            <a:spAutoFit/>
-          </a:bodyPr>
-          <a:lstStyle/>
-          <a:p>
-            <a:pPr algn="l">
-              <a:defRPr sz="1200" b="1">
-                <a:solidFill>
-                  <a:srgbClr val="1C1C1E"/>
-                </a:solidFill>
-                <a:latin typeface="Calibri"/>
-              </a:defRPr>
-            </a:pPr>
-            <a:r>
-              <a:t>25% increase</a:t>
-            </a:r>
-          </a:p>
-        </p:txBody>
-      </p:sp>
-      <p:sp>
-        <p:nvSpPr>
-          <p:cNvPr id="12" name="TextBox 11"/>
-          <p:cNvSpPr txBox="1"/>
-          <p:nvPr/>
-        </p:nvSpPr>
-        <p:spPr>
-          <a:xfrm>
-            <a:off x="731520" y="3063240"/>
-            <a:ext cx="3657600" cy="320040"/>
-          </a:xfrm>
-          <a:prstGeom prst="rect">
-            <a:avLst/>
-          </a:prstGeom>
-          <a:noFill/>
-        </p:spPr>
-        <p:txBody>
-          <a:bodyPr wrap="square">
-            <a:spAutoFit/>
-          </a:bodyPr>
-          <a:lstStyle/>
-          <a:p>
-            <a:pPr algn="l">
-              <a:defRPr sz="1200" b="0">
-                <a:solidFill>
-                  <a:srgbClr val="3A3A3C"/>
-                </a:solidFill>
-                <a:latin typeface="Calibri"/>
-              </a:defRPr>
-            </a:pPr>
-            <a:r>
-              <a:t>AI draft acceptance rate</a:t>
-            </a:r>
-          </a:p>
-        </p:txBody>
-      </p:sp>
-      <p:sp>
-        <p:nvSpPr>
-          <p:cNvPr id="13" name="TextBox 12"/>
-          <p:cNvSpPr txBox="1"/>
-          <p:nvPr/>
-        </p:nvSpPr>
-        <p:spPr>
-          <a:xfrm>
-            <a:off x="4572000" y="3063240"/>
-            <a:ext cx="1828800" cy="320040"/>
-          </a:xfrm>
-          <a:prstGeom prst="rect">
-            <a:avLst/>
-          </a:prstGeom>
-          <a:noFill/>
-        </p:spPr>
-        <p:txBody>
-          <a:bodyPr wrap="square">
-            <a:spAutoFit/>
-          </a:bodyPr>
-          <a:lstStyle/>
-          <a:p>
-            <a:pPr algn="l">
-              <a:defRPr sz="1200" b="1">
-                <a:solidFill>
-                  <a:srgbClr val="1C1C1E"/>
-                </a:solidFill>
-                <a:latin typeface="Calibri"/>
-              </a:defRPr>
-            </a:pPr>
-            <a:r>
-              <a:t>Above 70%</a:t>
-            </a:r>
-          </a:p>
-        </p:txBody>
-      </p:sp>
-      <p:sp>
-        <p:nvSpPr>
-          <p:cNvPr id="14" name="TextBox 13"/>
-          <p:cNvSpPr txBox="1"/>
-          <p:nvPr/>
-        </p:nvSpPr>
-        <p:spPr>
-          <a:xfrm>
-            <a:off x="731520" y="3474720"/>
-            <a:ext cx="3657600" cy="320040"/>
-          </a:xfrm>
-          <a:prstGeom prst="rect">
-            <a:avLst/>
-          </a:prstGeom>
-          <a:noFill/>
-        </p:spPr>
-        <p:txBody>
-          <a:bodyPr wrap="square">
-            <a:spAutoFit/>
-          </a:bodyPr>
-          <a:lstStyle/>
-          <a:p>
-            <a:pPr algn="l">
-              <a:defRPr sz="1200" b="0">
-                <a:solidFill>
-                  <a:srgbClr val="3A3A3C"/>
-                </a:solidFill>
-                <a:latin typeface="Calibri"/>
-              </a:defRPr>
-            </a:pPr>
-            <a:r>
-              <a:t>Customer satisfaction</a:t>
-            </a:r>
-          </a:p>
-        </p:txBody>
-      </p:sp>
-      <p:sp>
-        <p:nvSpPr>
-          <p:cNvPr id="15" name="TextBox 14"/>
-          <p:cNvSpPr txBox="1"/>
-          <p:nvPr/>
-        </p:nvSpPr>
-        <p:spPr>
-          <a:xfrm>
-            <a:off x="4572000" y="3474720"/>
-            <a:ext cx="1828800" cy="320040"/>
-          </a:xfrm>
-          <a:prstGeom prst="rect">
-            <a:avLst/>
-          </a:prstGeom>
-          <a:noFill/>
-        </p:spPr>
-        <p:txBody>
-          <a:bodyPr wrap="square">
-            <a:spAutoFit/>
-          </a:bodyPr>
-          <a:lstStyle/>
-          <a:p>
-            <a:pPr algn="l">
-              <a:defRPr sz="1200" b="1">
-                <a:solidFill>
-                  <a:srgbClr val="1C1C1E"/>
-                </a:solidFill>
-                <a:latin typeface="Calibri"/>
-              </a:defRPr>
-            </a:pPr>
-            <a:r>
-              <a:t>No decline</a:t>
-            </a:r>
-          </a:p>
-        </p:txBody>
-      </p:sp>
-      <p:sp>
-        <p:nvSpPr>
-          <p:cNvPr id="16" name="TextBox 15"/>
-          <p:cNvSpPr txBox="1"/>
-          <p:nvPr/>
-        </p:nvSpPr>
-        <p:spPr>
-          <a:xfrm>
-            <a:off x="6858000" y="1371600"/>
-            <a:ext cx="4572000" cy="320040"/>
-          </a:xfrm>
-          <a:prstGeom prst="rect">
-            <a:avLst/>
-          </a:prstGeom>
-          <a:noFill/>
-        </p:spPr>
-        <p:txBody>
-          <a:bodyPr wrap="square">
-            <a:spAutoFit/>
-          </a:bodyPr>
-          <a:lstStyle/>
-          <a:p>
-            <a:pPr algn="l">
-              <a:defRPr sz="1600" b="1">
-                <a:solidFill>
-                  <a:srgbClr val="1C1C1E"/>
-                </a:solidFill>
-                <a:latin typeface="Calibri"/>
-              </a:defRPr>
-            </a:pPr>
-            <a:r>
-              <a:t>Year-1 Financial Impact (All Phases)</a:t>
-            </a:r>
-          </a:p>
-        </p:txBody>
-      </p:sp>
-      <p:sp>
-        <p:nvSpPr>
-          <p:cNvPr id="17" name="Rounded Rectangle 16"/>
+          <p:cNvPr id="5" name="Rounded Rectangle 4"/>
           <p:cNvSpPr/>
           <p:nvPr/>
         </p:nvSpPr>
         <p:spPr>
           <a:xfrm>
-            <a:off x="6858000" y="1828800"/>
-            <a:ext cx="2286000" cy="1188720"/>
+            <a:off x="731520" y="1463040"/>
+            <a:ext cx="2057400" cy="2011680"/>
           </a:xfrm>
           <a:prstGeom prst="roundRect">
             <a:avLst>
@@ -9804,64 +8207,80 @@
       </p:sp>
       <p:sp>
         <p:nvSpPr>
-          <p:cNvPr id="18" name="TextBox 17"/>
-          <p:cNvSpPr txBox="1"/>
-          <p:nvPr/>
-        </p:nvSpPr>
-        <p:spPr>
-          <a:xfrm>
-            <a:off x="7086600" y="1965960"/>
-            <a:ext cx="1828800" cy="228600"/>
-          </a:xfrm>
-          <a:prstGeom prst="rect">
-            <a:avLst/>
-          </a:prstGeom>
-          <a:noFill/>
-        </p:spPr>
-        <p:txBody>
-          <a:bodyPr wrap="square">
-            <a:spAutoFit/>
-          </a:bodyPr>
-          <a:lstStyle/>
-          <a:p>
-            <a:pPr algn="l">
-              <a:defRPr sz="1000" b="0">
-                <a:solidFill>
-                  <a:srgbClr val="767676"/>
-                </a:solidFill>
-                <a:latin typeface="Calibri"/>
-              </a:defRPr>
-            </a:pPr>
-            <a:r>
-              <a:t>NET YEAR-1 VALUE</a:t>
-            </a:r>
-          </a:p>
-        </p:txBody>
-      </p:sp>
-      <p:sp>
-        <p:nvSpPr>
-          <p:cNvPr id="19" name="TextBox 18"/>
-          <p:cNvSpPr txBox="1"/>
-          <p:nvPr/>
-        </p:nvSpPr>
-        <p:spPr>
-          <a:xfrm>
-            <a:off x="7086600" y="2194560"/>
-            <a:ext cx="1828800" cy="411480"/>
-          </a:xfrm>
-          <a:prstGeom prst="rect">
-            <a:avLst/>
-          </a:prstGeom>
-          <a:noFill/>
-        </p:spPr>
-        <p:txBody>
-          <a:bodyPr wrap="square">
-            <a:spAutoFit/>
-          </a:bodyPr>
-          <a:lstStyle/>
-          <a:p>
-            <a:pPr algn="l">
-              <a:defRPr sz="2600" b="1">
+          <p:cNvPr id="6" name="Oval 5"/>
+          <p:cNvSpPr/>
+          <p:nvPr/>
+        </p:nvSpPr>
+        <p:spPr>
+          <a:xfrm>
+            <a:off x="868680" y="1600200"/>
+            <a:ext cx="320040" cy="320040"/>
+          </a:xfrm>
+          <a:prstGeom prst="ellipse">
+            <a:avLst/>
+          </a:prstGeom>
+          <a:solidFill>
+            <a:srgbClr val="1C1C1E"/>
+          </a:solidFill>
+          <a:ln>
+            <a:noFill/>
+          </a:ln>
+        </p:spPr>
+        <p:style>
+          <a:lnRef idx="1">
+            <a:schemeClr val="accent1"/>
+          </a:lnRef>
+          <a:fillRef idx="3">
+            <a:schemeClr val="accent1"/>
+          </a:fillRef>
+          <a:effectRef idx="2">
+            <a:schemeClr val="accent1"/>
+          </a:effectRef>
+          <a:fontRef idx="minor">
+            <a:schemeClr val="lt1"/>
+          </a:fontRef>
+        </p:style>
+        <p:txBody>
+          <a:bodyPr rtlCol="0" anchor="ctr"/>
+          <a:lstStyle/>
+          <a:p>
+            <a:pPr algn="ctr">
+              <a:defRPr sz="1400" b="1">
+                <a:solidFill>
+                  <a:srgbClr val="F5F5F3"/>
+                </a:solidFill>
+              </a:defRPr>
+            </a:pPr>
+            <a:r>
+              <a:t>1</a:t>
+            </a:r>
+          </a:p>
+        </p:txBody>
+      </p:sp>
+      <p:sp>
+        <p:nvSpPr>
+          <p:cNvPr id="7" name="TextBox 6"/>
+          <p:cNvSpPr txBox="1"/>
+          <p:nvPr/>
+        </p:nvSpPr>
+        <p:spPr>
+          <a:xfrm>
+            <a:off x="868680" y="2011680"/>
+            <a:ext cx="1783080" cy="228600"/>
+          </a:xfrm>
+          <a:prstGeom prst="rect">
+            <a:avLst/>
+          </a:prstGeom>
+          <a:noFill/>
+        </p:spPr>
+        <p:txBody>
+          <a:bodyPr wrap="square">
+            <a:spAutoFit/>
+          </a:bodyPr>
+          <a:lstStyle/>
+          <a:p>
+            <a:pPr algn="l">
+              <a:defRPr sz="1000" b="1">
                 <a:solidFill>
                   <a:srgbClr val="1C1C1E"/>
                 </a:solidFill>
@@ -9869,57 +8288,57 @@
               </a:defRPr>
             </a:pPr>
             <a:r>
-              <a:t>$10.2M</a:t>
-            </a:r>
-          </a:p>
-        </p:txBody>
-      </p:sp>
-      <p:sp>
-        <p:nvSpPr>
-          <p:cNvPr id="20" name="TextBox 19"/>
-          <p:cNvSpPr txBox="1"/>
-          <p:nvPr/>
-        </p:nvSpPr>
-        <p:spPr>
-          <a:xfrm>
-            <a:off x="7086600" y="2651760"/>
-            <a:ext cx="1828800" cy="228600"/>
-          </a:xfrm>
-          <a:prstGeom prst="rect">
-            <a:avLst/>
-          </a:prstGeom>
-          <a:noFill/>
-        </p:spPr>
-        <p:txBody>
-          <a:bodyPr wrap="square">
-            <a:spAutoFit/>
-          </a:bodyPr>
-          <a:lstStyle/>
-          <a:p>
-            <a:pPr algn="l">
-              <a:defRPr sz="900" b="0">
-                <a:solidFill>
-                  <a:srgbClr val="767676"/>
-                </a:solidFill>
-                <a:latin typeface="Calibri"/>
-              </a:defRPr>
-            </a:pPr>
-            <a:r>
-              <a:t>Expected case</a:t>
-            </a:r>
-          </a:p>
-        </p:txBody>
-      </p:sp>
-      <p:sp>
-        <p:nvSpPr>
-          <p:cNvPr id="21" name="Rounded Rectangle 20"/>
+              <a:t>TICKET IN</a:t>
+            </a:r>
+          </a:p>
+        </p:txBody>
+      </p:sp>
+      <p:sp>
+        <p:nvSpPr>
+          <p:cNvPr id="8" name="TextBox 7"/>
+          <p:cNvSpPr txBox="1"/>
+          <p:nvPr/>
+        </p:nvSpPr>
+        <p:spPr>
+          <a:xfrm>
+            <a:off x="868680" y="2286000"/>
+            <a:ext cx="1783080" cy="914400"/>
+          </a:xfrm>
+          <a:prstGeom prst="rect">
+            <a:avLst/>
+          </a:prstGeom>
+          <a:noFill/>
+        </p:spPr>
+        <p:txBody>
+          <a:bodyPr wrap="square">
+            <a:spAutoFit/>
+          </a:bodyPr>
+          <a:lstStyle/>
+          <a:p>
+            <a:pPr algn="l">
+              <a:defRPr sz="1100" b="0">
+                <a:solidFill>
+                  <a:srgbClr val="3A3A3C"/>
+                </a:solidFill>
+                <a:latin typeface="Calibri"/>
+              </a:defRPr>
+            </a:pPr>
+            <a:r>
+              <a:t>Dealer or rider submits via Zendesk</a:t>
+            </a:r>
+          </a:p>
+        </p:txBody>
+      </p:sp>
+      <p:sp>
+        <p:nvSpPr>
+          <p:cNvPr id="9" name="Rounded Rectangle 8"/>
           <p:cNvSpPr/>
           <p:nvPr/>
         </p:nvSpPr>
         <p:spPr>
           <a:xfrm>
-            <a:off x="9326880" y="1828800"/>
-            <a:ext cx="2286000" cy="1188720"/>
+            <a:off x="2971800" y="1463040"/>
+            <a:ext cx="2057400" cy="2011680"/>
           </a:xfrm>
           <a:prstGeom prst="roundRect">
             <a:avLst>
@@ -9959,36 +8378,565 @@
       </p:sp>
       <p:sp>
         <p:nvSpPr>
-          <p:cNvPr id="22" name="TextBox 21"/>
-          <p:cNvSpPr txBox="1"/>
-          <p:nvPr/>
-        </p:nvSpPr>
-        <p:spPr>
-          <a:xfrm>
-            <a:off x="9555480" y="1965960"/>
-            <a:ext cx="1828800" cy="228600"/>
-          </a:xfrm>
-          <a:prstGeom prst="rect">
-            <a:avLst/>
-          </a:prstGeom>
-          <a:noFill/>
-        </p:spPr>
-        <p:txBody>
-          <a:bodyPr wrap="square">
-            <a:spAutoFit/>
-          </a:bodyPr>
-          <a:lstStyle/>
-          <a:p>
-            <a:pPr algn="l">
-              <a:defRPr sz="1000" b="0">
-                <a:solidFill>
-                  <a:srgbClr val="767676"/>
-                </a:solidFill>
-                <a:latin typeface="Calibri"/>
-              </a:defRPr>
-            </a:pPr>
-            <a:r>
-              <a:t>RETURN ON SPEND</a:t>
+          <p:cNvPr id="10" name="Oval 9"/>
+          <p:cNvSpPr/>
+          <p:nvPr/>
+        </p:nvSpPr>
+        <p:spPr>
+          <a:xfrm>
+            <a:off x="3108960" y="1600200"/>
+            <a:ext cx="320040" cy="320040"/>
+          </a:xfrm>
+          <a:prstGeom prst="ellipse">
+            <a:avLst/>
+          </a:prstGeom>
+          <a:solidFill>
+            <a:srgbClr val="1C1C1E"/>
+          </a:solidFill>
+          <a:ln>
+            <a:noFill/>
+          </a:ln>
+        </p:spPr>
+        <p:style>
+          <a:lnRef idx="1">
+            <a:schemeClr val="accent1"/>
+          </a:lnRef>
+          <a:fillRef idx="3">
+            <a:schemeClr val="accent1"/>
+          </a:fillRef>
+          <a:effectRef idx="2">
+            <a:schemeClr val="accent1"/>
+          </a:effectRef>
+          <a:fontRef idx="minor">
+            <a:schemeClr val="lt1"/>
+          </a:fontRef>
+        </p:style>
+        <p:txBody>
+          <a:bodyPr rtlCol="0" anchor="ctr"/>
+          <a:lstStyle/>
+          <a:p>
+            <a:pPr algn="ctr">
+              <a:defRPr sz="1400" b="1">
+                <a:solidFill>
+                  <a:srgbClr val="F5F5F3"/>
+                </a:solidFill>
+              </a:defRPr>
+            </a:pPr>
+            <a:r>
+              <a:t>2</a:t>
+            </a:r>
+          </a:p>
+        </p:txBody>
+      </p:sp>
+      <p:sp>
+        <p:nvSpPr>
+          <p:cNvPr id="11" name="TextBox 10"/>
+          <p:cNvSpPr txBox="1"/>
+          <p:nvPr/>
+        </p:nvSpPr>
+        <p:spPr>
+          <a:xfrm>
+            <a:off x="3108960" y="2011680"/>
+            <a:ext cx="1783080" cy="228600"/>
+          </a:xfrm>
+          <a:prstGeom prst="rect">
+            <a:avLst/>
+          </a:prstGeom>
+          <a:noFill/>
+        </p:spPr>
+        <p:txBody>
+          <a:bodyPr wrap="square">
+            <a:spAutoFit/>
+          </a:bodyPr>
+          <a:lstStyle/>
+          <a:p>
+            <a:pPr algn="l">
+              <a:defRPr sz="1000" b="1">
+                <a:solidFill>
+                  <a:srgbClr val="1C1C1E"/>
+                </a:solidFill>
+                <a:latin typeface="Calibri"/>
+              </a:defRPr>
+            </a:pPr>
+            <a:r>
+              <a:t>AI RETRIEVES</a:t>
+            </a:r>
+          </a:p>
+        </p:txBody>
+      </p:sp>
+      <p:sp>
+        <p:nvSpPr>
+          <p:cNvPr id="12" name="TextBox 11"/>
+          <p:cNvSpPr txBox="1"/>
+          <p:nvPr/>
+        </p:nvSpPr>
+        <p:spPr>
+          <a:xfrm>
+            <a:off x="3108960" y="2286000"/>
+            <a:ext cx="1783080" cy="914400"/>
+          </a:xfrm>
+          <a:prstGeom prst="rect">
+            <a:avLst/>
+          </a:prstGeom>
+          <a:noFill/>
+        </p:spPr>
+        <p:txBody>
+          <a:bodyPr wrap="square">
+            <a:spAutoFit/>
+          </a:bodyPr>
+          <a:lstStyle/>
+          <a:p>
+            <a:pPr algn="l">
+              <a:defRPr sz="1100" b="0">
+                <a:solidFill>
+                  <a:srgbClr val="3A3A3C"/>
+                </a:solidFill>
+                <a:latin typeface="Calibri"/>
+              </a:defRPr>
+            </a:pPr>
+            <a:r>
+              <a:t>Azure AI Search finds approved docs + AXS telemetry</a:t>
+            </a:r>
+          </a:p>
+        </p:txBody>
+      </p:sp>
+      <p:sp>
+        <p:nvSpPr>
+          <p:cNvPr id="13" name="Rounded Rectangle 12"/>
+          <p:cNvSpPr/>
+          <p:nvPr/>
+        </p:nvSpPr>
+        <p:spPr>
+          <a:xfrm>
+            <a:off x="5212080" y="1463040"/>
+            <a:ext cx="2057400" cy="2011680"/>
+          </a:xfrm>
+          <a:prstGeom prst="roundRect">
+            <a:avLst>
+              <a:gd name="adj" fmla="val 4000"/>
+            </a:avLst>
+          </a:prstGeom>
+          <a:solidFill>
+            <a:srgbClr val="FFFFFF"/>
+          </a:solidFill>
+          <a:ln w="12700">
+            <a:solidFill>
+              <a:srgbClr val="E0E0DE"/>
+            </a:solidFill>
+          </a:ln>
+        </p:spPr>
+        <p:style>
+          <a:lnRef idx="1">
+            <a:schemeClr val="accent1"/>
+          </a:lnRef>
+          <a:fillRef idx="3">
+            <a:schemeClr val="accent1"/>
+          </a:fillRef>
+          <a:effectRef idx="2">
+            <a:schemeClr val="accent1"/>
+          </a:effectRef>
+          <a:fontRef idx="minor">
+            <a:schemeClr val="lt1"/>
+          </a:fontRef>
+        </p:style>
+        <p:txBody>
+          <a:bodyPr rtlCol="0" anchor="ctr"/>
+          <a:lstStyle/>
+          <a:p>
+            <a:pPr algn="ctr"/>
+          </a:p>
+        </p:txBody>
+      </p:sp>
+      <p:sp>
+        <p:nvSpPr>
+          <p:cNvPr id="14" name="Oval 13"/>
+          <p:cNvSpPr/>
+          <p:nvPr/>
+        </p:nvSpPr>
+        <p:spPr>
+          <a:xfrm>
+            <a:off x="5349240" y="1600200"/>
+            <a:ext cx="320040" cy="320040"/>
+          </a:xfrm>
+          <a:prstGeom prst="ellipse">
+            <a:avLst/>
+          </a:prstGeom>
+          <a:solidFill>
+            <a:srgbClr val="1C1C1E"/>
+          </a:solidFill>
+          <a:ln>
+            <a:noFill/>
+          </a:ln>
+        </p:spPr>
+        <p:style>
+          <a:lnRef idx="1">
+            <a:schemeClr val="accent1"/>
+          </a:lnRef>
+          <a:fillRef idx="3">
+            <a:schemeClr val="accent1"/>
+          </a:fillRef>
+          <a:effectRef idx="2">
+            <a:schemeClr val="accent1"/>
+          </a:effectRef>
+          <a:fontRef idx="minor">
+            <a:schemeClr val="lt1"/>
+          </a:fontRef>
+        </p:style>
+        <p:txBody>
+          <a:bodyPr rtlCol="0" anchor="ctr"/>
+          <a:lstStyle/>
+          <a:p>
+            <a:pPr algn="ctr">
+              <a:defRPr sz="1400" b="1">
+                <a:solidFill>
+                  <a:srgbClr val="F5F5F3"/>
+                </a:solidFill>
+              </a:defRPr>
+            </a:pPr>
+            <a:r>
+              <a:t>3</a:t>
+            </a:r>
+          </a:p>
+        </p:txBody>
+      </p:sp>
+      <p:sp>
+        <p:nvSpPr>
+          <p:cNvPr id="15" name="TextBox 14"/>
+          <p:cNvSpPr txBox="1"/>
+          <p:nvPr/>
+        </p:nvSpPr>
+        <p:spPr>
+          <a:xfrm>
+            <a:off x="5349240" y="2011680"/>
+            <a:ext cx="1783080" cy="228600"/>
+          </a:xfrm>
+          <a:prstGeom prst="rect">
+            <a:avLst/>
+          </a:prstGeom>
+          <a:noFill/>
+        </p:spPr>
+        <p:txBody>
+          <a:bodyPr wrap="square">
+            <a:spAutoFit/>
+          </a:bodyPr>
+          <a:lstStyle/>
+          <a:p>
+            <a:pPr algn="l">
+              <a:defRPr sz="1000" b="1">
+                <a:solidFill>
+                  <a:srgbClr val="1C1C1E"/>
+                </a:solidFill>
+                <a:latin typeface="Calibri"/>
+              </a:defRPr>
+            </a:pPr>
+            <a:r>
+              <a:t>AI DRAFTS</a:t>
+            </a:r>
+          </a:p>
+        </p:txBody>
+      </p:sp>
+      <p:sp>
+        <p:nvSpPr>
+          <p:cNvPr id="16" name="TextBox 15"/>
+          <p:cNvSpPr txBox="1"/>
+          <p:nvPr/>
+        </p:nvSpPr>
+        <p:spPr>
+          <a:xfrm>
+            <a:off x="5349240" y="2286000"/>
+            <a:ext cx="1783080" cy="914400"/>
+          </a:xfrm>
+          <a:prstGeom prst="rect">
+            <a:avLst/>
+          </a:prstGeom>
+          <a:noFill/>
+        </p:spPr>
+        <p:txBody>
+          <a:bodyPr wrap="square">
+            <a:spAutoFit/>
+          </a:bodyPr>
+          <a:lstStyle/>
+          <a:p>
+            <a:pPr algn="l">
+              <a:defRPr sz="1100" b="0">
+                <a:solidFill>
+                  <a:srgbClr val="3A3A3C"/>
+                </a:solidFill>
+                <a:latin typeface="Calibri"/>
+              </a:defRPr>
+            </a:pPr>
+            <a:r>
+              <a:t>OpenAI generates response from knowledge base only</a:t>
+            </a:r>
+          </a:p>
+        </p:txBody>
+      </p:sp>
+      <p:sp>
+        <p:nvSpPr>
+          <p:cNvPr id="17" name="Rounded Rectangle 16"/>
+          <p:cNvSpPr/>
+          <p:nvPr/>
+        </p:nvSpPr>
+        <p:spPr>
+          <a:xfrm>
+            <a:off x="7452360" y="1463040"/>
+            <a:ext cx="2057400" cy="2011680"/>
+          </a:xfrm>
+          <a:prstGeom prst="roundRect">
+            <a:avLst>
+              <a:gd name="adj" fmla="val 4000"/>
+            </a:avLst>
+          </a:prstGeom>
+          <a:solidFill>
+            <a:srgbClr val="FFFFFF"/>
+          </a:solidFill>
+          <a:ln w="12700">
+            <a:solidFill>
+              <a:srgbClr val="E0E0DE"/>
+            </a:solidFill>
+          </a:ln>
+        </p:spPr>
+        <p:style>
+          <a:lnRef idx="1">
+            <a:schemeClr val="accent1"/>
+          </a:lnRef>
+          <a:fillRef idx="3">
+            <a:schemeClr val="accent1"/>
+          </a:fillRef>
+          <a:effectRef idx="2">
+            <a:schemeClr val="accent1"/>
+          </a:effectRef>
+          <a:fontRef idx="minor">
+            <a:schemeClr val="lt1"/>
+          </a:fontRef>
+        </p:style>
+        <p:txBody>
+          <a:bodyPr rtlCol="0" anchor="ctr"/>
+          <a:lstStyle/>
+          <a:p>
+            <a:pPr algn="ctr"/>
+          </a:p>
+        </p:txBody>
+      </p:sp>
+      <p:sp>
+        <p:nvSpPr>
+          <p:cNvPr id="18" name="Oval 17"/>
+          <p:cNvSpPr/>
+          <p:nvPr/>
+        </p:nvSpPr>
+        <p:spPr>
+          <a:xfrm>
+            <a:off x="7589520" y="1600200"/>
+            <a:ext cx="320040" cy="320040"/>
+          </a:xfrm>
+          <a:prstGeom prst="ellipse">
+            <a:avLst/>
+          </a:prstGeom>
+          <a:solidFill>
+            <a:srgbClr val="1C1C1E"/>
+          </a:solidFill>
+          <a:ln>
+            <a:noFill/>
+          </a:ln>
+        </p:spPr>
+        <p:style>
+          <a:lnRef idx="1">
+            <a:schemeClr val="accent1"/>
+          </a:lnRef>
+          <a:fillRef idx="3">
+            <a:schemeClr val="accent1"/>
+          </a:fillRef>
+          <a:effectRef idx="2">
+            <a:schemeClr val="accent1"/>
+          </a:effectRef>
+          <a:fontRef idx="minor">
+            <a:schemeClr val="lt1"/>
+          </a:fontRef>
+        </p:style>
+        <p:txBody>
+          <a:bodyPr rtlCol="0" anchor="ctr"/>
+          <a:lstStyle/>
+          <a:p>
+            <a:pPr algn="ctr">
+              <a:defRPr sz="1400" b="1">
+                <a:solidFill>
+                  <a:srgbClr val="F5F5F3"/>
+                </a:solidFill>
+              </a:defRPr>
+            </a:pPr>
+            <a:r>
+              <a:t>4</a:t>
+            </a:r>
+          </a:p>
+        </p:txBody>
+      </p:sp>
+      <p:sp>
+        <p:nvSpPr>
+          <p:cNvPr id="19" name="TextBox 18"/>
+          <p:cNvSpPr txBox="1"/>
+          <p:nvPr/>
+        </p:nvSpPr>
+        <p:spPr>
+          <a:xfrm>
+            <a:off x="7589520" y="2011680"/>
+            <a:ext cx="1783080" cy="228600"/>
+          </a:xfrm>
+          <a:prstGeom prst="rect">
+            <a:avLst/>
+          </a:prstGeom>
+          <a:noFill/>
+        </p:spPr>
+        <p:txBody>
+          <a:bodyPr wrap="square">
+            <a:spAutoFit/>
+          </a:bodyPr>
+          <a:lstStyle/>
+          <a:p>
+            <a:pPr algn="l">
+              <a:defRPr sz="1000" b="1">
+                <a:solidFill>
+                  <a:srgbClr val="1C1C1E"/>
+                </a:solidFill>
+                <a:latin typeface="Calibri"/>
+              </a:defRPr>
+            </a:pPr>
+            <a:r>
+              <a:t>HUMAN REVIEWS</a:t>
+            </a:r>
+          </a:p>
+        </p:txBody>
+      </p:sp>
+      <p:sp>
+        <p:nvSpPr>
+          <p:cNvPr id="20" name="TextBox 19"/>
+          <p:cNvSpPr txBox="1"/>
+          <p:nvPr/>
+        </p:nvSpPr>
+        <p:spPr>
+          <a:xfrm>
+            <a:off x="7589520" y="2286000"/>
+            <a:ext cx="1783080" cy="914400"/>
+          </a:xfrm>
+          <a:prstGeom prst="rect">
+            <a:avLst/>
+          </a:prstGeom>
+          <a:noFill/>
+        </p:spPr>
+        <p:txBody>
+          <a:bodyPr wrap="square">
+            <a:spAutoFit/>
+          </a:bodyPr>
+          <a:lstStyle/>
+          <a:p>
+            <a:pPr algn="l">
+              <a:defRPr sz="1100" b="0">
+                <a:solidFill>
+                  <a:srgbClr val="3A3A3C"/>
+                </a:solidFill>
+                <a:latin typeface="Calibri"/>
+              </a:defRPr>
+            </a:pPr>
+            <a:r>
+              <a:t>Agent approves before sending (100% in pilot)</a:t>
+            </a:r>
+          </a:p>
+        </p:txBody>
+      </p:sp>
+      <p:sp>
+        <p:nvSpPr>
+          <p:cNvPr id="21" name="Rounded Rectangle 20"/>
+          <p:cNvSpPr/>
+          <p:nvPr/>
+        </p:nvSpPr>
+        <p:spPr>
+          <a:xfrm>
+            <a:off x="9692640" y="1463040"/>
+            <a:ext cx="2057400" cy="2011680"/>
+          </a:xfrm>
+          <a:prstGeom prst="roundRect">
+            <a:avLst>
+              <a:gd name="adj" fmla="val 4000"/>
+            </a:avLst>
+          </a:prstGeom>
+          <a:solidFill>
+            <a:srgbClr val="FFFFFF"/>
+          </a:solidFill>
+          <a:ln w="12700">
+            <a:solidFill>
+              <a:srgbClr val="E0E0DE"/>
+            </a:solidFill>
+          </a:ln>
+        </p:spPr>
+        <p:style>
+          <a:lnRef idx="1">
+            <a:schemeClr val="accent1"/>
+          </a:lnRef>
+          <a:fillRef idx="3">
+            <a:schemeClr val="accent1"/>
+          </a:fillRef>
+          <a:effectRef idx="2">
+            <a:schemeClr val="accent1"/>
+          </a:effectRef>
+          <a:fontRef idx="minor">
+            <a:schemeClr val="lt1"/>
+          </a:fontRef>
+        </p:style>
+        <p:txBody>
+          <a:bodyPr rtlCol="0" anchor="ctr"/>
+          <a:lstStyle/>
+          <a:p>
+            <a:pPr algn="ctr"/>
+          </a:p>
+        </p:txBody>
+      </p:sp>
+      <p:sp>
+        <p:nvSpPr>
+          <p:cNvPr id="22" name="Oval 21"/>
+          <p:cNvSpPr/>
+          <p:nvPr/>
+        </p:nvSpPr>
+        <p:spPr>
+          <a:xfrm>
+            <a:off x="9829800" y="1600200"/>
+            <a:ext cx="320040" cy="320040"/>
+          </a:xfrm>
+          <a:prstGeom prst="ellipse">
+            <a:avLst/>
+          </a:prstGeom>
+          <a:solidFill>
+            <a:srgbClr val="1C1C1E"/>
+          </a:solidFill>
+          <a:ln>
+            <a:noFill/>
+          </a:ln>
+        </p:spPr>
+        <p:style>
+          <a:lnRef idx="1">
+            <a:schemeClr val="accent1"/>
+          </a:lnRef>
+          <a:fillRef idx="3">
+            <a:schemeClr val="accent1"/>
+          </a:fillRef>
+          <a:effectRef idx="2">
+            <a:schemeClr val="accent1"/>
+          </a:effectRef>
+          <a:fontRef idx="minor">
+            <a:schemeClr val="lt1"/>
+          </a:fontRef>
+        </p:style>
+        <p:txBody>
+          <a:bodyPr rtlCol="0" anchor="ctr"/>
+          <a:lstStyle/>
+          <a:p>
+            <a:pPr algn="ctr">
+              <a:defRPr sz="1400" b="1">
+                <a:solidFill>
+                  <a:srgbClr val="F5F5F3"/>
+                </a:solidFill>
+              </a:defRPr>
+            </a:pPr>
+            <a:r>
+              <a:t>5</a:t>
             </a:r>
           </a:p>
         </p:txBody>
@@ -10001,22 +8949,22 @@
         </p:nvSpPr>
         <p:spPr>
           <a:xfrm>
-            <a:off x="9555480" y="2194560"/>
-            <a:ext cx="1828800" cy="411480"/>
-          </a:xfrm>
-          <a:prstGeom prst="rect">
-            <a:avLst/>
-          </a:prstGeom>
-          <a:noFill/>
-        </p:spPr>
-        <p:txBody>
-          <a:bodyPr wrap="square">
-            <a:spAutoFit/>
-          </a:bodyPr>
-          <a:lstStyle/>
-          <a:p>
-            <a:pPr algn="l">
-              <a:defRPr sz="2600" b="1">
+            <a:off x="9829800" y="2011680"/>
+            <a:ext cx="1783080" cy="228600"/>
+          </a:xfrm>
+          <a:prstGeom prst="rect">
+            <a:avLst/>
+          </a:prstGeom>
+          <a:noFill/>
+        </p:spPr>
+        <p:txBody>
+          <a:bodyPr wrap="square">
+            <a:spAutoFit/>
+          </a:bodyPr>
+          <a:lstStyle/>
+          <a:p>
+            <a:pPr algn="l">
+              <a:defRPr sz="1000" b="1">
                 <a:solidFill>
                   <a:srgbClr val="1C1C1E"/>
                 </a:solidFill>
@@ -10024,7 +8972,7 @@
               </a:defRPr>
             </a:pPr>
             <a:r>
-              <a:t>3.8x</a:t>
+              <a:t>QUALITY LOGGED</a:t>
             </a:r>
           </a:p>
         </p:txBody>
@@ -10037,44 +8985,127 @@
         </p:nvSpPr>
         <p:spPr>
           <a:xfrm>
-            <a:off x="9555480" y="2651760"/>
-            <a:ext cx="1828800" cy="228600"/>
-          </a:xfrm>
-          <a:prstGeom prst="rect">
-            <a:avLst/>
-          </a:prstGeom>
-          <a:noFill/>
-        </p:spPr>
-        <p:txBody>
-          <a:bodyPr wrap="square">
-            <a:spAutoFit/>
-          </a:bodyPr>
-          <a:lstStyle/>
-          <a:p>
-            <a:pPr algn="l">
-              <a:defRPr sz="900" b="0">
-                <a:solidFill>
-                  <a:srgbClr val="767676"/>
-                </a:solidFill>
-                <a:latin typeface="Calibri"/>
-              </a:defRPr>
-            </a:pPr>
-            <a:r>
-              <a:t>On $2.7M total spend</a:t>
-            </a:r>
-          </a:p>
-        </p:txBody>
-      </p:sp>
-      <p:sp>
-        <p:nvSpPr>
-          <p:cNvPr id="25" name="TextBox 24"/>
-          <p:cNvSpPr txBox="1"/>
-          <p:nvPr/>
-        </p:nvSpPr>
-        <p:spPr>
-          <a:xfrm>
-            <a:off x="6858000" y="3200400"/>
-            <a:ext cx="4572000" cy="3200400"/>
+            <a:off x="9829800" y="2286000"/>
+            <a:ext cx="1783080" cy="914400"/>
+          </a:xfrm>
+          <a:prstGeom prst="rect">
+            <a:avLst/>
+          </a:prstGeom>
+          <a:noFill/>
+        </p:spPr>
+        <p:txBody>
+          <a:bodyPr wrap="square">
+            <a:spAutoFit/>
+          </a:bodyPr>
+          <a:lstStyle/>
+          <a:p>
+            <a:pPr algn="l">
+              <a:defRPr sz="1100" b="0">
+                <a:solidFill>
+                  <a:srgbClr val="3A3A3C"/>
+                </a:solidFill>
+                <a:latin typeface="Calibri"/>
+              </a:defRPr>
+            </a:pPr>
+            <a:r>
+              <a:t>Metrics tracked; weekly review with rollback trigger</a:t>
+            </a:r>
+          </a:p>
+        </p:txBody>
+      </p:sp>
+      <p:sp>
+        <p:nvSpPr>
+          <p:cNvPr id="25" name="Rounded Rectangle 24"/>
+          <p:cNvSpPr/>
+          <p:nvPr/>
+        </p:nvSpPr>
+        <p:spPr>
+          <a:xfrm>
+            <a:off x="731520" y="3794760"/>
+            <a:ext cx="5303520" cy="2743200"/>
+          </a:xfrm>
+          <a:prstGeom prst="roundRect">
+            <a:avLst>
+              <a:gd name="adj" fmla="val 4000"/>
+            </a:avLst>
+          </a:prstGeom>
+          <a:solidFill>
+            <a:srgbClr val="FFFFFF"/>
+          </a:solidFill>
+          <a:ln w="12700">
+            <a:solidFill>
+              <a:srgbClr val="E0E0DE"/>
+            </a:solidFill>
+          </a:ln>
+        </p:spPr>
+        <p:style>
+          <a:lnRef idx="1">
+            <a:schemeClr val="accent1"/>
+          </a:lnRef>
+          <a:fillRef idx="3">
+            <a:schemeClr val="accent1"/>
+          </a:fillRef>
+          <a:effectRef idx="2">
+            <a:schemeClr val="accent1"/>
+          </a:effectRef>
+          <a:fontRef idx="minor">
+            <a:schemeClr val="lt1"/>
+          </a:fontRef>
+        </p:style>
+        <p:txBody>
+          <a:bodyPr rtlCol="0" anchor="ctr"/>
+          <a:lstStyle/>
+          <a:p>
+            <a:pPr algn="ctr"/>
+          </a:p>
+        </p:txBody>
+      </p:sp>
+      <p:sp>
+        <p:nvSpPr>
+          <p:cNvPr id="26" name="TextBox 25"/>
+          <p:cNvSpPr txBox="1"/>
+          <p:nvPr/>
+        </p:nvSpPr>
+        <p:spPr>
+          <a:xfrm>
+            <a:off x="1005840" y="3931920"/>
+            <a:ext cx="4572000" cy="320040"/>
+          </a:xfrm>
+          <a:prstGeom prst="rect">
+            <a:avLst/>
+          </a:prstGeom>
+          <a:noFill/>
+        </p:spPr>
+        <p:txBody>
+          <a:bodyPr wrap="square">
+            <a:spAutoFit/>
+          </a:bodyPr>
+          <a:lstStyle/>
+          <a:p>
+            <a:pPr algn="l">
+              <a:defRPr sz="1400" b="1">
+                <a:solidFill>
+                  <a:srgbClr val="1C1C1E"/>
+                </a:solidFill>
+                <a:latin typeface="Calibri"/>
+              </a:defRPr>
+            </a:pPr>
+            <a:r>
+              <a:t>Pilot Scope</a:t>
+            </a:r>
+          </a:p>
+        </p:txBody>
+      </p:sp>
+      <p:sp>
+        <p:nvSpPr>
+          <p:cNvPr id="27" name="TextBox 26"/>
+          <p:cNvSpPr txBox="1"/>
+          <p:nvPr/>
+        </p:nvSpPr>
+        <p:spPr>
+          <a:xfrm>
+            <a:off x="1005840" y="4297680"/>
+            <a:ext cx="4754880" cy="2011680"/>
           </a:xfrm>
           <a:prstGeom prst="rect">
             <a:avLst/>
@@ -10089,23 +9120,23 @@
           <a:p>
             <a:pPr>
               <a:spcAft>
-                <a:spcPts val="650"/>
+                <a:spcPts val="1100"/>
               </a:spcAft>
-              <a:defRPr sz="1300" b="1">
-                <a:solidFill>
-                  <a:srgbClr val="1C1C1E"/>
-                </a:solidFill>
-                <a:latin typeface="Calibri"/>
-              </a:defRPr>
-            </a:pPr>
-            <a:r>
-              <a:t>Cost Reductions</a:t>
+              <a:defRPr sz="1100" b="0">
+                <a:solidFill>
+                  <a:srgbClr val="3A3A3C"/>
+                </a:solidFill>
+                <a:latin typeface="Calibri"/>
+              </a:defRPr>
+            </a:pPr>
+            <a:r>
+              <a:t>•  AXS drivetrain + Hammerhead device support only</a:t>
             </a:r>
           </a:p>
           <a:p>
             <a:pPr>
               <a:spcAft>
-                <a:spcPts val="550"/>
+                <a:spcPts val="1100"/>
               </a:spcAft>
               <a:defRPr sz="1100" b="0">
                 <a:solidFill>
@@ -10115,13 +9146,13 @@
               </a:defRPr>
             </a:pPr>
             <a:r>
-              <a:t>Support automation: $1.6M</a:t>
+              <a:t>•  Dealer inbox and high-volume web forms</a:t>
             </a:r>
           </a:p>
           <a:p>
             <a:pPr>
               <a:spcAft>
-                <a:spcPts val="550"/>
+                <a:spcPts val="1100"/>
               </a:spcAft>
               <a:defRPr sz="1100" b="0">
                 <a:solidFill>
@@ -10131,13 +9162,13 @@
               </a:defRPr>
             </a:pPr>
             <a:r>
-              <a:t>Demand forecasting: $1.6M</a:t>
+              <a:t>•  Compatibility and firmware issues first</a:t>
             </a:r>
           </a:p>
           <a:p>
             <a:pPr>
               <a:spcAft>
-                <a:spcPts val="550"/>
+                <a:spcPts val="1100"/>
               </a:spcAft>
               <a:defRPr sz="1100" b="0">
                 <a:solidFill>
@@ -10147,42 +9178,151 @@
               </a:defRPr>
             </a:pPr>
             <a:r>
-              <a:t>Documentation: $0.24M</a:t>
-            </a:r>
-          </a:p>
+              <a:t>•  Human approval on all customer-facing responses</a:t>
+            </a:r>
+          </a:p>
+        </p:txBody>
+      </p:sp>
+      <p:sp>
+        <p:nvSpPr>
+          <p:cNvPr id="28" name="Rounded Rectangle 27"/>
+          <p:cNvSpPr/>
+          <p:nvPr/>
+        </p:nvSpPr>
+        <p:spPr>
+          <a:xfrm>
+            <a:off x="6263640" y="3794760"/>
+            <a:ext cx="5303520" cy="2743200"/>
+          </a:xfrm>
+          <a:prstGeom prst="roundRect">
+            <a:avLst>
+              <a:gd name="adj" fmla="val 4000"/>
+            </a:avLst>
+          </a:prstGeom>
+          <a:solidFill>
+            <a:srgbClr val="FFFFFF"/>
+          </a:solidFill>
+          <a:ln w="12700">
+            <a:solidFill>
+              <a:srgbClr val="E0E0DE"/>
+            </a:solidFill>
+          </a:ln>
+        </p:spPr>
+        <p:style>
+          <a:lnRef idx="1">
+            <a:schemeClr val="accent1"/>
+          </a:lnRef>
+          <a:fillRef idx="3">
+            <a:schemeClr val="accent1"/>
+          </a:fillRef>
+          <a:effectRef idx="2">
+            <a:schemeClr val="accent1"/>
+          </a:effectRef>
+          <a:fontRef idx="minor">
+            <a:schemeClr val="lt1"/>
+          </a:fontRef>
+        </p:style>
+        <p:txBody>
+          <a:bodyPr rtlCol="0" anchor="ctr"/>
+          <a:lstStyle/>
+          <a:p>
+            <a:pPr algn="ctr"/>
+          </a:p>
+        </p:txBody>
+      </p:sp>
+      <p:sp>
+        <p:nvSpPr>
+          <p:cNvPr id="29" name="TextBox 28"/>
+          <p:cNvSpPr txBox="1"/>
+          <p:nvPr/>
+        </p:nvSpPr>
+        <p:spPr>
+          <a:xfrm>
+            <a:off x="6537960" y="3931920"/>
+            <a:ext cx="4572000" cy="320040"/>
+          </a:xfrm>
+          <a:prstGeom prst="rect">
+            <a:avLst/>
+          </a:prstGeom>
+          <a:noFill/>
+        </p:spPr>
+        <p:txBody>
+          <a:bodyPr wrap="square">
+            <a:spAutoFit/>
+          </a:bodyPr>
+          <a:lstStyle/>
+          <a:p>
+            <a:pPr algn="l">
+              <a:defRPr sz="1400" b="1">
+                <a:solidFill>
+                  <a:srgbClr val="1C1C1E"/>
+                </a:solidFill>
+                <a:latin typeface="Calibri"/>
+              </a:defRPr>
+            </a:pPr>
+            <a:r>
+              <a:t>Risk Controls</a:t>
+            </a:r>
+          </a:p>
+        </p:txBody>
+      </p:sp>
+      <p:sp>
+        <p:nvSpPr>
+          <p:cNvPr id="30" name="TextBox 29"/>
+          <p:cNvSpPr txBox="1"/>
+          <p:nvPr/>
+        </p:nvSpPr>
+        <p:spPr>
+          <a:xfrm>
+            <a:off x="6537960" y="4297680"/>
+            <a:ext cx="4754880" cy="2011680"/>
+          </a:xfrm>
+          <a:prstGeom prst="rect">
+            <a:avLst/>
+          </a:prstGeom>
+          <a:noFill/>
+        </p:spPr>
+        <p:txBody>
+          <a:bodyPr wrap="square">
+            <a:spAutoFit/>
+          </a:bodyPr>
+          <a:lstStyle/>
           <a:p>
             <a:pPr>
               <a:spcAft>
-                <a:spcPts val="300"/>
+                <a:spcPts val="1100"/>
               </a:spcAft>
-              <a:defRPr sz="600" b="0">
-                <a:solidFill>
-                  <a:srgbClr val="767676"/>
-                </a:solidFill>
-                <a:latin typeface="Calibri"/>
-              </a:defRPr>
-            </a:pPr>
+              <a:defRPr sz="1100" b="0">
+                <a:solidFill>
+                  <a:srgbClr val="3A3A3C"/>
+                </a:solidFill>
+                <a:latin typeface="Calibri"/>
+              </a:defRPr>
+            </a:pPr>
+            <a:r>
+              <a:t>•  Human approval for warranty and safety decisions</a:t>
+            </a:r>
           </a:p>
           <a:p>
             <a:pPr>
               <a:spcAft>
-                <a:spcPts val="650"/>
+                <a:spcPts val="1100"/>
               </a:spcAft>
-              <a:defRPr sz="1300" b="1">
-                <a:solidFill>
-                  <a:srgbClr val="1C1C1E"/>
-                </a:solidFill>
-                <a:latin typeface="Calibri"/>
-              </a:defRPr>
-            </a:pPr>
-            <a:r>
-              <a:t>Revenue Growth</a:t>
+              <a:defRPr sz="1100" b="0">
+                <a:solidFill>
+                  <a:srgbClr val="3A3A3C"/>
+                </a:solidFill>
+                <a:latin typeface="Calibri"/>
+              </a:defRPr>
+            </a:pPr>
+            <a:r>
+              <a:t>•  Answers sourced from approved docs only</a:t>
             </a:r>
           </a:p>
           <a:p>
             <a:pPr>
               <a:spcAft>
-                <a:spcPts val="550"/>
+                <a:spcPts val="1100"/>
               </a:spcAft>
               <a:defRPr sz="1100" b="0">
                 <a:solidFill>
@@ -10192,13 +9332,13 @@
               </a:defRPr>
             </a:pPr>
             <a:r>
-              <a:t>Customer retention: $3.0M</a:t>
+              <a:t>•  Weekly quality review with rollback trigger</a:t>
             </a:r>
           </a:p>
           <a:p>
             <a:pPr>
               <a:spcAft>
-                <a:spcPts val="550"/>
+                <a:spcPts val="1100"/>
               </a:spcAft>
               <a:defRPr sz="1100" b="0">
                 <a:solidFill>
@@ -10208,84 +9348,7 @@
               </a:defRPr>
             </a:pPr>
             <a:r>
-              <a:t>Package size increase: $4.0M</a:t>
-            </a:r>
-          </a:p>
-          <a:p>
-            <a:pPr>
-              <a:spcAft>
-                <a:spcPts val="550"/>
-              </a:spcAft>
-              <a:defRPr sz="1100" b="0">
-                <a:solidFill>
-                  <a:srgbClr val="3A3A3C"/>
-                </a:solidFill>
-                <a:latin typeface="Calibri"/>
-              </a:defRPr>
-            </a:pPr>
-            <a:r>
-              <a:t>Proposal win rate: $2.5M</a:t>
-            </a:r>
-          </a:p>
-          <a:p>
-            <a:pPr>
-              <a:spcAft>
-                <a:spcPts val="300"/>
-              </a:spcAft>
-              <a:defRPr sz="600" b="0">
-                <a:solidFill>
-                  <a:srgbClr val="767676"/>
-                </a:solidFill>
-                <a:latin typeface="Calibri"/>
-              </a:defRPr>
-            </a:pPr>
-          </a:p>
-          <a:p>
-            <a:pPr>
-              <a:spcAft>
-                <a:spcPts val="600"/>
-              </a:spcAft>
-              <a:defRPr sz="1200" b="1">
-                <a:solidFill>
-                  <a:srgbClr val="1C1C1E"/>
-                </a:solidFill>
-                <a:latin typeface="Calibri"/>
-              </a:defRPr>
-            </a:pPr>
-            <a:r>
-              <a:t>Gross value: $12.9M</a:t>
-            </a:r>
-          </a:p>
-          <a:p>
-            <a:pPr>
-              <a:spcAft>
-                <a:spcPts val="600"/>
-              </a:spcAft>
-              <a:defRPr sz="1200" b="0">
-                <a:solidFill>
-                  <a:srgbClr val="767676"/>
-                </a:solidFill>
-                <a:latin typeface="Calibri"/>
-              </a:defRPr>
-            </a:pPr>
-            <a:r>
-              <a:t>Total spend: ($2.7M)</a:t>
-            </a:r>
-          </a:p>
-          <a:p>
-            <a:pPr>
-              <a:spcAft>
-                <a:spcPts val="600"/>
-              </a:spcAft>
-              <a:defRPr sz="1200" b="1">
-                <a:solidFill>
-                  <a:srgbClr val="1C1C1E"/>
-                </a:solidFill>
-                <a:latin typeface="Calibri"/>
-              </a:defRPr>
-            </a:pPr>
-            <a:r>
-              <a:t>Net value: $10.2M</a:t>
+              <a:t>•  No automated warranty adjudication in Phase 1</a:t>
             </a:r>
           </a:p>
         </p:txBody>
@@ -10347,7 +9410,7 @@
               </a:defRPr>
             </a:pPr>
             <a:r>
-              <a:t>2031 VISION</a:t>
+              <a:t>MEASURING SUCCESS</a:t>
             </a:r>
           </a:p>
         </p:txBody>
@@ -10383,7 +9446,7 @@
               </a:defRPr>
             </a:pPr>
             <a:r>
-              <a:t>From Hardware Manufacturer to Performance Intelligence</a:t>
+              <a:t>Pilot Metrics and Year-1 Financial Impact</a:t>
             </a:r>
           </a:p>
         </p:txBody>
@@ -10439,22 +9502,58 @@
         </p:nvSpPr>
         <p:spPr>
           <a:xfrm>
-            <a:off x="731520" y="1280160"/>
-            <a:ext cx="10058400" cy="457200"/>
-          </a:xfrm>
-          <a:prstGeom prst="rect">
-            <a:avLst/>
-          </a:prstGeom>
-          <a:noFill/>
-        </p:spPr>
-        <p:txBody>
-          <a:bodyPr wrap="square">
-            <a:spAutoFit/>
-          </a:bodyPr>
-          <a:lstStyle/>
-          <a:p>
-            <a:pPr algn="l">
-              <a:defRPr sz="1400" b="0">
+            <a:off x="731520" y="1371600"/>
+            <a:ext cx="5486400" cy="320040"/>
+          </a:xfrm>
+          <a:prstGeom prst="rect">
+            <a:avLst/>
+          </a:prstGeom>
+          <a:noFill/>
+        </p:spPr>
+        <p:txBody>
+          <a:bodyPr wrap="square">
+            <a:spAutoFit/>
+          </a:bodyPr>
+          <a:lstStyle/>
+          <a:p>
+            <a:pPr algn="l">
+              <a:defRPr sz="1600" b="1">
+                <a:solidFill>
+                  <a:srgbClr val="1C1C1E"/>
+                </a:solidFill>
+                <a:latin typeface="Calibri"/>
+              </a:defRPr>
+            </a:pPr>
+            <a:r>
+              <a:t>90-Day Pilot Targets</a:t>
+            </a:r>
+          </a:p>
+        </p:txBody>
+      </p:sp>
+      <p:sp>
+        <p:nvSpPr>
+          <p:cNvPr id="6" name="TextBox 5"/>
+          <p:cNvSpPr txBox="1"/>
+          <p:nvPr/>
+        </p:nvSpPr>
+        <p:spPr>
+          <a:xfrm>
+            <a:off x="731520" y="1828800"/>
+            <a:ext cx="3657600" cy="320040"/>
+          </a:xfrm>
+          <a:prstGeom prst="rect">
+            <a:avLst/>
+          </a:prstGeom>
+          <a:noFill/>
+        </p:spPr>
+        <p:txBody>
+          <a:bodyPr wrap="square">
+            <a:spAutoFit/>
+          </a:bodyPr>
+          <a:lstStyle/>
+          <a:p>
+            <a:pPr algn="l">
+              <a:defRPr sz="1200" b="0">
                 <a:solidFill>
                   <a:srgbClr val="3A3A3C"/>
                 </a:solidFill>
@@ -10462,21 +9561,381 @@
               </a:defRPr>
             </a:pPr>
             <a:r>
-              <a:t>SRAM's full product stack creates a data moat no competitor can replicate. The rider with SRAM drivetrain, RockShox suspension, Quarq power, and Hammerhead computer gets a unified intelligence layer impossible with mixed components.</a:t>
-            </a:r>
-          </a:p>
-        </p:txBody>
-      </p:sp>
-      <p:sp>
-        <p:nvSpPr>
-          <p:cNvPr id="6" name="Rounded Rectangle 5"/>
+              <a:t>Time-to-first-response</a:t>
+            </a:r>
+          </a:p>
+        </p:txBody>
+      </p:sp>
+      <p:sp>
+        <p:nvSpPr>
+          <p:cNvPr id="7" name="TextBox 6"/>
+          <p:cNvSpPr txBox="1"/>
+          <p:nvPr/>
+        </p:nvSpPr>
+        <p:spPr>
+          <a:xfrm>
+            <a:off x="4572000" y="1828800"/>
+            <a:ext cx="1828800" cy="320040"/>
+          </a:xfrm>
+          <a:prstGeom prst="rect">
+            <a:avLst/>
+          </a:prstGeom>
+          <a:noFill/>
+        </p:spPr>
+        <p:txBody>
+          <a:bodyPr wrap="square">
+            <a:spAutoFit/>
+          </a:bodyPr>
+          <a:lstStyle/>
+          <a:p>
+            <a:pPr algn="l">
+              <a:defRPr sz="1200" b="1">
+                <a:solidFill>
+                  <a:srgbClr val="1C1C1E"/>
+                </a:solidFill>
+                <a:latin typeface="Calibri"/>
+              </a:defRPr>
+            </a:pPr>
+            <a:r>
+              <a:t>40% reduction</a:t>
+            </a:r>
+          </a:p>
+        </p:txBody>
+      </p:sp>
+      <p:sp>
+        <p:nvSpPr>
+          <p:cNvPr id="8" name="TextBox 7"/>
+          <p:cNvSpPr txBox="1"/>
+          <p:nvPr/>
+        </p:nvSpPr>
+        <p:spPr>
+          <a:xfrm>
+            <a:off x="731520" y="2240280"/>
+            <a:ext cx="3657600" cy="320040"/>
+          </a:xfrm>
+          <a:prstGeom prst="rect">
+            <a:avLst/>
+          </a:prstGeom>
+          <a:noFill/>
+        </p:spPr>
+        <p:txBody>
+          <a:bodyPr wrap="square">
+            <a:spAutoFit/>
+          </a:bodyPr>
+          <a:lstStyle/>
+          <a:p>
+            <a:pPr algn="l">
+              <a:defRPr sz="1200" b="0">
+                <a:solidFill>
+                  <a:srgbClr val="3A3A3C"/>
+                </a:solidFill>
+                <a:latin typeface="Calibri"/>
+              </a:defRPr>
+            </a:pPr>
+            <a:r>
+              <a:t>Tickets without escalation</a:t>
+            </a:r>
+          </a:p>
+        </p:txBody>
+      </p:sp>
+      <p:sp>
+        <p:nvSpPr>
+          <p:cNvPr id="9" name="TextBox 8"/>
+          <p:cNvSpPr txBox="1"/>
+          <p:nvPr/>
+        </p:nvSpPr>
+        <p:spPr>
+          <a:xfrm>
+            <a:off x="4572000" y="2240280"/>
+            <a:ext cx="1828800" cy="320040"/>
+          </a:xfrm>
+          <a:prstGeom prst="rect">
+            <a:avLst/>
+          </a:prstGeom>
+          <a:noFill/>
+        </p:spPr>
+        <p:txBody>
+          <a:bodyPr wrap="square">
+            <a:spAutoFit/>
+          </a:bodyPr>
+          <a:lstStyle/>
+          <a:p>
+            <a:pPr algn="l">
+              <a:defRPr sz="1200" b="1">
+                <a:solidFill>
+                  <a:srgbClr val="1C1C1E"/>
+                </a:solidFill>
+                <a:latin typeface="Calibri"/>
+              </a:defRPr>
+            </a:pPr>
+            <a:r>
+              <a:t>15% improvement</a:t>
+            </a:r>
+          </a:p>
+        </p:txBody>
+      </p:sp>
+      <p:sp>
+        <p:nvSpPr>
+          <p:cNvPr id="10" name="TextBox 9"/>
+          <p:cNvSpPr txBox="1"/>
+          <p:nvPr/>
+        </p:nvSpPr>
+        <p:spPr>
+          <a:xfrm>
+            <a:off x="731520" y="2651760"/>
+            <a:ext cx="3657600" cy="320040"/>
+          </a:xfrm>
+          <a:prstGeom prst="rect">
+            <a:avLst/>
+          </a:prstGeom>
+          <a:noFill/>
+        </p:spPr>
+        <p:txBody>
+          <a:bodyPr wrap="square">
+            <a:spAutoFit/>
+          </a:bodyPr>
+          <a:lstStyle/>
+          <a:p>
+            <a:pPr algn="l">
+              <a:defRPr sz="1200" b="0">
+                <a:solidFill>
+                  <a:srgbClr val="3A3A3C"/>
+                </a:solidFill>
+                <a:latin typeface="Calibri"/>
+              </a:defRPr>
+            </a:pPr>
+            <a:r>
+              <a:t>Agent productivity</a:t>
+            </a:r>
+          </a:p>
+        </p:txBody>
+      </p:sp>
+      <p:sp>
+        <p:nvSpPr>
+          <p:cNvPr id="11" name="TextBox 10"/>
+          <p:cNvSpPr txBox="1"/>
+          <p:nvPr/>
+        </p:nvSpPr>
+        <p:spPr>
+          <a:xfrm>
+            <a:off x="4572000" y="2651760"/>
+            <a:ext cx="1828800" cy="320040"/>
+          </a:xfrm>
+          <a:prstGeom prst="rect">
+            <a:avLst/>
+          </a:prstGeom>
+          <a:noFill/>
+        </p:spPr>
+        <p:txBody>
+          <a:bodyPr wrap="square">
+            <a:spAutoFit/>
+          </a:bodyPr>
+          <a:lstStyle/>
+          <a:p>
+            <a:pPr algn="l">
+              <a:defRPr sz="1200" b="1">
+                <a:solidFill>
+                  <a:srgbClr val="1C1C1E"/>
+                </a:solidFill>
+                <a:latin typeface="Calibri"/>
+              </a:defRPr>
+            </a:pPr>
+            <a:r>
+              <a:t>25% increase</a:t>
+            </a:r>
+          </a:p>
+        </p:txBody>
+      </p:sp>
+      <p:sp>
+        <p:nvSpPr>
+          <p:cNvPr id="12" name="TextBox 11"/>
+          <p:cNvSpPr txBox="1"/>
+          <p:nvPr/>
+        </p:nvSpPr>
+        <p:spPr>
+          <a:xfrm>
+            <a:off x="731520" y="3063240"/>
+            <a:ext cx="3657600" cy="320040"/>
+          </a:xfrm>
+          <a:prstGeom prst="rect">
+            <a:avLst/>
+          </a:prstGeom>
+          <a:noFill/>
+        </p:spPr>
+        <p:txBody>
+          <a:bodyPr wrap="square">
+            <a:spAutoFit/>
+          </a:bodyPr>
+          <a:lstStyle/>
+          <a:p>
+            <a:pPr algn="l">
+              <a:defRPr sz="1200" b="0">
+                <a:solidFill>
+                  <a:srgbClr val="3A3A3C"/>
+                </a:solidFill>
+                <a:latin typeface="Calibri"/>
+              </a:defRPr>
+            </a:pPr>
+            <a:r>
+              <a:t>AI draft acceptance rate</a:t>
+            </a:r>
+          </a:p>
+        </p:txBody>
+      </p:sp>
+      <p:sp>
+        <p:nvSpPr>
+          <p:cNvPr id="13" name="TextBox 12"/>
+          <p:cNvSpPr txBox="1"/>
+          <p:nvPr/>
+        </p:nvSpPr>
+        <p:spPr>
+          <a:xfrm>
+            <a:off x="4572000" y="3063240"/>
+            <a:ext cx="1828800" cy="320040"/>
+          </a:xfrm>
+          <a:prstGeom prst="rect">
+            <a:avLst/>
+          </a:prstGeom>
+          <a:noFill/>
+        </p:spPr>
+        <p:txBody>
+          <a:bodyPr wrap="square">
+            <a:spAutoFit/>
+          </a:bodyPr>
+          <a:lstStyle/>
+          <a:p>
+            <a:pPr algn="l">
+              <a:defRPr sz="1200" b="1">
+                <a:solidFill>
+                  <a:srgbClr val="1C1C1E"/>
+                </a:solidFill>
+                <a:latin typeface="Calibri"/>
+              </a:defRPr>
+            </a:pPr>
+            <a:r>
+              <a:t>Above 70%</a:t>
+            </a:r>
+          </a:p>
+        </p:txBody>
+      </p:sp>
+      <p:sp>
+        <p:nvSpPr>
+          <p:cNvPr id="14" name="TextBox 13"/>
+          <p:cNvSpPr txBox="1"/>
+          <p:nvPr/>
+        </p:nvSpPr>
+        <p:spPr>
+          <a:xfrm>
+            <a:off x="731520" y="3474720"/>
+            <a:ext cx="3657600" cy="320040"/>
+          </a:xfrm>
+          <a:prstGeom prst="rect">
+            <a:avLst/>
+          </a:prstGeom>
+          <a:noFill/>
+        </p:spPr>
+        <p:txBody>
+          <a:bodyPr wrap="square">
+            <a:spAutoFit/>
+          </a:bodyPr>
+          <a:lstStyle/>
+          <a:p>
+            <a:pPr algn="l">
+              <a:defRPr sz="1200" b="0">
+                <a:solidFill>
+                  <a:srgbClr val="3A3A3C"/>
+                </a:solidFill>
+                <a:latin typeface="Calibri"/>
+              </a:defRPr>
+            </a:pPr>
+            <a:r>
+              <a:t>Customer satisfaction</a:t>
+            </a:r>
+          </a:p>
+        </p:txBody>
+      </p:sp>
+      <p:sp>
+        <p:nvSpPr>
+          <p:cNvPr id="15" name="TextBox 14"/>
+          <p:cNvSpPr txBox="1"/>
+          <p:nvPr/>
+        </p:nvSpPr>
+        <p:spPr>
+          <a:xfrm>
+            <a:off x="4572000" y="3474720"/>
+            <a:ext cx="1828800" cy="320040"/>
+          </a:xfrm>
+          <a:prstGeom prst="rect">
+            <a:avLst/>
+          </a:prstGeom>
+          <a:noFill/>
+        </p:spPr>
+        <p:txBody>
+          <a:bodyPr wrap="square">
+            <a:spAutoFit/>
+          </a:bodyPr>
+          <a:lstStyle/>
+          <a:p>
+            <a:pPr algn="l">
+              <a:defRPr sz="1200" b="1">
+                <a:solidFill>
+                  <a:srgbClr val="1C1C1E"/>
+                </a:solidFill>
+                <a:latin typeface="Calibri"/>
+              </a:defRPr>
+            </a:pPr>
+            <a:r>
+              <a:t>No decline</a:t>
+            </a:r>
+          </a:p>
+        </p:txBody>
+      </p:sp>
+      <p:sp>
+        <p:nvSpPr>
+          <p:cNvPr id="16" name="TextBox 15"/>
+          <p:cNvSpPr txBox="1"/>
+          <p:nvPr/>
+        </p:nvSpPr>
+        <p:spPr>
+          <a:xfrm>
+            <a:off x="6858000" y="1371600"/>
+            <a:ext cx="4572000" cy="320040"/>
+          </a:xfrm>
+          <a:prstGeom prst="rect">
+            <a:avLst/>
+          </a:prstGeom>
+          <a:noFill/>
+        </p:spPr>
+        <p:txBody>
+          <a:bodyPr wrap="square">
+            <a:spAutoFit/>
+          </a:bodyPr>
+          <a:lstStyle/>
+          <a:p>
+            <a:pPr algn="l">
+              <a:defRPr sz="1600" b="1">
+                <a:solidFill>
+                  <a:srgbClr val="1C1C1E"/>
+                </a:solidFill>
+                <a:latin typeface="Calibri"/>
+              </a:defRPr>
+            </a:pPr>
+            <a:r>
+              <a:t>Year-1 Financial Impact (All Phases)</a:t>
+            </a:r>
+          </a:p>
+        </p:txBody>
+      </p:sp>
+      <p:sp>
+        <p:nvSpPr>
+          <p:cNvPr id="17" name="Rounded Rectangle 16"/>
           <p:cNvSpPr/>
           <p:nvPr/>
         </p:nvSpPr>
         <p:spPr>
           <a:xfrm>
-            <a:off x="731520" y="2011680"/>
-            <a:ext cx="5166360" cy="1691640"/>
+            <a:off x="6858000" y="1828800"/>
+            <a:ext cx="2286000" cy="1188720"/>
           </a:xfrm>
           <a:prstGeom prst="roundRect">
             <a:avLst>
@@ -10516,28 +9975,64 @@
       </p:sp>
       <p:sp>
         <p:nvSpPr>
-          <p:cNvPr id="7" name="TextBox 6"/>
-          <p:cNvSpPr txBox="1"/>
-          <p:nvPr/>
-        </p:nvSpPr>
-        <p:spPr>
-          <a:xfrm>
-            <a:off x="1005840" y="2148840"/>
-            <a:ext cx="4617720" cy="320040"/>
-          </a:xfrm>
-          <a:prstGeom prst="rect">
-            <a:avLst/>
-          </a:prstGeom>
-          <a:noFill/>
-        </p:spPr>
-        <p:txBody>
-          <a:bodyPr wrap="square">
-            <a:spAutoFit/>
-          </a:bodyPr>
-          <a:lstStyle/>
-          <a:p>
-            <a:pPr algn="l">
-              <a:defRPr sz="1500" b="1">
+          <p:cNvPr id="18" name="TextBox 17"/>
+          <p:cNvSpPr txBox="1"/>
+          <p:nvPr/>
+        </p:nvSpPr>
+        <p:spPr>
+          <a:xfrm>
+            <a:off x="7086600" y="1965960"/>
+            <a:ext cx="1828800" cy="228600"/>
+          </a:xfrm>
+          <a:prstGeom prst="rect">
+            <a:avLst/>
+          </a:prstGeom>
+          <a:noFill/>
+        </p:spPr>
+        <p:txBody>
+          <a:bodyPr wrap="square">
+            <a:spAutoFit/>
+          </a:bodyPr>
+          <a:lstStyle/>
+          <a:p>
+            <a:pPr algn="l">
+              <a:defRPr sz="1000" b="0">
+                <a:solidFill>
+                  <a:srgbClr val="767676"/>
+                </a:solidFill>
+                <a:latin typeface="Calibri"/>
+              </a:defRPr>
+            </a:pPr>
+            <a:r>
+              <a:t>NET YEAR-1 VALUE</a:t>
+            </a:r>
+          </a:p>
+        </p:txBody>
+      </p:sp>
+      <p:sp>
+        <p:nvSpPr>
+          <p:cNvPr id="19" name="TextBox 18"/>
+          <p:cNvSpPr txBox="1"/>
+          <p:nvPr/>
+        </p:nvSpPr>
+        <p:spPr>
+          <a:xfrm>
+            <a:off x="7086600" y="2194560"/>
+            <a:ext cx="1828800" cy="411480"/>
+          </a:xfrm>
+          <a:prstGeom prst="rect">
+            <a:avLst/>
+          </a:prstGeom>
+          <a:noFill/>
+        </p:spPr>
+        <p:txBody>
+          <a:bodyPr wrap="square">
+            <a:spAutoFit/>
+          </a:bodyPr>
+          <a:lstStyle/>
+          <a:p>
+            <a:pPr algn="l">
+              <a:defRPr sz="2600" b="1">
                 <a:solidFill>
                   <a:srgbClr val="1C1C1E"/>
                 </a:solidFill>
@@ -10545,57 +10040,57 @@
               </a:defRPr>
             </a:pPr>
             <a:r>
-              <a:t>AXS Intelligence Platform</a:t>
-            </a:r>
-          </a:p>
-        </p:txBody>
-      </p:sp>
-      <p:sp>
-        <p:nvSpPr>
-          <p:cNvPr id="8" name="TextBox 7"/>
-          <p:cNvSpPr txBox="1"/>
-          <p:nvPr/>
-        </p:nvSpPr>
-        <p:spPr>
-          <a:xfrm>
-            <a:off x="1005840" y="2514600"/>
-            <a:ext cx="4617720" cy="1005840"/>
-          </a:xfrm>
-          <a:prstGeom prst="rect">
-            <a:avLst/>
-          </a:prstGeom>
-          <a:noFill/>
-        </p:spPr>
-        <p:txBody>
-          <a:bodyPr wrap="square">
-            <a:spAutoFit/>
-          </a:bodyPr>
-          <a:lstStyle/>
-          <a:p>
-            <a:pPr algn="l">
-              <a:defRPr sz="1200" b="0">
-                <a:solidFill>
-                  <a:srgbClr val="3A3A3C"/>
-                </a:solidFill>
-                <a:latin typeface="Calibri"/>
-              </a:defRPr>
-            </a:pPr>
-            <a:r>
-              <a:t>Unified rider dashboard showing power, gearing, suspension, and heart rate in one view. No competitor has the product breadth to match this.</a:t>
-            </a:r>
-          </a:p>
-        </p:txBody>
-      </p:sp>
-      <p:sp>
-        <p:nvSpPr>
-          <p:cNvPr id="9" name="Rounded Rectangle 8"/>
+              <a:t>$10.2M</a:t>
+            </a:r>
+          </a:p>
+        </p:txBody>
+      </p:sp>
+      <p:sp>
+        <p:nvSpPr>
+          <p:cNvPr id="20" name="TextBox 19"/>
+          <p:cNvSpPr txBox="1"/>
+          <p:nvPr/>
+        </p:nvSpPr>
+        <p:spPr>
+          <a:xfrm>
+            <a:off x="7086600" y="2651760"/>
+            <a:ext cx="1828800" cy="228600"/>
+          </a:xfrm>
+          <a:prstGeom prst="rect">
+            <a:avLst/>
+          </a:prstGeom>
+          <a:noFill/>
+        </p:spPr>
+        <p:txBody>
+          <a:bodyPr wrap="square">
+            <a:spAutoFit/>
+          </a:bodyPr>
+          <a:lstStyle/>
+          <a:p>
+            <a:pPr algn="l">
+              <a:defRPr sz="900" b="0">
+                <a:solidFill>
+                  <a:srgbClr val="767676"/>
+                </a:solidFill>
+                <a:latin typeface="Calibri"/>
+              </a:defRPr>
+            </a:pPr>
+            <a:r>
+              <a:t>Expected case</a:t>
+            </a:r>
+          </a:p>
+        </p:txBody>
+      </p:sp>
+      <p:sp>
+        <p:nvSpPr>
+          <p:cNvPr id="21" name="Rounded Rectangle 20"/>
           <p:cNvSpPr/>
           <p:nvPr/>
         </p:nvSpPr>
         <p:spPr>
           <a:xfrm>
-            <a:off x="6126480" y="2011680"/>
-            <a:ext cx="5166360" cy="1691640"/>
+            <a:off x="9326880" y="1828800"/>
+            <a:ext cx="2286000" cy="1188720"/>
           </a:xfrm>
           <a:prstGeom prst="roundRect">
             <a:avLst>
@@ -10635,28 +10130,64 @@
       </p:sp>
       <p:sp>
         <p:nvSpPr>
-          <p:cNvPr id="10" name="TextBox 9"/>
-          <p:cNvSpPr txBox="1"/>
-          <p:nvPr/>
-        </p:nvSpPr>
-        <p:spPr>
-          <a:xfrm>
-            <a:off x="6400800" y="2148840"/>
-            <a:ext cx="4617720" cy="320040"/>
-          </a:xfrm>
-          <a:prstGeom prst="rect">
-            <a:avLst/>
-          </a:prstGeom>
-          <a:noFill/>
-        </p:spPr>
-        <p:txBody>
-          <a:bodyPr wrap="square">
-            <a:spAutoFit/>
-          </a:bodyPr>
-          <a:lstStyle/>
-          <a:p>
-            <a:pPr algn="l">
-              <a:defRPr sz="1500" b="1">
+          <p:cNvPr id="22" name="TextBox 21"/>
+          <p:cNvSpPr txBox="1"/>
+          <p:nvPr/>
+        </p:nvSpPr>
+        <p:spPr>
+          <a:xfrm>
+            <a:off x="9555480" y="1965960"/>
+            <a:ext cx="1828800" cy="228600"/>
+          </a:xfrm>
+          <a:prstGeom prst="rect">
+            <a:avLst/>
+          </a:prstGeom>
+          <a:noFill/>
+        </p:spPr>
+        <p:txBody>
+          <a:bodyPr wrap="square">
+            <a:spAutoFit/>
+          </a:bodyPr>
+          <a:lstStyle/>
+          <a:p>
+            <a:pPr algn="l">
+              <a:defRPr sz="1000" b="0">
+                <a:solidFill>
+                  <a:srgbClr val="767676"/>
+                </a:solidFill>
+                <a:latin typeface="Calibri"/>
+              </a:defRPr>
+            </a:pPr>
+            <a:r>
+              <a:t>RETURN ON SPEND</a:t>
+            </a:r>
+          </a:p>
+        </p:txBody>
+      </p:sp>
+      <p:sp>
+        <p:nvSpPr>
+          <p:cNvPr id="23" name="TextBox 22"/>
+          <p:cNvSpPr txBox="1"/>
+          <p:nvPr/>
+        </p:nvSpPr>
+        <p:spPr>
+          <a:xfrm>
+            <a:off x="9555480" y="2194560"/>
+            <a:ext cx="1828800" cy="411480"/>
+          </a:xfrm>
+          <a:prstGeom prst="rect">
+            <a:avLst/>
+          </a:prstGeom>
+          <a:noFill/>
+        </p:spPr>
+        <p:txBody>
+          <a:bodyPr wrap="square">
+            <a:spAutoFit/>
+          </a:bodyPr>
+          <a:lstStyle/>
+          <a:p>
+            <a:pPr algn="l">
+              <a:defRPr sz="2600" b="1">
                 <a:solidFill>
                   <a:srgbClr val="1C1C1E"/>
                 </a:solidFill>
@@ -10664,118 +10195,260 @@
               </a:defRPr>
             </a:pPr>
             <a:r>
-              <a:t>Predictive Maintenance</a:t>
-            </a:r>
-          </a:p>
-        </p:txBody>
-      </p:sp>
-      <p:sp>
-        <p:nvSpPr>
-          <p:cNvPr id="11" name="TextBox 10"/>
-          <p:cNvSpPr txBox="1"/>
-          <p:nvPr/>
-        </p:nvSpPr>
-        <p:spPr>
-          <a:xfrm>
-            <a:off x="6400800" y="2514600"/>
-            <a:ext cx="4617720" cy="1005840"/>
-          </a:xfrm>
-          <a:prstGeom prst="rect">
-            <a:avLst/>
-          </a:prstGeom>
-          <a:noFill/>
-        </p:spPr>
-        <p:txBody>
-          <a:bodyPr wrap="square">
-            <a:spAutoFit/>
-          </a:bodyPr>
-          <a:lstStyle/>
-          <a:p>
-            <a:pPr algn="l">
+              <a:t>3.8x</a:t>
+            </a:r>
+          </a:p>
+        </p:txBody>
+      </p:sp>
+      <p:sp>
+        <p:nvSpPr>
+          <p:cNvPr id="24" name="TextBox 23"/>
+          <p:cNvSpPr txBox="1"/>
+          <p:nvPr/>
+        </p:nvSpPr>
+        <p:spPr>
+          <a:xfrm>
+            <a:off x="9555480" y="2651760"/>
+            <a:ext cx="1828800" cy="228600"/>
+          </a:xfrm>
+          <a:prstGeom prst="rect">
+            <a:avLst/>
+          </a:prstGeom>
+          <a:noFill/>
+        </p:spPr>
+        <p:txBody>
+          <a:bodyPr wrap="square">
+            <a:spAutoFit/>
+          </a:bodyPr>
+          <a:lstStyle/>
+          <a:p>
+            <a:pPr algn="l">
+              <a:defRPr sz="900" b="0">
+                <a:solidFill>
+                  <a:srgbClr val="767676"/>
+                </a:solidFill>
+                <a:latin typeface="Calibri"/>
+              </a:defRPr>
+            </a:pPr>
+            <a:r>
+              <a:t>On $2.7M total spend</a:t>
+            </a:r>
+          </a:p>
+        </p:txBody>
+      </p:sp>
+      <p:sp>
+        <p:nvSpPr>
+          <p:cNvPr id="25" name="TextBox 24"/>
+          <p:cNvSpPr txBox="1"/>
+          <p:nvPr/>
+        </p:nvSpPr>
+        <p:spPr>
+          <a:xfrm>
+            <a:off x="6858000" y="3200400"/>
+            <a:ext cx="4572000" cy="3200400"/>
+          </a:xfrm>
+          <a:prstGeom prst="rect">
+            <a:avLst/>
+          </a:prstGeom>
+          <a:noFill/>
+        </p:spPr>
+        <p:txBody>
+          <a:bodyPr wrap="square">
+            <a:spAutoFit/>
+          </a:bodyPr>
+          <a:lstStyle/>
+          <a:p>
+            <a:pPr>
+              <a:spcAft>
+                <a:spcPts val="650"/>
+              </a:spcAft>
+              <a:defRPr sz="1300" b="1">
+                <a:solidFill>
+                  <a:srgbClr val="1C1C1E"/>
+                </a:solidFill>
+                <a:latin typeface="Calibri"/>
+              </a:defRPr>
+            </a:pPr>
+            <a:r>
+              <a:t>Cost Reductions</a:t>
+            </a:r>
+          </a:p>
+          <a:p>
+            <a:pPr>
+              <a:spcAft>
+                <a:spcPts val="550"/>
+              </a:spcAft>
+              <a:defRPr sz="1100" b="0">
+                <a:solidFill>
+                  <a:srgbClr val="3A3A3C"/>
+                </a:solidFill>
+                <a:latin typeface="Calibri"/>
+              </a:defRPr>
+            </a:pPr>
+            <a:r>
+              <a:t>Support automation: $1.6M</a:t>
+            </a:r>
+          </a:p>
+          <a:p>
+            <a:pPr>
+              <a:spcAft>
+                <a:spcPts val="550"/>
+              </a:spcAft>
+              <a:defRPr sz="1100" b="0">
+                <a:solidFill>
+                  <a:srgbClr val="3A3A3C"/>
+                </a:solidFill>
+                <a:latin typeface="Calibri"/>
+              </a:defRPr>
+            </a:pPr>
+            <a:r>
+              <a:t>Demand forecasting: $1.6M</a:t>
+            </a:r>
+          </a:p>
+          <a:p>
+            <a:pPr>
+              <a:spcAft>
+                <a:spcPts val="550"/>
+              </a:spcAft>
+              <a:defRPr sz="1100" b="0">
+                <a:solidFill>
+                  <a:srgbClr val="3A3A3C"/>
+                </a:solidFill>
+                <a:latin typeface="Calibri"/>
+              </a:defRPr>
+            </a:pPr>
+            <a:r>
+              <a:t>Documentation: $0.24M</a:t>
+            </a:r>
+          </a:p>
+          <a:p>
+            <a:pPr>
+              <a:spcAft>
+                <a:spcPts val="300"/>
+              </a:spcAft>
+              <a:defRPr sz="600" b="0">
+                <a:solidFill>
+                  <a:srgbClr val="767676"/>
+                </a:solidFill>
+                <a:latin typeface="Calibri"/>
+              </a:defRPr>
+            </a:pPr>
+          </a:p>
+          <a:p>
+            <a:pPr>
+              <a:spcAft>
+                <a:spcPts val="650"/>
+              </a:spcAft>
+              <a:defRPr sz="1300" b="1">
+                <a:solidFill>
+                  <a:srgbClr val="1C1C1E"/>
+                </a:solidFill>
+                <a:latin typeface="Calibri"/>
+              </a:defRPr>
+            </a:pPr>
+            <a:r>
+              <a:t>Revenue Growth</a:t>
+            </a:r>
+          </a:p>
+          <a:p>
+            <a:pPr>
+              <a:spcAft>
+                <a:spcPts val="550"/>
+              </a:spcAft>
+              <a:defRPr sz="1100" b="0">
+                <a:solidFill>
+                  <a:srgbClr val="3A3A3C"/>
+                </a:solidFill>
+                <a:latin typeface="Calibri"/>
+              </a:defRPr>
+            </a:pPr>
+            <a:r>
+              <a:t>Customer retention: $3.0M</a:t>
+            </a:r>
+          </a:p>
+          <a:p>
+            <a:pPr>
+              <a:spcAft>
+                <a:spcPts val="550"/>
+              </a:spcAft>
+              <a:defRPr sz="1100" b="0">
+                <a:solidFill>
+                  <a:srgbClr val="3A3A3C"/>
+                </a:solidFill>
+                <a:latin typeface="Calibri"/>
+              </a:defRPr>
+            </a:pPr>
+            <a:r>
+              <a:t>Package size increase: $4.0M</a:t>
+            </a:r>
+          </a:p>
+          <a:p>
+            <a:pPr>
+              <a:spcAft>
+                <a:spcPts val="550"/>
+              </a:spcAft>
+              <a:defRPr sz="1100" b="0">
+                <a:solidFill>
+                  <a:srgbClr val="3A3A3C"/>
+                </a:solidFill>
+                <a:latin typeface="Calibri"/>
+              </a:defRPr>
+            </a:pPr>
+            <a:r>
+              <a:t>Proposal win rate: $2.5M</a:t>
+            </a:r>
+          </a:p>
+          <a:p>
+            <a:pPr>
+              <a:spcAft>
+                <a:spcPts val="300"/>
+              </a:spcAft>
+              <a:defRPr sz="600" b="0">
+                <a:solidFill>
+                  <a:srgbClr val="767676"/>
+                </a:solidFill>
+                <a:latin typeface="Calibri"/>
+              </a:defRPr>
+            </a:pPr>
+          </a:p>
+          <a:p>
+            <a:pPr>
+              <a:spcAft>
+                <a:spcPts val="600"/>
+              </a:spcAft>
+              <a:defRPr sz="1200" b="1">
+                <a:solidFill>
+                  <a:srgbClr val="1C1C1E"/>
+                </a:solidFill>
+                <a:latin typeface="Calibri"/>
+              </a:defRPr>
+            </a:pPr>
+            <a:r>
+              <a:t>Gross value: $12.9M</a:t>
+            </a:r>
+          </a:p>
+          <a:p>
+            <a:pPr>
+              <a:spcAft>
+                <a:spcPts val="600"/>
+              </a:spcAft>
               <a:defRPr sz="1200" b="0">
                 <a:solidFill>
-                  <a:srgbClr val="3A3A3C"/>
-                </a:solidFill>
-                <a:latin typeface="Calibri"/>
-              </a:defRPr>
-            </a:pPr>
-            <a:r>
-              <a:t>Connected components predict chain, cassette, and brake pad replacement before failure. Installed base becomes a recurring revenue platform.</a:t>
-            </a:r>
-          </a:p>
-        </p:txBody>
-      </p:sp>
-      <p:sp>
-        <p:nvSpPr>
-          <p:cNvPr id="12" name="Rounded Rectangle 11"/>
-          <p:cNvSpPr/>
-          <p:nvPr/>
-        </p:nvSpPr>
-        <p:spPr>
-          <a:xfrm>
-            <a:off x="731520" y="3931920"/>
-            <a:ext cx="5166360" cy="1691640"/>
-          </a:xfrm>
-          <a:prstGeom prst="roundRect">
-            <a:avLst>
-              <a:gd name="adj" fmla="val 4000"/>
-            </a:avLst>
-          </a:prstGeom>
-          <a:solidFill>
-            <a:srgbClr val="FFFFFF"/>
-          </a:solidFill>
-          <a:ln w="12700">
-            <a:solidFill>
-              <a:srgbClr val="E0E0DE"/>
-            </a:solidFill>
-          </a:ln>
-        </p:spPr>
-        <p:style>
-          <a:lnRef idx="1">
-            <a:schemeClr val="accent1"/>
-          </a:lnRef>
-          <a:fillRef idx="3">
-            <a:schemeClr val="accent1"/>
-          </a:fillRef>
-          <a:effectRef idx="2">
-            <a:schemeClr val="accent1"/>
-          </a:effectRef>
-          <a:fontRef idx="minor">
-            <a:schemeClr val="lt1"/>
-          </a:fontRef>
-        </p:style>
-        <p:txBody>
-          <a:bodyPr rtlCol="0" anchor="ctr"/>
-          <a:lstStyle/>
-          <a:p>
-            <a:pPr algn="ctr"/>
-          </a:p>
-        </p:txBody>
-      </p:sp>
-      <p:sp>
-        <p:nvSpPr>
-          <p:cNvPr id="13" name="TextBox 12"/>
-          <p:cNvSpPr txBox="1"/>
-          <p:nvPr/>
-        </p:nvSpPr>
-        <p:spPr>
-          <a:xfrm>
-            <a:off x="1005840" y="4069080"/>
-            <a:ext cx="4617720" cy="320040"/>
-          </a:xfrm>
-          <a:prstGeom prst="rect">
-            <a:avLst/>
-          </a:prstGeom>
-          <a:noFill/>
-        </p:spPr>
-        <p:txBody>
-          <a:bodyPr wrap="square">
-            <a:spAutoFit/>
-          </a:bodyPr>
-          <a:lstStyle/>
-          <a:p>
-            <a:pPr algn="l">
-              <a:defRPr sz="1500" b="1">
+                  <a:srgbClr val="767676"/>
+                </a:solidFill>
+                <a:latin typeface="Calibri"/>
+              </a:defRPr>
+            </a:pPr>
+            <a:r>
+              <a:t>Total spend: ($2.7M)</a:t>
+            </a:r>
+          </a:p>
+          <a:p>
+            <a:pPr>
+              <a:spcAft>
+                <a:spcPts val="600"/>
+              </a:spcAft>
+              <a:defRPr sz="1200" b="1">
                 <a:solidFill>
                   <a:srgbClr val="1C1C1E"/>
                 </a:solidFill>
@@ -10783,288 +10456,7 @@
               </a:defRPr>
             </a:pPr>
             <a:r>
-              <a:t>AI-Tuned Performance</a:t>
-            </a:r>
-          </a:p>
-        </p:txBody>
-      </p:sp>
-      <p:sp>
-        <p:nvSpPr>
-          <p:cNvPr id="14" name="TextBox 13"/>
-          <p:cNvSpPr txBox="1"/>
-          <p:nvPr/>
-        </p:nvSpPr>
-        <p:spPr>
-          <a:xfrm>
-            <a:off x="1005840" y="4434840"/>
-            <a:ext cx="4617720" cy="1005840"/>
-          </a:xfrm>
-          <a:prstGeom prst="rect">
-            <a:avLst/>
-          </a:prstGeom>
-          <a:noFill/>
-        </p:spPr>
-        <p:txBody>
-          <a:bodyPr wrap="square">
-            <a:spAutoFit/>
-          </a:bodyPr>
-          <a:lstStyle/>
-          <a:p>
-            <a:pPr algn="l">
-              <a:defRPr sz="1200" b="0">
-                <a:solidFill>
-                  <a:srgbClr val="3A3A3C"/>
-                </a:solidFill>
-                <a:latin typeface="Calibri"/>
-              </a:defRPr>
-            </a:pPr>
-            <a:r>
-              <a:t>Suspension auto-adjusts to terrain. Shifting optimizes for rider power patterns. Products improve continuously after purchase.</a:t>
-            </a:r>
-          </a:p>
-        </p:txBody>
-      </p:sp>
-      <p:sp>
-        <p:nvSpPr>
-          <p:cNvPr id="15" name="Rounded Rectangle 14"/>
-          <p:cNvSpPr/>
-          <p:nvPr/>
-        </p:nvSpPr>
-        <p:spPr>
-          <a:xfrm>
-            <a:off x="6126480" y="3931920"/>
-            <a:ext cx="5166360" cy="1691640"/>
-          </a:xfrm>
-          <a:prstGeom prst="roundRect">
-            <a:avLst>
-              <a:gd name="adj" fmla="val 4000"/>
-            </a:avLst>
-          </a:prstGeom>
-          <a:solidFill>
-            <a:srgbClr val="FFFFFF"/>
-          </a:solidFill>
-          <a:ln w="12700">
-            <a:solidFill>
-              <a:srgbClr val="E0E0DE"/>
-            </a:solidFill>
-          </a:ln>
-        </p:spPr>
-        <p:style>
-          <a:lnRef idx="1">
-            <a:schemeClr val="accent1"/>
-          </a:lnRef>
-          <a:fillRef idx="3">
-            <a:schemeClr val="accent1"/>
-          </a:fillRef>
-          <a:effectRef idx="2">
-            <a:schemeClr val="accent1"/>
-          </a:effectRef>
-          <a:fontRef idx="minor">
-            <a:schemeClr val="lt1"/>
-          </a:fontRef>
-        </p:style>
-        <p:txBody>
-          <a:bodyPr rtlCol="0" anchor="ctr"/>
-          <a:lstStyle/>
-          <a:p>
-            <a:pPr algn="ctr"/>
-          </a:p>
-        </p:txBody>
-      </p:sp>
-      <p:sp>
-        <p:nvSpPr>
-          <p:cNvPr id="16" name="TextBox 15"/>
-          <p:cNvSpPr txBox="1"/>
-          <p:nvPr/>
-        </p:nvSpPr>
-        <p:spPr>
-          <a:xfrm>
-            <a:off x="6400800" y="4069080"/>
-            <a:ext cx="4617720" cy="320040"/>
-          </a:xfrm>
-          <a:prstGeom prst="rect">
-            <a:avLst/>
-          </a:prstGeom>
-          <a:noFill/>
-        </p:spPr>
-        <p:txBody>
-          <a:bodyPr wrap="square">
-            <a:spAutoFit/>
-          </a:bodyPr>
-          <a:lstStyle/>
-          <a:p>
-            <a:pPr algn="l">
-              <a:defRPr sz="1500" b="1">
-                <a:solidFill>
-                  <a:srgbClr val="1C1C1E"/>
-                </a:solidFill>
-                <a:latin typeface="Calibri"/>
-              </a:defRPr>
-            </a:pPr>
-            <a:r>
-              <a:t>Dealer Intelligence</a:t>
-            </a:r>
-          </a:p>
-        </p:txBody>
-      </p:sp>
-      <p:sp>
-        <p:nvSpPr>
-          <p:cNvPr id="17" name="TextBox 16"/>
-          <p:cNvSpPr txBox="1"/>
-          <p:nvPr/>
-        </p:nvSpPr>
-        <p:spPr>
-          <a:xfrm>
-            <a:off x="6400800" y="4434840"/>
-            <a:ext cx="4617720" cy="1005840"/>
-          </a:xfrm>
-          <a:prstGeom prst="rect">
-            <a:avLst/>
-          </a:prstGeom>
-          <a:noFill/>
-        </p:spPr>
-        <p:txBody>
-          <a:bodyPr wrap="square">
-            <a:spAutoFit/>
-          </a:bodyPr>
-          <a:lstStyle/>
-          <a:p>
-            <a:pPr algn="l">
-              <a:defRPr sz="1200" b="0">
-                <a:solidFill>
-                  <a:srgbClr val="3A3A3C"/>
-                </a:solidFill>
-                <a:latin typeface="Calibri"/>
-              </a:defRPr>
-            </a:pPr>
-            <a:r>
-              <a:t>Aggregated telemetry tells dealers which parts approach end-of-life in their service area. Proactive ordering replaces reactive.</a:t>
-            </a:r>
-          </a:p>
-        </p:txBody>
-      </p:sp>
-      <p:sp>
-        <p:nvSpPr>
-          <p:cNvPr id="18" name="Rounded Rectangle 17"/>
-          <p:cNvSpPr/>
-          <p:nvPr/>
-        </p:nvSpPr>
-        <p:spPr>
-          <a:xfrm>
-            <a:off x="731520" y="5943600"/>
-            <a:ext cx="10698480" cy="411480"/>
-          </a:xfrm>
-          <a:prstGeom prst="roundRect">
-            <a:avLst>
-              <a:gd name="adj" fmla="val 10000"/>
-            </a:avLst>
-          </a:prstGeom>
-          <a:solidFill>
-            <a:srgbClr val="FFFFFF"/>
-          </a:solidFill>
-          <a:ln w="12700">
-            <a:solidFill>
-              <a:srgbClr val="E0E0DE"/>
-            </a:solidFill>
-          </a:ln>
-        </p:spPr>
-        <p:style>
-          <a:lnRef idx="1">
-            <a:schemeClr val="accent1"/>
-          </a:lnRef>
-          <a:fillRef idx="3">
-            <a:schemeClr val="accent1"/>
-          </a:fillRef>
-          <a:effectRef idx="2">
-            <a:schemeClr val="accent1"/>
-          </a:effectRef>
-          <a:fontRef idx="minor">
-            <a:schemeClr val="lt1"/>
-          </a:fontRef>
-        </p:style>
-        <p:txBody>
-          <a:bodyPr rtlCol="0" anchor="ctr"/>
-          <a:lstStyle/>
-          <a:p>
-            <a:pPr algn="ctr"/>
-          </a:p>
-        </p:txBody>
-      </p:sp>
-      <p:sp>
-        <p:nvSpPr>
-          <p:cNvPr id="19" name="Rectangle 18"/>
-          <p:cNvSpPr/>
-          <p:nvPr/>
-        </p:nvSpPr>
-        <p:spPr>
-          <a:xfrm>
-            <a:off x="731520" y="5943600"/>
-            <a:ext cx="50800" cy="411480"/>
-          </a:xfrm>
-          <a:prstGeom prst="rect">
-            <a:avLst/>
-          </a:prstGeom>
-          <a:solidFill>
-            <a:srgbClr val="E51937"/>
-          </a:solidFill>
-          <a:ln>
-            <a:noFill/>
-          </a:ln>
-        </p:spPr>
-        <p:style>
-          <a:lnRef idx="1">
-            <a:schemeClr val="accent1"/>
-          </a:lnRef>
-          <a:fillRef idx="3">
-            <a:schemeClr val="accent1"/>
-          </a:fillRef>
-          <a:effectRef idx="2">
-            <a:schemeClr val="accent1"/>
-          </a:effectRef>
-          <a:fontRef idx="minor">
-            <a:schemeClr val="lt1"/>
-          </a:fontRef>
-        </p:style>
-        <p:txBody>
-          <a:bodyPr rtlCol="0" anchor="ctr"/>
-          <a:lstStyle/>
-          <a:p>
-            <a:pPr algn="ctr"/>
-          </a:p>
-        </p:txBody>
-      </p:sp>
-      <p:sp>
-        <p:nvSpPr>
-          <p:cNvPr id="20" name="TextBox 19"/>
-          <p:cNvSpPr txBox="1"/>
-          <p:nvPr/>
-        </p:nvSpPr>
-        <p:spPr>
-          <a:xfrm>
-            <a:off x="1097280" y="5989320"/>
-            <a:ext cx="10058400" cy="320040"/>
-          </a:xfrm>
-          <a:prstGeom prst="rect">
-            <a:avLst/>
-          </a:prstGeom>
-          <a:noFill/>
-        </p:spPr>
-        <p:txBody>
-          <a:bodyPr wrap="square">
-            <a:spAutoFit/>
-          </a:bodyPr>
-          <a:lstStyle/>
-          <a:p>
-            <a:pPr algn="ctr">
-              <a:defRPr sz="1300" b="1">
-                <a:solidFill>
-                  <a:srgbClr val="1C1C1E"/>
-                </a:solidFill>
-                <a:latin typeface="Calibri"/>
-              </a:defRPr>
-            </a:pPr>
-            <a:r>
-              <a:t>Hardware sells data access  →  Data improves performance  →  Performance sells hardware</a:t>
+              <a:t>Net value: $10.2M</a:t>
             </a:r>
           </a:p>
         </p:txBody>
@@ -11078,6 +10470,785 @@
 </file>
 
 <file path=ppt/slides/slide8.xml><?xml version="1.0" encoding="utf-8"?>
+<p:sld xmlns:a="http://schemas.openxmlformats.org/drawingml/2006/main" xmlns:p="http://schemas.openxmlformats.org/presentationml/2006/main" xmlns:r="http://schemas.openxmlformats.org/officeDocument/2006/relationships">
+  <p:cSld>
+    <p:bg>
+      <p:bgPr>
+        <a:solidFill>
+          <a:srgbClr val="F5F5F3"/>
+        </a:solidFill>
+        <a:effectLst/>
+      </p:bgPr>
+    </p:bg>
+    <p:spTree>
+      <p:nvGrpSpPr>
+        <p:cNvPr id="1" name=""/>
+        <p:cNvGrpSpPr/>
+        <p:nvPr/>
+      </p:nvGrpSpPr>
+      <p:grpSpPr/>
+      <p:sp>
+        <p:nvSpPr>
+          <p:cNvPr id="2" name="TextBox 1"/>
+          <p:cNvSpPr txBox="1"/>
+          <p:nvPr/>
+        </p:nvSpPr>
+        <p:spPr>
+          <a:xfrm>
+            <a:off x="731520" y="274320"/>
+            <a:ext cx="5486400" cy="228600"/>
+          </a:xfrm>
+          <a:prstGeom prst="rect">
+            <a:avLst/>
+          </a:prstGeom>
+          <a:noFill/>
+        </p:spPr>
+        <p:txBody>
+          <a:bodyPr wrap="square">
+            <a:spAutoFit/>
+          </a:bodyPr>
+          <a:lstStyle/>
+          <a:p>
+            <a:pPr algn="l">
+              <a:defRPr sz="1100" b="1">
+                <a:solidFill>
+                  <a:srgbClr val="767676"/>
+                </a:solidFill>
+                <a:latin typeface="Calibri"/>
+              </a:defRPr>
+            </a:pPr>
+            <a:r>
+              <a:t>2031 VISION</a:t>
+            </a:r>
+          </a:p>
+        </p:txBody>
+      </p:sp>
+      <p:sp>
+        <p:nvSpPr>
+          <p:cNvPr id="3" name="TextBox 2"/>
+          <p:cNvSpPr txBox="1"/>
+          <p:nvPr/>
+        </p:nvSpPr>
+        <p:spPr>
+          <a:xfrm>
+            <a:off x="731520" y="548640"/>
+            <a:ext cx="10058400" cy="457200"/>
+          </a:xfrm>
+          <a:prstGeom prst="rect">
+            <a:avLst/>
+          </a:prstGeom>
+          <a:noFill/>
+        </p:spPr>
+        <p:txBody>
+          <a:bodyPr wrap="square">
+            <a:spAutoFit/>
+          </a:bodyPr>
+          <a:lstStyle/>
+          <a:p>
+            <a:pPr algn="l">
+              <a:defRPr sz="3200" b="1">
+                <a:solidFill>
+                  <a:srgbClr val="1C1C1E"/>
+                </a:solidFill>
+                <a:latin typeface="Calibri"/>
+              </a:defRPr>
+            </a:pPr>
+            <a:r>
+              <a:t>From Hardware Manufacturer to Performance Intelligence</a:t>
+            </a:r>
+          </a:p>
+        </p:txBody>
+      </p:sp>
+      <p:sp>
+        <p:nvSpPr>
+          <p:cNvPr id="4" name="Rectangle 3"/>
+          <p:cNvSpPr/>
+          <p:nvPr/>
+        </p:nvSpPr>
+        <p:spPr>
+          <a:xfrm>
+            <a:off x="731520" y="1051560"/>
+            <a:ext cx="731520" cy="38100"/>
+          </a:xfrm>
+          <a:prstGeom prst="rect">
+            <a:avLst/>
+          </a:prstGeom>
+          <a:solidFill>
+            <a:srgbClr val="E51937"/>
+          </a:solidFill>
+          <a:ln>
+            <a:noFill/>
+          </a:ln>
+        </p:spPr>
+        <p:style>
+          <a:lnRef idx="1">
+            <a:schemeClr val="accent1"/>
+          </a:lnRef>
+          <a:fillRef idx="3">
+            <a:schemeClr val="accent1"/>
+          </a:fillRef>
+          <a:effectRef idx="2">
+            <a:schemeClr val="accent1"/>
+          </a:effectRef>
+          <a:fontRef idx="minor">
+            <a:schemeClr val="lt1"/>
+          </a:fontRef>
+        </p:style>
+        <p:txBody>
+          <a:bodyPr rtlCol="0" anchor="ctr"/>
+          <a:lstStyle/>
+          <a:p>
+            <a:pPr algn="ctr"/>
+          </a:p>
+        </p:txBody>
+      </p:sp>
+      <p:sp>
+        <p:nvSpPr>
+          <p:cNvPr id="5" name="TextBox 4"/>
+          <p:cNvSpPr txBox="1"/>
+          <p:nvPr/>
+        </p:nvSpPr>
+        <p:spPr>
+          <a:xfrm>
+            <a:off x="731520" y="1280160"/>
+            <a:ext cx="10058400" cy="457200"/>
+          </a:xfrm>
+          <a:prstGeom prst="rect">
+            <a:avLst/>
+          </a:prstGeom>
+          <a:noFill/>
+        </p:spPr>
+        <p:txBody>
+          <a:bodyPr wrap="square">
+            <a:spAutoFit/>
+          </a:bodyPr>
+          <a:lstStyle/>
+          <a:p>
+            <a:pPr algn="l">
+              <a:defRPr sz="1400" b="0">
+                <a:solidFill>
+                  <a:srgbClr val="3A3A3C"/>
+                </a:solidFill>
+                <a:latin typeface="Calibri"/>
+              </a:defRPr>
+            </a:pPr>
+            <a:r>
+              <a:t>SRAM's full product stack creates a data moat no competitor can replicate. The rider with SRAM drivetrain, RockShox suspension, Quarq power, and Hammerhead computer gets a unified intelligence layer impossible with mixed components.</a:t>
+            </a:r>
+          </a:p>
+        </p:txBody>
+      </p:sp>
+      <p:sp>
+        <p:nvSpPr>
+          <p:cNvPr id="6" name="Rounded Rectangle 5"/>
+          <p:cNvSpPr/>
+          <p:nvPr/>
+        </p:nvSpPr>
+        <p:spPr>
+          <a:xfrm>
+            <a:off x="731520" y="2011680"/>
+            <a:ext cx="5166360" cy="1691640"/>
+          </a:xfrm>
+          <a:prstGeom prst="roundRect">
+            <a:avLst>
+              <a:gd name="adj" fmla="val 4000"/>
+            </a:avLst>
+          </a:prstGeom>
+          <a:solidFill>
+            <a:srgbClr val="FFFFFF"/>
+          </a:solidFill>
+          <a:ln w="12700">
+            <a:solidFill>
+              <a:srgbClr val="E0E0DE"/>
+            </a:solidFill>
+          </a:ln>
+        </p:spPr>
+        <p:style>
+          <a:lnRef idx="1">
+            <a:schemeClr val="accent1"/>
+          </a:lnRef>
+          <a:fillRef idx="3">
+            <a:schemeClr val="accent1"/>
+          </a:fillRef>
+          <a:effectRef idx="2">
+            <a:schemeClr val="accent1"/>
+          </a:effectRef>
+          <a:fontRef idx="minor">
+            <a:schemeClr val="lt1"/>
+          </a:fontRef>
+        </p:style>
+        <p:txBody>
+          <a:bodyPr rtlCol="0" anchor="ctr"/>
+          <a:lstStyle/>
+          <a:p>
+            <a:pPr algn="ctr"/>
+          </a:p>
+        </p:txBody>
+      </p:sp>
+      <p:sp>
+        <p:nvSpPr>
+          <p:cNvPr id="7" name="TextBox 6"/>
+          <p:cNvSpPr txBox="1"/>
+          <p:nvPr/>
+        </p:nvSpPr>
+        <p:spPr>
+          <a:xfrm>
+            <a:off x="1005840" y="2148840"/>
+            <a:ext cx="4617720" cy="320040"/>
+          </a:xfrm>
+          <a:prstGeom prst="rect">
+            <a:avLst/>
+          </a:prstGeom>
+          <a:noFill/>
+        </p:spPr>
+        <p:txBody>
+          <a:bodyPr wrap="square">
+            <a:spAutoFit/>
+          </a:bodyPr>
+          <a:lstStyle/>
+          <a:p>
+            <a:pPr algn="l">
+              <a:defRPr sz="1500" b="1">
+                <a:solidFill>
+                  <a:srgbClr val="1C1C1E"/>
+                </a:solidFill>
+                <a:latin typeface="Calibri"/>
+              </a:defRPr>
+            </a:pPr>
+            <a:r>
+              <a:t>AXS Intelligence Platform</a:t>
+            </a:r>
+          </a:p>
+        </p:txBody>
+      </p:sp>
+      <p:sp>
+        <p:nvSpPr>
+          <p:cNvPr id="8" name="TextBox 7"/>
+          <p:cNvSpPr txBox="1"/>
+          <p:nvPr/>
+        </p:nvSpPr>
+        <p:spPr>
+          <a:xfrm>
+            <a:off x="1005840" y="2514600"/>
+            <a:ext cx="4617720" cy="1005840"/>
+          </a:xfrm>
+          <a:prstGeom prst="rect">
+            <a:avLst/>
+          </a:prstGeom>
+          <a:noFill/>
+        </p:spPr>
+        <p:txBody>
+          <a:bodyPr wrap="square">
+            <a:spAutoFit/>
+          </a:bodyPr>
+          <a:lstStyle/>
+          <a:p>
+            <a:pPr algn="l">
+              <a:defRPr sz="1200" b="0">
+                <a:solidFill>
+                  <a:srgbClr val="3A3A3C"/>
+                </a:solidFill>
+                <a:latin typeface="Calibri"/>
+              </a:defRPr>
+            </a:pPr>
+            <a:r>
+              <a:t>Unified rider dashboard showing power, gearing, suspension, and heart rate in one view. No competitor has the product breadth to match this.</a:t>
+            </a:r>
+          </a:p>
+        </p:txBody>
+      </p:sp>
+      <p:sp>
+        <p:nvSpPr>
+          <p:cNvPr id="9" name="Rounded Rectangle 8"/>
+          <p:cNvSpPr/>
+          <p:nvPr/>
+        </p:nvSpPr>
+        <p:spPr>
+          <a:xfrm>
+            <a:off x="6126480" y="2011680"/>
+            <a:ext cx="5166360" cy="1691640"/>
+          </a:xfrm>
+          <a:prstGeom prst="roundRect">
+            <a:avLst>
+              <a:gd name="adj" fmla="val 4000"/>
+            </a:avLst>
+          </a:prstGeom>
+          <a:solidFill>
+            <a:srgbClr val="FFFFFF"/>
+          </a:solidFill>
+          <a:ln w="12700">
+            <a:solidFill>
+              <a:srgbClr val="E0E0DE"/>
+            </a:solidFill>
+          </a:ln>
+        </p:spPr>
+        <p:style>
+          <a:lnRef idx="1">
+            <a:schemeClr val="accent1"/>
+          </a:lnRef>
+          <a:fillRef idx="3">
+            <a:schemeClr val="accent1"/>
+          </a:fillRef>
+          <a:effectRef idx="2">
+            <a:schemeClr val="accent1"/>
+          </a:effectRef>
+          <a:fontRef idx="minor">
+            <a:schemeClr val="lt1"/>
+          </a:fontRef>
+        </p:style>
+        <p:txBody>
+          <a:bodyPr rtlCol="0" anchor="ctr"/>
+          <a:lstStyle/>
+          <a:p>
+            <a:pPr algn="ctr"/>
+          </a:p>
+        </p:txBody>
+      </p:sp>
+      <p:sp>
+        <p:nvSpPr>
+          <p:cNvPr id="10" name="TextBox 9"/>
+          <p:cNvSpPr txBox="1"/>
+          <p:nvPr/>
+        </p:nvSpPr>
+        <p:spPr>
+          <a:xfrm>
+            <a:off x="6400800" y="2148840"/>
+            <a:ext cx="4617720" cy="320040"/>
+          </a:xfrm>
+          <a:prstGeom prst="rect">
+            <a:avLst/>
+          </a:prstGeom>
+          <a:noFill/>
+        </p:spPr>
+        <p:txBody>
+          <a:bodyPr wrap="square">
+            <a:spAutoFit/>
+          </a:bodyPr>
+          <a:lstStyle/>
+          <a:p>
+            <a:pPr algn="l">
+              <a:defRPr sz="1500" b="1">
+                <a:solidFill>
+                  <a:srgbClr val="1C1C1E"/>
+                </a:solidFill>
+                <a:latin typeface="Calibri"/>
+              </a:defRPr>
+            </a:pPr>
+            <a:r>
+              <a:t>Predictive Maintenance</a:t>
+            </a:r>
+          </a:p>
+        </p:txBody>
+      </p:sp>
+      <p:sp>
+        <p:nvSpPr>
+          <p:cNvPr id="11" name="TextBox 10"/>
+          <p:cNvSpPr txBox="1"/>
+          <p:nvPr/>
+        </p:nvSpPr>
+        <p:spPr>
+          <a:xfrm>
+            <a:off x="6400800" y="2514600"/>
+            <a:ext cx="4617720" cy="1005840"/>
+          </a:xfrm>
+          <a:prstGeom prst="rect">
+            <a:avLst/>
+          </a:prstGeom>
+          <a:noFill/>
+        </p:spPr>
+        <p:txBody>
+          <a:bodyPr wrap="square">
+            <a:spAutoFit/>
+          </a:bodyPr>
+          <a:lstStyle/>
+          <a:p>
+            <a:pPr algn="l">
+              <a:defRPr sz="1200" b="0">
+                <a:solidFill>
+                  <a:srgbClr val="3A3A3C"/>
+                </a:solidFill>
+                <a:latin typeface="Calibri"/>
+              </a:defRPr>
+            </a:pPr>
+            <a:r>
+              <a:t>Connected components predict chain, cassette, and brake pad replacement before failure. Installed base becomes a recurring revenue platform.</a:t>
+            </a:r>
+          </a:p>
+        </p:txBody>
+      </p:sp>
+      <p:sp>
+        <p:nvSpPr>
+          <p:cNvPr id="12" name="Rounded Rectangle 11"/>
+          <p:cNvSpPr/>
+          <p:nvPr/>
+        </p:nvSpPr>
+        <p:spPr>
+          <a:xfrm>
+            <a:off x="731520" y="3931920"/>
+            <a:ext cx="5166360" cy="1691640"/>
+          </a:xfrm>
+          <a:prstGeom prst="roundRect">
+            <a:avLst>
+              <a:gd name="adj" fmla="val 4000"/>
+            </a:avLst>
+          </a:prstGeom>
+          <a:solidFill>
+            <a:srgbClr val="FFFFFF"/>
+          </a:solidFill>
+          <a:ln w="12700">
+            <a:solidFill>
+              <a:srgbClr val="E0E0DE"/>
+            </a:solidFill>
+          </a:ln>
+        </p:spPr>
+        <p:style>
+          <a:lnRef idx="1">
+            <a:schemeClr val="accent1"/>
+          </a:lnRef>
+          <a:fillRef idx="3">
+            <a:schemeClr val="accent1"/>
+          </a:fillRef>
+          <a:effectRef idx="2">
+            <a:schemeClr val="accent1"/>
+          </a:effectRef>
+          <a:fontRef idx="minor">
+            <a:schemeClr val="lt1"/>
+          </a:fontRef>
+        </p:style>
+        <p:txBody>
+          <a:bodyPr rtlCol="0" anchor="ctr"/>
+          <a:lstStyle/>
+          <a:p>
+            <a:pPr algn="ctr"/>
+          </a:p>
+        </p:txBody>
+      </p:sp>
+      <p:sp>
+        <p:nvSpPr>
+          <p:cNvPr id="13" name="TextBox 12"/>
+          <p:cNvSpPr txBox="1"/>
+          <p:nvPr/>
+        </p:nvSpPr>
+        <p:spPr>
+          <a:xfrm>
+            <a:off x="1005840" y="4069080"/>
+            <a:ext cx="4617720" cy="320040"/>
+          </a:xfrm>
+          <a:prstGeom prst="rect">
+            <a:avLst/>
+          </a:prstGeom>
+          <a:noFill/>
+        </p:spPr>
+        <p:txBody>
+          <a:bodyPr wrap="square">
+            <a:spAutoFit/>
+          </a:bodyPr>
+          <a:lstStyle/>
+          <a:p>
+            <a:pPr algn="l">
+              <a:defRPr sz="1500" b="1">
+                <a:solidFill>
+                  <a:srgbClr val="1C1C1E"/>
+                </a:solidFill>
+                <a:latin typeface="Calibri"/>
+              </a:defRPr>
+            </a:pPr>
+            <a:r>
+              <a:t>AI-Tuned Performance</a:t>
+            </a:r>
+          </a:p>
+        </p:txBody>
+      </p:sp>
+      <p:sp>
+        <p:nvSpPr>
+          <p:cNvPr id="14" name="TextBox 13"/>
+          <p:cNvSpPr txBox="1"/>
+          <p:nvPr/>
+        </p:nvSpPr>
+        <p:spPr>
+          <a:xfrm>
+            <a:off x="1005840" y="4434840"/>
+            <a:ext cx="4617720" cy="1005840"/>
+          </a:xfrm>
+          <a:prstGeom prst="rect">
+            <a:avLst/>
+          </a:prstGeom>
+          <a:noFill/>
+        </p:spPr>
+        <p:txBody>
+          <a:bodyPr wrap="square">
+            <a:spAutoFit/>
+          </a:bodyPr>
+          <a:lstStyle/>
+          <a:p>
+            <a:pPr algn="l">
+              <a:defRPr sz="1200" b="0">
+                <a:solidFill>
+                  <a:srgbClr val="3A3A3C"/>
+                </a:solidFill>
+                <a:latin typeface="Calibri"/>
+              </a:defRPr>
+            </a:pPr>
+            <a:r>
+              <a:t>Suspension auto-adjusts to terrain. Shifting optimizes for rider power patterns. Products improve continuously after purchase.</a:t>
+            </a:r>
+          </a:p>
+        </p:txBody>
+      </p:sp>
+      <p:sp>
+        <p:nvSpPr>
+          <p:cNvPr id="15" name="Rounded Rectangle 14"/>
+          <p:cNvSpPr/>
+          <p:nvPr/>
+        </p:nvSpPr>
+        <p:spPr>
+          <a:xfrm>
+            <a:off x="6126480" y="3931920"/>
+            <a:ext cx="5166360" cy="1691640"/>
+          </a:xfrm>
+          <a:prstGeom prst="roundRect">
+            <a:avLst>
+              <a:gd name="adj" fmla="val 4000"/>
+            </a:avLst>
+          </a:prstGeom>
+          <a:solidFill>
+            <a:srgbClr val="FFFFFF"/>
+          </a:solidFill>
+          <a:ln w="12700">
+            <a:solidFill>
+              <a:srgbClr val="E0E0DE"/>
+            </a:solidFill>
+          </a:ln>
+        </p:spPr>
+        <p:style>
+          <a:lnRef idx="1">
+            <a:schemeClr val="accent1"/>
+          </a:lnRef>
+          <a:fillRef idx="3">
+            <a:schemeClr val="accent1"/>
+          </a:fillRef>
+          <a:effectRef idx="2">
+            <a:schemeClr val="accent1"/>
+          </a:effectRef>
+          <a:fontRef idx="minor">
+            <a:schemeClr val="lt1"/>
+          </a:fontRef>
+        </p:style>
+        <p:txBody>
+          <a:bodyPr rtlCol="0" anchor="ctr"/>
+          <a:lstStyle/>
+          <a:p>
+            <a:pPr algn="ctr"/>
+          </a:p>
+        </p:txBody>
+      </p:sp>
+      <p:sp>
+        <p:nvSpPr>
+          <p:cNvPr id="16" name="TextBox 15"/>
+          <p:cNvSpPr txBox="1"/>
+          <p:nvPr/>
+        </p:nvSpPr>
+        <p:spPr>
+          <a:xfrm>
+            <a:off x="6400800" y="4069080"/>
+            <a:ext cx="4617720" cy="320040"/>
+          </a:xfrm>
+          <a:prstGeom prst="rect">
+            <a:avLst/>
+          </a:prstGeom>
+          <a:noFill/>
+        </p:spPr>
+        <p:txBody>
+          <a:bodyPr wrap="square">
+            <a:spAutoFit/>
+          </a:bodyPr>
+          <a:lstStyle/>
+          <a:p>
+            <a:pPr algn="l">
+              <a:defRPr sz="1500" b="1">
+                <a:solidFill>
+                  <a:srgbClr val="1C1C1E"/>
+                </a:solidFill>
+                <a:latin typeface="Calibri"/>
+              </a:defRPr>
+            </a:pPr>
+            <a:r>
+              <a:t>Dealer Intelligence</a:t>
+            </a:r>
+          </a:p>
+        </p:txBody>
+      </p:sp>
+      <p:sp>
+        <p:nvSpPr>
+          <p:cNvPr id="17" name="TextBox 16"/>
+          <p:cNvSpPr txBox="1"/>
+          <p:nvPr/>
+        </p:nvSpPr>
+        <p:spPr>
+          <a:xfrm>
+            <a:off x="6400800" y="4434840"/>
+            <a:ext cx="4617720" cy="1005840"/>
+          </a:xfrm>
+          <a:prstGeom prst="rect">
+            <a:avLst/>
+          </a:prstGeom>
+          <a:noFill/>
+        </p:spPr>
+        <p:txBody>
+          <a:bodyPr wrap="square">
+            <a:spAutoFit/>
+          </a:bodyPr>
+          <a:lstStyle/>
+          <a:p>
+            <a:pPr algn="l">
+              <a:defRPr sz="1200" b="0">
+                <a:solidFill>
+                  <a:srgbClr val="3A3A3C"/>
+                </a:solidFill>
+                <a:latin typeface="Calibri"/>
+              </a:defRPr>
+            </a:pPr>
+            <a:r>
+              <a:t>Aggregated telemetry tells dealers which parts approach end-of-life in their service area. Proactive ordering replaces reactive.</a:t>
+            </a:r>
+          </a:p>
+        </p:txBody>
+      </p:sp>
+      <p:sp>
+        <p:nvSpPr>
+          <p:cNvPr id="18" name="Rounded Rectangle 17"/>
+          <p:cNvSpPr/>
+          <p:nvPr/>
+        </p:nvSpPr>
+        <p:spPr>
+          <a:xfrm>
+            <a:off x="731520" y="5943600"/>
+            <a:ext cx="10698480" cy="411480"/>
+          </a:xfrm>
+          <a:prstGeom prst="roundRect">
+            <a:avLst>
+              <a:gd name="adj" fmla="val 10000"/>
+            </a:avLst>
+          </a:prstGeom>
+          <a:solidFill>
+            <a:srgbClr val="FFFFFF"/>
+          </a:solidFill>
+          <a:ln w="12700">
+            <a:solidFill>
+              <a:srgbClr val="E0E0DE"/>
+            </a:solidFill>
+          </a:ln>
+        </p:spPr>
+        <p:style>
+          <a:lnRef idx="1">
+            <a:schemeClr val="accent1"/>
+          </a:lnRef>
+          <a:fillRef idx="3">
+            <a:schemeClr val="accent1"/>
+          </a:fillRef>
+          <a:effectRef idx="2">
+            <a:schemeClr val="accent1"/>
+          </a:effectRef>
+          <a:fontRef idx="minor">
+            <a:schemeClr val="lt1"/>
+          </a:fontRef>
+        </p:style>
+        <p:txBody>
+          <a:bodyPr rtlCol="0" anchor="ctr"/>
+          <a:lstStyle/>
+          <a:p>
+            <a:pPr algn="ctr"/>
+          </a:p>
+        </p:txBody>
+      </p:sp>
+      <p:sp>
+        <p:nvSpPr>
+          <p:cNvPr id="19" name="Rectangle 18"/>
+          <p:cNvSpPr/>
+          <p:nvPr/>
+        </p:nvSpPr>
+        <p:spPr>
+          <a:xfrm>
+            <a:off x="731520" y="5943600"/>
+            <a:ext cx="50800" cy="411480"/>
+          </a:xfrm>
+          <a:prstGeom prst="rect">
+            <a:avLst/>
+          </a:prstGeom>
+          <a:solidFill>
+            <a:srgbClr val="E51937"/>
+          </a:solidFill>
+          <a:ln>
+            <a:noFill/>
+          </a:ln>
+        </p:spPr>
+        <p:style>
+          <a:lnRef idx="1">
+            <a:schemeClr val="accent1"/>
+          </a:lnRef>
+          <a:fillRef idx="3">
+            <a:schemeClr val="accent1"/>
+          </a:fillRef>
+          <a:effectRef idx="2">
+            <a:schemeClr val="accent1"/>
+          </a:effectRef>
+          <a:fontRef idx="minor">
+            <a:schemeClr val="lt1"/>
+          </a:fontRef>
+        </p:style>
+        <p:txBody>
+          <a:bodyPr rtlCol="0" anchor="ctr"/>
+          <a:lstStyle/>
+          <a:p>
+            <a:pPr algn="ctr"/>
+          </a:p>
+        </p:txBody>
+      </p:sp>
+      <p:sp>
+        <p:nvSpPr>
+          <p:cNvPr id="20" name="TextBox 19"/>
+          <p:cNvSpPr txBox="1"/>
+          <p:nvPr/>
+        </p:nvSpPr>
+        <p:spPr>
+          <a:xfrm>
+            <a:off x="1097280" y="5989320"/>
+            <a:ext cx="10058400" cy="320040"/>
+          </a:xfrm>
+          <a:prstGeom prst="rect">
+            <a:avLst/>
+          </a:prstGeom>
+          <a:noFill/>
+        </p:spPr>
+        <p:txBody>
+          <a:bodyPr wrap="square">
+            <a:spAutoFit/>
+          </a:bodyPr>
+          <a:lstStyle/>
+          <a:p>
+            <a:pPr algn="ctr">
+              <a:defRPr sz="1300" b="1">
+                <a:solidFill>
+                  <a:srgbClr val="1C1C1E"/>
+                </a:solidFill>
+                <a:latin typeface="Calibri"/>
+              </a:defRPr>
+            </a:pPr>
+            <a:r>
+              <a:t>Hardware sells data access  →  Data improves performance  →  Performance sells hardware</a:t>
+            </a:r>
+          </a:p>
+        </p:txBody>
+      </p:sp>
+    </p:spTree>
+  </p:cSld>
+  <p:clrMapOvr>
+    <a:masterClrMapping/>
+  </p:clrMapOvr>
+</p:sld>
+</file>
+
+<file path=ppt/slides/slide9.xml><?xml version="1.0" encoding="utf-8"?>
 <p:sld xmlns:a="http://schemas.openxmlformats.org/drawingml/2006/main" xmlns:p="http://schemas.openxmlformats.org/presentationml/2006/main" xmlns:r="http://schemas.openxmlformats.org/officeDocument/2006/relationships">
   <p:cSld>
     <p:bg>

--- a/presentation/SRAM_AI_Adoption_Playbook.pptx
+++ b/presentation/SRAM_AI_Adoption_Playbook.pptx
@@ -7481,7 +7481,7 @@
               </a:defRPr>
             </a:pPr>
             <a:r>
-              <a:t>SRAM sells $1B+ in cycling components through the only fully connected ecosystem</a:t>
+              <a:t>SRAM's connected ecosystem is unmatched in cycling</a:t>
             </a:r>
           </a:p>
         </p:txBody>
@@ -15364,7 +15364,7 @@
               </a:defRPr>
             </a:pPr>
             <a:r>
-              <a:t>Expected Year-1 net value of $10.2M on $2.7M total spend</a:t>
+              <a:t>$10.2M net value in Year 1 on $2.7M spend</a:t>
             </a:r>
           </a:p>
         </p:txBody>
@@ -17180,7 +17180,7 @@
               </a:defRPr>
             </a:pPr>
             <a:r>
-              <a:t>By 2031, SRAM transforms from hardware manufacturer to performance intelligence company</a:t>
+              <a:t>Hardware company to performance intelligence by 2031</a:t>
             </a:r>
           </a:p>
         </p:txBody>
